--- a/S1-CL1-Cloud-Design-Build/delivery/topic_06/Topic_06_Slides.pptx
+++ b/S1-CL1-Cloud-Design-Build/delivery/topic_06/Topic_06_Slides.pptx
@@ -4460,123 +4460,33 @@
           </a:p>
         </p:txBody>
       </p:sp>
-      <p:sp>
-        <p:nvSpPr>
-          <p:cNvPr id="5" name="Rounded Rectangle 4"/>
-          <p:cNvSpPr/>
-          <p:nvPr/>
-        </p:nvSpPr>
-        <p:spPr>
-          <a:xfrm>
-            <a:off x="6400800" y="1783080"/>
-            <a:ext cx="5120640" cy="4023360"/>
-          </a:xfrm>
-          <a:prstGeom prst="roundRect">
-            <a:avLst/>
-          </a:prstGeom>
-          <a:solidFill>
-            <a:srgbClr val="FBF6E6"/>
-          </a:solidFill>
-          <a:ln w="12700">
-            <a:solidFill>
-              <a:srgbClr val="27B5CE"/>
-            </a:solidFill>
-            <a:prstDash val="dash"/>
-          </a:ln>
-          <a:effectLst/>
-        </p:spPr>
-        <p:style>
-          <a:lnRef idx="1">
-            <a:schemeClr val="accent1"/>
-          </a:lnRef>
-          <a:fillRef idx="3">
-            <a:schemeClr val="accent1"/>
-          </a:fillRef>
-          <a:effectRef idx="2">
-            <a:schemeClr val="accent1"/>
-          </a:effectRef>
-          <a:fontRef idx="minor">
-            <a:schemeClr val="lt1"/>
-          </a:fontRef>
-        </p:style>
-        <p:txBody>
-          <a:bodyPr rtlCol="0" anchor="ctr"/>
-          <a:lstStyle/>
-          <a:p>
-            <a:pPr algn="ctr"/>
-          </a:p>
-        </p:txBody>
-      </p:sp>
-      <p:sp>
-        <p:nvSpPr>
-          <p:cNvPr id="6" name="TextBox 5"/>
-          <p:cNvSpPr txBox="1"/>
-          <p:nvPr/>
-        </p:nvSpPr>
-        <p:spPr>
-          <a:xfrm>
-            <a:off x="6400800" y="1783080"/>
-            <a:ext cx="5120640" cy="4023360"/>
-          </a:xfrm>
-          <a:prstGeom prst="rect">
-            <a:avLst/>
-          </a:prstGeom>
-          <a:noFill/>
-        </p:spPr>
-        <p:txBody>
-          <a:bodyPr wrap="square" anchor="ctr" lIns="0" rIns="0" tIns="0" bIns="0">
-            <a:spAutoFit/>
-          </a:bodyPr>
-          <a:lstStyle/>
-          <a:p>
-            <a:pPr algn="ctr"/>
-            <a:r>
-              <a:rPr sz="3000" b="0" i="0">
-                <a:solidFill>
-                  <a:srgbClr val="27B5CE"/>
-                </a:solidFill>
-                <a:latin typeface="Roboto"/>
-              </a:rPr>
-              <a:t>🖼</a:t>
-            </a:r>
-          </a:p>
-          <a:p>
-            <a:pPr algn="ctr">
-              <a:spcBef>
-                <a:spcPts val="400"/>
-              </a:spcBef>
-            </a:pPr>
-            <a:r>
-              <a:rPr sz="1200" b="1" i="0">
-                <a:solidFill>
-                  <a:srgbClr val="27B5CE"/>
-                </a:solidFill>
-                <a:latin typeface="Roboto"/>
-              </a:rPr>
-              <a:t>IMAGE</a:t>
-            </a:r>
-          </a:p>
-          <a:p>
-            <a:pPr algn="ctr">
-              <a:spcBef>
-                <a:spcPts val="200"/>
-              </a:spcBef>
-            </a:pPr>
-            <a:r>
-              <a:rPr sz="1200" b="0" i="1">
-                <a:solidFill>
-                  <a:srgbClr val="484848"/>
-                </a:solidFill>
-                <a:latin typeface="Roboto Light"/>
-              </a:rPr>
-              <a:t>AWS — IAM components: user / group / role / policy (ACF M04 S18)</a:t>
-            </a:r>
-          </a:p>
-        </p:txBody>
-      </p:sp>
-      <p:sp>
-        <p:nvSpPr>
-          <p:cNvPr id="7" name="Rectangle 6"/>
+      <p:pic>
+        <p:nvPicPr>
+          <p:cNvPr id="5" name="Picture 4" descr="06-iam-components.png"/>
+          <p:cNvPicPr>
+            <a:picLocks noChangeAspect="1"/>
+          </p:cNvPicPr>
+          <p:nvPr/>
+        </p:nvPicPr>
+        <p:blipFill>
+          <a:blip r:embed="rId2"/>
+          <a:stretch>
+            <a:fillRect/>
+          </a:stretch>
+        </p:blipFill>
+        <p:spPr>
+          <a:xfrm>
+            <a:off x="6400800" y="2554558"/>
+            <a:ext cx="5120640" cy="2480404"/>
+          </a:xfrm>
+          <a:prstGeom prst="rect">
+            <a:avLst/>
+          </a:prstGeom>
+        </p:spPr>
+      </p:pic>
+      <p:sp>
+        <p:nvSpPr>
+          <p:cNvPr id="6" name="Rectangle 5"/>
           <p:cNvSpPr/>
           <p:nvPr/>
         </p:nvSpPr>
@@ -4620,7 +4530,7 @@
       </p:sp>
       <p:sp>
         <p:nvSpPr>
-          <p:cNvPr id="8" name="TextBox 7"/>
+          <p:cNvPr id="7" name="TextBox 6"/>
           <p:cNvSpPr txBox="1"/>
           <p:nvPr/>
         </p:nvSpPr>
@@ -4663,7 +4573,7 @@
       </p:sp>
       <p:sp>
         <p:nvSpPr>
-          <p:cNvPr id="9" name="TextBox 8"/>
+          <p:cNvPr id="8" name="TextBox 7"/>
           <p:cNvSpPr txBox="1"/>
           <p:nvPr/>
         </p:nvSpPr>
@@ -7674,123 +7584,33 @@
           </a:p>
         </p:txBody>
       </p:sp>
-      <p:sp>
-        <p:nvSpPr>
-          <p:cNvPr id="5" name="Rounded Rectangle 4"/>
-          <p:cNvSpPr/>
-          <p:nvPr/>
-        </p:nvSpPr>
-        <p:spPr>
-          <a:xfrm>
-            <a:off x="6400800" y="1783080"/>
-            <a:ext cx="5120640" cy="4023360"/>
-          </a:xfrm>
-          <a:prstGeom prst="roundRect">
-            <a:avLst/>
-          </a:prstGeom>
-          <a:solidFill>
-            <a:srgbClr val="FBF6E6"/>
-          </a:solidFill>
-          <a:ln w="12700">
-            <a:solidFill>
-              <a:srgbClr val="205F61"/>
-            </a:solidFill>
-            <a:prstDash val="dash"/>
-          </a:ln>
-          <a:effectLst/>
-        </p:spPr>
-        <p:style>
-          <a:lnRef idx="1">
-            <a:schemeClr val="accent1"/>
-          </a:lnRef>
-          <a:fillRef idx="3">
-            <a:schemeClr val="accent1"/>
-          </a:fillRef>
-          <a:effectRef idx="2">
-            <a:schemeClr val="accent1"/>
-          </a:effectRef>
-          <a:fontRef idx="minor">
-            <a:schemeClr val="lt1"/>
-          </a:fontRef>
-        </p:style>
-        <p:txBody>
-          <a:bodyPr rtlCol="0" anchor="ctr"/>
-          <a:lstStyle/>
-          <a:p>
-            <a:pPr algn="ctr"/>
-          </a:p>
-        </p:txBody>
-      </p:sp>
-      <p:sp>
-        <p:nvSpPr>
-          <p:cNvPr id="6" name="TextBox 5"/>
-          <p:cNvSpPr txBox="1"/>
-          <p:nvPr/>
-        </p:nvSpPr>
-        <p:spPr>
-          <a:xfrm>
-            <a:off x="6400800" y="1783080"/>
-            <a:ext cx="5120640" cy="4023360"/>
-          </a:xfrm>
-          <a:prstGeom prst="rect">
-            <a:avLst/>
-          </a:prstGeom>
-          <a:noFill/>
-        </p:spPr>
-        <p:txBody>
-          <a:bodyPr wrap="square" anchor="ctr" lIns="0" rIns="0" tIns="0" bIns="0">
-            <a:spAutoFit/>
-          </a:bodyPr>
-          <a:lstStyle/>
-          <a:p>
-            <a:pPr algn="ctr"/>
-            <a:r>
-              <a:rPr sz="3000" b="0" i="0">
-                <a:solidFill>
-                  <a:srgbClr val="205F61"/>
-                </a:solidFill>
-                <a:latin typeface="Roboto"/>
-              </a:rPr>
-              <a:t>🖼</a:t>
-            </a:r>
-          </a:p>
-          <a:p>
-            <a:pPr algn="ctr">
-              <a:spcBef>
-                <a:spcPts val="400"/>
-              </a:spcBef>
-            </a:pPr>
-            <a:r>
-              <a:rPr sz="1200" b="1" i="0">
-                <a:solidFill>
-                  <a:srgbClr val="205F61"/>
-                </a:solidFill>
-                <a:latin typeface="Roboto"/>
-              </a:rPr>
-              <a:t>IMAGE</a:t>
-            </a:r>
-          </a:p>
-          <a:p>
-            <a:pPr algn="ctr">
-              <a:spcBef>
-                <a:spcPts val="200"/>
-              </a:spcBef>
-            </a:pPr>
-            <a:r>
-              <a:rPr sz="1200" b="0" i="1">
-                <a:solidFill>
-                  <a:srgbClr val="484848"/>
-                </a:solidFill>
-                <a:latin typeface="Roboto Light"/>
-              </a:rPr>
-              <a:t>AWS — shared responsibility model (ACF M04 S05)</a:t>
-            </a:r>
-          </a:p>
-        </p:txBody>
-      </p:sp>
-      <p:sp>
-        <p:nvSpPr>
-          <p:cNvPr id="7" name="Rectangle 6"/>
+      <p:pic>
+        <p:nvPicPr>
+          <p:cNvPr id="5" name="Picture 4" descr="06-shared-responsibility.png"/>
+          <p:cNvPicPr>
+            <a:picLocks noChangeAspect="1"/>
+          </p:cNvPicPr>
+          <p:nvPr/>
+        </p:nvPicPr>
+        <p:blipFill>
+          <a:blip r:embed="rId2"/>
+          <a:stretch>
+            <a:fillRect/>
+          </a:stretch>
+        </p:blipFill>
+        <p:spPr>
+          <a:xfrm>
+            <a:off x="6400800" y="2384615"/>
+            <a:ext cx="5120640" cy="2820290"/>
+          </a:xfrm>
+          <a:prstGeom prst="rect">
+            <a:avLst/>
+          </a:prstGeom>
+        </p:spPr>
+      </p:pic>
+      <p:sp>
+        <p:nvSpPr>
+          <p:cNvPr id="6" name="Rectangle 5"/>
           <p:cNvSpPr/>
           <p:nvPr/>
         </p:nvSpPr>
@@ -7834,7 +7654,7 @@
       </p:sp>
       <p:sp>
         <p:nvSpPr>
-          <p:cNvPr id="8" name="TextBox 7"/>
+          <p:cNvPr id="7" name="TextBox 6"/>
           <p:cNvSpPr txBox="1"/>
           <p:nvPr/>
         </p:nvSpPr>
@@ -7877,7 +7697,7 @@
       </p:sp>
       <p:sp>
         <p:nvSpPr>
-          <p:cNvPr id="9" name="TextBox 8"/>
+          <p:cNvPr id="8" name="TextBox 7"/>
           <p:cNvSpPr txBox="1"/>
           <p:nvPr/>
         </p:nvSpPr>
@@ -10885,123 +10705,33 @@
           </a:p>
         </p:txBody>
       </p:sp>
-      <p:sp>
-        <p:nvSpPr>
-          <p:cNvPr id="5" name="Rounded Rectangle 4"/>
-          <p:cNvSpPr/>
-          <p:nvPr/>
-        </p:nvSpPr>
-        <p:spPr>
-          <a:xfrm>
-            <a:off x="6400800" y="1783080"/>
-            <a:ext cx="5120640" cy="4023360"/>
-          </a:xfrm>
-          <a:prstGeom prst="roundRect">
-            <a:avLst/>
-          </a:prstGeom>
-          <a:solidFill>
-            <a:srgbClr val="FBF6E6"/>
-          </a:solidFill>
-          <a:ln w="12700">
-            <a:solidFill>
-              <a:srgbClr val="92268F"/>
-            </a:solidFill>
-            <a:prstDash val="dash"/>
-          </a:ln>
-          <a:effectLst/>
-        </p:spPr>
-        <p:style>
-          <a:lnRef idx="1">
-            <a:schemeClr val="accent1"/>
-          </a:lnRef>
-          <a:fillRef idx="3">
-            <a:schemeClr val="accent1"/>
-          </a:fillRef>
-          <a:effectRef idx="2">
-            <a:schemeClr val="accent1"/>
-          </a:effectRef>
-          <a:fontRef idx="minor">
-            <a:schemeClr val="lt1"/>
-          </a:fontRef>
-        </p:style>
-        <p:txBody>
-          <a:bodyPr rtlCol="0" anchor="ctr"/>
-          <a:lstStyle/>
-          <a:p>
-            <a:pPr algn="ctr"/>
-          </a:p>
-        </p:txBody>
-      </p:sp>
-      <p:sp>
-        <p:nvSpPr>
-          <p:cNvPr id="6" name="TextBox 5"/>
-          <p:cNvSpPr txBox="1"/>
-          <p:nvPr/>
-        </p:nvSpPr>
-        <p:spPr>
-          <a:xfrm>
-            <a:off x="6400800" y="1783080"/>
-            <a:ext cx="5120640" cy="4023360"/>
-          </a:xfrm>
-          <a:prstGeom prst="rect">
-            <a:avLst/>
-          </a:prstGeom>
-          <a:noFill/>
-        </p:spPr>
-        <p:txBody>
-          <a:bodyPr wrap="square" anchor="ctr" lIns="0" rIns="0" tIns="0" bIns="0">
-            <a:spAutoFit/>
-          </a:bodyPr>
-          <a:lstStyle/>
-          <a:p>
-            <a:pPr algn="ctr"/>
-            <a:r>
-              <a:rPr sz="3000" b="0" i="0">
-                <a:solidFill>
-                  <a:srgbClr val="92268F"/>
-                </a:solidFill>
-                <a:latin typeface="Roboto"/>
-              </a:rPr>
-              <a:t>🖼</a:t>
-            </a:r>
-          </a:p>
-          <a:p>
-            <a:pPr algn="ctr">
-              <a:spcBef>
-                <a:spcPts val="400"/>
-              </a:spcBef>
-            </a:pPr>
-            <a:r>
-              <a:rPr sz="1200" b="1" i="0">
-                <a:solidFill>
-                  <a:srgbClr val="92268F"/>
-                </a:solidFill>
-                <a:latin typeface="Roboto"/>
-              </a:rPr>
-              <a:t>IMAGE</a:t>
-            </a:r>
-          </a:p>
-          <a:p>
-            <a:pPr algn="ctr">
-              <a:spcBef>
-                <a:spcPts val="200"/>
-              </a:spcBef>
-            </a:pPr>
-            <a:r>
-              <a:rPr sz="1200" b="0" i="1">
-                <a:solidFill>
-                  <a:srgbClr val="484848"/>
-                </a:solidFill>
-                <a:latin typeface="Roboto Light"/>
-              </a:rPr>
-              <a:t>AWS — cloud architecture: requirements→design→structure (ACA M02 S08)</a:t>
-            </a:r>
-          </a:p>
-        </p:txBody>
-      </p:sp>
-      <p:sp>
-        <p:nvSpPr>
-          <p:cNvPr id="7" name="Rectangle 6"/>
+      <p:pic>
+        <p:nvPicPr>
+          <p:cNvPr id="5" name="Picture 4" descr="06-aws-arch-reqs-design-build.png"/>
+          <p:cNvPicPr>
+            <a:picLocks noChangeAspect="1"/>
+          </p:cNvPicPr>
+          <p:nvPr/>
+        </p:nvPicPr>
+        <p:blipFill>
+          <a:blip r:embed="rId2"/>
+          <a:stretch>
+            <a:fillRect/>
+          </a:stretch>
+        </p:blipFill>
+        <p:spPr>
+          <a:xfrm>
+            <a:off x="6400800" y="2521331"/>
+            <a:ext cx="5120640" cy="2546858"/>
+          </a:xfrm>
+          <a:prstGeom prst="rect">
+            <a:avLst/>
+          </a:prstGeom>
+        </p:spPr>
+      </p:pic>
+      <p:sp>
+        <p:nvSpPr>
+          <p:cNvPr id="6" name="Rectangle 5"/>
           <p:cNvSpPr/>
           <p:nvPr/>
         </p:nvSpPr>
@@ -11045,7 +10775,7 @@
       </p:sp>
       <p:sp>
         <p:nvSpPr>
-          <p:cNvPr id="8" name="TextBox 7"/>
+          <p:cNvPr id="7" name="TextBox 6"/>
           <p:cNvSpPr txBox="1"/>
           <p:nvPr/>
         </p:nvSpPr>
@@ -11088,7 +10818,7 @@
       </p:sp>
       <p:sp>
         <p:nvSpPr>
-          <p:cNvPr id="9" name="TextBox 8"/>
+          <p:cNvPr id="8" name="TextBox 7"/>
           <p:cNvSpPr txBox="1"/>
           <p:nvPr/>
         </p:nvSpPr>

--- a/S1-CL1-Cloud-Design-Build/delivery/topic_06/Topic_06_Slides.pptx
+++ b/S1-CL1-Cloud-Design-Build/delivery/topic_06/Topic_06_Slides.pptx
@@ -4743,7 +4743,7 @@
           <a:noFill/>
         </p:spPr>
         <p:txBody>
-          <a:bodyPr wrap="square" anchor="t" lIns="0" rIns="0" tIns="0" bIns="0">
+          <a:bodyPr wrap="square" anchor="ctr" lIns="0" rIns="0" tIns="0" bIns="0">
             <a:spAutoFit/>
           </a:bodyPr>
           <a:lstStyle/>
@@ -4760,7 +4760,7 @@
               </a:spcAft>
             </a:pPr>
             <a:r>
-              <a:rPr sz="1800" b="1" i="0">
+              <a:rPr sz="2400" b="1" i="0">
                 <a:solidFill>
                   <a:srgbClr val="EDAB0C"/>
                 </a:solidFill>
@@ -4769,7 +4769,7 @@
               <a:t>■  </a:t>
             </a:r>
             <a:r>
-              <a:rPr sz="1800" b="0" i="0">
+              <a:rPr sz="2400" b="0" i="0">
                 <a:solidFill>
                   <a:srgbClr val="2A2929"/>
                 </a:solidFill>
@@ -4791,7 +4791,7 @@
               </a:spcAft>
             </a:pPr>
             <a:r>
-              <a:rPr sz="1800" b="1" i="0">
+              <a:rPr sz="2400" b="1" i="0">
                 <a:solidFill>
                   <a:srgbClr val="EDAB0C"/>
                 </a:solidFill>
@@ -4800,7 +4800,7 @@
               <a:t>■  </a:t>
             </a:r>
             <a:r>
-              <a:rPr sz="1800" b="0" i="0">
+              <a:rPr sz="2400" b="0" i="0">
                 <a:solidFill>
                   <a:srgbClr val="2A2929"/>
                 </a:solidFill>
@@ -4822,7 +4822,7 @@
               </a:spcAft>
             </a:pPr>
             <a:r>
-              <a:rPr sz="1800" b="1" i="0">
+              <a:rPr sz="2400" b="1" i="0">
                 <a:solidFill>
                   <a:srgbClr val="EDAB0C"/>
                 </a:solidFill>
@@ -4831,7 +4831,7 @@
               <a:t>■  </a:t>
             </a:r>
             <a:r>
-              <a:rPr sz="1800" b="0" i="0">
+              <a:rPr sz="2400" b="0" i="0">
                 <a:solidFill>
                   <a:srgbClr val="2A2929"/>
                 </a:solidFill>
@@ -4853,7 +4853,7 @@
               </a:spcAft>
             </a:pPr>
             <a:r>
-              <a:rPr sz="1800" b="1" i="0">
+              <a:rPr sz="2400" b="1" i="0">
                 <a:solidFill>
                   <a:srgbClr val="27B5CE"/>
                 </a:solidFill>
@@ -4862,7 +4862,7 @@
               <a:t>■  </a:t>
             </a:r>
             <a:r>
-              <a:rPr sz="1800" b="1" i="0">
+              <a:rPr sz="2400" b="1" i="0">
                 <a:solidFill>
                   <a:srgbClr val="27B5CE"/>
                 </a:solidFill>
@@ -5132,7 +5132,7 @@
           <a:noFill/>
         </p:spPr>
         <p:txBody>
-          <a:bodyPr wrap="square" anchor="t" lIns="0" rIns="0" tIns="0" bIns="0">
+          <a:bodyPr wrap="square" anchor="ctr" lIns="0" rIns="0" tIns="0" bIns="0">
             <a:spAutoFit/>
           </a:bodyPr>
           <a:lstStyle/>
@@ -5149,7 +5149,7 @@
               </a:spcAft>
             </a:pPr>
             <a:r>
-              <a:rPr sz="1800" b="1" i="0">
+              <a:rPr sz="2400" b="1" i="0">
                 <a:solidFill>
                   <a:srgbClr val="EDAB0C"/>
                 </a:solidFill>
@@ -5158,7 +5158,7 @@
               <a:t>■  </a:t>
             </a:r>
             <a:r>
-              <a:rPr sz="1800" b="0" i="0">
+              <a:rPr sz="2400" b="0" i="0">
                 <a:solidFill>
                   <a:srgbClr val="2A2929"/>
                 </a:solidFill>
@@ -5180,7 +5180,7 @@
               </a:spcAft>
             </a:pPr>
             <a:r>
-              <a:rPr sz="1800" b="1" i="0">
+              <a:rPr sz="2400" b="1" i="0">
                 <a:solidFill>
                   <a:srgbClr val="EDAB0C"/>
                 </a:solidFill>
@@ -5189,7 +5189,7 @@
               <a:t>■  </a:t>
             </a:r>
             <a:r>
-              <a:rPr sz="1800" b="0" i="0">
+              <a:rPr sz="2400" b="0" i="0">
                 <a:solidFill>
                   <a:srgbClr val="2A2929"/>
                 </a:solidFill>
@@ -5211,7 +5211,7 @@
               </a:spcAft>
             </a:pPr>
             <a:r>
-              <a:rPr sz="1800" b="1" i="0">
+              <a:rPr sz="2400" b="1" i="0">
                 <a:solidFill>
                   <a:srgbClr val="EDAB0C"/>
                 </a:solidFill>
@@ -5220,7 +5220,7 @@
               <a:t>■  </a:t>
             </a:r>
             <a:r>
-              <a:rPr sz="1800" b="0" i="0">
+              <a:rPr sz="2400" b="0" i="0">
                 <a:solidFill>
                   <a:srgbClr val="2A2929"/>
                 </a:solidFill>
@@ -5242,7 +5242,7 @@
               </a:spcAft>
             </a:pPr>
             <a:r>
-              <a:rPr sz="1800" b="1" i="0">
+              <a:rPr sz="2400" b="1" i="0">
                 <a:solidFill>
                   <a:srgbClr val="EDAB0C"/>
                 </a:solidFill>
@@ -5251,7 +5251,7 @@
               <a:t>■  </a:t>
             </a:r>
             <a:r>
-              <a:rPr sz="1800" b="0" i="0">
+              <a:rPr sz="2400" b="0" i="0">
                 <a:solidFill>
                   <a:srgbClr val="2A2929"/>
                 </a:solidFill>
@@ -5273,7 +5273,7 @@
               </a:spcAft>
             </a:pPr>
             <a:r>
-              <a:rPr sz="1800" b="1" i="0">
+              <a:rPr sz="2400" b="1" i="0">
                 <a:solidFill>
                   <a:srgbClr val="27B5CE"/>
                 </a:solidFill>
@@ -5282,7 +5282,7 @@
               <a:t>■  </a:t>
             </a:r>
             <a:r>
-              <a:rPr sz="1800" b="1" i="0">
+              <a:rPr sz="2400" b="1" i="0">
                 <a:solidFill>
                   <a:srgbClr val="27B5CE"/>
                 </a:solidFill>
@@ -7867,7 +7867,7 @@
           <a:noFill/>
         </p:spPr>
         <p:txBody>
-          <a:bodyPr wrap="square" anchor="t" lIns="0" rIns="0" tIns="0" bIns="0">
+          <a:bodyPr wrap="square" anchor="ctr" lIns="0" rIns="0" tIns="0" bIns="0">
             <a:spAutoFit/>
           </a:bodyPr>
           <a:lstStyle/>
@@ -7884,7 +7884,7 @@
               </a:spcAft>
             </a:pPr>
             <a:r>
-              <a:rPr sz="1800" b="1" i="0">
+              <a:rPr sz="2400" b="1" i="0">
                 <a:solidFill>
                   <a:srgbClr val="EDAB0C"/>
                 </a:solidFill>
@@ -7893,7 +7893,7 @@
               <a:t>■  </a:t>
             </a:r>
             <a:r>
-              <a:rPr sz="1800" b="0" i="0">
+              <a:rPr sz="2400" b="0" i="0">
                 <a:solidFill>
                   <a:srgbClr val="2A2929"/>
                 </a:solidFill>
@@ -7915,7 +7915,7 @@
               </a:spcAft>
             </a:pPr>
             <a:r>
-              <a:rPr sz="1800" b="1" i="0">
+              <a:rPr sz="2400" b="1" i="0">
                 <a:solidFill>
                   <a:srgbClr val="92268F"/>
                 </a:solidFill>
@@ -7924,7 +7924,7 @@
               <a:t>■  </a:t>
             </a:r>
             <a:r>
-              <a:rPr sz="1800" b="1" i="0">
+              <a:rPr sz="2400" b="1" i="0">
                 <a:solidFill>
                   <a:srgbClr val="92268F"/>
                 </a:solidFill>
@@ -7946,7 +7946,7 @@
               </a:spcAft>
             </a:pPr>
             <a:r>
-              <a:rPr sz="1800" b="1" i="0">
+              <a:rPr sz="2400" b="1" i="0">
                 <a:solidFill>
                   <a:srgbClr val="EDAB0C"/>
                 </a:solidFill>
@@ -7955,7 +7955,7 @@
               <a:t>■  </a:t>
             </a:r>
             <a:r>
-              <a:rPr sz="1800" b="0" i="0">
+              <a:rPr sz="2400" b="0" i="0">
                 <a:solidFill>
                   <a:srgbClr val="2A2929"/>
                 </a:solidFill>
@@ -7977,7 +7977,7 @@
               </a:spcAft>
             </a:pPr>
             <a:r>
-              <a:rPr sz="1800" b="1" i="0">
+              <a:rPr sz="2400" b="1" i="0">
                 <a:solidFill>
                   <a:srgbClr val="EDAB0C"/>
                 </a:solidFill>
@@ -7986,7 +7986,7 @@
               <a:t>■  </a:t>
             </a:r>
             <a:r>
-              <a:rPr sz="1800" b="0" i="0">
+              <a:rPr sz="2400" b="0" i="0">
                 <a:solidFill>
                   <a:srgbClr val="2A2929"/>
                 </a:solidFill>
@@ -8008,7 +8008,7 @@
               </a:spcAft>
             </a:pPr>
             <a:r>
-              <a:rPr sz="1800" b="1" i="0">
+              <a:rPr sz="2400" b="1" i="0">
                 <a:solidFill>
                   <a:srgbClr val="EDAB0C"/>
                 </a:solidFill>
@@ -8017,7 +8017,7 @@
               <a:t>■  </a:t>
             </a:r>
             <a:r>
-              <a:rPr sz="1800" b="0" i="0">
+              <a:rPr sz="2400" b="0" i="0">
                 <a:solidFill>
                   <a:srgbClr val="2A2929"/>
                 </a:solidFill>
@@ -8287,7 +8287,7 @@
           <a:noFill/>
         </p:spPr>
         <p:txBody>
-          <a:bodyPr wrap="square" anchor="t" lIns="0" rIns="0" tIns="0" bIns="0">
+          <a:bodyPr wrap="square" anchor="ctr" lIns="0" rIns="0" tIns="0" bIns="0">
             <a:spAutoFit/>
           </a:bodyPr>
           <a:lstStyle/>
@@ -8304,7 +8304,7 @@
               </a:spcAft>
             </a:pPr>
             <a:r>
-              <a:rPr sz="1800" b="1" i="0">
+              <a:rPr sz="2400" b="1" i="0">
                 <a:solidFill>
                   <a:srgbClr val="EDAB0C"/>
                 </a:solidFill>
@@ -8313,7 +8313,7 @@
               <a:t>■  </a:t>
             </a:r>
             <a:r>
-              <a:rPr sz="1800" b="0" i="0">
+              <a:rPr sz="2400" b="0" i="0">
                 <a:solidFill>
                   <a:srgbClr val="2A2929"/>
                 </a:solidFill>
@@ -8335,7 +8335,7 @@
               </a:spcAft>
             </a:pPr>
             <a:r>
-              <a:rPr sz="1800" b="1" i="0">
+              <a:rPr sz="2400" b="1" i="0">
                 <a:solidFill>
                   <a:srgbClr val="EDAB0C"/>
                 </a:solidFill>
@@ -8344,7 +8344,7 @@
               <a:t>■  </a:t>
             </a:r>
             <a:r>
-              <a:rPr sz="1800" b="0" i="0">
+              <a:rPr sz="2400" b="0" i="0">
                 <a:solidFill>
                   <a:srgbClr val="2A2929"/>
                 </a:solidFill>
@@ -8366,7 +8366,7 @@
               </a:spcAft>
             </a:pPr>
             <a:r>
-              <a:rPr sz="1800" b="1" i="0">
+              <a:rPr sz="2400" b="1" i="0">
                 <a:solidFill>
                   <a:srgbClr val="205F61"/>
                 </a:solidFill>
@@ -8375,7 +8375,7 @@
               <a:t>■  </a:t>
             </a:r>
             <a:r>
-              <a:rPr sz="1800" b="1" i="0">
+              <a:rPr sz="2400" b="1" i="0">
                 <a:solidFill>
                   <a:srgbClr val="205F61"/>
                 </a:solidFill>
@@ -8629,7 +8629,7 @@
           <a:noFill/>
         </p:spPr>
         <p:txBody>
-          <a:bodyPr wrap="square" anchor="t" lIns="0" rIns="0" tIns="0" bIns="0">
+          <a:bodyPr wrap="square" anchor="ctr" lIns="0" rIns="0" tIns="0" bIns="0">
             <a:spAutoFit/>
           </a:bodyPr>
           <a:lstStyle/>
@@ -8646,7 +8646,7 @@
               </a:spcAft>
             </a:pPr>
             <a:r>
-              <a:rPr sz="1800" b="1" i="0">
+              <a:rPr sz="2400" b="1" i="0">
                 <a:solidFill>
                   <a:srgbClr val="EDAB0C"/>
                 </a:solidFill>
@@ -8655,7 +8655,7 @@
               <a:t>■  </a:t>
             </a:r>
             <a:r>
-              <a:rPr sz="1800" b="0" i="0">
+              <a:rPr sz="2400" b="0" i="0">
                 <a:solidFill>
                   <a:srgbClr val="2A2929"/>
                 </a:solidFill>
@@ -8677,7 +8677,7 @@
               </a:spcAft>
             </a:pPr>
             <a:r>
-              <a:rPr sz="1800" b="1" i="0">
+              <a:rPr sz="2400" b="1" i="0">
                 <a:solidFill>
                   <a:srgbClr val="EDAB0C"/>
                 </a:solidFill>
@@ -8686,7 +8686,7 @@
               <a:t>■  </a:t>
             </a:r>
             <a:r>
-              <a:rPr sz="1800" b="0" i="0">
+              <a:rPr sz="2400" b="0" i="0">
                 <a:solidFill>
                   <a:srgbClr val="2A2929"/>
                 </a:solidFill>
@@ -8708,7 +8708,7 @@
               </a:spcAft>
             </a:pPr>
             <a:r>
-              <a:rPr sz="1500" b="0" i="0">
+              <a:rPr sz="2100" b="0" i="0">
                 <a:solidFill>
                   <a:srgbClr val="7A7A7A"/>
                 </a:solidFill>
@@ -8717,7 +8717,7 @@
               <a:t>–  </a:t>
             </a:r>
             <a:r>
-              <a:rPr sz="1500" b="0" i="0">
+              <a:rPr sz="2100" b="0" i="0">
                 <a:solidFill>
                   <a:srgbClr val="2A2929"/>
                 </a:solidFill>
@@ -10988,7 +10988,7 @@
           <a:noFill/>
         </p:spPr>
         <p:txBody>
-          <a:bodyPr wrap="square" anchor="t" lIns="0" rIns="0" tIns="0" bIns="0">
+          <a:bodyPr wrap="square" anchor="ctr" lIns="0" rIns="0" tIns="0" bIns="0">
             <a:spAutoFit/>
           </a:bodyPr>
           <a:lstStyle/>
@@ -11005,7 +11005,7 @@
               </a:spcAft>
             </a:pPr>
             <a:r>
-              <a:rPr sz="1800" b="1" i="0">
+              <a:rPr sz="2400" b="1" i="0">
                 <a:solidFill>
                   <a:srgbClr val="EDAB0C"/>
                 </a:solidFill>
@@ -11014,7 +11014,7 @@
               <a:t>■  </a:t>
             </a:r>
             <a:r>
-              <a:rPr sz="1800" b="0" i="0">
+              <a:rPr sz="2400" b="0" i="0">
                 <a:solidFill>
                   <a:srgbClr val="2A2929"/>
                 </a:solidFill>
@@ -11036,7 +11036,7 @@
               </a:spcAft>
             </a:pPr>
             <a:r>
-              <a:rPr sz="1800" b="1" i="0">
+              <a:rPr sz="2400" b="1" i="0">
                 <a:solidFill>
                   <a:srgbClr val="EDAB0C"/>
                 </a:solidFill>
@@ -11045,7 +11045,7 @@
               <a:t>■  </a:t>
             </a:r>
             <a:r>
-              <a:rPr sz="1800" b="0" i="0">
+              <a:rPr sz="2400" b="0" i="0">
                 <a:solidFill>
                   <a:srgbClr val="2A2929"/>
                 </a:solidFill>
@@ -11067,7 +11067,7 @@
               </a:spcAft>
             </a:pPr>
             <a:r>
-              <a:rPr sz="1800" b="1" i="0">
+              <a:rPr sz="2400" b="1" i="0">
                 <a:solidFill>
                   <a:srgbClr val="92268F"/>
                 </a:solidFill>
@@ -11076,7 +11076,7 @@
               <a:t>■  </a:t>
             </a:r>
             <a:r>
-              <a:rPr sz="1800" b="1" i="0">
+              <a:rPr sz="2400" b="1" i="0">
                 <a:solidFill>
                   <a:srgbClr val="92268F"/>
                 </a:solidFill>
@@ -11346,7 +11346,7 @@
           <a:noFill/>
         </p:spPr>
         <p:txBody>
-          <a:bodyPr wrap="square" anchor="t" lIns="0" rIns="0" tIns="0" bIns="0">
+          <a:bodyPr wrap="square" anchor="ctr" lIns="0" rIns="0" tIns="0" bIns="0">
             <a:spAutoFit/>
           </a:bodyPr>
           <a:lstStyle/>
@@ -11363,7 +11363,7 @@
               </a:spcAft>
             </a:pPr>
             <a:r>
-              <a:rPr sz="1800" b="1" i="0">
+              <a:rPr sz="2200" b="1" i="0">
                 <a:solidFill>
                   <a:srgbClr val="EDAB0C"/>
                 </a:solidFill>
@@ -11372,7 +11372,7 @@
               <a:t>■  </a:t>
             </a:r>
             <a:r>
-              <a:rPr sz="1800" b="0" i="0">
+              <a:rPr sz="2200" b="0" i="0">
                 <a:solidFill>
                   <a:srgbClr val="2A2929"/>
                 </a:solidFill>
@@ -11394,7 +11394,7 @@
               </a:spcAft>
             </a:pPr>
             <a:r>
-              <a:rPr sz="1800" b="1" i="0">
+              <a:rPr sz="2200" b="1" i="0">
                 <a:solidFill>
                   <a:srgbClr val="EDAB0C"/>
                 </a:solidFill>
@@ -11403,7 +11403,7 @@
               <a:t>■  </a:t>
             </a:r>
             <a:r>
-              <a:rPr sz="1800" b="0" i="0">
+              <a:rPr sz="2200" b="0" i="0">
                 <a:solidFill>
                   <a:srgbClr val="2A2929"/>
                 </a:solidFill>
@@ -11425,7 +11425,7 @@
               </a:spcAft>
             </a:pPr>
             <a:r>
-              <a:rPr sz="1800" b="1" i="0">
+              <a:rPr sz="2200" b="1" i="0">
                 <a:solidFill>
                   <a:srgbClr val="EDAB0C"/>
                 </a:solidFill>
@@ -11434,7 +11434,7 @@
               <a:t>■  </a:t>
             </a:r>
             <a:r>
-              <a:rPr sz="1800" b="0" i="0">
+              <a:rPr sz="2200" b="0" i="0">
                 <a:solidFill>
                   <a:srgbClr val="2A2929"/>
                 </a:solidFill>
@@ -11456,7 +11456,7 @@
               </a:spcAft>
             </a:pPr>
             <a:r>
-              <a:rPr sz="1800" b="1" i="0">
+              <a:rPr sz="2200" b="1" i="0">
                 <a:solidFill>
                   <a:srgbClr val="EDAB0C"/>
                 </a:solidFill>
@@ -11465,7 +11465,7 @@
               <a:t>■  </a:t>
             </a:r>
             <a:r>
-              <a:rPr sz="1800" b="0" i="0">
+              <a:rPr sz="2200" b="0" i="0">
                 <a:solidFill>
                   <a:srgbClr val="2A2929"/>
                 </a:solidFill>
@@ -11487,7 +11487,7 @@
               </a:spcAft>
             </a:pPr>
             <a:r>
-              <a:rPr sz="1800" b="1" i="0">
+              <a:rPr sz="2200" b="1" i="0">
                 <a:solidFill>
                   <a:srgbClr val="92268F"/>
                 </a:solidFill>
@@ -11496,7 +11496,7 @@
               <a:t>■  </a:t>
             </a:r>
             <a:r>
-              <a:rPr sz="1800" b="1" i="0">
+              <a:rPr sz="2200" b="1" i="0">
                 <a:solidFill>
                   <a:srgbClr val="92268F"/>
                 </a:solidFill>
@@ -11750,7 +11750,7 @@
           <a:noFill/>
         </p:spPr>
         <p:txBody>
-          <a:bodyPr wrap="square" anchor="t" lIns="0" rIns="0" tIns="0" bIns="0">
+          <a:bodyPr wrap="square" anchor="ctr" lIns="0" rIns="0" tIns="0" bIns="0">
             <a:spAutoFit/>
           </a:bodyPr>
           <a:lstStyle/>
@@ -11767,7 +11767,7 @@
               </a:spcAft>
             </a:pPr>
             <a:r>
-              <a:rPr sz="1800" b="1" i="0">
+              <a:rPr sz="2400" b="1" i="0">
                 <a:solidFill>
                   <a:srgbClr val="EDAB0C"/>
                 </a:solidFill>
@@ -11776,7 +11776,7 @@
               <a:t>■  </a:t>
             </a:r>
             <a:r>
-              <a:rPr sz="1800" b="0" i="0">
+              <a:rPr sz="2400" b="0" i="0">
                 <a:solidFill>
                   <a:srgbClr val="2A2929"/>
                 </a:solidFill>
@@ -11798,7 +11798,7 @@
               </a:spcAft>
             </a:pPr>
             <a:r>
-              <a:rPr sz="1800" b="1" i="0">
+              <a:rPr sz="2400" b="1" i="0">
                 <a:solidFill>
                   <a:srgbClr val="EDAB0C"/>
                 </a:solidFill>
@@ -11807,7 +11807,7 @@
               <a:t>■  </a:t>
             </a:r>
             <a:r>
-              <a:rPr sz="1800" b="0" i="0">
+              <a:rPr sz="2400" b="0" i="0">
                 <a:solidFill>
                   <a:srgbClr val="2A2929"/>
                 </a:solidFill>
@@ -11829,7 +11829,7 @@
               </a:spcAft>
             </a:pPr>
             <a:r>
-              <a:rPr sz="1800" b="1" i="0">
+              <a:rPr sz="2400" b="1" i="0">
                 <a:solidFill>
                   <a:srgbClr val="EDAB0C"/>
                 </a:solidFill>
@@ -11838,7 +11838,7 @@
               <a:t>■  </a:t>
             </a:r>
             <a:r>
-              <a:rPr sz="1800" b="0" i="0">
+              <a:rPr sz="2400" b="0" i="0">
                 <a:solidFill>
                   <a:srgbClr val="2A2929"/>
                 </a:solidFill>
@@ -11860,7 +11860,7 @@
               </a:spcAft>
             </a:pPr>
             <a:r>
-              <a:rPr sz="1800" b="1" i="0">
+              <a:rPr sz="2400" b="1" i="0">
                 <a:solidFill>
                   <a:srgbClr val="92268F"/>
                 </a:solidFill>
@@ -11869,7 +11869,7 @@
               <a:t>■  </a:t>
             </a:r>
             <a:r>
-              <a:rPr sz="1800" b="1" i="0">
+              <a:rPr sz="2400" b="1" i="0">
                 <a:solidFill>
                   <a:srgbClr val="92268F"/>
                 </a:solidFill>

--- a/S1-CL1-Cloud-Design-Build/delivery/topic_06/Topic_06_Slides.pptx
+++ b/S1-CL1-Cloud-Design-Build/delivery/topic_06/Topic_06_Slides.pptx
@@ -17,18 +17,18 @@
     <p:sldId id="265" r:id="rId16"/>
     <p:sldId id="266" r:id="rId17"/>
     <p:sldId id="267" r:id="rId18"/>
-    <p:sldId id="268" r:id="rId19"/>
-    <p:sldId id="269" r:id="rId20"/>
-    <p:sldId id="270" r:id="rId21"/>
-    <p:sldId id="271" r:id="rId22"/>
-    <p:sldId id="272" r:id="rId23"/>
-    <p:sldId id="273" r:id="rId24"/>
-    <p:sldId id="274" r:id="rId25"/>
-    <p:sldId id="275" r:id="rId26"/>
-    <p:sldId id="276" r:id="rId27"/>
-    <p:sldId id="277" r:id="rId28"/>
-    <p:sldId id="278" r:id="rId29"/>
-    <p:sldId id="279" r:id="rId30"/>
+    <p:sldId id="268" r:id="rId20"/>
+    <p:sldId id="269" r:id="rId21"/>
+    <p:sldId id="270" r:id="rId22"/>
+    <p:sldId id="271" r:id="rId23"/>
+    <p:sldId id="272" r:id="rId24"/>
+    <p:sldId id="273" r:id="rId25"/>
+    <p:sldId id="274" r:id="rId26"/>
+    <p:sldId id="275" r:id="rId27"/>
+    <p:sldId id="276" r:id="rId28"/>
+    <p:sldId id="277" r:id="rId29"/>
+    <p:sldId id="278" r:id="rId30"/>
+    <p:sldId id="279" r:id="rId31"/>
   </p:sldIdLst>
   <p:sldSz cx="12191695" cy="6858000" type="screen4x3"/>
   <p:notesSz cx="6858000" cy="9144000"/>
@@ -128,6 +128,823 @@
     </a:lvl9pPr>
   </p:defaultTextStyle>
 </p:presentation>
+</file>
+
+<file path=ppt/notesMasters/notesMaster1.xml><?xml version="1.0" encoding="utf-8"?>
+<p:notesMaster xmlns:a="http://schemas.openxmlformats.org/drawingml/2006/main" xmlns:p="http://schemas.openxmlformats.org/presentationml/2006/main" xmlns:r="http://schemas.openxmlformats.org/officeDocument/2006/relationships">
+  <p:cSld>
+    <p:bg>
+      <p:bgRef idx="1001">
+        <a:schemeClr val="bg1"/>
+      </p:bgRef>
+    </p:bg>
+    <p:spTree>
+      <p:nvGrpSpPr>
+        <p:cNvPr id="1" name=""/>
+        <p:cNvGrpSpPr/>
+        <p:nvPr/>
+      </p:nvGrpSpPr>
+      <p:grpSpPr>
+        <a:xfrm>
+          <a:off x="0" y="0"/>
+          <a:ext cx="0" cy="0"/>
+          <a:chOff x="0" y="0"/>
+          <a:chExt cx="0" cy="0"/>
+        </a:xfrm>
+      </p:grpSpPr>
+      <p:sp>
+        <p:nvSpPr>
+          <p:cNvPr id="2" name="Header Placeholder 1"/>
+          <p:cNvSpPr>
+            <a:spLocks noGrp="1"/>
+          </p:cNvSpPr>
+          <p:nvPr>
+            <p:ph type="hdr" sz="quarter"/>
+          </p:nvPr>
+        </p:nvSpPr>
+        <p:spPr>
+          <a:xfrm>
+            <a:off x="0" y="0"/>
+            <a:ext cx="2971800" cy="457200"/>
+          </a:xfrm>
+          <a:prstGeom prst="rect">
+            <a:avLst/>
+          </a:prstGeom>
+        </p:spPr>
+        <p:txBody>
+          <a:bodyPr vert="horz" lIns="91440" tIns="45720" rIns="91440" bIns="45720" rtlCol="0"/>
+          <a:lstStyle>
+            <a:lvl1pPr algn="l">
+              <a:defRPr sz="1200"/>
+            </a:lvl1pPr>
+          </a:lstStyle>
+          <a:p>
+            <a:endParaRPr lang="en-US"/>
+          </a:p>
+        </p:txBody>
+      </p:sp>
+      <p:sp>
+        <p:nvSpPr>
+          <p:cNvPr id="3" name="Date Placeholder 2"/>
+          <p:cNvSpPr>
+            <a:spLocks noGrp="1"/>
+          </p:cNvSpPr>
+          <p:nvPr>
+            <p:ph type="dt" idx="1"/>
+          </p:nvPr>
+        </p:nvSpPr>
+        <p:spPr>
+          <a:xfrm>
+            <a:off x="3884613" y="0"/>
+            <a:ext cx="2971800" cy="457200"/>
+          </a:xfrm>
+          <a:prstGeom prst="rect">
+            <a:avLst/>
+          </a:prstGeom>
+        </p:spPr>
+        <p:txBody>
+          <a:bodyPr vert="horz" lIns="91440" tIns="45720" rIns="91440" bIns="45720" rtlCol="0"/>
+          <a:lstStyle>
+            <a:lvl1pPr algn="r">
+              <a:defRPr sz="1200"/>
+            </a:lvl1pPr>
+          </a:lstStyle>
+          <a:p>
+            <a:fld id="{0F89C1C7-3DCD-1040-A9CF-14679D8B5DDD}" type="datetimeFigureOut">
+              <a:rPr lang="en-US" smtClean="0"/>
+              <a:t>10/17/16</a:t>
+            </a:fld>
+            <a:endParaRPr lang="en-US"/>
+          </a:p>
+        </p:txBody>
+      </p:sp>
+      <p:sp>
+        <p:nvSpPr>
+          <p:cNvPr id="4" name="Slide Image Placeholder 3"/>
+          <p:cNvSpPr>
+            <a:spLocks noGrp="1" noRot="1" noChangeAspect="1"/>
+          </p:cNvSpPr>
+          <p:nvPr>
+            <p:ph type="sldImg" idx="2"/>
+          </p:nvPr>
+        </p:nvSpPr>
+        <p:spPr>
+          <a:xfrm>
+            <a:off x="1143000" y="685800"/>
+            <a:ext cx="4572000" cy="3429000"/>
+          </a:xfrm>
+          <a:prstGeom prst="rect">
+            <a:avLst/>
+          </a:prstGeom>
+          <a:noFill/>
+          <a:ln w="12700">
+            <a:solidFill>
+              <a:prstClr val="black"/>
+            </a:solidFill>
+          </a:ln>
+        </p:spPr>
+        <p:txBody>
+          <a:bodyPr vert="horz" lIns="91440" tIns="45720" rIns="91440" bIns="45720" rtlCol="0" anchor="ctr"/>
+          <a:lstStyle/>
+          <a:p>
+            <a:endParaRPr lang="en-US"/>
+          </a:p>
+        </p:txBody>
+      </p:sp>
+      <p:sp>
+        <p:nvSpPr>
+          <p:cNvPr id="5" name="Notes Placeholder 4"/>
+          <p:cNvSpPr>
+            <a:spLocks noGrp="1"/>
+          </p:cNvSpPr>
+          <p:nvPr>
+            <p:ph type="body" sz="quarter" idx="3"/>
+          </p:nvPr>
+        </p:nvSpPr>
+        <p:spPr>
+          <a:xfrm>
+            <a:off x="685800" y="4343400"/>
+            <a:ext cx="5486400" cy="4114800"/>
+          </a:xfrm>
+          <a:prstGeom prst="rect">
+            <a:avLst/>
+          </a:prstGeom>
+        </p:spPr>
+        <p:txBody>
+          <a:bodyPr vert="horz" lIns="91440" tIns="45720" rIns="91440" bIns="45720" rtlCol="0"/>
+          <a:lstStyle/>
+          <a:p>
+            <a:pPr lvl="0"/>
+            <a:r>
+              <a:rPr lang="en-US" smtClean="0"/>
+              <a:t>Click to edit Master text styles</a:t>
+            </a:r>
+          </a:p>
+          <a:p>
+            <a:pPr lvl="1"/>
+            <a:r>
+              <a:rPr lang="en-US" smtClean="0"/>
+              <a:t>Second level</a:t>
+            </a:r>
+          </a:p>
+          <a:p>
+            <a:pPr lvl="2"/>
+            <a:r>
+              <a:rPr lang="en-US" smtClean="0"/>
+              <a:t>Third level</a:t>
+            </a:r>
+          </a:p>
+          <a:p>
+            <a:pPr lvl="3"/>
+            <a:r>
+              <a:rPr lang="en-US" smtClean="0"/>
+              <a:t>Fourth level</a:t>
+            </a:r>
+          </a:p>
+          <a:p>
+            <a:pPr lvl="4"/>
+            <a:r>
+              <a:rPr lang="en-US" smtClean="0"/>
+              <a:t>Fifth level</a:t>
+            </a:r>
+            <a:endParaRPr lang="en-US"/>
+          </a:p>
+        </p:txBody>
+      </p:sp>
+      <p:sp>
+        <p:nvSpPr>
+          <p:cNvPr id="6" name="Footer Placeholder 5"/>
+          <p:cNvSpPr>
+            <a:spLocks noGrp="1"/>
+          </p:cNvSpPr>
+          <p:nvPr>
+            <p:ph type="ftr" sz="quarter" idx="4"/>
+          </p:nvPr>
+        </p:nvSpPr>
+        <p:spPr>
+          <a:xfrm>
+            <a:off x="0" y="8685213"/>
+            <a:ext cx="2971800" cy="457200"/>
+          </a:xfrm>
+          <a:prstGeom prst="rect">
+            <a:avLst/>
+          </a:prstGeom>
+        </p:spPr>
+        <p:txBody>
+          <a:bodyPr vert="horz" lIns="91440" tIns="45720" rIns="91440" bIns="45720" rtlCol="0" anchor="b"/>
+          <a:lstStyle>
+            <a:lvl1pPr algn="l">
+              <a:defRPr sz="1200"/>
+            </a:lvl1pPr>
+          </a:lstStyle>
+          <a:p>
+            <a:endParaRPr lang="en-US"/>
+          </a:p>
+        </p:txBody>
+      </p:sp>
+      <p:sp>
+        <p:nvSpPr>
+          <p:cNvPr id="7" name="Slide Number Placeholder 6"/>
+          <p:cNvSpPr>
+            <a:spLocks noGrp="1"/>
+          </p:cNvSpPr>
+          <p:nvPr>
+            <p:ph type="sldNum" sz="quarter" idx="5"/>
+          </p:nvPr>
+        </p:nvSpPr>
+        <p:spPr>
+          <a:xfrm>
+            <a:off x="3884613" y="8685213"/>
+            <a:ext cx="2971800" cy="457200"/>
+          </a:xfrm>
+          <a:prstGeom prst="rect">
+            <a:avLst/>
+          </a:prstGeom>
+        </p:spPr>
+        <p:txBody>
+          <a:bodyPr vert="horz" lIns="91440" tIns="45720" rIns="91440" bIns="45720" rtlCol="0" anchor="b"/>
+          <a:lstStyle>
+            <a:lvl1pPr algn="r">
+              <a:defRPr sz="1200"/>
+            </a:lvl1pPr>
+          </a:lstStyle>
+          <a:p>
+            <a:fld id="{BB5E49A5-4136-284D-997B-48E1D791AD67}" type="slidenum">
+              <a:rPr lang="en-US" smtClean="0"/>
+              <a:t>‹#›</a:t>
+            </a:fld>
+            <a:endParaRPr lang="en-US"/>
+          </a:p>
+        </p:txBody>
+      </p:sp>
+    </p:spTree>
+    <p:extLst>
+      <p:ext uri="{BB962C8B-B14F-4D97-AF65-F5344CB8AC3E}">
+        <p14:creationId xmlns:p14="http://schemas.microsoft.com/office/powerpoint/2010/main" val="2623252185"/>
+      </p:ext>
+    </p:extLst>
+  </p:cSld>
+  <p:clrMap bg1="lt1" tx1="dk1" bg2="lt2" tx2="dk2" accent1="accent1" accent2="accent2" accent3="accent3" accent4="accent4" accent5="accent5" accent6="accent6" hlink="hlink" folHlink="folHlink"/>
+  <p:notesStyle>
+    <a:lvl1pPr marL="0" algn="l" defTabSz="457200" rtl="0" eaLnBrk="1" latinLnBrk="0" hangingPunct="1">
+      <a:defRPr sz="1200" kern="1200">
+        <a:solidFill>
+          <a:schemeClr val="tx1"/>
+        </a:solidFill>
+        <a:latin typeface="+mn-lt"/>
+        <a:ea typeface="+mn-ea"/>
+        <a:cs typeface="+mn-cs"/>
+      </a:defRPr>
+    </a:lvl1pPr>
+    <a:lvl2pPr marL="457200" algn="l" defTabSz="457200" rtl="0" eaLnBrk="1" latinLnBrk="0" hangingPunct="1">
+      <a:defRPr sz="1200" kern="1200">
+        <a:solidFill>
+          <a:schemeClr val="tx1"/>
+        </a:solidFill>
+        <a:latin typeface="+mn-lt"/>
+        <a:ea typeface="+mn-ea"/>
+        <a:cs typeface="+mn-cs"/>
+      </a:defRPr>
+    </a:lvl2pPr>
+    <a:lvl3pPr marL="914400" algn="l" defTabSz="457200" rtl="0" eaLnBrk="1" latinLnBrk="0" hangingPunct="1">
+      <a:defRPr sz="1200" kern="1200">
+        <a:solidFill>
+          <a:schemeClr val="tx1"/>
+        </a:solidFill>
+        <a:latin typeface="+mn-lt"/>
+        <a:ea typeface="+mn-ea"/>
+        <a:cs typeface="+mn-cs"/>
+      </a:defRPr>
+    </a:lvl3pPr>
+    <a:lvl4pPr marL="1371600" algn="l" defTabSz="457200" rtl="0" eaLnBrk="1" latinLnBrk="0" hangingPunct="1">
+      <a:defRPr sz="1200" kern="1200">
+        <a:solidFill>
+          <a:schemeClr val="tx1"/>
+        </a:solidFill>
+        <a:latin typeface="+mn-lt"/>
+        <a:ea typeface="+mn-ea"/>
+        <a:cs typeface="+mn-cs"/>
+      </a:defRPr>
+    </a:lvl4pPr>
+    <a:lvl5pPr marL="1828800" algn="l" defTabSz="457200" rtl="0" eaLnBrk="1" latinLnBrk="0" hangingPunct="1">
+      <a:defRPr sz="1200" kern="1200">
+        <a:solidFill>
+          <a:schemeClr val="tx1"/>
+        </a:solidFill>
+        <a:latin typeface="+mn-lt"/>
+        <a:ea typeface="+mn-ea"/>
+        <a:cs typeface="+mn-cs"/>
+      </a:defRPr>
+    </a:lvl5pPr>
+    <a:lvl6pPr marL="2286000" algn="l" defTabSz="457200" rtl="0" eaLnBrk="1" latinLnBrk="0" hangingPunct="1">
+      <a:defRPr sz="1200" kern="1200">
+        <a:solidFill>
+          <a:schemeClr val="tx1"/>
+        </a:solidFill>
+        <a:latin typeface="+mn-lt"/>
+        <a:ea typeface="+mn-ea"/>
+        <a:cs typeface="+mn-cs"/>
+      </a:defRPr>
+    </a:lvl6pPr>
+    <a:lvl7pPr marL="2743200" algn="l" defTabSz="457200" rtl="0" eaLnBrk="1" latinLnBrk="0" hangingPunct="1">
+      <a:defRPr sz="1200" kern="1200">
+        <a:solidFill>
+          <a:schemeClr val="tx1"/>
+        </a:solidFill>
+        <a:latin typeface="+mn-lt"/>
+        <a:ea typeface="+mn-ea"/>
+        <a:cs typeface="+mn-cs"/>
+      </a:defRPr>
+    </a:lvl7pPr>
+    <a:lvl8pPr marL="3200400" algn="l" defTabSz="457200" rtl="0" eaLnBrk="1" latinLnBrk="0" hangingPunct="1">
+      <a:defRPr sz="1200" kern="1200">
+        <a:solidFill>
+          <a:schemeClr val="tx1"/>
+        </a:solidFill>
+        <a:latin typeface="+mn-lt"/>
+        <a:ea typeface="+mn-ea"/>
+        <a:cs typeface="+mn-cs"/>
+      </a:defRPr>
+    </a:lvl8pPr>
+    <a:lvl9pPr marL="3657600" algn="l" defTabSz="457200" rtl="0" eaLnBrk="1" latinLnBrk="0" hangingPunct="1">
+      <a:defRPr sz="1200" kern="1200">
+        <a:solidFill>
+          <a:schemeClr val="tx1"/>
+        </a:solidFill>
+        <a:latin typeface="+mn-lt"/>
+        <a:ea typeface="+mn-ea"/>
+        <a:cs typeface="+mn-cs"/>
+      </a:defRPr>
+    </a:lvl9pPr>
+  </p:notesStyle>
+</p:notesMaster>
+</file>
+
+<file path=ppt/notesSlides/notesSlide1.xml><?xml version="1.0" encoding="utf-8"?>
+<p:notes xmlns:a="http://schemas.openxmlformats.org/drawingml/2006/main" xmlns:p="http://schemas.openxmlformats.org/presentationml/2006/main" xmlns:r="http://schemas.openxmlformats.org/officeDocument/2006/relationships">
+  <p:cSld>
+    <p:spTree>
+      <p:nvGrpSpPr>
+        <p:cNvPr id="1" name=""/>
+        <p:cNvGrpSpPr/>
+        <p:nvPr/>
+      </p:nvGrpSpPr>
+      <p:grpSpPr>
+        <a:xfrm>
+          <a:off x="0" y="0"/>
+          <a:ext cx="0" cy="0"/>
+          <a:chOff x="0" y="0"/>
+          <a:chExt cx="0" cy="0"/>
+        </a:xfrm>
+      </p:grpSpPr>
+      <p:sp>
+        <p:nvSpPr>
+          <p:cNvPr id="2" name="Slide Image Placeholder 1"/>
+          <p:cNvSpPr>
+            <a:spLocks noGrp="1"/>
+          </p:cNvSpPr>
+          <p:nvPr>
+            <p:ph type="sldImg" idx="2"/>
+          </p:nvPr>
+        </p:nvSpPr>
+        <p:spPr/>
+      </p:sp>
+      <p:sp>
+        <p:nvSpPr>
+          <p:cNvPr id="3" name="Notes Placeholder 2"/>
+          <p:cNvSpPr>
+            <a:spLocks noGrp="1"/>
+          </p:cNvSpPr>
+          <p:nvPr>
+            <p:ph type="body" idx="3" sz="quarter"/>
+          </p:nvPr>
+        </p:nvSpPr>
+        <p:spPr/>
+        <p:txBody>
+          <a:bodyPr/>
+          <a:lstStyle/>
+          <a:p>
+            <a:r>
+              <a:t>Teach IAM as the account's "who can do what." Walk the four in order — user → group → role →</a:t>
+            </a:r>
+          </a:p>
+          <a:p>
+            <a:r>
+              <a:t>policy — stressing the split: the first two are about PEOPLE, the last two about PERMISSIONS.</a:t>
+            </a:r>
+          </a:p>
+          <a:p/>
+          <a:p>
+            <a:r>
+              <a:t>• IAM user — one identity per person or app. Emphasise: never share a login; each person their</a:t>
+            </a:r>
+          </a:p>
+          <a:p>
+            <a:r>
+              <a:t>  own user (that's what gives you accountability and an audit trail).</a:t>
+            </a:r>
+          </a:p>
+          <a:p>
+            <a:r>
+              <a:t>• IAM group — how you manage permissions at scale: set permissions ONCE on the group, not per</a:t>
+            </a:r>
+          </a:p>
+          <a:p>
+            <a:r>
+              <a:t>  person. Analogy: a team like "Finance" — add someone to the team and they inherit the access.</a:t>
+            </a:r>
+          </a:p>
+          <a:p>
+            <a:r>
+              <a:t>• IAM role — the one students find hardest. Unlike a user it has NO permanent credentials; it is</a:t>
+            </a:r>
+          </a:p>
+          <a:p>
+            <a:r>
+              <a:t>  ASSUMED temporarily. Key example for this build: an EC2 instance assumes a role to reach RDS/S3</a:t>
+            </a:r>
+          </a:p>
+          <a:p>
+            <a:r>
+              <a:t>  — no passwords or keys stored on the server.</a:t>
+            </a:r>
+          </a:p>
+          <a:p>
+            <a:r>
+              <a:t>• IAM policy — the JSON that says what's allowed. Everything is DENIED by default; a policy grants.</a:t>
+            </a:r>
+          </a:p>
+          <a:p>
+            <a:r>
+              <a:t>  You attach policies to groups/roles, never the JSON straight onto a person.</a:t>
+            </a:r>
+          </a:p>
+          <a:p/>
+          <a:p>
+            <a:r>
+              <a:t>Misconception to pre-empt: students conflate authentication (who you are = user) with authorization</a:t>
+            </a:r>
+          </a:p>
+          <a:p>
+            <a:r>
+              <a:t>(what you can do = policy). Say both words out loud.</a:t>
+            </a:r>
+          </a:p>
+          <a:p>
+            <a:r>
+              <a:t>Question to pose: "The web server needs to read from S3 — do we give it a username and password?"</a:t>
+            </a:r>
+          </a:p>
+          <a:p>
+            <a:r>
+              <a:t>(No — a role. This sets up the next two slides.)</a:t>
+            </a:r>
+          </a:p>
+          <a:p>
+            <a:r>
+              <a:t>Why it matters: this identity foundation is what the AT2 build is assessed on (securing the</a:t>
+            </a:r>
+          </a:p>
+          <a:p>
+            <a:r>
+              <a:t>deployment); the specific groups to build come two slides on.</a:t>
+            </a:r>
+          </a:p>
+        </p:txBody>
+      </p:sp>
+      <p:sp>
+        <p:nvSpPr>
+          <p:cNvPr id="4" name="Slide Number Placeholder 3"/>
+          <p:cNvSpPr>
+            <a:spLocks noGrp="1"/>
+          </p:cNvSpPr>
+          <p:nvPr>
+            <p:ph type="sldNum" idx="5" sz="quarter"/>
+          </p:nvPr>
+        </p:nvSpPr>
+        <p:spPr/>
+      </p:sp>
+    </p:spTree>
+  </p:cSld>
+  <p:clrMapOvr>
+    <a:masterClrMapping/>
+  </p:clrMapOvr>
+</p:notes>
+</file>
+
+<file path=ppt/notesSlides/notesSlide2.xml><?xml version="1.0" encoding="utf-8"?>
+<p:notes xmlns:a="http://schemas.openxmlformats.org/drawingml/2006/main" xmlns:p="http://schemas.openxmlformats.org/presentationml/2006/main" xmlns:r="http://schemas.openxmlformats.org/officeDocument/2006/relationships">
+  <p:cSld>
+    <p:spTree>
+      <p:nvGrpSpPr>
+        <p:cNvPr id="1" name=""/>
+        <p:cNvGrpSpPr/>
+        <p:nvPr/>
+      </p:nvGrpSpPr>
+      <p:grpSpPr>
+        <a:xfrm>
+          <a:off x="0" y="0"/>
+          <a:ext cx="0" cy="0"/>
+          <a:chOff x="0" y="0"/>
+          <a:chExt cx="0" cy="0"/>
+        </a:xfrm>
+      </p:grpSpPr>
+      <p:sp>
+        <p:nvSpPr>
+          <p:cNvPr id="2" name="Slide Image Placeholder 1"/>
+          <p:cNvSpPr>
+            <a:spLocks noGrp="1"/>
+          </p:cNvSpPr>
+          <p:nvPr>
+            <p:ph type="sldImg" idx="2"/>
+          </p:nvPr>
+        </p:nvSpPr>
+        <p:spPr/>
+      </p:sp>
+      <p:sp>
+        <p:nvSpPr>
+          <p:cNvPr id="3" name="Notes Placeholder 2"/>
+          <p:cNvSpPr>
+            <a:spLocks noGrp="1"/>
+          </p:cNvSpPr>
+          <p:nvPr>
+            <p:ph type="body" idx="3" sz="quarter"/>
+          </p:nvPr>
+        </p:nvSpPr>
+        <p:spPr/>
+        <p:txBody>
+          <a:bodyPr/>
+          <a:lstStyle/>
+          <a:p>
+            <a:r>
+              <a:t>WHERE TO FIND THE RECORDED DEMO: AWS Academy Cloud Foundations → Module 04 (AWS Cloud Security) →</a:t>
+            </a:r>
+          </a:p>
+          <a:p>
+            <a:r>
+              <a:t>slide 31, "Recorded demo: IAM", inside the ACF M04 instructor deck</a:t>
+            </a:r>
+          </a:p>
+          <a:p>
+            <a:r>
+              <a:t>(original-materials/AWS-Instructor Presentations/…). Instructor-facing — screen it in class, don't</a:t>
+            </a:r>
+          </a:p>
+          <a:p>
+            <a:r>
+              <a:t>distribute to students. Preview it before class and cue it to this slide.</a:t>
+            </a:r>
+          </a:p>
+          <a:p/>
+          <a:p>
+            <a:r>
+              <a:t>WHAT TO DEMONSTRATE (follow the recorded demo, then relate each step to OUR build):</a:t>
+            </a:r>
+          </a:p>
+          <a:p>
+            <a:r>
+              <a:t>1. Create a group and attach a least-privilege policy.</a:t>
+            </a:r>
+          </a:p>
+          <a:p>
+            <a:r>
+              <a:t>2. Create a user, add them to the group, enable MFA.</a:t>
+            </a:r>
+          </a:p>
+          <a:p>
+            <a:r>
+              <a:t>3. Create the EC2 instance role (Application-Service) and attach its policy.</a:t>
+            </a:r>
+          </a:p>
+          <a:p>
+            <a:r>
+              <a:t>4. Capture the IAM evidence screenshot (groups list + a user showing MFA enabled).</a:t>
+            </a:r>
+          </a:p>
+          <a:p/>
+          <a:p>
+            <a:r>
+              <a:t>WHAT TO EMPHASISE:</a:t>
+            </a:r>
+          </a:p>
+          <a:p>
+            <a:r>
+              <a:t>• Permissions go on the GROUP, then the user joins it — not policy-on-user. Show the difference.</a:t>
+            </a:r>
+          </a:p>
+          <a:p>
+            <a:r>
+              <a:t>• MFA — show the "assign MFA device" step explicitly; students routinely skip it and it's an</a:t>
+            </a:r>
+          </a:p>
+          <a:p>
+            <a:r>
+              <a:t>  Essential Eight requirement they're assessed on.</a:t>
+            </a:r>
+          </a:p>
+          <a:p>
+            <a:r>
+              <a:t>• The role has NO password — point out there are no long-lived credentials; the instance assumes</a:t>
+            </a:r>
+          </a:p>
+          <a:p>
+            <a:r>
+              <a:t>  it. This is the payoff of the "IAM components" teaching slide.</a:t>
+            </a:r>
+          </a:p>
+          <a:p>
+            <a:r>
+              <a:t>• Narrate the evidence capture — students must screenshot as they go for AT2; model it here.</a:t>
+            </a:r>
+          </a:p>
+          <a:p/>
+          <a:p>
+            <a:r>
+              <a:t>PREP: clean lab account open, the Accounting Baseline Design handy (for the group names), recorded</a:t>
+            </a:r>
+          </a:p>
+          <a:p>
+            <a:r>
+              <a:t>demo queued. ~8–10 min to screen + narrate before the activity.</a:t>
+            </a:r>
+          </a:p>
+        </p:txBody>
+      </p:sp>
+      <p:sp>
+        <p:nvSpPr>
+          <p:cNvPr id="4" name="Slide Number Placeholder 3"/>
+          <p:cNvSpPr>
+            <a:spLocks noGrp="1"/>
+          </p:cNvSpPr>
+          <p:nvPr>
+            <p:ph type="sldNum" idx="5" sz="quarter"/>
+          </p:nvPr>
+        </p:nvSpPr>
+        <p:spPr/>
+      </p:sp>
+    </p:spTree>
+  </p:cSld>
+  <p:clrMapOvr>
+    <a:masterClrMapping/>
+  </p:clrMapOvr>
+</p:notes>
+</file>
+
+<file path=ppt/notesSlides/notesSlide3.xml><?xml version="1.0" encoding="utf-8"?>
+<p:notes xmlns:a="http://schemas.openxmlformats.org/drawingml/2006/main" xmlns:p="http://schemas.openxmlformats.org/presentationml/2006/main" xmlns:r="http://schemas.openxmlformats.org/officeDocument/2006/relationships">
+  <p:cSld>
+    <p:spTree>
+      <p:nvGrpSpPr>
+        <p:cNvPr id="1" name=""/>
+        <p:cNvGrpSpPr/>
+        <p:nvPr/>
+      </p:nvGrpSpPr>
+      <p:grpSpPr>
+        <a:xfrm>
+          <a:off x="0" y="0"/>
+          <a:ext cx="0" cy="0"/>
+          <a:chOff x="0" y="0"/>
+          <a:chExt cx="0" cy="0"/>
+        </a:xfrm>
+      </p:grpSpPr>
+      <p:sp>
+        <p:nvSpPr>
+          <p:cNvPr id="2" name="Slide Image Placeholder 1"/>
+          <p:cNvSpPr>
+            <a:spLocks noGrp="1"/>
+          </p:cNvSpPr>
+          <p:nvPr>
+            <p:ph type="sldImg" idx="2"/>
+          </p:nvPr>
+        </p:nvSpPr>
+        <p:spPr/>
+      </p:sp>
+      <p:sp>
+        <p:nvSpPr>
+          <p:cNvPr id="3" name="Notes Placeholder 2"/>
+          <p:cNvSpPr>
+            <a:spLocks noGrp="1"/>
+          </p:cNvSpPr>
+          <p:nvPr>
+            <p:ph type="body" idx="3" sz="quarter"/>
+          </p:nvPr>
+        </p:nvSpPr>
+        <p:spPr/>
+        <p:txBody>
+          <a:bodyPr/>
+          <a:lstStyle/>
+          <a:p>
+            <a:r>
+              <a:t>Tell students, in these words: "Open the lab and the Accounting Baseline Design. Build the IAM</a:t>
+            </a:r>
+          </a:p>
+          <a:p>
+            <a:r>
+              <a:t>foundation for the MTS engagement — exactly the groups and role in the design. Work in the lab</a:t>
+            </a:r>
+          </a:p>
+          <a:p>
+            <a:r>
+              <a:t>account and capture evidence as you go."</a:t>
+            </a:r>
+          </a:p>
+          <a:p/>
+          <a:p>
+            <a:r>
+              <a:t>The task, step by step (put on the board / read out):</a:t>
+            </a:r>
+          </a:p>
+          <a:p>
+            <a:r>
+              <a:t>1. Create the four groups from the design: YAT-ICT-Admins, MTS-Consultants, Application-Service</a:t>
+            </a:r>
+          </a:p>
+          <a:p>
+            <a:r>
+              <a:t>   (this one is the EC2 ROLE, not a human group), Finance-Auditors.</a:t>
+            </a:r>
+          </a:p>
+          <a:p>
+            <a:r>
+              <a:t>2. Attach a least-privilege policy to each — only what that group needs.</a:t>
+            </a:r>
+          </a:p>
+          <a:p>
+            <a:r>
+              <a:t>3. Create at least one user in each HUMAN group and enable MFA on it.</a:t>
+            </a:r>
+          </a:p>
+          <a:p>
+            <a:r>
+              <a:t>4. Create the Application-Service role for the EC2 instance (RDS + S3 + CloudWatch access).</a:t>
+            </a:r>
+          </a:p>
+          <a:p>
+            <a:r>
+              <a:t>5. Capture the IAM evidence: the groups list, a user with MFA on, and the role.</a:t>
+            </a:r>
+          </a:p>
+          <a:p/>
+          <a:p>
+            <a:r>
+              <a:t>MUST PRODUCE (the AT2 evidence): screenshots of the groups list, one user with MFA enabled, and</a:t>
+            </a:r>
+          </a:p>
+          <a:p>
+            <a:r>
+              <a:t>the role with its policy.</a:t>
+            </a:r>
+          </a:p>
+          <a:p>
+            <a:r>
+              <a:t>TIMING: ~30 min. Circulate — the two common sticking points are (a) forgetting MFA and (b) trying</a:t>
+            </a:r>
+          </a:p>
+          <a:p>
+            <a:r>
+              <a:t>to attach a policy straight to a user.</a:t>
+            </a:r>
+          </a:p>
+          <a:p>
+            <a:r>
+              <a:t>SHARE-BACK: ask one student to show their groups list; confirm least-privilege (no</a:t>
+            </a:r>
+          </a:p>
+          <a:p>
+            <a:r>
+              <a:t>AdministratorAccess shortcuts).</a:t>
+            </a:r>
+          </a:p>
+          <a:p>
+            <a:r>
+              <a:t>Remind them: this practice uses the Accounting baseline; the assessed task uses a different system</a:t>
+            </a:r>
+          </a:p>
+          <a:p>
+            <a:r>
+              <a:t>— comparable, not identical.</a:t>
+            </a:r>
+          </a:p>
+        </p:txBody>
+      </p:sp>
+      <p:sp>
+        <p:nvSpPr>
+          <p:cNvPr id="4" name="Slide Number Placeholder 3"/>
+          <p:cNvSpPr>
+            <a:spLocks noGrp="1"/>
+          </p:cNvSpPr>
+          <p:nvPr>
+            <p:ph type="sldNum" idx="5" sz="quarter"/>
+          </p:nvPr>
+        </p:nvSpPr>
+        <p:spPr/>
+      </p:sp>
+    </p:spTree>
+  </p:cSld>
+  <p:clrMapOvr>
+    <a:masterClrMapping/>
+  </p:clrMapOvr>
+</p:notes>
 </file>
 
 <file path=ppt/slideLayouts/slideLayout1.xml><?xml version="1.0" encoding="utf-8"?>
@@ -13371,4 +14188,324 @@
   </a:objectDefaults>
   <a:extraClrSchemeLst/>
 </a:theme>
+</file>
+
+<file path=ppt/theme/theme2.xml><?xml version="1.0" encoding="utf-8"?>
+<a:theme xmlns:a="http://schemas.openxmlformats.org/drawingml/2006/main" name="Office Theme">
+  <a:themeElements>
+    <a:clrScheme name="Office">
+      <a:dk1>
+        <a:sysClr val="windowText" lastClr="000000"/>
+      </a:dk1>
+      <a:lt1>
+        <a:sysClr val="window" lastClr="FFFFFF"/>
+      </a:lt1>
+      <a:dk2>
+        <a:srgbClr val="1F497D"/>
+      </a:dk2>
+      <a:lt2>
+        <a:srgbClr val="EEECE1"/>
+      </a:lt2>
+      <a:accent1>
+        <a:srgbClr val="4F81BD"/>
+      </a:accent1>
+      <a:accent2>
+        <a:srgbClr val="C0504D"/>
+      </a:accent2>
+      <a:accent3>
+        <a:srgbClr val="9BBB59"/>
+      </a:accent3>
+      <a:accent4>
+        <a:srgbClr val="8064A2"/>
+      </a:accent4>
+      <a:accent5>
+        <a:srgbClr val="4BACC6"/>
+      </a:accent5>
+      <a:accent6>
+        <a:srgbClr val="F79646"/>
+      </a:accent6>
+      <a:hlink>
+        <a:srgbClr val="0000FF"/>
+      </a:hlink>
+      <a:folHlink>
+        <a:srgbClr val="800080"/>
+      </a:folHlink>
+    </a:clrScheme>
+    <a:fontScheme name="Office">
+      <a:majorFont>
+        <a:latin typeface="Calibri"/>
+        <a:ea typeface=""/>
+        <a:cs typeface=""/>
+        <a:font script="Jpan" typeface="ＭＳ Ｐゴシック"/>
+        <a:font script="Hang" typeface="맑은 고딕"/>
+        <a:font script="Hans" typeface="宋体"/>
+        <a:font script="Hant" typeface="新細明體"/>
+        <a:font script="Arab" typeface="Times New Roman"/>
+        <a:font script="Hebr" typeface="Times New Roman"/>
+        <a:font script="Thai" typeface="Angsana New"/>
+        <a:font script="Ethi" typeface="Nyala"/>
+        <a:font script="Beng" typeface="Vrinda"/>
+        <a:font script="Gujr" typeface="Shruti"/>
+        <a:font script="Khmr" typeface="MoolBoran"/>
+        <a:font script="Knda" typeface="Tunga"/>
+        <a:font script="Guru" typeface="Raavi"/>
+        <a:font script="Cans" typeface="Euphemia"/>
+        <a:font script="Cher" typeface="Plantagenet Cherokee"/>
+        <a:font script="Yiii" typeface="Microsoft Yi Baiti"/>
+        <a:font script="Tibt" typeface="Microsoft Himalaya"/>
+        <a:font script="Thaa" typeface="MV Boli"/>
+        <a:font script="Deva" typeface="Mangal"/>
+        <a:font script="Telu" typeface="Gautami"/>
+        <a:font script="Taml" typeface="Latha"/>
+        <a:font script="Syrc" typeface="Estrangelo Edessa"/>
+        <a:font script="Orya" typeface="Kalinga"/>
+        <a:font script="Mlym" typeface="Kartika"/>
+        <a:font script="Laoo" typeface="DokChampa"/>
+        <a:font script="Sinh" typeface="Iskoola Pota"/>
+        <a:font script="Mong" typeface="Mongolian Baiti"/>
+        <a:font script="Viet" typeface="Times New Roman"/>
+        <a:font script="Uigh" typeface="Microsoft Uighur"/>
+        <a:font script="Geor" typeface="Sylfaen"/>
+      </a:majorFont>
+      <a:minorFont>
+        <a:latin typeface="Calibri"/>
+        <a:ea typeface=""/>
+        <a:cs typeface=""/>
+        <a:font script="Jpan" typeface="ＭＳ Ｐゴシック"/>
+        <a:font script="Hang" typeface="맑은 고딕"/>
+        <a:font script="Hans" typeface="宋体"/>
+        <a:font script="Hant" typeface="新細明體"/>
+        <a:font script="Arab" typeface="Arial"/>
+        <a:font script="Hebr" typeface="Arial"/>
+        <a:font script="Thai" typeface="Cordia New"/>
+        <a:font script="Ethi" typeface="Nyala"/>
+        <a:font script="Beng" typeface="Vrinda"/>
+        <a:font script="Gujr" typeface="Shruti"/>
+        <a:font script="Khmr" typeface="DaunPenh"/>
+        <a:font script="Knda" typeface="Tunga"/>
+        <a:font script="Guru" typeface="Raavi"/>
+        <a:font script="Cans" typeface="Euphemia"/>
+        <a:font script="Cher" typeface="Plantagenet Cherokee"/>
+        <a:font script="Yiii" typeface="Microsoft Yi Baiti"/>
+        <a:font script="Tibt" typeface="Microsoft Himalaya"/>
+        <a:font script="Thaa" typeface="MV Boli"/>
+        <a:font script="Deva" typeface="Mangal"/>
+        <a:font script="Telu" typeface="Gautami"/>
+        <a:font script="Taml" typeface="Latha"/>
+        <a:font script="Syrc" typeface="Estrangelo Edessa"/>
+        <a:font script="Orya" typeface="Kalinga"/>
+        <a:font script="Mlym" typeface="Kartika"/>
+        <a:font script="Laoo" typeface="DokChampa"/>
+        <a:font script="Sinh" typeface="Iskoola Pota"/>
+        <a:font script="Mong" typeface="Mongolian Baiti"/>
+        <a:font script="Viet" typeface="Arial"/>
+        <a:font script="Uigh" typeface="Microsoft Uighur"/>
+        <a:font script="Geor" typeface="Sylfaen"/>
+      </a:minorFont>
+    </a:fontScheme>
+    <a:fmtScheme name="Office">
+      <a:fillStyleLst>
+        <a:solidFill>
+          <a:schemeClr val="phClr"/>
+        </a:solidFill>
+        <a:gradFill rotWithShape="1">
+          <a:gsLst>
+            <a:gs pos="0">
+              <a:schemeClr val="phClr">
+                <a:tint val="50000"/>
+                <a:satMod val="300000"/>
+              </a:schemeClr>
+            </a:gs>
+            <a:gs pos="35000">
+              <a:schemeClr val="phClr">
+                <a:tint val="37000"/>
+                <a:satMod val="300000"/>
+              </a:schemeClr>
+            </a:gs>
+            <a:gs pos="100000">
+              <a:schemeClr val="phClr">
+                <a:tint val="15000"/>
+                <a:satMod val="350000"/>
+              </a:schemeClr>
+            </a:gs>
+          </a:gsLst>
+          <a:lin ang="16200000" scaled="1"/>
+        </a:gradFill>
+        <a:gradFill rotWithShape="1">
+          <a:gsLst>
+            <a:gs pos="0">
+              <a:schemeClr val="phClr">
+                <a:tint val="100000"/>
+                <a:shade val="100000"/>
+                <a:satMod val="130000"/>
+              </a:schemeClr>
+            </a:gs>
+            <a:gs pos="100000">
+              <a:schemeClr val="phClr">
+                <a:tint val="50000"/>
+                <a:shade val="100000"/>
+                <a:satMod val="350000"/>
+              </a:schemeClr>
+            </a:gs>
+          </a:gsLst>
+          <a:lin ang="16200000" scaled="0"/>
+        </a:gradFill>
+      </a:fillStyleLst>
+      <a:lnStyleLst>
+        <a:ln w="9525" cap="flat" cmpd="sng" algn="ctr">
+          <a:solidFill>
+            <a:schemeClr val="phClr">
+              <a:shade val="95000"/>
+              <a:satMod val="105000"/>
+            </a:schemeClr>
+          </a:solidFill>
+          <a:prstDash val="solid"/>
+        </a:ln>
+        <a:ln w="25400" cap="flat" cmpd="sng" algn="ctr">
+          <a:solidFill>
+            <a:schemeClr val="phClr"/>
+          </a:solidFill>
+          <a:prstDash val="solid"/>
+        </a:ln>
+        <a:ln w="38100" cap="flat" cmpd="sng" algn="ctr">
+          <a:solidFill>
+            <a:schemeClr val="phClr"/>
+          </a:solidFill>
+          <a:prstDash val="solid"/>
+        </a:ln>
+      </a:lnStyleLst>
+      <a:effectStyleLst>
+        <a:effectStyle>
+          <a:effectLst>
+            <a:outerShdw blurRad="40000" dist="20000" dir="5400000" rotWithShape="0">
+              <a:srgbClr val="000000">
+                <a:alpha val="38000"/>
+              </a:srgbClr>
+            </a:outerShdw>
+          </a:effectLst>
+        </a:effectStyle>
+        <a:effectStyle>
+          <a:effectLst>
+            <a:outerShdw blurRad="40000" dist="23000" dir="5400000" rotWithShape="0">
+              <a:srgbClr val="000000">
+                <a:alpha val="35000"/>
+              </a:srgbClr>
+            </a:outerShdw>
+          </a:effectLst>
+        </a:effectStyle>
+        <a:effectStyle>
+          <a:effectLst>
+            <a:outerShdw blurRad="40000" dist="23000" dir="5400000" rotWithShape="0">
+              <a:srgbClr val="000000">
+                <a:alpha val="35000"/>
+              </a:srgbClr>
+            </a:outerShdw>
+          </a:effectLst>
+          <a:scene3d>
+            <a:camera prst="orthographicFront">
+              <a:rot lat="0" lon="0" rev="0"/>
+            </a:camera>
+            <a:lightRig rig="threePt" dir="t">
+              <a:rot lat="0" lon="0" rev="1200000"/>
+            </a:lightRig>
+          </a:scene3d>
+          <a:sp3d>
+            <a:bevelT w="63500" h="25400"/>
+          </a:sp3d>
+        </a:effectStyle>
+      </a:effectStyleLst>
+      <a:bgFillStyleLst>
+        <a:solidFill>
+          <a:schemeClr val="phClr"/>
+        </a:solidFill>
+        <a:gradFill rotWithShape="1">
+          <a:gsLst>
+            <a:gs pos="0">
+              <a:schemeClr val="phClr">
+                <a:tint val="40000"/>
+                <a:satMod val="350000"/>
+              </a:schemeClr>
+            </a:gs>
+            <a:gs pos="40000">
+              <a:schemeClr val="phClr">
+                <a:tint val="45000"/>
+                <a:shade val="99000"/>
+                <a:satMod val="350000"/>
+              </a:schemeClr>
+            </a:gs>
+            <a:gs pos="100000">
+              <a:schemeClr val="phClr">
+                <a:shade val="20000"/>
+                <a:satMod val="255000"/>
+              </a:schemeClr>
+            </a:gs>
+          </a:gsLst>
+          <a:path path="circle">
+            <a:fillToRect l="50000" t="-80000" r="50000" b="180000"/>
+          </a:path>
+        </a:gradFill>
+        <a:gradFill rotWithShape="1">
+          <a:gsLst>
+            <a:gs pos="0">
+              <a:schemeClr val="phClr">
+                <a:tint val="80000"/>
+                <a:satMod val="300000"/>
+              </a:schemeClr>
+            </a:gs>
+            <a:gs pos="100000">
+              <a:schemeClr val="phClr">
+                <a:shade val="30000"/>
+                <a:satMod val="200000"/>
+              </a:schemeClr>
+            </a:gs>
+          </a:gsLst>
+          <a:path path="circle">
+            <a:fillToRect l="50000" t="50000" r="50000" b="50000"/>
+          </a:path>
+        </a:gradFill>
+      </a:bgFillStyleLst>
+    </a:fmtScheme>
+  </a:themeElements>
+  <a:objectDefaults>
+    <a:spDef>
+      <a:spPr/>
+      <a:bodyPr/>
+      <a:lstStyle/>
+      <a:style>
+        <a:lnRef idx="1">
+          <a:schemeClr val="accent1"/>
+        </a:lnRef>
+        <a:fillRef idx="3">
+          <a:schemeClr val="accent1"/>
+        </a:fillRef>
+        <a:effectRef idx="2">
+          <a:schemeClr val="accent1"/>
+        </a:effectRef>
+        <a:fontRef idx="minor">
+          <a:schemeClr val="lt1"/>
+        </a:fontRef>
+      </a:style>
+    </a:spDef>
+    <a:lnDef>
+      <a:spPr/>
+      <a:bodyPr/>
+      <a:lstStyle/>
+      <a:style>
+        <a:lnRef idx="2">
+          <a:schemeClr val="accent1"/>
+        </a:lnRef>
+        <a:fillRef idx="0">
+          <a:schemeClr val="accent1"/>
+        </a:fillRef>
+        <a:effectRef idx="1">
+          <a:schemeClr val="accent1"/>
+        </a:effectRef>
+        <a:fontRef idx="minor">
+          <a:schemeClr val="tx1"/>
+        </a:fontRef>
+      </a:style>
+    </a:lnDef>
+  </a:objectDefaults>
+  <a:extraClrSchemeLst/>
+</a:theme>
 </file>
--- a/S1-CL1-Cloud-Design-Build/delivery/topic_06/Topic_06_Slides.pptx
+++ b/S1-CL1-Cloud-Design-Build/delivery/topic_06/Topic_06_Slides.pptx
@@ -7,16 +7,16 @@
   <p:sldIdLst>
     <p:sldId id="256" r:id="rId7"/>
     <p:sldId id="257" r:id="rId8"/>
-    <p:sldId id="258" r:id="rId9"/>
-    <p:sldId id="259" r:id="rId10"/>
-    <p:sldId id="260" r:id="rId11"/>
-    <p:sldId id="261" r:id="rId12"/>
-    <p:sldId id="262" r:id="rId13"/>
-    <p:sldId id="263" r:id="rId14"/>
-    <p:sldId id="264" r:id="rId15"/>
-    <p:sldId id="265" r:id="rId16"/>
-    <p:sldId id="266" r:id="rId17"/>
-    <p:sldId id="267" r:id="rId18"/>
+    <p:sldId id="258" r:id="rId10"/>
+    <p:sldId id="259" r:id="rId11"/>
+    <p:sldId id="260" r:id="rId12"/>
+    <p:sldId id="261" r:id="rId13"/>
+    <p:sldId id="262" r:id="rId14"/>
+    <p:sldId id="263" r:id="rId15"/>
+    <p:sldId id="264" r:id="rId16"/>
+    <p:sldId id="265" r:id="rId17"/>
+    <p:sldId id="266" r:id="rId18"/>
+    <p:sldId id="267" r:id="rId19"/>
     <p:sldId id="268" r:id="rId20"/>
     <p:sldId id="269" r:id="rId21"/>
     <p:sldId id="270" r:id="rId22"/>
@@ -525,89 +525,1086 @@
           <a:lstStyle/>
           <a:p>
             <a:r>
-              <a:t>Teach IAM as the account's "who can do what." Walk the four in order — user → group → role →</a:t>
-            </a:r>
-          </a:p>
-          <a:p>
-            <a:r>
-              <a:t>policy — stressing the split: the first two are about PEOPLE, the last two about PERMISSIONS.</a:t>
+              <a:t>Frame this as the pivot of the whole cluster — AT1 was advice on paper; AT2 is a build in AWS.</a:t>
+            </a:r>
+          </a:p>
+          <a:p>
+            <a:r>
+              <a:t>Set the mode, don't teach IAM yet.</a:t>
+            </a:r>
+          </a:p>
+          <a:p>
+            <a:r>
+              <a:t>• The shift (bolded line): they now work to a design they did NOT write — read it, build it</a:t>
+            </a:r>
+          </a:p>
+          <a:p>
+            <a:r>
+              <a:t>  faithfully, resist the urge to redesign it. This is a new professional posture.</a:t>
+            </a:r>
+          </a:p>
+          <a:p>
+            <a:r>
+              <a:t>• The second new discipline: capture evidence AS they build. The Deployment Report is made from</a:t>
+            </a:r>
+          </a:p>
+          <a:p>
+            <a:r>
+              <a:t>  what they screenshot live — you cannot reconstruct it after the fact.</a:t>
+            </a:r>
+          </a:p>
+          <a:p>
+            <a:r>
+              <a:t>• Scope this Topic: the FOUNDATION tier only — account &amp; Region, identity &amp; access, shared</a:t>
+            </a:r>
+          </a:p>
+          <a:p>
+            <a:r>
+              <a:t>  responsibility. Network, compute and the report come in Topics 7–10.</a:t>
+            </a:r>
+          </a:p>
+          <a:p>
+            <a:r>
+              <a:t>• Set the rhythm for every AWS task today: watch the demo, THEN do it yourself.</a:t>
+            </a:r>
+          </a:p>
+          <a:p>
+            <a:r>
+              <a:t>Misconception to pre-empt: "we're finally free to build whatever we think is best." No — the whole</a:t>
+            </a:r>
+          </a:p>
+          <a:p>
+            <a:r>
+              <a:t>skill being assessed is faithful implementation of a supplied design, not invention.</a:t>
+            </a:r>
+          </a:p>
+          <a:p>
+            <a:r>
+              <a:t>Question to pose: "What changes about your job when the design is already written and handed to you?"</a:t>
+            </a:r>
+          </a:p>
+          <a:p>
+            <a:r>
+              <a:t>(you become the builder/implementer, and your judgement shows in the open decisions + the evidence).</a:t>
+            </a:r>
+          </a:p>
+          <a:p>
+            <a:r>
+              <a:t>UoC/AT2 tie: opens the AT2 arc — ICTCLD401 (primary) + ICTCLD502 (partial); everything today feeds</a:t>
+            </a:r>
+          </a:p>
+          <a:p>
+            <a:r>
+              <a:t>the foundation-tier build narrative (criterion A2) + the evidence appendices (A9/A10).</a:t>
+            </a:r>
+          </a:p>
+        </p:txBody>
+      </p:sp>
+      <p:sp>
+        <p:nvSpPr>
+          <p:cNvPr id="4" name="Slide Number Placeholder 3"/>
+          <p:cNvSpPr>
+            <a:spLocks noGrp="1"/>
+          </p:cNvSpPr>
+          <p:nvPr>
+            <p:ph type="sldNum" idx="5" sz="quarter"/>
+          </p:nvPr>
+        </p:nvSpPr>
+        <p:spPr/>
+      </p:sp>
+    </p:spTree>
+  </p:cSld>
+  <p:clrMapOvr>
+    <a:masterClrMapping/>
+  </p:clrMapOvr>
+</p:notes>
+</file>
+
+<file path=ppt/notesSlides/notesSlide10.xml><?xml version="1.0" encoding="utf-8"?>
+<p:notes xmlns:a="http://schemas.openxmlformats.org/drawingml/2006/main" xmlns:p="http://schemas.openxmlformats.org/presentationml/2006/main" xmlns:r="http://schemas.openxmlformats.org/officeDocument/2006/relationships">
+  <p:cSld>
+    <p:spTree>
+      <p:nvGrpSpPr>
+        <p:cNvPr id="1" name=""/>
+        <p:cNvGrpSpPr/>
+        <p:nvPr/>
+      </p:nvGrpSpPr>
+      <p:grpSpPr>
+        <a:xfrm>
+          <a:off x="0" y="0"/>
+          <a:ext cx="0" cy="0"/>
+          <a:chOff x="0" y="0"/>
+          <a:chExt cx="0" cy="0"/>
+        </a:xfrm>
+      </p:grpSpPr>
+      <p:sp>
+        <p:nvSpPr>
+          <p:cNvPr id="2" name="Slide Image Placeholder 1"/>
+          <p:cNvSpPr>
+            <a:spLocks noGrp="1"/>
+          </p:cNvSpPr>
+          <p:nvPr>
+            <p:ph type="sldImg" idx="2"/>
+          </p:nvPr>
+        </p:nvSpPr>
+        <p:spPr/>
+      </p:sp>
+      <p:sp>
+        <p:nvSpPr>
+          <p:cNvPr id="3" name="Notes Placeholder 2"/>
+          <p:cNvSpPr>
+            <a:spLocks noGrp="1"/>
+          </p:cNvSpPr>
+          <p:nvPr>
+            <p:ph type="body" idx="3" sz="quarter"/>
+          </p:nvPr>
+        </p:nvSpPr>
+        <p:spPr/>
+        <p:txBody>
+          <a:bodyPr/>
+          <a:lstStyle/>
+          <a:p>
+            <a:r>
+              <a:t>The design made concrete — teach the FOUR groups + role they must build, and why each exists. This is the spec for the activity.</a:t>
+            </a:r>
+          </a:p>
+          <a:p>
+            <a:r>
+              <a:t>• Walk each with its purpose (don't just read names):</a:t>
+            </a:r>
+          </a:p>
+          <a:p>
+            <a:r>
+              <a:t>  - YAT-ICT-Admins — read-only infra + console AFTER handover (YAT runs it once MTS leaves).</a:t>
+            </a:r>
+          </a:p>
+          <a:p>
+            <a:r>
+              <a:t>  - MTS-Consultants — build admin (the consultants doing the work now).</a:t>
+            </a:r>
+          </a:p>
+          <a:p>
+            <a:r>
+              <a:t>  - Application-Service — the EC2 INSTANCE ROLE (not a human group) — RDS + S3 + CloudWatch access.</a:t>
+            </a:r>
+          </a:p>
+          <a:p>
+            <a:r>
+              <a:t>  - Finance-Auditors — read-only on logs / metrics / configs.</a:t>
+            </a:r>
+          </a:p>
+          <a:p>
+            <a:r>
+              <a:t>• Accent-bold: enforce MFA on the human groups — an Essential Eight requirement they're assessed on.</a:t>
+            </a:r>
+          </a:p>
+          <a:p>
+            <a:r>
+              <a:t>• Flag the trap: Application-Service is a ROLE, not a user group — it's the one students try to add a</a:t>
+            </a:r>
+          </a:p>
+          <a:p>
+            <a:r>
+              <a:t>  person to. It exists so the server can reach other services without stored credentials.</a:t>
+            </a:r>
+          </a:p>
+          <a:p>
+            <a:r>
+              <a:t>Misconception to pre-empt: that all four are the same KIND of thing. Three are human groups; one is a</a:t>
+            </a:r>
+          </a:p>
+          <a:p>
+            <a:r>
+              <a:t>service role — different creation path, different purpose.</a:t>
+            </a:r>
+          </a:p>
+          <a:p>
+            <a:r>
+              <a:t>Question to pose: "Why does YAT-ICT-Admins get read-only, when they'll own the system after handover?"</a:t>
+            </a:r>
+          </a:p>
+          <a:p>
+            <a:r>
+              <a:t>(least privilege during the build; they get operational access at handover, not build access now).</a:t>
+            </a:r>
+          </a:p>
+          <a:p>
+            <a:r>
+              <a:t>UoC/AT2 tie: ICTCLD401 PC 1.6 (configure users/groups/permissions) + PC 2.1 (create users/groups) +</a:t>
+            </a:r>
+          </a:p>
+          <a:p>
+            <a:r>
+              <a:t>PC 1.7 (assign security responsibilities); this exact model is what the A2 IAM build is scored on.</a:t>
+            </a:r>
+          </a:p>
+        </p:txBody>
+      </p:sp>
+      <p:sp>
+        <p:nvSpPr>
+          <p:cNvPr id="4" name="Slide Number Placeholder 3"/>
+          <p:cNvSpPr>
+            <a:spLocks noGrp="1"/>
+          </p:cNvSpPr>
+          <p:nvPr>
+            <p:ph type="sldNum" idx="5" sz="quarter"/>
+          </p:nvPr>
+        </p:nvSpPr>
+        <p:spPr/>
+      </p:sp>
+    </p:spTree>
+  </p:cSld>
+  <p:clrMapOvr>
+    <a:masterClrMapping/>
+  </p:clrMapOvr>
+</p:notes>
+</file>
+
+<file path=ppt/notesSlides/notesSlide11.xml><?xml version="1.0" encoding="utf-8"?>
+<p:notes xmlns:a="http://schemas.openxmlformats.org/drawingml/2006/main" xmlns:p="http://schemas.openxmlformats.org/presentationml/2006/main" xmlns:r="http://schemas.openxmlformats.org/officeDocument/2006/relationships">
+  <p:cSld>
+    <p:spTree>
+      <p:nvGrpSpPr>
+        <p:cNvPr id="1" name=""/>
+        <p:cNvGrpSpPr/>
+        <p:nvPr/>
+      </p:nvGrpSpPr>
+      <p:grpSpPr>
+        <a:xfrm>
+          <a:off x="0" y="0"/>
+          <a:ext cx="0" cy="0"/>
+          <a:chOff x="0" y="0"/>
+          <a:chExt cx="0" cy="0"/>
+        </a:xfrm>
+      </p:grpSpPr>
+      <p:sp>
+        <p:nvSpPr>
+          <p:cNvPr id="2" name="Slide Image Placeholder 1"/>
+          <p:cNvSpPr>
+            <a:spLocks noGrp="1"/>
+          </p:cNvSpPr>
+          <p:nvPr>
+            <p:ph type="sldImg" idx="2"/>
+          </p:nvPr>
+        </p:nvSpPr>
+        <p:spPr/>
+      </p:sp>
+      <p:sp>
+        <p:nvSpPr>
+          <p:cNvPr id="3" name="Notes Placeholder 2"/>
+          <p:cNvSpPr>
+            <a:spLocks noGrp="1"/>
+          </p:cNvSpPr>
+          <p:nvPr>
+            <p:ph type="body" idx="3" sz="quarter"/>
+          </p:nvPr>
+        </p:nvSpPr>
+        <p:spPr/>
+        <p:txBody>
+          <a:bodyPr/>
+          <a:lstStyle/>
+          <a:p>
+            <a:r>
+              <a:t>DEMONSTRATION (recorded demo available). Screen it, then relate each step to OUR build. Then they</a:t>
+            </a:r>
+          </a:p>
+          <a:p>
+            <a:r>
+              <a:t>replicate on the next slide.</a:t>
             </a:r>
           </a:p>
           <a:p/>
           <a:p>
             <a:r>
-              <a:t>• IAM user — one identity per person or app. Emphasise: never share a login; each person their</a:t>
-            </a:r>
-          </a:p>
-          <a:p>
-            <a:r>
-              <a:t>  own user (that's what gives you accountability and an audit trail).</a:t>
-            </a:r>
-          </a:p>
-          <a:p>
-            <a:r>
-              <a:t>• IAM group — how you manage permissions at scale: set permissions ONCE on the group, not per</a:t>
-            </a:r>
-          </a:p>
-          <a:p>
-            <a:r>
-              <a:t>  person. Analogy: a team like "Finance" — add someone to the team and they inherit the access.</a:t>
-            </a:r>
-          </a:p>
-          <a:p>
-            <a:r>
-              <a:t>• IAM role — the one students find hardest. Unlike a user it has NO permanent credentials; it is</a:t>
-            </a:r>
-          </a:p>
-          <a:p>
-            <a:r>
-              <a:t>  ASSUMED temporarily. Key example for this build: an EC2 instance assumes a role to reach RDS/S3</a:t>
-            </a:r>
-          </a:p>
-          <a:p>
-            <a:r>
-              <a:t>  — no passwords or keys stored on the server.</a:t>
-            </a:r>
-          </a:p>
-          <a:p>
-            <a:r>
-              <a:t>• IAM policy — the JSON that says what's allowed. Everything is DENIED by default; a policy grants.</a:t>
-            </a:r>
-          </a:p>
-          <a:p>
-            <a:r>
-              <a:t>  You attach policies to groups/roles, never the JSON straight onto a person.</a:t>
+              <a:t>WHAT TO DEMONSTRATE (follow the recorded demo, then tie each step to the Accounting build):</a:t>
+            </a:r>
+          </a:p>
+          <a:p>
+            <a:r>
+              <a:t>1. Create a group and attach a least-privilege policy.</a:t>
+            </a:r>
+          </a:p>
+          <a:p>
+            <a:r>
+              <a:t>2. Create a user, add them to the group, enable MFA.</a:t>
+            </a:r>
+          </a:p>
+          <a:p>
+            <a:r>
+              <a:t>3. Create the EC2 instance role (Application-Service) and attach its policy.</a:t>
+            </a:r>
+          </a:p>
+          <a:p>
+            <a:r>
+              <a:t>4. Capture the IAM evidence screenshot (groups list + a user showing MFA enabled).</a:t>
             </a:r>
           </a:p>
           <a:p/>
           <a:p>
             <a:r>
-              <a:t>Misconception to pre-empt: students conflate authentication (who you are = user) with authorization</a:t>
-            </a:r>
-          </a:p>
-          <a:p>
-            <a:r>
-              <a:t>(what you can do = policy). Say both words out loud.</a:t>
-            </a:r>
-          </a:p>
-          <a:p>
-            <a:r>
-              <a:t>Question to pose: "The web server needs to read from S3 — do we give it a username and password?"</a:t>
-            </a:r>
-          </a:p>
-          <a:p>
-            <a:r>
-              <a:t>(No — a role. This sets up the next two slides.)</a:t>
-            </a:r>
-          </a:p>
-          <a:p>
-            <a:r>
-              <a:t>Why it matters: this identity foundation is what the AT2 build is assessed on (securing the</a:t>
-            </a:r>
-          </a:p>
-          <a:p>
-            <a:r>
-              <a:t>deployment); the specific groups to build come two slides on.</a:t>
+              <a:t>WHAT TO EMPHASISE:</a:t>
+            </a:r>
+          </a:p>
+          <a:p>
+            <a:r>
+              <a:t>• Permissions go on the GROUP, then the user joins it — not policy-on-user. Show the difference explicitly.</a:t>
+            </a:r>
+          </a:p>
+          <a:p>
+            <a:r>
+              <a:t>• MFA — show the "assign MFA device" step; students routinely skip it and it's an Essential Eight</a:t>
+            </a:r>
+          </a:p>
+          <a:p>
+            <a:r>
+              <a:t>  requirement they're assessed on.</a:t>
+            </a:r>
+          </a:p>
+          <a:p>
+            <a:r>
+              <a:t>• The role has NO password — point out there are no long-lived credentials; the instance assumes it.</a:t>
+            </a:r>
+          </a:p>
+          <a:p>
+            <a:r>
+              <a:t>  This is the payoff of the "IAM components" teaching slide.</a:t>
+            </a:r>
+          </a:p>
+          <a:p>
+            <a:r>
+              <a:t>• Narrate the evidence capture — students must screenshot as they go for AT2; model it here.</a:t>
+            </a:r>
+          </a:p>
+          <a:p/>
+          <a:p>
+            <a:r>
+              <a:t>PREP: clean lab account open, the Accounting Baseline Design handy (for the group names), recorded demo</a:t>
+            </a:r>
+          </a:p>
+          <a:p>
+            <a:r>
+              <a:t>queued. ~8–10 min to screen + narrate before the activity.</a:t>
+            </a:r>
+          </a:p>
+          <a:p/>
+          <a:p>
+            <a:r>
+              <a:t>WHERE TO FIND THE RECORDED DEMO: "Recorded demo: IAM" — ACF M04 · S31 (AWS Academy Cloud Foundations,</a:t>
+            </a:r>
+          </a:p>
+          <a:p>
+            <a:r>
+              <a:t>Module 04 "AWS Cloud Security"), inside the instructor deck (original-materials/AWS-Instructor</a:t>
+            </a:r>
+          </a:p>
+          <a:p>
+            <a:r>
+              <a:t>Presentations/…). Instructor-facing — screen it in class, don't distribute to students. Preview and cue</a:t>
+            </a:r>
+          </a:p>
+          <a:p>
+            <a:r>
+              <a:t>it to this slide before class.</a:t>
+            </a:r>
+          </a:p>
+        </p:txBody>
+      </p:sp>
+      <p:sp>
+        <p:nvSpPr>
+          <p:cNvPr id="4" name="Slide Number Placeholder 3"/>
+          <p:cNvSpPr>
+            <a:spLocks noGrp="1"/>
+          </p:cNvSpPr>
+          <p:nvPr>
+            <p:ph type="sldNum" idx="5" sz="quarter"/>
+          </p:nvPr>
+        </p:nvSpPr>
+        <p:spPr/>
+      </p:sp>
+    </p:spTree>
+  </p:cSld>
+  <p:clrMapOvr>
+    <a:masterClrMapping/>
+  </p:clrMapOvr>
+</p:notes>
+</file>
+
+<file path=ppt/notesSlides/notesSlide12.xml><?xml version="1.0" encoding="utf-8"?>
+<p:notes xmlns:a="http://schemas.openxmlformats.org/drawingml/2006/main" xmlns:p="http://schemas.openxmlformats.org/presentationml/2006/main" xmlns:r="http://schemas.openxmlformats.org/officeDocument/2006/relationships">
+  <p:cSld>
+    <p:spTree>
+      <p:nvGrpSpPr>
+        <p:cNvPr id="1" name=""/>
+        <p:cNvGrpSpPr/>
+        <p:nvPr/>
+      </p:nvGrpSpPr>
+      <p:grpSpPr>
+        <a:xfrm>
+          <a:off x="0" y="0"/>
+          <a:ext cx="0" cy="0"/>
+          <a:chOff x="0" y="0"/>
+          <a:chExt cx="0" cy="0"/>
+        </a:xfrm>
+      </p:grpSpPr>
+      <p:sp>
+        <p:nvSpPr>
+          <p:cNvPr id="2" name="Slide Image Placeholder 1"/>
+          <p:cNvSpPr>
+            <a:spLocks noGrp="1"/>
+          </p:cNvSpPr>
+          <p:nvPr>
+            <p:ph type="sldImg" idx="2"/>
+          </p:nvPr>
+        </p:nvSpPr>
+        <p:spPr/>
+      </p:sp>
+      <p:sp>
+        <p:nvSpPr>
+          <p:cNvPr id="3" name="Notes Placeholder 2"/>
+          <p:cNvSpPr>
+            <a:spLocks noGrp="1"/>
+          </p:cNvSpPr>
+          <p:nvPr>
+            <p:ph type="body" idx="3" sz="quarter"/>
+          </p:nvPr>
+        </p:nvSpPr>
+        <p:spPr/>
+        <p:txBody>
+          <a:bodyPr/>
+          <a:lstStyle/>
+          <a:p>
+            <a:r>
+              <a:t>Facilitation — the C2 practice; they build the design's IAM foundation in the lab, evidencing as they go.</a:t>
+            </a:r>
+          </a:p>
+          <a:p>
+            <a:r>
+              <a:t>Tell students, in these words: "Open the lab and the Accounting Baseline Design. Build the IAM foundation</a:t>
+            </a:r>
+          </a:p>
+          <a:p>
+            <a:r>
+              <a:t>for the MTS engagement — exactly the groups and role in the design. Work in the lab account and capture</a:t>
+            </a:r>
+          </a:p>
+          <a:p>
+            <a:r>
+              <a:t>evidence as you go."</a:t>
+            </a:r>
+          </a:p>
+          <a:p>
+            <a:r>
+              <a:t>The task, step by step (put on the board / read out):</a:t>
+            </a:r>
+          </a:p>
+          <a:p>
+            <a:r>
+              <a:t>1. Create the four groups from the design: YAT-ICT-Admins, MTS-Consultants, Application-Service (this one</a:t>
+            </a:r>
+          </a:p>
+          <a:p>
+            <a:r>
+              <a:t>   is the EC2 ROLE, not a human group), Finance-Auditors.</a:t>
+            </a:r>
+          </a:p>
+          <a:p>
+            <a:r>
+              <a:t>2. Attach a least-privilege policy to each — only what that group needs.</a:t>
+            </a:r>
+          </a:p>
+          <a:p>
+            <a:r>
+              <a:t>3. Create at least one user in each HUMAN group and enable MFA on it.</a:t>
+            </a:r>
+          </a:p>
+          <a:p>
+            <a:r>
+              <a:t>4. Create the Application-Service role for the EC2 instance (RDS + S3 + CloudWatch access).</a:t>
+            </a:r>
+          </a:p>
+          <a:p>
+            <a:r>
+              <a:t>5. Capture the IAM evidence: the groups list, a user with MFA on, and the role.</a:t>
+            </a:r>
+          </a:p>
+          <a:p>
+            <a:r>
+              <a:t>MUST PRODUCE (the AT2 evidence): screenshots of the groups list, one user with MFA enabled, and the role</a:t>
+            </a:r>
+          </a:p>
+          <a:p>
+            <a:r>
+              <a:t>with its policy.</a:t>
+            </a:r>
+          </a:p>
+          <a:p>
+            <a:r>
+              <a:t>TIMING: ~30 min. Circulate — the two common sticking points are (a) forgetting MFA and (b) trying to</a:t>
+            </a:r>
+          </a:p>
+          <a:p>
+            <a:r>
+              <a:t>attach a policy straight to a user.</a:t>
+            </a:r>
+          </a:p>
+          <a:p>
+            <a:r>
+              <a:t>SHARE-BACK: ask one student to show their groups list; confirm least privilege (no AdministratorAccess</a:t>
+            </a:r>
+          </a:p>
+          <a:p>
+            <a:r>
+              <a:t>shortcuts).</a:t>
+            </a:r>
+          </a:p>
+          <a:p>
+            <a:r>
+              <a:t>No-leakage note: this practice uses the Accounting baseline; the assessed AT2 task uses a different system</a:t>
+            </a:r>
+          </a:p>
+          <a:p>
+            <a:r>
+              <a:t>— comparable, not identical.</a:t>
+            </a:r>
+          </a:p>
+        </p:txBody>
+      </p:sp>
+      <p:sp>
+        <p:nvSpPr>
+          <p:cNvPr id="4" name="Slide Number Placeholder 3"/>
+          <p:cNvSpPr>
+            <a:spLocks noGrp="1"/>
+          </p:cNvSpPr>
+          <p:nvPr>
+            <p:ph type="sldNum" idx="5" sz="quarter"/>
+          </p:nvPr>
+        </p:nvSpPr>
+        <p:spPr/>
+      </p:sp>
+    </p:spTree>
+  </p:cSld>
+  <p:clrMapOvr>
+    <a:masterClrMapping/>
+  </p:clrMapOvr>
+</p:notes>
+</file>
+
+<file path=ppt/notesSlides/notesSlide13.xml><?xml version="1.0" encoding="utf-8"?>
+<p:notes xmlns:a="http://schemas.openxmlformats.org/drawingml/2006/main" xmlns:p="http://schemas.openxmlformats.org/presentationml/2006/main" xmlns:r="http://schemas.openxmlformats.org/officeDocument/2006/relationships">
+  <p:cSld>
+    <p:spTree>
+      <p:nvGrpSpPr>
+        <p:cNvPr id="1" name=""/>
+        <p:cNvGrpSpPr/>
+        <p:nvPr/>
+      </p:nvGrpSpPr>
+      <p:grpSpPr>
+        <a:xfrm>
+          <a:off x="0" y="0"/>
+          <a:ext cx="0" cy="0"/>
+          <a:chOff x="0" y="0"/>
+          <a:chExt cx="0" cy="0"/>
+        </a:xfrm>
+      </p:grpSpPr>
+      <p:sp>
+        <p:nvSpPr>
+          <p:cNvPr id="2" name="Slide Image Placeholder 1"/>
+          <p:cNvSpPr>
+            <a:spLocks noGrp="1"/>
+          </p:cNvSpPr>
+          <p:nvPr>
+            <p:ph type="sldImg" idx="2"/>
+          </p:nvPr>
+        </p:nvSpPr>
+        <p:spPr/>
+      </p:sp>
+      <p:sp>
+        <p:nvSpPr>
+          <p:cNvPr id="3" name="Notes Placeholder 2"/>
+          <p:cNvSpPr>
+            <a:spLocks noGrp="1"/>
+          </p:cNvSpPr>
+          <p:nvPr>
+            <p:ph type="body" idx="3" sz="quarter"/>
+          </p:nvPr>
+        </p:nvSpPr>
+        <p:spPr/>
+        <p:txBody>
+          <a:bodyPr/>
+          <a:lstStyle/>
+          <a:p>
+            <a:r>
+              <a:t>AWS-sourced (ACF M04) — teach the security dividing line. Use the shared-responsibility diagram.</a:t>
+            </a:r>
+          </a:p>
+          <a:p>
+            <a:r>
+              <a:t>• The split, stated cleanly: AWS handles security OF the cloud — physical data centres, hardware, the</a:t>
+            </a:r>
+          </a:p>
+          <a:p>
+            <a:r>
+              <a:t>  network, the virtualisation infrastructure. YOU handle security IN the cloud — the EC2 OS (patching),</a:t>
+            </a:r>
+          </a:p>
+          <a:p>
+            <a:r>
+              <a:t>  your applications, security-group config, IAM, account management, and your DATA.</a:t>
+            </a:r>
+          </a:p>
+          <a:p>
+            <a:r>
+              <a:t>• Accent-bold: knowing exactly where the line falls tells you what you must CONFIGURE versus what you can</a:t>
+            </a:r>
+          </a:p>
+          <a:p>
+            <a:r>
+              <a:t>  RELY ON. That's the whole practical value of the model.</a:t>
+            </a:r>
+          </a:p>
+          <a:p>
+            <a:r>
+              <a:t>• Anchor it to the build: on our foundation, IAM and MFA sit firmly on the "you" side — which is why the</a:t>
+            </a:r>
+          </a:p>
+          <a:p>
+            <a:r>
+              <a:t>  last two slides mattered.</a:t>
+            </a:r>
+          </a:p>
+          <a:p>
+            <a:r>
+              <a:t>Misconception to pre-empt: "it's the cloud, so AWS secures it all." No — AWS secures the infrastructure;</a:t>
+            </a:r>
+          </a:p>
+          <a:p>
+            <a:r>
+              <a:t>misconfiguring a security group or skipping MFA is entirely on YOU, and that's where breaches happen.</a:t>
+            </a:r>
+          </a:p>
+          <a:p>
+            <a:r>
+              <a:t>Question to pose: "The EC2 operating system needs a security patch — whose job is that, AWS's or yours?"</a:t>
+            </a:r>
+          </a:p>
+          <a:p>
+            <a:r>
+              <a:t>(yours, on IaaS — sets up the next slide where the line shifts by service).</a:t>
+            </a:r>
+          </a:p>
+          <a:p>
+            <a:r>
+              <a:t>UoC/AT2 tie: ICTCLD401 PC 1.2 + KE 7 (user/business/vendor responsibilities under shared models) +</a:t>
+            </a:r>
+          </a:p>
+          <a:p>
+            <a:r>
+              <a:t>ICTCLD502 PC 1.3; the shared-responsibility assignment is marked under A2 (section detail A4).</a:t>
+            </a:r>
+          </a:p>
+        </p:txBody>
+      </p:sp>
+      <p:sp>
+        <p:nvSpPr>
+          <p:cNvPr id="4" name="Slide Number Placeholder 3"/>
+          <p:cNvSpPr>
+            <a:spLocks noGrp="1"/>
+          </p:cNvSpPr>
+          <p:nvPr>
+            <p:ph type="sldNum" idx="5" sz="quarter"/>
+          </p:nvPr>
+        </p:nvSpPr>
+        <p:spPr/>
+      </p:sp>
+    </p:spTree>
+  </p:cSld>
+  <p:clrMapOvr>
+    <a:masterClrMapping/>
+  </p:clrMapOvr>
+</p:notes>
+</file>
+
+<file path=ppt/notesSlides/notesSlide14.xml><?xml version="1.0" encoding="utf-8"?>
+<p:notes xmlns:a="http://schemas.openxmlformats.org/drawingml/2006/main" xmlns:p="http://schemas.openxmlformats.org/presentationml/2006/main" xmlns:r="http://schemas.openxmlformats.org/officeDocument/2006/relationships">
+  <p:cSld>
+    <p:spTree>
+      <p:nvGrpSpPr>
+        <p:cNvPr id="1" name=""/>
+        <p:cNvGrpSpPr/>
+        <p:nvPr/>
+      </p:nvGrpSpPr>
+      <p:grpSpPr>
+        <a:xfrm>
+          <a:off x="0" y="0"/>
+          <a:ext cx="0" cy="0"/>
+          <a:chOff x="0" y="0"/>
+          <a:chExt cx="0" cy="0"/>
+        </a:xfrm>
+      </p:grpSpPr>
+      <p:sp>
+        <p:nvSpPr>
+          <p:cNvPr id="2" name="Slide Image Placeholder 1"/>
+          <p:cNvSpPr>
+            <a:spLocks noGrp="1"/>
+          </p:cNvSpPr>
+          <p:nvPr>
+            <p:ph type="sldImg" idx="2"/>
+          </p:nvPr>
+        </p:nvSpPr>
+        <p:spPr/>
+      </p:sp>
+      <p:sp>
+        <p:nvSpPr>
+          <p:cNvPr id="3" name="Notes Placeholder 2"/>
+          <p:cNvSpPr>
+            <a:spLocks noGrp="1"/>
+          </p:cNvSpPr>
+          <p:nvPr>
+            <p:ph type="body" idx="3" sz="quarter"/>
+          </p:nvPr>
+        </p:nvSpPr>
+        <p:spPr/>
+        <p:txBody>
+          <a:bodyPr/>
+          <a:lstStyle/>
+          <a:p>
+            <a:r>
+              <a:t>AWS-sourced (ACF M04) — the crucial nuance: the responsibility line is not fixed; it MOVES by service type.</a:t>
+            </a:r>
+          </a:p>
+          <a:p>
+            <a:r>
+              <a:t>• IaaS (EC2): you manage MORE — the OS, patching, security groups, access controls. Maximum control,</a:t>
+            </a:r>
+          </a:p>
+          <a:p>
+            <a:r>
+              <a:t>  maximum responsibility.</a:t>
+            </a:r>
+          </a:p>
+          <a:p>
+            <a:r>
+              <a:t>• PaaS (RDS): AWS handles the OS, database patching, the firewall, DR; you manage your DATA + access. The</a:t>
+            </a:r>
+          </a:p>
+          <a:p>
+            <a:r>
+              <a:t>  line has shifted toward AWS.</a:t>
+            </a:r>
+          </a:p>
+          <a:p>
+            <a:r>
+              <a:t>• Accent-bold: more managed = more on AWS. The SERVICE TYPE decides where the line falls — this is the</a:t>
+            </a:r>
+          </a:p>
+          <a:p>
+            <a:r>
+              <a:t>  IaaS/PaaS spectrum from Topic 1 now expressed as a security boundary.</a:t>
+            </a:r>
+          </a:p>
+          <a:p>
+            <a:r>
+              <a:t>Misconception to pre-empt: that shared responsibility is one fixed diagram. It isn't — the same account</a:t>
+            </a:r>
+          </a:p>
+          <a:p>
+            <a:r>
+              <a:t>can have EC2 (line well toward you) and RDS (line well toward AWS) side by side; you must map each service.</a:t>
+            </a:r>
+          </a:p>
+          <a:p>
+            <a:r>
+              <a:t>Question to pose: "SQL Server needs patching — who does it if it's on an EC2 instance vs on RDS?" (EC2:</a:t>
+            </a:r>
+          </a:p>
+          <a:p>
+            <a:r>
+              <a:t>you; RDS: AWS — same software, different service, different owner).</a:t>
+            </a:r>
+          </a:p>
+          <a:p>
+            <a:r>
+              <a:t>UoC/AT2 tie: ICTCLD502 PC 1.3 (identify the LEVEL of shared responsibility per business needs) + KE 7;</a:t>
+            </a:r>
+          </a:p>
+          <a:p>
+            <a:r>
+              <a:t>this per-service reasoning is exactly what the build assignment (next activity) requires.</a:t>
+            </a:r>
+          </a:p>
+        </p:txBody>
+      </p:sp>
+      <p:sp>
+        <p:nvSpPr>
+          <p:cNvPr id="4" name="Slide Number Placeholder 3"/>
+          <p:cNvSpPr>
+            <a:spLocks noGrp="1"/>
+          </p:cNvSpPr>
+          <p:nvPr>
+            <p:ph type="sldNum" idx="5" sz="quarter"/>
+          </p:nvPr>
+        </p:nvSpPr>
+        <p:spPr/>
+      </p:sp>
+    </p:spTree>
+  </p:cSld>
+  <p:clrMapOvr>
+    <a:masterClrMapping/>
+  </p:clrMapOvr>
+</p:notes>
+</file>
+
+<file path=ppt/notesSlides/notesSlide15.xml><?xml version="1.0" encoding="utf-8"?>
+<p:notes xmlns:a="http://schemas.openxmlformats.org/drawingml/2006/main" xmlns:p="http://schemas.openxmlformats.org/presentationml/2006/main" xmlns:r="http://schemas.openxmlformats.org/officeDocument/2006/relationships">
+  <p:cSld>
+    <p:spTree>
+      <p:nvGrpSpPr>
+        <p:cNvPr id="1" name=""/>
+        <p:cNvGrpSpPr/>
+        <p:nvPr/>
+      </p:nvGrpSpPr>
+      <p:grpSpPr>
+        <a:xfrm>
+          <a:off x="0" y="0"/>
+          <a:ext cx="0" cy="0"/>
+          <a:chOff x="0" y="0"/>
+          <a:chExt cx="0" cy="0"/>
+        </a:xfrm>
+      </p:grpSpPr>
+      <p:sp>
+        <p:nvSpPr>
+          <p:cNvPr id="2" name="Slide Image Placeholder 1"/>
+          <p:cNvSpPr>
+            <a:spLocks noGrp="1"/>
+          </p:cNvSpPr>
+          <p:nvPr>
+            <p:ph type="sldImg" idx="2"/>
+          </p:nvPr>
+        </p:nvSpPr>
+        <p:spPr/>
+      </p:sp>
+      <p:sp>
+        <p:nvSpPr>
+          <p:cNvPr id="3" name="Notes Placeholder 2"/>
+          <p:cNvSpPr>
+            <a:spLocks noGrp="1"/>
+          </p:cNvSpPr>
+          <p:nvPr>
+            <p:ph type="body" idx="3" sz="quarter"/>
+          </p:nvPr>
+        </p:nvSpPr>
+        <p:spPr/>
+        <p:txBody>
+          <a:bodyPr/>
+          <a:lstStyle/>
+          <a:p>
+            <a:r>
+              <a:t>Bespoke — apply the model to the actual Accounting foundation. This is the bridge from concept to the activity.</a:t>
+            </a:r>
+          </a:p>
+          <a:p>
+            <a:r>
+              <a:t>• The task in one line: map each layer of the Accounting build to its owner — AWS · YAT ICT · MTS (build)</a:t>
+            </a:r>
+          </a:p>
+          <a:p>
+            <a:r>
+              <a:t>  · end-users. Four possible owners, not two.</a:t>
+            </a:r>
+          </a:p>
+          <a:p>
+            <a:r>
+              <a:t>• Point them at the source: the supplied design's security section NAMES the split; their job is to apply</a:t>
+            </a:r>
+          </a:p>
+          <a:p>
+            <a:r>
+              <a:t>  it, not invent it (the working-to-a-design discipline again).</a:t>
+            </a:r>
+          </a:p>
+          <a:p>
+            <a:r>
+              <a:t>• Worked examples (the sub-bullet): AWS patches the RDS host · YAT patches the EC2 OS · MTS sets the IAM +</a:t>
+            </a:r>
+          </a:p>
+          <a:p>
+            <a:r>
+              <a:t>  SG config at build time. Note how the owner changes by both service AND lifecycle stage (build vs run).</a:t>
+            </a:r>
+          </a:p>
+          <a:p>
+            <a:r>
+              <a:t>Misconception to pre-empt: that it's a binary AWS-vs-"you." Here "you" splits three ways — YAT ICT (the</a:t>
+            </a:r>
+          </a:p>
+          <a:p>
+            <a:r>
+              <a:t>ongoing owner), MTS (the builder, now), and end-users. Who's responsible depends on the phase too.</a:t>
+            </a:r>
+          </a:p>
+          <a:p>
+            <a:r>
+              <a:t>Question to pose: "Security-group configuration — who owns it during the build, and who owns it after</a:t>
+            </a:r>
+          </a:p>
+          <a:p>
+            <a:r>
+              <a:t>handover?" (MTS sets it at build; YAT ICT owns it operationally after — draws out the build/run split).</a:t>
+            </a:r>
+          </a:p>
+          <a:p>
+            <a:r>
+              <a:t>UoC/AT2 tie: ICTCLD401 PC 1.7 + KE 7 + ICTCLD502 PC 1.3; produces the input for the Deployment Report's</a:t>
+            </a:r>
+          </a:p>
+          <a:p>
+            <a:r>
+              <a:t>security section (A2 / A4).</a:t>
+            </a:r>
+          </a:p>
+        </p:txBody>
+      </p:sp>
+      <p:sp>
+        <p:nvSpPr>
+          <p:cNvPr id="4" name="Slide Number Placeholder 3"/>
+          <p:cNvSpPr>
+            <a:spLocks noGrp="1"/>
+          </p:cNvSpPr>
+          <p:nvPr>
+            <p:ph type="sldNum" idx="5" sz="quarter"/>
+          </p:nvPr>
+        </p:nvSpPr>
+        <p:spPr/>
+      </p:sp>
+    </p:spTree>
+  </p:cSld>
+  <p:clrMapOvr>
+    <a:masterClrMapping/>
+  </p:clrMapOvr>
+</p:notes>
+</file>
+
+<file path=ppt/notesSlides/notesSlide16.xml><?xml version="1.0" encoding="utf-8"?>
+<p:notes xmlns:a="http://schemas.openxmlformats.org/drawingml/2006/main" xmlns:p="http://schemas.openxmlformats.org/presentationml/2006/main" xmlns:r="http://schemas.openxmlformats.org/officeDocument/2006/relationships">
+  <p:cSld>
+    <p:spTree>
+      <p:nvGrpSpPr>
+        <p:cNvPr id="1" name=""/>
+        <p:cNvGrpSpPr/>
+        <p:nvPr/>
+      </p:nvGrpSpPr>
+      <p:grpSpPr>
+        <a:xfrm>
+          <a:off x="0" y="0"/>
+          <a:ext cx="0" cy="0"/>
+          <a:chOff x="0" y="0"/>
+          <a:chExt cx="0" cy="0"/>
+        </a:xfrm>
+      </p:grpSpPr>
+      <p:sp>
+        <p:nvSpPr>
+          <p:cNvPr id="2" name="Slide Image Placeholder 1"/>
+          <p:cNvSpPr>
+            <a:spLocks noGrp="1"/>
+          </p:cNvSpPr>
+          <p:nvPr>
+            <p:ph type="sldImg" idx="2"/>
+          </p:nvPr>
+        </p:nvSpPr>
+        <p:spPr/>
+      </p:sp>
+      <p:sp>
+        <p:nvSpPr>
+          <p:cNvPr id="3" name="Notes Placeholder 2"/>
+          <p:cNvSpPr>
+            <a:spLocks noGrp="1"/>
+          </p:cNvSpPr>
+          <p:nvPr>
+            <p:ph type="body" idx="3" sz="quarter"/>
+          </p:nvPr>
+        </p:nvSpPr>
+        <p:spPr/>
+        <p:txBody>
+          <a:bodyPr/>
+          <a:lstStyle/>
+          <a:p>
+            <a:r>
+              <a:t>Facilitation — the C3 practice. Note this one is ANALYSIS, not a console build (say so up front).</a:t>
+            </a:r>
+          </a:p>
+          <a:p>
+            <a:r>
+              <a:t>Tell students, in these words: "No building this time — an analysis task in the style of the AWS scenario.</a:t>
+            </a:r>
+          </a:p>
+          <a:p>
+            <a:r>
+              <a:t>For each part of the Accounting foundation, name who is responsible — AWS, or you (YAT ICT / MTS) — using</a:t>
+            </a:r>
+          </a:p>
+          <a:p>
+            <a:r>
+              <a:t>the supplied design and the shared-responsibility model. Write it up as about half a page."</a:t>
+            </a:r>
+          </a:p>
+          <a:p>
+            <a:r>
+              <a:t>The parts to assign (put up):</a:t>
+            </a:r>
+          </a:p>
+          <a:p>
+            <a:r>
+              <a:t>1. EC2 OS patching · security-group settings · application config · IAM / MFA</a:t>
+            </a:r>
+          </a:p>
+          <a:p>
+            <a:r>
+              <a:t>2. SQL Server patching on RDS · physical data-centre security · S3 bucket access config · data</a:t>
+            </a:r>
+          </a:p>
+          <a:p>
+            <a:r>
+              <a:t>MUST PRODUCE: a ~½-page written assignment naming the responsible party for each part, justified against</a:t>
+            </a:r>
+          </a:p>
+          <a:p>
+            <a:r>
+              <a:t>the design + the model — this feeds their Deployment Report's security section.</a:t>
+            </a:r>
+          </a:p>
+          <a:p>
+            <a:r>
+              <a:t>TIMING: ~15 min, then discuss as a group.</a:t>
+            </a:r>
+          </a:p>
+          <a:p>
+            <a:r>
+              <a:t>Where they get stuck: the ones that shift by service — SQL Server patching is AWS's on RDS but would be</a:t>
+            </a:r>
+          </a:p>
+          <a:p>
+            <a:r>
+              <a:t>theirs on EC2; physical security is always AWS. Circulate and probe the reasoning, not just the answer.</a:t>
+            </a:r>
+          </a:p>
+          <a:p>
+            <a:r>
+              <a:t>SHARE-BACK: take the two trickiest (RDS patching, physical data-centre security), get the room's answer,</a:t>
+            </a:r>
+          </a:p>
+          <a:p>
+            <a:r>
+              <a:t>and confirm WHY — the reasoning is the assessable skill.</a:t>
+            </a:r>
+          </a:p>
+          <a:p>
+            <a:r>
+              <a:t>No-leakage note: practice on the Accounting foundation; AT2 assesses the same reasoning on a different</a:t>
+            </a:r>
+          </a:p>
+          <a:p>
+            <a:r>
+              <a:t>system — comparable, not identical.</a:t>
             </a:r>
           </a:p>
         </p:txBody>
@@ -677,95 +1674,67 @@
           <a:lstStyle/>
           <a:p>
             <a:r>
-              <a:t>WHERE TO FIND THE RECORDED DEMO: AWS Academy Cloud Foundations → Module 04 (AWS Cloud Security) →</a:t>
-            </a:r>
-          </a:p>
-          <a:p>
-            <a:r>
-              <a:t>slide 31, "Recorded demo: IAM", inside the ACF M04 instructor deck</a:t>
-            </a:r>
-          </a:p>
-          <a:p>
-            <a:r>
-              <a:t>(original-materials/AWS-Instructor Presentations/…). Instructor-facing — screen it in class, don't</a:t>
-            </a:r>
-          </a:p>
-          <a:p>
-            <a:r>
-              <a:t>distribute to students. Preview it before class and cue it to this slide.</a:t>
-            </a:r>
-          </a:p>
-          <a:p/>
-          <a:p>
-            <a:r>
-              <a:t>WHAT TO DEMONSTRATE (follow the recorded demo, then relate each step to OUR build):</a:t>
-            </a:r>
-          </a:p>
-          <a:p>
-            <a:r>
-              <a:t>1. Create a group and attach a least-privilege policy.</a:t>
-            </a:r>
-          </a:p>
-          <a:p>
-            <a:r>
-              <a:t>2. Create a user, add them to the group, enable MFA.</a:t>
-            </a:r>
-          </a:p>
-          <a:p>
-            <a:r>
-              <a:t>3. Create the EC2 instance role (Application-Service) and attach its policy.</a:t>
-            </a:r>
-          </a:p>
-          <a:p>
-            <a:r>
-              <a:t>4. Capture the IAM evidence screenshot (groups list + a user showing MFA enabled).</a:t>
-            </a:r>
-          </a:p>
-          <a:p/>
-          <a:p>
-            <a:r>
-              <a:t>WHAT TO EMPHASISE:</a:t>
-            </a:r>
-          </a:p>
-          <a:p>
-            <a:r>
-              <a:t>• Permissions go on the GROUP, then the user joins it — not policy-on-user. Show the difference.</a:t>
-            </a:r>
-          </a:p>
-          <a:p>
-            <a:r>
-              <a:t>• MFA — show the "assign MFA device" step explicitly; students routinely skip it and it's an</a:t>
-            </a:r>
-          </a:p>
-          <a:p>
-            <a:r>
-              <a:t>  Essential Eight requirement they're assessed on.</a:t>
-            </a:r>
-          </a:p>
-          <a:p>
-            <a:r>
-              <a:t>• The role has NO password — point out there are no long-lived credentials; the instance assumes</a:t>
-            </a:r>
-          </a:p>
-          <a:p>
-            <a:r>
-              <a:t>  it. This is the payoff of the "IAM components" teaching slide.</a:t>
-            </a:r>
-          </a:p>
-          <a:p>
-            <a:r>
-              <a:t>• Narrate the evidence capture — students must screenshot as they go for AT2; model it here.</a:t>
-            </a:r>
-          </a:p>
-          <a:p/>
-          <a:p>
-            <a:r>
-              <a:t>PREP: clean lab account open, the Accounting Baseline Design handy (for the group names), recorded</a:t>
-            </a:r>
-          </a:p>
-          <a:p>
-            <a:r>
-              <a:t>demo queued. ~8–10 min to screen + narrate before the activity.</a:t>
+              <a:t>AWS-sourced (ACA M02) — use the diagram to install the three-role picture, then land where THEY sit.</a:t>
+            </a:r>
+          </a:p>
+          <a:p>
+            <a:r>
+              <a:t>• Walk the chain off the visual: the customer sets the REQUIREMENTS → the architect produces the</a:t>
+            </a:r>
+          </a:p>
+          <a:p>
+            <a:r>
+              <a:t>  DESIGN → the delivery crew BUILDS it. Three distinct roles, one hand-off line between each.</a:t>
+            </a:r>
+          </a:p>
+          <a:p>
+            <a:r>
+              <a:t>• Drive the accent-bold point: in AT2 they are the DELIVERY CREW. The design is already done; their</a:t>
+            </a:r>
+          </a:p>
+          <a:p>
+            <a:r>
+              <a:t>  job starts at "build it," not "decide it."</a:t>
+            </a:r>
+          </a:p>
+          <a:p>
+            <a:r>
+              <a:t>• Callback to AT1: there they were doing the architect/advisor work; now they step one role down the</a:t>
+            </a:r>
+          </a:p>
+          <a:p>
+            <a:r>
+              <a:t>  chain and execute. Same engagement, different seat.</a:t>
+            </a:r>
+          </a:p>
+          <a:p>
+            <a:r>
+              <a:t>Misconception to pre-empt: that "architecture" means they get to make the big calls. Here the big</a:t>
+            </a:r>
+          </a:p>
+          <a:p>
+            <a:r>
+              <a:t>calls are made — architecture literacy is what lets them READ the design correctly and build true to it.</a:t>
+            </a:r>
+          </a:p>
+          <a:p>
+            <a:r>
+              <a:t>Question to pose: "If the customer, architect and builder are three roles, which one are you in AT2 —</a:t>
+            </a:r>
+          </a:p>
+          <a:p>
+            <a:r>
+              <a:t>and what does that mean you must NOT do?" (builder; don't rewrite the design).</a:t>
+            </a:r>
+          </a:p>
+          <a:p>
+            <a:r>
+              <a:t>UoC/AT2 tie: frames the whole foundation-build (A2); establishes the working-to-a-supplied-design</a:t>
+            </a:r>
+          </a:p>
+          <a:p>
+            <a:r>
+              <a:t>mode that the next slide makes concrete.</a:t>
             </a:r>
           </a:p>
         </p:txBody>
@@ -835,94 +1804,931 @@
           <a:lstStyle/>
           <a:p>
             <a:r>
-              <a:t>Tell students, in these words: "Open the lab and the Accounting Baseline Design. Build the IAM</a:t>
-            </a:r>
-          </a:p>
-          <a:p>
-            <a:r>
-              <a:t>foundation for the MTS engagement — exactly the groups and role in the design. Work in the lab</a:t>
-            </a:r>
-          </a:p>
-          <a:p>
-            <a:r>
-              <a:t>account and capture evidence as you go."</a:t>
+              <a:t>Bespoke — the heart of the AT2 mode. Teach the discipline of building faithfully to someone else's design.</a:t>
+            </a:r>
+          </a:p>
+          <a:p>
+            <a:r>
+              <a:t>• Rule one: read the design end to end BEFORE touching the console. You cannot build faithfully to a</a:t>
+            </a:r>
+          </a:p>
+          <a:p>
+            <a:r>
+              <a:t>  document you have only skimmed the first page of.</a:t>
+            </a:r>
+          </a:p>
+          <a:p>
+            <a:r>
+              <a:t>• Rule two: build exactly what it specifies. The only decisions that are yours are the ones the design</a:t>
+            </a:r>
+          </a:p>
+          <a:p>
+            <a:r>
+              <a:t>  deliberately LEAVES OPEN — the implementer decisions (labelled C1–C8 in the supplied design).</a:t>
+            </a:r>
+          </a:p>
+          <a:p>
+            <a:r>
+              <a:t>• The accent-bold line: an "implementer decision" is precisely where their judgement is ASSESSED.</a:t>
+            </a:r>
+          </a:p>
+          <a:p>
+            <a:r>
+              <a:t>  Everywhere else, deviating from the design is an error, not initiative.</a:t>
+            </a:r>
+          </a:p>
+          <a:p>
+            <a:r>
+              <a:t>Misconception to pre-empt: "if I can build it a better way, I should." No — unrequested cleverness is</a:t>
+            </a:r>
+          </a:p>
+          <a:p>
+            <a:r>
+              <a:t>marked down. The skill is fidelity; judgement is shown only in the open decisions, and must be justified.</a:t>
+            </a:r>
+          </a:p>
+          <a:p>
+            <a:r>
+              <a:t>Question to pose: "You spot what you think is a better instance type than the design names — do you</a:t>
+            </a:r>
+          </a:p>
+          <a:p>
+            <a:r>
+              <a:t>change it?" (No — unless it's an open implementer decision; otherwise build as specified).</a:t>
+            </a:r>
+          </a:p>
+          <a:p>
+            <a:r>
+              <a:t>UoC/AT2 tie: ICTCLD401 PE 1/PE 2 — the built artefacts are the evidence; this establishes the standard</a:t>
+            </a:r>
+          </a:p>
+          <a:p>
+            <a:r>
+              <a:t>the whole foundation build (A2) is judged against.</a:t>
+            </a:r>
+          </a:p>
+        </p:txBody>
+      </p:sp>
+      <p:sp>
+        <p:nvSpPr>
+          <p:cNvPr id="4" name="Slide Number Placeholder 3"/>
+          <p:cNvSpPr>
+            <a:spLocks noGrp="1"/>
+          </p:cNvSpPr>
+          <p:nvPr>
+            <p:ph type="sldNum" idx="5" sz="quarter"/>
+          </p:nvPr>
+        </p:nvSpPr>
+        <p:spPr/>
+      </p:sp>
+    </p:spTree>
+  </p:cSld>
+  <p:clrMapOvr>
+    <a:masterClrMapping/>
+  </p:clrMapOvr>
+</p:notes>
+</file>
+
+<file path=ppt/notesSlides/notesSlide4.xml><?xml version="1.0" encoding="utf-8"?>
+<p:notes xmlns:a="http://schemas.openxmlformats.org/drawingml/2006/main" xmlns:p="http://schemas.openxmlformats.org/presentationml/2006/main" xmlns:r="http://schemas.openxmlformats.org/officeDocument/2006/relationships">
+  <p:cSld>
+    <p:spTree>
+      <p:nvGrpSpPr>
+        <p:cNvPr id="1" name=""/>
+        <p:cNvGrpSpPr/>
+        <p:nvPr/>
+      </p:nvGrpSpPr>
+      <p:grpSpPr>
+        <a:xfrm>
+          <a:off x="0" y="0"/>
+          <a:ext cx="0" cy="0"/>
+          <a:chOff x="0" y="0"/>
+          <a:chExt cx="0" cy="0"/>
+        </a:xfrm>
+      </p:grpSpPr>
+      <p:sp>
+        <p:nvSpPr>
+          <p:cNvPr id="2" name="Slide Image Placeholder 1"/>
+          <p:cNvSpPr>
+            <a:spLocks noGrp="1"/>
+          </p:cNvSpPr>
+          <p:nvPr>
+            <p:ph type="sldImg" idx="2"/>
+          </p:nvPr>
+        </p:nvSpPr>
+        <p:spPr/>
+      </p:sp>
+      <p:sp>
+        <p:nvSpPr>
+          <p:cNvPr id="3" name="Notes Placeholder 2"/>
+          <p:cNvSpPr>
+            <a:spLocks noGrp="1"/>
+          </p:cNvSpPr>
+          <p:nvPr>
+            <p:ph type="body" idx="3" sz="quarter"/>
+          </p:nvPr>
+        </p:nvSpPr>
+        <p:spPr/>
+        <p:txBody>
+          <a:bodyPr/>
+          <a:lstStyle/>
+          <a:p>
+            <a:r>
+              <a:t>The first real build decision — and it's compliance, not preference. Applied from Topic 1's residency teaching.</a:t>
+            </a:r>
+          </a:p>
+          <a:p>
+            <a:r>
+              <a:t>• Region is decision number one because everything you create is Region-scoped — get it wrong and every</a:t>
+            </a:r>
+          </a:p>
+          <a:p>
+            <a:r>
+              <a:t>  resource lands in the wrong place.</a:t>
+            </a:r>
+          </a:p>
+          <a:p>
+            <a:r>
+              <a:t>• WHY Sydney: the design mandates ap-southeast-2 because financial records + PII must stay ONSHORE.</a:t>
+            </a:r>
+          </a:p>
+          <a:p>
+            <a:r>
+              <a:t>  This is the residency driver from Topic 1 now being BUILT, not just argued.</a:t>
+            </a:r>
+          </a:p>
+          <a:p>
+            <a:r>
+              <a:t>• The lab reality (be explicit): in the AWS Academy Learner Lab they deploy to us-east-1 —</a:t>
+            </a:r>
+          </a:p>
+          <a:p>
+            <a:r>
+              <a:t>  [scenario: ap-southeast-2 (Sydney) | deploy: us-east-1]. Same build; only the location label changes.</a:t>
+            </a:r>
+          </a:p>
+          <a:p>
+            <a:r>
+              <a:t>  Set the console Region before creating anything.</a:t>
+            </a:r>
+          </a:p>
+          <a:p>
+            <a:r>
+              <a:t>• Accent-bold: deploy everything to the lab's Region (us-east-1) and make sure the Region is VISIBLE in</a:t>
+            </a:r>
+          </a:p>
+          <a:p>
+            <a:r>
+              <a:t>  every screenshot — the assessor checks it matches.</a:t>
+            </a:r>
+          </a:p>
+          <a:p>
+            <a:r>
+              <a:t>Misconception to pre-empt: that the us-east-1 substitution means residency doesn't matter. It matters</a:t>
+            </a:r>
+          </a:p>
+          <a:p>
+            <a:r>
+              <a:t>conceptually (design says Sydney, for legal reasons); the lab just can't host that Region.</a:t>
+            </a:r>
+          </a:p>
+          <a:p>
+            <a:r>
+              <a:t>Question to pose: "Why is Region the FIRST thing you set, before you create a single resource?"</a:t>
+            </a:r>
+          </a:p>
+          <a:p>
+            <a:r>
+              <a:t>(resources are Region-scoped; the design mandates it for data residency).</a:t>
+            </a:r>
+          </a:p>
+          <a:p>
+            <a:r>
+              <a:t>UoC/AT2 tie: ICTCLD401 PC 1.4 (access the account per business requirements); evidenced in Appendix A</a:t>
+            </a:r>
+          </a:p>
+          <a:p>
+            <a:r>
+              <a:t>with the Region visible (A9/A10).</a:t>
+            </a:r>
+          </a:p>
+        </p:txBody>
+      </p:sp>
+      <p:sp>
+        <p:nvSpPr>
+          <p:cNvPr id="4" name="Slide Number Placeholder 3"/>
+          <p:cNvSpPr>
+            <a:spLocks noGrp="1"/>
+          </p:cNvSpPr>
+          <p:nvPr>
+            <p:ph type="sldNum" idx="5" sz="quarter"/>
+          </p:nvPr>
+        </p:nvSpPr>
+        <p:spPr/>
+      </p:sp>
+    </p:spTree>
+  </p:cSld>
+  <p:clrMapOvr>
+    <a:masterClrMapping/>
+  </p:clrMapOvr>
+</p:notes>
+</file>
+
+<file path=ppt/notesSlides/notesSlide5.xml><?xml version="1.0" encoding="utf-8"?>
+<p:notes xmlns:a="http://schemas.openxmlformats.org/drawingml/2006/main" xmlns:p="http://schemas.openxmlformats.org/presentationml/2006/main" xmlns:r="http://schemas.openxmlformats.org/officeDocument/2006/relationships">
+  <p:cSld>
+    <p:spTree>
+      <p:nvGrpSpPr>
+        <p:cNvPr id="1" name=""/>
+        <p:cNvGrpSpPr/>
+        <p:nvPr/>
+      </p:nvGrpSpPr>
+      <p:grpSpPr>
+        <a:xfrm>
+          <a:off x="0" y="0"/>
+          <a:ext cx="0" cy="0"/>
+          <a:chOff x="0" y="0"/>
+          <a:chExt cx="0" cy="0"/>
+        </a:xfrm>
+      </p:grpSpPr>
+      <p:sp>
+        <p:nvSpPr>
+          <p:cNvPr id="2" name="Slide Image Placeholder 1"/>
+          <p:cNvSpPr>
+            <a:spLocks noGrp="1"/>
+          </p:cNvSpPr>
+          <p:nvPr>
+            <p:ph type="sldImg" idx="2"/>
+          </p:nvPr>
+        </p:nvSpPr>
+        <p:spPr/>
+      </p:sp>
+      <p:sp>
+        <p:nvSpPr>
+          <p:cNvPr id="3" name="Notes Placeholder 2"/>
+          <p:cNvSpPr>
+            <a:spLocks noGrp="1"/>
+          </p:cNvSpPr>
+          <p:nvPr>
+            <p:ph type="body" idx="3" sz="quarter"/>
+          </p:nvPr>
+        </p:nvSpPr>
+        <p:spPr/>
+        <p:txBody>
+          <a:bodyPr/>
+          <a:lstStyle/>
+          <a:p>
+            <a:r>
+              <a:t>Bespoke — the consulting discipline that makes AT2 pass or fail. Teach it as part of the build, not a write-up.</a:t>
+            </a:r>
+          </a:p>
+          <a:p>
+            <a:r>
+              <a:t>• The core truth: the Deployment Report is EVIDENCED from what they capture live. You cannot go back</a:t>
+            </a:r>
+          </a:p>
+          <a:p>
+            <a:r>
+              <a:t>  and reconstruct a screenshot of a resource you built an hour ago in a state you've since changed.</a:t>
+            </a:r>
+          </a:p>
+          <a:p>
+            <a:r>
+              <a:t>• Concretely: the AT2 template LISTS named screenshots — capture each one as you build that resource,</a:t>
+            </a:r>
+          </a:p>
+          <a:p>
+            <a:r>
+              <a:t>  with the Region + the named resource visible in frame.</a:t>
+            </a:r>
+          </a:p>
+          <a:p>
+            <a:r>
+              <a:t>• Configs too: export IAM policies, SG rules, VPC settings AS you go → they land in Appendix B.</a:t>
+            </a:r>
+          </a:p>
+          <a:p>
+            <a:r>
+              <a:t>• Accent-bold rhythm: build → capture → move on. Evidence is a step in the build, not homework afterwards.</a:t>
+            </a:r>
+          </a:p>
+          <a:p>
+            <a:r>
+              <a:t>Misconception to pre-empt: "I'll build it all, then screenshot at the end." By then the console state</a:t>
+            </a:r>
+          </a:p>
+          <a:p>
+            <a:r>
+              <a:t>has moved on and half the evidence is gone or inconsistent. Capture is live or it's lost.</a:t>
+            </a:r>
+          </a:p>
+          <a:p>
+            <a:r>
+              <a:t>Question to pose: "You finish the whole build, then realise you never screenshotted the group creation</a:t>
+            </a:r>
+          </a:p>
+          <a:p>
+            <a:r>
+              <a:t>— can you get that evidence back?" (not the live creation state — you'd have to rebuild; capture as you go).</a:t>
+            </a:r>
+          </a:p>
+          <a:p>
+            <a:r>
+              <a:t>UoC/AT2 tie: ICTCLD401 PE 1/PE 2; feeds Appendices A (screenshots) + B (config exports) — criteria A9/A10.</a:t>
+            </a:r>
+          </a:p>
+        </p:txBody>
+      </p:sp>
+      <p:sp>
+        <p:nvSpPr>
+          <p:cNvPr id="4" name="Slide Number Placeholder 3"/>
+          <p:cNvSpPr>
+            <a:spLocks noGrp="1"/>
+          </p:cNvSpPr>
+          <p:nvPr>
+            <p:ph type="sldNum" idx="5" sz="quarter"/>
+          </p:nvPr>
+        </p:nvSpPr>
+        <p:spPr/>
+      </p:sp>
+    </p:spTree>
+  </p:cSld>
+  <p:clrMapOvr>
+    <a:masterClrMapping/>
+  </p:clrMapOvr>
+</p:notes>
+</file>
+
+<file path=ppt/notesSlides/notesSlide6.xml><?xml version="1.0" encoding="utf-8"?>
+<p:notes xmlns:a="http://schemas.openxmlformats.org/drawingml/2006/main" xmlns:p="http://schemas.openxmlformats.org/presentationml/2006/main" xmlns:r="http://schemas.openxmlformats.org/officeDocument/2006/relationships">
+  <p:cSld>
+    <p:spTree>
+      <p:nvGrpSpPr>
+        <p:cNvPr id="1" name=""/>
+        <p:cNvGrpSpPr/>
+        <p:nvPr/>
+      </p:nvGrpSpPr>
+      <p:grpSpPr>
+        <a:xfrm>
+          <a:off x="0" y="0"/>
+          <a:ext cx="0" cy="0"/>
+          <a:chOff x="0" y="0"/>
+          <a:chExt cx="0" cy="0"/>
+        </a:xfrm>
+      </p:grpSpPr>
+      <p:sp>
+        <p:nvSpPr>
+          <p:cNvPr id="2" name="Slide Image Placeholder 1"/>
+          <p:cNvSpPr>
+            <a:spLocks noGrp="1"/>
+          </p:cNvSpPr>
+          <p:nvPr>
+            <p:ph type="sldImg" idx="2"/>
+          </p:nvPr>
+        </p:nvSpPr>
+        <p:spPr/>
+      </p:sp>
+      <p:sp>
+        <p:nvSpPr>
+          <p:cNvPr id="3" name="Notes Placeholder 2"/>
+          <p:cNvSpPr>
+            <a:spLocks noGrp="1"/>
+          </p:cNvSpPr>
+          <p:nvPr>
+            <p:ph type="body" idx="3" sz="quarter"/>
+          </p:nvPr>
+        </p:nvSpPr>
+        <p:spPr/>
+        <p:txBody>
+          <a:bodyPr/>
+          <a:lstStyle/>
+          <a:p>
+            <a:r>
+              <a:t>DEMONSTRATION (educator-led — no recorded demo fits this one; screen a live walk-through or a</a:t>
+            </a:r>
+          </a:p>
+          <a:p>
+            <a:r>
+              <a:t>pre-recorded screen capture you make). Show, then they replicate on the next slide.</a:t>
             </a:r>
           </a:p>
           <a:p/>
           <a:p>
             <a:r>
-              <a:t>The task, step by step (put on the board / read out):</a:t>
-            </a:r>
-          </a:p>
-          <a:p>
-            <a:r>
-              <a:t>1. Create the four groups from the design: YAT-ICT-Admins, MTS-Consultants, Application-Service</a:t>
-            </a:r>
-          </a:p>
-          <a:p>
-            <a:r>
-              <a:t>   (this one is the EC2 ROLE, not a human group), Finance-Auditors.</a:t>
-            </a:r>
-          </a:p>
-          <a:p>
-            <a:r>
-              <a:t>2. Attach a least-privilege policy to each — only what that group needs.</a:t>
-            </a:r>
-          </a:p>
-          <a:p>
-            <a:r>
-              <a:t>3. Create at least one user in each HUMAN group and enable MFA on it.</a:t>
-            </a:r>
-          </a:p>
-          <a:p>
-            <a:r>
-              <a:t>4. Create the Application-Service role for the EC2 instance (RDS + S3 + CloudWatch access).</a:t>
-            </a:r>
-          </a:p>
-          <a:p>
-            <a:r>
-              <a:t>5. Capture the IAM evidence: the groups list, a user with MFA on, and the role.</a:t>
+              <a:t>WHAT TO DEMONSTRATE:</a:t>
+            </a:r>
+          </a:p>
+          <a:p>
+            <a:r>
+              <a:t>1. Sign in to the AWS Academy Learner Lab and set the Region to us-east-1 —</a:t>
+            </a:r>
+          </a:p>
+          <a:p>
+            <a:r>
+              <a:t>   [scenario: ap-southeast-2 (Sydney) | deploy: us-east-1]. Say the substitution out loud as you do it.</a:t>
+            </a:r>
+          </a:p>
+          <a:p>
+            <a:r>
+              <a:t>2. Confirm the identity you're building as (the lab's provided credentials).</a:t>
+            </a:r>
+          </a:p>
+          <a:p>
+            <a:r>
+              <a:t>3. Capture the FIRST named screenshot — the Region selector — into the evidence log, Region visible.</a:t>
+            </a:r>
+          </a:p>
+          <a:p>
+            <a:r>
+              <a:t>4. Show where configuration exports come from (the point in the console you'll later export policies/SGs).</a:t>
             </a:r>
           </a:p>
           <a:p/>
           <a:p>
             <a:r>
-              <a:t>MUST PRODUCE (the AT2 evidence): screenshots of the groups list, one user with MFA enabled, and</a:t>
-            </a:r>
-          </a:p>
-          <a:p>
-            <a:r>
-              <a:t>the role with its policy.</a:t>
-            </a:r>
-          </a:p>
-          <a:p>
-            <a:r>
-              <a:t>TIMING: ~30 min. Circulate — the two common sticking points are (a) forgetting MFA and (b) trying</a:t>
-            </a:r>
-          </a:p>
-          <a:p>
-            <a:r>
-              <a:t>to attach a policy straight to a user.</a:t>
-            </a:r>
-          </a:p>
-          <a:p>
-            <a:r>
-              <a:t>SHARE-BACK: ask one student to show their groups list; confirm least-privilege (no</a:t>
-            </a:r>
-          </a:p>
-          <a:p>
-            <a:r>
-              <a:t>AdministratorAccess shortcuts).</a:t>
-            </a:r>
-          </a:p>
-          <a:p>
-            <a:r>
-              <a:t>Remind them: this practice uses the Accounting baseline; the assessed task uses a different system</a:t>
-            </a:r>
-          </a:p>
-          <a:p>
-            <a:r>
-              <a:t>— comparable, not identical.</a:t>
+              <a:t>WHAT TO EMPHASISE:</a:t>
+            </a:r>
+          </a:p>
+          <a:p>
+            <a:r>
+              <a:t>• Region BEFORE anything else — model setting it first, deliberately.</a:t>
+            </a:r>
+          </a:p>
+          <a:p>
+            <a:r>
+              <a:t>• Narrate the evidence capture: name the file the way the AT2 template names it; students must mirror this.</a:t>
+            </a:r>
+          </a:p>
+          <a:p>
+            <a:r>
+              <a:t>• This is the workspace they'll build the whole foundation in — get it set up correctly once.</a:t>
+            </a:r>
+          </a:p>
+          <a:p/>
+          <a:p>
+            <a:r>
+              <a:t>PREP: clean Learner Lab open, evidence-log/template handy, the Accounting Baseline Design ready to open.</a:t>
+            </a:r>
+          </a:p>
+          <a:p>
+            <a:r>
+              <a:t>~5–8 min to screen + narrate before the activity.</a:t>
+            </a:r>
+          </a:p>
+          <a:p/>
+          <a:p>
+            <a:r>
+              <a:t>WHERE TO FIND THE RECORDED DEMO: none — per the demos catalogue, no recorded demo fits the C1</a:t>
+            </a:r>
+          </a:p>
+          <a:p>
+            <a:r>
+              <a:t>account/Region/evidence workspace setup, so this demo stays live/bespoke (screen your own capture).</a:t>
+            </a:r>
+          </a:p>
+        </p:txBody>
+      </p:sp>
+      <p:sp>
+        <p:nvSpPr>
+          <p:cNvPr id="4" name="Slide Number Placeholder 3"/>
+          <p:cNvSpPr>
+            <a:spLocks noGrp="1"/>
+          </p:cNvSpPr>
+          <p:nvPr>
+            <p:ph type="sldNum" idx="5" sz="quarter"/>
+          </p:nvPr>
+        </p:nvSpPr>
+        <p:spPr/>
+      </p:sp>
+    </p:spTree>
+  </p:cSld>
+  <p:clrMapOvr>
+    <a:masterClrMapping/>
+  </p:clrMapOvr>
+</p:notes>
+</file>
+
+<file path=ppt/notesSlides/notesSlide7.xml><?xml version="1.0" encoding="utf-8"?>
+<p:notes xmlns:a="http://schemas.openxmlformats.org/drawingml/2006/main" xmlns:p="http://schemas.openxmlformats.org/presentationml/2006/main" xmlns:r="http://schemas.openxmlformats.org/officeDocument/2006/relationships">
+  <p:cSld>
+    <p:spTree>
+      <p:nvGrpSpPr>
+        <p:cNvPr id="1" name=""/>
+        <p:cNvGrpSpPr/>
+        <p:nvPr/>
+      </p:nvGrpSpPr>
+      <p:grpSpPr>
+        <a:xfrm>
+          <a:off x="0" y="0"/>
+          <a:ext cx="0" cy="0"/>
+          <a:chOff x="0" y="0"/>
+          <a:chExt cx="0" cy="0"/>
+        </a:xfrm>
+      </p:grpSpPr>
+      <p:sp>
+        <p:nvSpPr>
+          <p:cNvPr id="2" name="Slide Image Placeholder 1"/>
+          <p:cNvSpPr>
+            <a:spLocks noGrp="1"/>
+          </p:cNvSpPr>
+          <p:nvPr>
+            <p:ph type="sldImg" idx="2"/>
+          </p:nvPr>
+        </p:nvSpPr>
+        <p:spPr/>
+      </p:sp>
+      <p:sp>
+        <p:nvSpPr>
+          <p:cNvPr id="3" name="Notes Placeholder 2"/>
+          <p:cNvSpPr>
+            <a:spLocks noGrp="1"/>
+          </p:cNvSpPr>
+          <p:nvPr>
+            <p:ph type="body" idx="3" sz="quarter"/>
+          </p:nvPr>
+        </p:nvSpPr>
+        <p:spPr/>
+        <p:txBody>
+          <a:bodyPr/>
+          <a:lstStyle/>
+          <a:p>
+            <a:r>
+              <a:t>Facilitation — the first hands-on step of the cumulative practice build. They do what you just demoed.</a:t>
+            </a:r>
+          </a:p>
+          <a:p>
+            <a:r>
+              <a:t>Tell students, in these words: "In the AWS Academy Learner Lab, set yourself up to build the Accounting</a:t>
+            </a:r>
+          </a:p>
+          <a:p>
+            <a:r>
+              <a:t>System foundation. Set the Region, confirm your identity, capture your first evidence, then open and skim</a:t>
+            </a:r>
+          </a:p>
+          <a:p>
+            <a:r>
+              <a:t>the supplied design. Work in the lab account and capture evidence as you go."</a:t>
+            </a:r>
+          </a:p>
+          <a:p>
+            <a:r>
+              <a:t>The task, step by step (put on the board):</a:t>
+            </a:r>
+          </a:p>
+          <a:p>
+            <a:r>
+              <a:t>1. Set the console Region to us-east-1 — [scenario: ap-southeast-2 (Sydney) | deploy: us-east-1] — and</a:t>
+            </a:r>
+          </a:p>
+          <a:p>
+            <a:r>
+              <a:t>   confirm it in your evidence.</a:t>
+            </a:r>
+          </a:p>
+          <a:p>
+            <a:r>
+              <a:t>2. Confirm your build identity.</a:t>
+            </a:r>
+          </a:p>
+          <a:p>
+            <a:r>
+              <a:t>3. Capture your first named evidence screenshot (Region visible) into your evidence log.</a:t>
+            </a:r>
+          </a:p>
+          <a:p>
+            <a:r>
+              <a:t>4. Open the supplied Accounting Baseline Solution Design and skim it end to end.</a:t>
+            </a:r>
+          </a:p>
+          <a:p>
+            <a:r>
+              <a:t>MUST PRODUCE: the first evidence screenshot (Region visible) in the evidence log, and a workspace set to</a:t>
+            </a:r>
+          </a:p>
+          <a:p>
+            <a:r>
+              <a:t>us-east-1, ready to build.</a:t>
+            </a:r>
+          </a:p>
+          <a:p>
+            <a:r>
+              <a:t>TIMING: ~15 min. Where they get stuck: the Learner Lab login/console hand-off (have the lab-launch steps</a:t>
+            </a:r>
+          </a:p>
+          <a:p>
+            <a:r>
+              <a:t>ready), and forgetting to set Region before poking around — circulate and check the Region indicator.</a:t>
+            </a:r>
+          </a:p>
+          <a:p>
+            <a:r>
+              <a:t>SHARE-BACK: ask one student to show their first evidence screenshot; confirm the Region is visible in frame.</a:t>
+            </a:r>
+          </a:p>
+          <a:p>
+            <a:r>
+              <a:t>No-leakage note: this practice runs on the Accounting System (Ledgerline); the ASSESSED AT2 build is a</a:t>
+            </a:r>
+          </a:p>
+          <a:p>
+            <a:r>
+              <a:t>different system — comparable, not identical. Keep them anchored to the Accounting baseline here.</a:t>
+            </a:r>
+          </a:p>
+        </p:txBody>
+      </p:sp>
+      <p:sp>
+        <p:nvSpPr>
+          <p:cNvPr id="4" name="Slide Number Placeholder 3"/>
+          <p:cNvSpPr>
+            <a:spLocks noGrp="1"/>
+          </p:cNvSpPr>
+          <p:nvPr>
+            <p:ph type="sldNum" idx="5" sz="quarter"/>
+          </p:nvPr>
+        </p:nvSpPr>
+        <p:spPr/>
+      </p:sp>
+    </p:spTree>
+  </p:cSld>
+  <p:clrMapOvr>
+    <a:masterClrMapping/>
+  </p:clrMapOvr>
+</p:notes>
+</file>
+
+<file path=ppt/notesSlides/notesSlide8.xml><?xml version="1.0" encoding="utf-8"?>
+<p:notes xmlns:a="http://schemas.openxmlformats.org/drawingml/2006/main" xmlns:p="http://schemas.openxmlformats.org/presentationml/2006/main" xmlns:r="http://schemas.openxmlformats.org/officeDocument/2006/relationships">
+  <p:cSld>
+    <p:spTree>
+      <p:nvGrpSpPr>
+        <p:cNvPr id="1" name=""/>
+        <p:cNvGrpSpPr/>
+        <p:nvPr/>
+      </p:nvGrpSpPr>
+      <p:grpSpPr>
+        <a:xfrm>
+          <a:off x="0" y="0"/>
+          <a:ext cx="0" cy="0"/>
+          <a:chOff x="0" y="0"/>
+          <a:chExt cx="0" cy="0"/>
+        </a:xfrm>
+      </p:grpSpPr>
+      <p:sp>
+        <p:nvSpPr>
+          <p:cNvPr id="2" name="Slide Image Placeholder 1"/>
+          <p:cNvSpPr>
+            <a:spLocks noGrp="1"/>
+          </p:cNvSpPr>
+          <p:nvPr>
+            <p:ph type="sldImg" idx="2"/>
+          </p:nvPr>
+        </p:nvSpPr>
+        <p:spPr/>
+      </p:sp>
+      <p:sp>
+        <p:nvSpPr>
+          <p:cNvPr id="3" name="Notes Placeholder 2"/>
+          <p:cNvSpPr>
+            <a:spLocks noGrp="1"/>
+          </p:cNvSpPr>
+          <p:nvPr>
+            <p:ph type="body" idx="3" sz="quarter"/>
+          </p:nvPr>
+        </p:nvSpPr>
+        <p:spPr/>
+        <p:txBody>
+          <a:bodyPr/>
+          <a:lstStyle/>
+          <a:p>
+            <a:r>
+              <a:t>AWS-sourced (ACF M04) — teach IAM as the account's "who can do what." Use the components diagram.</a:t>
+            </a:r>
+          </a:p>
+          <a:p>
+            <a:r>
+              <a:t>Walk the four in order — user → group → role → policy — stressing the split: the first two are about</a:t>
+            </a:r>
+          </a:p>
+          <a:p>
+            <a:r>
+              <a:t>PEOPLE, the last two about PERMISSIONS.</a:t>
+            </a:r>
+          </a:p>
+          <a:p>
+            <a:r>
+              <a:t>• IAM user — one identity per person or app. Emphasise: never share a login; each person their own user</a:t>
+            </a:r>
+          </a:p>
+          <a:p>
+            <a:r>
+              <a:t>  (that is what gives you accountability and an audit trail).</a:t>
+            </a:r>
+          </a:p>
+          <a:p>
+            <a:r>
+              <a:t>• IAM group — how you manage permissions at scale: set permissions ONCE on the group, not per person.</a:t>
+            </a:r>
+          </a:p>
+          <a:p>
+            <a:r>
+              <a:t>  Analogy: a team like "Finance" — add someone and they inherit the access.</a:t>
+            </a:r>
+          </a:p>
+          <a:p>
+            <a:r>
+              <a:t>• IAM role — the one students find hardest. Unlike a user it has NO permanent credentials; it is ASSUMED</a:t>
+            </a:r>
+          </a:p>
+          <a:p>
+            <a:r>
+              <a:t>  temporarily. Key example for this build: an EC2 instance assumes a role to reach RDS/S3 — no passwords</a:t>
+            </a:r>
+          </a:p>
+          <a:p>
+            <a:r>
+              <a:t>  or keys stored on the server.</a:t>
+            </a:r>
+          </a:p>
+          <a:p>
+            <a:r>
+              <a:t>• IAM policy — the JSON that says what is allowed. Everything is DENIED by default; a policy grants. You</a:t>
+            </a:r>
+          </a:p>
+          <a:p>
+            <a:r>
+              <a:t>  attach policies to groups/roles, never the JSON straight onto a person.</a:t>
+            </a:r>
+          </a:p>
+          <a:p>
+            <a:r>
+              <a:t>Misconception to pre-empt: students conflate authentication (who you are = user) with authorisation</a:t>
+            </a:r>
+          </a:p>
+          <a:p>
+            <a:r>
+              <a:t>(what you can do = policy). Say both words out loud.</a:t>
+            </a:r>
+          </a:p>
+          <a:p>
+            <a:r>
+              <a:t>Question to pose: "The web server needs to read from S3 — do we give it a username and password?"</a:t>
+            </a:r>
+          </a:p>
+          <a:p>
+            <a:r>
+              <a:t>(No — a role. This sets up the next slides.)</a:t>
+            </a:r>
+          </a:p>
+          <a:p>
+            <a:r>
+              <a:t>UoC/AT2 tie: ICTCLD401 KE 8 + PC 1.5; this identity foundation is what the AT2 build is assessed on (A2);</a:t>
+            </a:r>
+          </a:p>
+          <a:p>
+            <a:r>
+              <a:t>the specific groups to build come two slides on.</a:t>
+            </a:r>
+          </a:p>
+        </p:txBody>
+      </p:sp>
+      <p:sp>
+        <p:nvSpPr>
+          <p:cNvPr id="4" name="Slide Number Placeholder 3"/>
+          <p:cNvSpPr>
+            <a:spLocks noGrp="1"/>
+          </p:cNvSpPr>
+          <p:nvPr>
+            <p:ph type="sldNum" idx="5" sz="quarter"/>
+          </p:nvPr>
+        </p:nvSpPr>
+        <p:spPr/>
+      </p:sp>
+    </p:spTree>
+  </p:cSld>
+  <p:clrMapOvr>
+    <a:masterClrMapping/>
+  </p:clrMapOvr>
+</p:notes>
+</file>
+
+<file path=ppt/notesSlides/notesSlide9.xml><?xml version="1.0" encoding="utf-8"?>
+<p:notes xmlns:a="http://schemas.openxmlformats.org/drawingml/2006/main" xmlns:p="http://schemas.openxmlformats.org/presentationml/2006/main" xmlns:r="http://schemas.openxmlformats.org/officeDocument/2006/relationships">
+  <p:cSld>
+    <p:spTree>
+      <p:nvGrpSpPr>
+        <p:cNvPr id="1" name=""/>
+        <p:cNvGrpSpPr/>
+        <p:nvPr/>
+      </p:nvGrpSpPr>
+      <p:grpSpPr>
+        <a:xfrm>
+          <a:off x="0" y="0"/>
+          <a:ext cx="0" cy="0"/>
+          <a:chOff x="0" y="0"/>
+          <a:chExt cx="0" cy="0"/>
+        </a:xfrm>
+      </p:grpSpPr>
+      <p:sp>
+        <p:nvSpPr>
+          <p:cNvPr id="2" name="Slide Image Placeholder 1"/>
+          <p:cNvSpPr>
+            <a:spLocks noGrp="1"/>
+          </p:cNvSpPr>
+          <p:nvPr>
+            <p:ph type="sldImg" idx="2"/>
+          </p:nvPr>
+        </p:nvSpPr>
+        <p:spPr/>
+      </p:sp>
+      <p:sp>
+        <p:nvSpPr>
+          <p:cNvPr id="3" name="Notes Placeholder 2"/>
+          <p:cNvSpPr>
+            <a:spLocks noGrp="1"/>
+          </p:cNvSpPr>
+          <p:nvPr>
+            <p:ph type="body" idx="3" sz="quarter"/>
+          </p:nvPr>
+        </p:nvSpPr>
+        <p:spPr/>
+        <p:txBody>
+          <a:bodyPr/>
+          <a:lstStyle/>
+          <a:p>
+            <a:r>
+              <a:t>AWS-sourced (ACF M04) — the rules that turn IAM components into a secure configuration. Teach as a checklist they'll apply.</a:t>
+            </a:r>
+          </a:p>
+          <a:p>
+            <a:r>
+              <a:t>• Attach policies to GROUPS, assign users to groups — never policy straight onto an individual. This is</a:t>
+            </a:r>
+          </a:p>
+          <a:p>
+            <a:r>
+              <a:t>  the manageability rule from the last slide, now stated as practice.</a:t>
+            </a:r>
+          </a:p>
+          <a:p>
+            <a:r>
+              <a:t>• Least privilege: grant only what the task needs; everything is denied by default, so you add exactly</a:t>
+            </a:r>
+          </a:p>
+          <a:p>
+            <a:r>
+              <a:t>  what's required and no more.</a:t>
+            </a:r>
+          </a:p>
+          <a:p>
+            <a:r>
+              <a:t>• MFA on human users; protect the root user (use it only when you must). Root is the master key — you</a:t>
+            </a:r>
+          </a:p>
+          <a:p>
+            <a:r>
+              <a:t>  lock it away, you don't build with it.</a:t>
+            </a:r>
+          </a:p>
+          <a:p>
+            <a:r>
+              <a:t>• Accent-bold: roles, NOT long-lived keys, for services — an EC2 instance ASSUMES a role to reach RDS/S3.</a:t>
+            </a:r>
+          </a:p>
+          <a:p>
+            <a:r>
+              <a:t>  This is the payoff of the "role has no password" point.</a:t>
+            </a:r>
+          </a:p>
+          <a:p>
+            <a:r>
+              <a:t>Misconception to pre-empt: "least privilege means I'll just grant AdministratorAccess to save time and</a:t>
+            </a:r>
+          </a:p>
+          <a:p>
+            <a:r>
+              <a:t>tighten it later." No — that IS the failure; you grant narrow from the start. Assessors look for it.</a:t>
+            </a:r>
+          </a:p>
+          <a:p>
+            <a:r>
+              <a:t>Question to pose: "Why attach the policy to the group and not to each user directly?" (set once, everyone</a:t>
+            </a:r>
+          </a:p>
+          <a:p>
+            <a:r>
+              <a:t>in the group inherits it; add/remove people without touching policies — manageable + auditable).</a:t>
+            </a:r>
+          </a:p>
+          <a:p>
+            <a:r>
+              <a:t>UoC/AT2 tie: ICTCLD401 PC 1.5 (access protocols/policies) + KE 8; these best practices are exactly what</a:t>
+            </a:r>
+          </a:p>
+          <a:p>
+            <a:r>
+              <a:t>the foundation-tier IAM build (A2) is marked against, incl. the Essential Eight MFA requirement.</a:t>
             </a:r>
           </a:p>
         </p:txBody>

--- a/S1-CL1-Cloud-Design-Build/delivery/topic_06/Topic_06_Slides.pptx
+++ b/S1-CL1-Cloud-Design-Build/delivery/topic_06/Topic_06_Slides.pptx
@@ -540,7 +540,7 @@
           </a:p>
           <a:p>
             <a:r>
-              <a:t>  faithfully, resist the urge to redesign it. This is a new professional posture.</a:t>
+              <a:t>faithfully, resist the urge to redesign it. This is a new professional posture.</a:t>
             </a:r>
           </a:p>
           <a:p>
@@ -550,7 +550,7 @@
           </a:p>
           <a:p>
             <a:r>
-              <a:t>  what they screenshot live — you cannot reconstruct it after the fact.</a:t>
+              <a:t>what they screenshot live — you cannot reconstruct it after the fact.</a:t>
             </a:r>
           </a:p>
           <a:p>
@@ -560,7 +560,7 @@
           </a:p>
           <a:p>
             <a:r>
-              <a:t>  responsibility. Network, compute and the report come in Topics 7–10.</a:t>
+              <a:t>responsibility. Network, compute and the report come in Topics 7–10.</a:t>
             </a:r>
           </a:p>
           <a:p>
@@ -675,22 +675,22 @@
           </a:p>
           <a:p>
             <a:r>
-              <a:t>  - YAT-ICT-Admins — read-only infra + console AFTER handover (YAT runs it once MTS leaves).</a:t>
-            </a:r>
-          </a:p>
-          <a:p>
-            <a:r>
-              <a:t>  - MTS-Consultants — build admin (the consultants doing the work now).</a:t>
-            </a:r>
-          </a:p>
-          <a:p>
-            <a:r>
-              <a:t>  - Application-Service — the EC2 INSTANCE ROLE (not a human group) — RDS + S3 + CloudWatch access.</a:t>
-            </a:r>
-          </a:p>
-          <a:p>
-            <a:r>
-              <a:t>  - Finance-Auditors — read-only on logs / metrics / configs.</a:t>
+              <a:t>- YAT-ICT-Admins — read-only infra + console AFTER handover (YAT runs it once MTS leaves).</a:t>
+            </a:r>
+          </a:p>
+          <a:p>
+            <a:r>
+              <a:t>- MTS-Consultants — build admin (the consultants doing the work now).</a:t>
+            </a:r>
+          </a:p>
+          <a:p>
+            <a:r>
+              <a:t>- Application-Service — the EC2 INSTANCE ROLE (not a human group) — RDS + S3 + CloudWatch access.</a:t>
+            </a:r>
+          </a:p>
+          <a:p>
+            <a:r>
+              <a:t>- Finance-Auditors — read-only on logs / metrics / configs.</a:t>
             </a:r>
           </a:p>
           <a:p>
@@ -705,7 +705,7 @@
           </a:p>
           <a:p>
             <a:r>
-              <a:t>  person to. It exists so the server can reach other services without stored credentials.</a:t>
+              <a:t>person to. It exists so the server can reach other services without stored credentials.</a:t>
             </a:r>
           </a:p>
           <a:p>
@@ -857,7 +857,7 @@
           </a:p>
           <a:p>
             <a:r>
-              <a:t>  requirement they're assessed on.</a:t>
+              <a:t>requirement they're assessed on.</a:t>
             </a:r>
           </a:p>
           <a:p>
@@ -867,7 +867,7 @@
           </a:p>
           <a:p>
             <a:r>
-              <a:t>  This is the payoff of the "IAM components" teaching slide.</a:t>
+              <a:t>This is the payoff of the "IAM components" teaching slide.</a:t>
             </a:r>
           </a:p>
           <a:p>
@@ -1004,7 +1004,7 @@
           </a:p>
           <a:p>
             <a:r>
-              <a:t>   is the EC2 ROLE, not a human group), Finance-Auditors.</a:t>
+              <a:t>is the EC2 ROLE, not a human group), Finance-Auditors.</a:t>
             </a:r>
           </a:p>
           <a:p>
@@ -1144,12 +1144,12 @@
           </a:p>
           <a:p>
             <a:r>
-              <a:t>  network, the virtualisation infrastructure. YOU handle security IN the cloud — the EC2 OS (patching),</a:t>
-            </a:r>
-          </a:p>
-          <a:p>
-            <a:r>
-              <a:t>  your applications, security-group config, IAM, account management, and your DATA.</a:t>
+              <a:t>network, the virtualisation infrastructure. YOU handle security IN the cloud — the EC2 OS (patching),</a:t>
+            </a:r>
+          </a:p>
+          <a:p>
+            <a:r>
+              <a:t>your applications, security-group config, IAM, account management, and your DATA.</a:t>
             </a:r>
           </a:p>
           <a:p>
@@ -1159,7 +1159,7 @@
           </a:p>
           <a:p>
             <a:r>
-              <a:t>  RELY ON. That's the whole practical value of the model.</a:t>
+              <a:t>RELY ON. That's the whole practical value of the model.</a:t>
             </a:r>
           </a:p>
           <a:p>
@@ -1169,7 +1169,7 @@
           </a:p>
           <a:p>
             <a:r>
-              <a:t>  last two slides mattered.</a:t>
+              <a:t>last two slides mattered.</a:t>
             </a:r>
           </a:p>
           <a:p>
@@ -1279,7 +1279,7 @@
           </a:p>
           <a:p>
             <a:r>
-              <a:t>  maximum responsibility.</a:t>
+              <a:t>maximum responsibility.</a:t>
             </a:r>
           </a:p>
           <a:p>
@@ -1289,7 +1289,7 @@
           </a:p>
           <a:p>
             <a:r>
-              <a:t>  line has shifted toward AWS.</a:t>
+              <a:t>line has shifted toward AWS.</a:t>
             </a:r>
           </a:p>
           <a:p>
@@ -1299,7 +1299,7 @@
           </a:p>
           <a:p>
             <a:r>
-              <a:t>  IaaS/PaaS spectrum from Topic 1 now expressed as a security boundary.</a:t>
+              <a:t>IaaS/PaaS spectrum from Topic 1 now expressed as a security boundary.</a:t>
             </a:r>
           </a:p>
           <a:p>
@@ -1409,7 +1409,7 @@
           </a:p>
           <a:p>
             <a:r>
-              <a:t>  · end-users. Four possible owners, not two.</a:t>
+              <a:t>· end-users. Four possible owners, not two.</a:t>
             </a:r>
           </a:p>
           <a:p>
@@ -1419,7 +1419,7 @@
           </a:p>
           <a:p>
             <a:r>
-              <a:t>  it, not invent it (the working-to-a-design discipline again).</a:t>
+              <a:t>it, not invent it (the working-to-a-design discipline again).</a:t>
             </a:r>
           </a:p>
           <a:p>
@@ -1429,7 +1429,7 @@
           </a:p>
           <a:p>
             <a:r>
-              <a:t>  SG config at build time. Note how the owner changes by both service AND lifecycle stage (build vs run).</a:t>
+              <a:t>SG config at build time. Note how the owner changes by both service AND lifecycle stage (build vs run).</a:t>
             </a:r>
           </a:p>
           <a:p>
@@ -1684,7 +1684,7 @@
           </a:p>
           <a:p>
             <a:r>
-              <a:t>  DESIGN → the delivery crew BUILDS it. Three distinct roles, one hand-off line between each.</a:t>
+              <a:t>DESIGN → the delivery crew BUILDS it. Three distinct roles, one hand-off line between each.</a:t>
             </a:r>
           </a:p>
           <a:p>
@@ -1694,7 +1694,7 @@
           </a:p>
           <a:p>
             <a:r>
-              <a:t>  job starts at "build it," not "decide it."</a:t>
+              <a:t>job starts at "build it," not "decide it."</a:t>
             </a:r>
           </a:p>
           <a:p>
@@ -1704,7 +1704,7 @@
           </a:p>
           <a:p>
             <a:r>
-              <a:t>  chain and execute. Same engagement, different seat.</a:t>
+              <a:t>chain and execute. Same engagement, different seat.</a:t>
             </a:r>
           </a:p>
           <a:p>
@@ -1814,7 +1814,7 @@
           </a:p>
           <a:p>
             <a:r>
-              <a:t>  document you have only skimmed the first page of.</a:t>
+              <a:t>document you have only skimmed the first page of.</a:t>
             </a:r>
           </a:p>
           <a:p>
@@ -1824,7 +1824,7 @@
           </a:p>
           <a:p>
             <a:r>
-              <a:t>  deliberately LEAVES OPEN — the implementer decisions (labelled C1–C8 in the supplied design).</a:t>
+              <a:t>deliberately LEAVES OPEN — the implementer decisions (labelled C1–C8 in the supplied design).</a:t>
             </a:r>
           </a:p>
           <a:p>
@@ -1834,7 +1834,7 @@
           </a:p>
           <a:p>
             <a:r>
-              <a:t>  Everywhere else, deviating from the design is an error, not initiative.</a:t>
+              <a:t>Everywhere else, deviating from the design is an error, not initiative.</a:t>
             </a:r>
           </a:p>
           <a:p>
@@ -1944,7 +1944,7 @@
           </a:p>
           <a:p>
             <a:r>
-              <a:t>  resource lands in the wrong place.</a:t>
+              <a:t>resource lands in the wrong place.</a:t>
             </a:r>
           </a:p>
           <a:p>
@@ -1954,7 +1954,7 @@
           </a:p>
           <a:p>
             <a:r>
-              <a:t>  This is the residency driver from Topic 1 now being BUILT, not just argued.</a:t>
+              <a:t>This is the residency driver from Topic 1 now being BUILT, not just argued.</a:t>
             </a:r>
           </a:p>
           <a:p>
@@ -1964,12 +1964,12 @@
           </a:p>
           <a:p>
             <a:r>
-              <a:t>  [scenario: ap-southeast-2 (Sydney) | deploy: us-east-1]. Same build; only the location label changes.</a:t>
-            </a:r>
-          </a:p>
-          <a:p>
-            <a:r>
-              <a:t>  Set the console Region before creating anything.</a:t>
+              <a:t>[scenario: ap-southeast-2 (Sydney) | deploy: us-east-1]. Same build; only the location label changes.</a:t>
+            </a:r>
+          </a:p>
+          <a:p>
+            <a:r>
+              <a:t>Set the console Region before creating anything.</a:t>
             </a:r>
           </a:p>
           <a:p>
@@ -1979,7 +1979,7 @@
           </a:p>
           <a:p>
             <a:r>
-              <a:t>  every screenshot — the assessor checks it matches.</a:t>
+              <a:t>every screenshot — the assessor checks it matches.</a:t>
             </a:r>
           </a:p>
           <a:p>
@@ -2089,7 +2089,7 @@
           </a:p>
           <a:p>
             <a:r>
-              <a:t>  and reconstruct a screenshot of a resource you built an hour ago in a state you've since changed.</a:t>
+              <a:t>and reconstruct a screenshot of a resource you built an hour ago in a state you've since changed.</a:t>
             </a:r>
           </a:p>
           <a:p>
@@ -2099,7 +2099,7 @@
           </a:p>
           <a:p>
             <a:r>
-              <a:t>  with the Region + the named resource visible in frame.</a:t>
+              <a:t>with the Region + the named resource visible in frame.</a:t>
             </a:r>
           </a:p>
           <a:p>
@@ -2225,7 +2225,7 @@
           </a:p>
           <a:p>
             <a:r>
-              <a:t>   [scenario: ap-southeast-2 (Sydney) | deploy: us-east-1]. Say the substitution out loud as you do it.</a:t>
+              <a:t>[scenario: ap-southeast-2 (Sydney) | deploy: us-east-1]. Say the substitution out loud as you do it.</a:t>
             </a:r>
           </a:p>
           <a:p>
@@ -2383,7 +2383,7 @@
           </a:p>
           <a:p>
             <a:r>
-              <a:t>   confirm it in your evidence.</a:t>
+              <a:t>confirm it in your evidence.</a:t>
             </a:r>
           </a:p>
           <a:p>
@@ -2523,7 +2523,7 @@
           </a:p>
           <a:p>
             <a:r>
-              <a:t>  (that is what gives you accountability and an audit trail).</a:t>
+              <a:t>(that is what gives you accountability and an audit trail).</a:t>
             </a:r>
           </a:p>
           <a:p>
@@ -2533,7 +2533,7 @@
           </a:p>
           <a:p>
             <a:r>
-              <a:t>  Analogy: a team like "Finance" — add someone and they inherit the access.</a:t>
+              <a:t>Analogy: a team like "Finance" — add someone and they inherit the access.</a:t>
             </a:r>
           </a:p>
           <a:p>
@@ -2543,12 +2543,12 @@
           </a:p>
           <a:p>
             <a:r>
-              <a:t>  temporarily. Key example for this build: an EC2 instance assumes a role to reach RDS/S3 — no passwords</a:t>
-            </a:r>
-          </a:p>
-          <a:p>
-            <a:r>
-              <a:t>  or keys stored on the server.</a:t>
+              <a:t>temporarily. Key example for this build: an EC2 instance assumes a role to reach RDS/S3 — no passwords</a:t>
+            </a:r>
+          </a:p>
+          <a:p>
+            <a:r>
+              <a:t>or keys stored on the server.</a:t>
             </a:r>
           </a:p>
           <a:p>
@@ -2558,7 +2558,7 @@
           </a:p>
           <a:p>
             <a:r>
-              <a:t>  attach policies to groups/roles, never the JSON straight onto a person.</a:t>
+              <a:t>attach policies to groups/roles, never the JSON straight onto a person.</a:t>
             </a:r>
           </a:p>
           <a:p>
@@ -2668,7 +2668,7 @@
           </a:p>
           <a:p>
             <a:r>
-              <a:t>  the manageability rule from the last slide, now stated as practice.</a:t>
+              <a:t>the manageability rule from the last slide, now stated as practice.</a:t>
             </a:r>
           </a:p>
           <a:p>
@@ -2678,7 +2678,7 @@
           </a:p>
           <a:p>
             <a:r>
-              <a:t>  what's required and no more.</a:t>
+              <a:t>what's required and no more.</a:t>
             </a:r>
           </a:p>
           <a:p>
@@ -2688,7 +2688,7 @@
           </a:p>
           <a:p>
             <a:r>
-              <a:t>  lock it away, you don't build with it.</a:t>
+              <a:t>lock it away, you don't build with it.</a:t>
             </a:r>
           </a:p>
           <a:p>
@@ -2698,7 +2698,7 @@
           </a:p>
           <a:p>
             <a:r>
-              <a:t>  This is the payoff of the "role has no password" point.</a:t>
+              <a:t>This is the payoff of the "role has no password" point.</a:t>
             </a:r>
           </a:p>
           <a:p>
@@ -7478,16 +7478,16 @@
             <a:r>
               <a:rPr sz="2400" b="1" i="0">
                 <a:solidFill>
-                  <a:srgbClr val="27B5CE"/>
+                  <a:srgbClr val="EDAB0C"/>
                 </a:solidFill>
                 <a:latin typeface="Roboto"/>
               </a:rPr>
               <a:t>■  </a:t>
             </a:r>
             <a:r>
-              <a:rPr sz="2400" b="1" i="0">
-                <a:solidFill>
-                  <a:srgbClr val="27B5CE"/>
+              <a:rPr sz="2400" b="0" i="0">
+                <a:solidFill>
+                  <a:srgbClr val="2A2929"/>
                 </a:solidFill>
                 <a:latin typeface="Roboto"/>
               </a:rPr>
@@ -7898,16 +7898,16 @@
             <a:r>
               <a:rPr sz="2400" b="1" i="0">
                 <a:solidFill>
-                  <a:srgbClr val="27B5CE"/>
+                  <a:srgbClr val="EDAB0C"/>
                 </a:solidFill>
                 <a:latin typeface="Roboto"/>
               </a:rPr>
               <a:t>■  </a:t>
             </a:r>
             <a:r>
-              <a:rPr sz="2400" b="1" i="0">
-                <a:solidFill>
-                  <a:srgbClr val="27B5CE"/>
+              <a:rPr sz="2400" b="0" i="0">
+                <a:solidFill>
+                  <a:srgbClr val="2A2929"/>
                 </a:solidFill>
                 <a:latin typeface="Roboto"/>
               </a:rPr>
@@ -8744,7 +8744,7 @@
               <a:t>■  </a:t>
             </a:r>
             <a:r>
-              <a:rPr sz="1700" b="1" i="0">
+              <a:rPr sz="1700" b="0" i="0">
                 <a:solidFill>
                   <a:srgbClr val="2A2929"/>
                 </a:solidFill>
@@ -10189,16 +10189,16 @@
             <a:r>
               <a:rPr sz="1700" b="1" i="0">
                 <a:solidFill>
-                  <a:srgbClr val="205F61"/>
+                  <a:srgbClr val="EDAB0C"/>
                 </a:solidFill>
                 <a:latin typeface="Roboto"/>
               </a:rPr>
               <a:t>■  </a:t>
             </a:r>
             <a:r>
-              <a:rPr sz="1700" b="1" i="0">
-                <a:solidFill>
-                  <a:srgbClr val="205F61"/>
+              <a:rPr sz="1700" b="0" i="0">
+                <a:solidFill>
+                  <a:srgbClr val="2A2929"/>
                 </a:solidFill>
                 <a:latin typeface="Roboto"/>
               </a:rPr>
@@ -10540,16 +10540,16 @@
             <a:r>
               <a:rPr sz="2400" b="1" i="0">
                 <a:solidFill>
-                  <a:srgbClr val="92268F"/>
+                  <a:srgbClr val="EDAB0C"/>
                 </a:solidFill>
                 <a:latin typeface="Roboto"/>
               </a:rPr>
               <a:t>■  </a:t>
             </a:r>
             <a:r>
-              <a:rPr sz="2400" b="1" i="0">
-                <a:solidFill>
-                  <a:srgbClr val="92268F"/>
+              <a:rPr sz="2400" b="0" i="0">
+                <a:solidFill>
+                  <a:srgbClr val="2A2929"/>
                 </a:solidFill>
                 <a:latin typeface="Roboto"/>
               </a:rPr>
@@ -10991,16 +10991,16 @@
             <a:r>
               <a:rPr sz="2400" b="1" i="0">
                 <a:solidFill>
-                  <a:srgbClr val="205F61"/>
+                  <a:srgbClr val="EDAB0C"/>
                 </a:solidFill>
                 <a:latin typeface="Roboto"/>
               </a:rPr>
               <a:t>■  </a:t>
             </a:r>
             <a:r>
-              <a:rPr sz="2400" b="1" i="0">
-                <a:solidFill>
-                  <a:srgbClr val="205F61"/>
+              <a:rPr sz="2400" b="0" i="0">
+                <a:solidFill>
+                  <a:srgbClr val="2A2929"/>
                 </a:solidFill>
                 <a:latin typeface="Roboto"/>
               </a:rPr>
@@ -11673,9 +11673,9 @@
               <a:t>■  </a:t>
             </a:r>
             <a:r>
-              <a:rPr sz="1700" b="0" i="1">
-                <a:solidFill>
-                  <a:srgbClr val="484848"/>
+              <a:rPr sz="1700" b="0" i="0">
+                <a:solidFill>
+                  <a:srgbClr val="2A2929"/>
                 </a:solidFill>
                 <a:latin typeface="Roboto"/>
               </a:rPr>
@@ -11704,7 +11704,7 @@
               <a:t>■  </a:t>
             </a:r>
             <a:r>
-              <a:rPr sz="1700" b="1" i="0">
+              <a:rPr sz="1700" b="0" i="0">
                 <a:solidFill>
                   <a:srgbClr val="2A2929"/>
                 </a:solidFill>
@@ -13310,16 +13310,16 @@
             <a:r>
               <a:rPr sz="1700" b="1" i="0">
                 <a:solidFill>
-                  <a:srgbClr val="92268F"/>
+                  <a:srgbClr val="EDAB0C"/>
                 </a:solidFill>
                 <a:latin typeface="Roboto"/>
               </a:rPr>
               <a:t>■  </a:t>
             </a:r>
             <a:r>
-              <a:rPr sz="1700" b="1" i="0">
-                <a:solidFill>
-                  <a:srgbClr val="92268F"/>
+              <a:rPr sz="1700" b="0" i="0">
+                <a:solidFill>
+                  <a:srgbClr val="2A2929"/>
                 </a:solidFill>
                 <a:latin typeface="Roboto"/>
               </a:rPr>
@@ -13692,16 +13692,16 @@
             <a:r>
               <a:rPr sz="2400" b="1" i="0">
                 <a:solidFill>
-                  <a:srgbClr val="92268F"/>
+                  <a:srgbClr val="EDAB0C"/>
                 </a:solidFill>
                 <a:latin typeface="Roboto"/>
               </a:rPr>
               <a:t>■  </a:t>
             </a:r>
             <a:r>
-              <a:rPr sz="2400" b="1" i="0">
-                <a:solidFill>
-                  <a:srgbClr val="92268F"/>
+              <a:rPr sz="2400" b="0" i="0">
+                <a:solidFill>
+                  <a:srgbClr val="2A2929"/>
                 </a:solidFill>
                 <a:latin typeface="Roboto"/>
               </a:rPr>
@@ -14112,16 +14112,16 @@
             <a:r>
               <a:rPr sz="2200" b="1" i="0">
                 <a:solidFill>
-                  <a:srgbClr val="92268F"/>
+                  <a:srgbClr val="EDAB0C"/>
                 </a:solidFill>
                 <a:latin typeface="Roboto"/>
               </a:rPr>
               <a:t>■  </a:t>
             </a:r>
             <a:r>
-              <a:rPr sz="2200" b="1" i="0">
-                <a:solidFill>
-                  <a:srgbClr val="92268F"/>
+              <a:rPr sz="2200" b="0" i="0">
+                <a:solidFill>
+                  <a:srgbClr val="2A2929"/>
                 </a:solidFill>
                 <a:latin typeface="Roboto"/>
               </a:rPr>
@@ -14485,16 +14485,16 @@
             <a:r>
               <a:rPr sz="2400" b="1" i="0">
                 <a:solidFill>
-                  <a:srgbClr val="92268F"/>
+                  <a:srgbClr val="EDAB0C"/>
                 </a:solidFill>
                 <a:latin typeface="Roboto"/>
               </a:rPr>
               <a:t>■  </a:t>
             </a:r>
             <a:r>
-              <a:rPr sz="2400" b="1" i="0">
-                <a:solidFill>
-                  <a:srgbClr val="92268F"/>
+              <a:rPr sz="2400" b="0" i="0">
+                <a:solidFill>
+                  <a:srgbClr val="2A2929"/>
                 </a:solidFill>
                 <a:latin typeface="Roboto"/>
               </a:rPr>
@@ -15331,7 +15331,7 @@
               <a:t>■  </a:t>
             </a:r>
             <a:r>
-              <a:rPr sz="1700" b="1" i="0">
+              <a:rPr sz="1700" b="0" i="0">
                 <a:solidFill>
                   <a:srgbClr val="2A2929"/>
                 </a:solidFill>

--- a/S1-CL1-Cloud-Design-Build/delivery/topic_06/Topic_06_Slides.pptx
+++ b/S1-CL1-Cloud-Design-Build/delivery/topic_06/Topic_06_Slides.pptx
@@ -7,12 +7,12 @@
   <p:sldIdLst>
     <p:sldId id="256" r:id="rId7"/>
     <p:sldId id="257" r:id="rId8"/>
-    <p:sldId id="258" r:id="rId10"/>
-    <p:sldId id="259" r:id="rId11"/>
-    <p:sldId id="260" r:id="rId12"/>
-    <p:sldId id="261" r:id="rId13"/>
-    <p:sldId id="262" r:id="rId14"/>
-    <p:sldId id="263" r:id="rId15"/>
+    <p:sldId id="258" r:id="rId9"/>
+    <p:sldId id="259" r:id="rId10"/>
+    <p:sldId id="260" r:id="rId11"/>
+    <p:sldId id="261" r:id="rId12"/>
+    <p:sldId id="262" r:id="rId13"/>
+    <p:sldId id="263" r:id="rId14"/>
     <p:sldId id="264" r:id="rId16"/>
     <p:sldId id="265" r:id="rId17"/>
     <p:sldId id="266" r:id="rId18"/>
@@ -525,1086 +525,12 @@
           <a:lstStyle/>
           <a:p>
             <a:r>
-              <a:t>Frame this as the pivot of the whole cluster — AT1 was advice on paper; AT2 is a build in AWS.</a:t>
-            </a:r>
-          </a:p>
-          <a:p>
-            <a:r>
-              <a:t>Set the mode, don't teach IAM yet.</a:t>
-            </a:r>
-          </a:p>
-          <a:p>
-            <a:r>
-              <a:t>• The shift (bolded line): they now work to a design they did NOT write — read it, build it</a:t>
-            </a:r>
-          </a:p>
-          <a:p>
-            <a:r>
-              <a:t>faithfully, resist the urge to redesign it. This is a new professional posture.</a:t>
-            </a:r>
-          </a:p>
-          <a:p>
-            <a:r>
-              <a:t>• The second new discipline: capture evidence AS they build. The Deployment Report is made from</a:t>
-            </a:r>
-          </a:p>
-          <a:p>
-            <a:r>
-              <a:t>what they screenshot live — you cannot reconstruct it after the fact.</a:t>
-            </a:r>
-          </a:p>
-          <a:p>
-            <a:r>
-              <a:t>• Scope this Topic: the FOUNDATION tier only — account &amp; Region, identity &amp; access, shared</a:t>
-            </a:r>
-          </a:p>
-          <a:p>
-            <a:r>
-              <a:t>responsibility. Network, compute and the report come in Topics 7–10.</a:t>
-            </a:r>
-          </a:p>
-          <a:p>
-            <a:r>
-              <a:t>• Set the rhythm for every AWS task today: watch the demo, THEN do it yourself.</a:t>
-            </a:r>
-          </a:p>
-          <a:p>
-            <a:r>
-              <a:t>Misconception to pre-empt: "we're finally free to build whatever we think is best." No — the whole</a:t>
-            </a:r>
-          </a:p>
-          <a:p>
-            <a:r>
-              <a:t>skill being assessed is faithful implementation of a supplied design, not invention.</a:t>
-            </a:r>
-          </a:p>
-          <a:p>
-            <a:r>
-              <a:t>Question to pose: "What changes about your job when the design is already written and handed to you?"</a:t>
-            </a:r>
-          </a:p>
-          <a:p>
-            <a:r>
-              <a:t>(you become the builder/implementer, and your judgement shows in the open decisions + the evidence).</a:t>
-            </a:r>
-          </a:p>
-          <a:p>
-            <a:r>
-              <a:t>UoC/AT2 tie: opens the AT2 arc — ICTCLD401 (primary) + ICTCLD502 (partial); everything today feeds</a:t>
-            </a:r>
-          </a:p>
-          <a:p>
-            <a:r>
-              <a:t>the foundation-tier build narrative (criterion A2) + the evidence appendices (A9/A10).</a:t>
-            </a:r>
-          </a:p>
-        </p:txBody>
-      </p:sp>
-      <p:sp>
-        <p:nvSpPr>
-          <p:cNvPr id="4" name="Slide Number Placeholder 3"/>
-          <p:cNvSpPr>
-            <a:spLocks noGrp="1"/>
-          </p:cNvSpPr>
-          <p:nvPr>
-            <p:ph type="sldNum" idx="5" sz="quarter"/>
-          </p:nvPr>
-        </p:nvSpPr>
-        <p:spPr/>
-      </p:sp>
-    </p:spTree>
-  </p:cSld>
-  <p:clrMapOvr>
-    <a:masterClrMapping/>
-  </p:clrMapOvr>
-</p:notes>
-</file>
-
-<file path=ppt/notesSlides/notesSlide10.xml><?xml version="1.0" encoding="utf-8"?>
-<p:notes xmlns:a="http://schemas.openxmlformats.org/drawingml/2006/main" xmlns:p="http://schemas.openxmlformats.org/presentationml/2006/main" xmlns:r="http://schemas.openxmlformats.org/officeDocument/2006/relationships">
-  <p:cSld>
-    <p:spTree>
-      <p:nvGrpSpPr>
-        <p:cNvPr id="1" name=""/>
-        <p:cNvGrpSpPr/>
-        <p:nvPr/>
-      </p:nvGrpSpPr>
-      <p:grpSpPr>
-        <a:xfrm>
-          <a:off x="0" y="0"/>
-          <a:ext cx="0" cy="0"/>
-          <a:chOff x="0" y="0"/>
-          <a:chExt cx="0" cy="0"/>
-        </a:xfrm>
-      </p:grpSpPr>
-      <p:sp>
-        <p:nvSpPr>
-          <p:cNvPr id="2" name="Slide Image Placeholder 1"/>
-          <p:cNvSpPr>
-            <a:spLocks noGrp="1"/>
-          </p:cNvSpPr>
-          <p:nvPr>
-            <p:ph type="sldImg" idx="2"/>
-          </p:nvPr>
-        </p:nvSpPr>
-        <p:spPr/>
-      </p:sp>
-      <p:sp>
-        <p:nvSpPr>
-          <p:cNvPr id="3" name="Notes Placeholder 2"/>
-          <p:cNvSpPr>
-            <a:spLocks noGrp="1"/>
-          </p:cNvSpPr>
-          <p:nvPr>
-            <p:ph type="body" idx="3" sz="quarter"/>
-          </p:nvPr>
-        </p:nvSpPr>
-        <p:spPr/>
-        <p:txBody>
-          <a:bodyPr/>
-          <a:lstStyle/>
-          <a:p>
-            <a:r>
-              <a:t>The design made concrete — teach the FOUR groups + role they must build, and why each exists. This is the spec for the activity.</a:t>
-            </a:r>
-          </a:p>
-          <a:p>
-            <a:r>
-              <a:t>• Walk each with its purpose (don't just read names):</a:t>
-            </a:r>
-          </a:p>
-          <a:p>
-            <a:r>
-              <a:t>- YAT-ICT-Admins — read-only infra + console AFTER handover (YAT runs it once MTS leaves).</a:t>
-            </a:r>
-          </a:p>
-          <a:p>
-            <a:r>
-              <a:t>- MTS-Consultants — build admin (the consultants doing the work now).</a:t>
-            </a:r>
-          </a:p>
-          <a:p>
-            <a:r>
-              <a:t>- Application-Service — the EC2 INSTANCE ROLE (not a human group) — RDS + S3 + CloudWatch access.</a:t>
-            </a:r>
-          </a:p>
-          <a:p>
-            <a:r>
-              <a:t>- Finance-Auditors — read-only on logs / metrics / configs.</a:t>
-            </a:r>
-          </a:p>
-          <a:p>
-            <a:r>
-              <a:t>• Accent-bold: enforce MFA on the human groups — an Essential Eight requirement they're assessed on.</a:t>
-            </a:r>
-          </a:p>
-          <a:p>
-            <a:r>
-              <a:t>• Flag the trap: Application-Service is a ROLE, not a user group — it's the one students try to add a</a:t>
-            </a:r>
-          </a:p>
-          <a:p>
-            <a:r>
-              <a:t>person to. It exists so the server can reach other services without stored credentials.</a:t>
-            </a:r>
-          </a:p>
-          <a:p>
-            <a:r>
-              <a:t>Misconception to pre-empt: that all four are the same KIND of thing. Three are human groups; one is a</a:t>
-            </a:r>
-          </a:p>
-          <a:p>
-            <a:r>
-              <a:t>service role — different creation path, different purpose.</a:t>
-            </a:r>
-          </a:p>
-          <a:p>
-            <a:r>
-              <a:t>Question to pose: "Why does YAT-ICT-Admins get read-only, when they'll own the system after handover?"</a:t>
-            </a:r>
-          </a:p>
-          <a:p>
-            <a:r>
-              <a:t>(least privilege during the build; they get operational access at handover, not build access now).</a:t>
-            </a:r>
-          </a:p>
-          <a:p>
-            <a:r>
-              <a:t>UoC/AT2 tie: ICTCLD401 PC 1.6 (configure users/groups/permissions) + PC 2.1 (create users/groups) +</a:t>
-            </a:r>
-          </a:p>
-          <a:p>
-            <a:r>
-              <a:t>PC 1.7 (assign security responsibilities); this exact model is what the A2 IAM build is scored on.</a:t>
-            </a:r>
-          </a:p>
-        </p:txBody>
-      </p:sp>
-      <p:sp>
-        <p:nvSpPr>
-          <p:cNvPr id="4" name="Slide Number Placeholder 3"/>
-          <p:cNvSpPr>
-            <a:spLocks noGrp="1"/>
-          </p:cNvSpPr>
-          <p:nvPr>
-            <p:ph type="sldNum" idx="5" sz="quarter"/>
-          </p:nvPr>
-        </p:nvSpPr>
-        <p:spPr/>
-      </p:sp>
-    </p:spTree>
-  </p:cSld>
-  <p:clrMapOvr>
-    <a:masterClrMapping/>
-  </p:clrMapOvr>
-</p:notes>
-</file>
-
-<file path=ppt/notesSlides/notesSlide11.xml><?xml version="1.0" encoding="utf-8"?>
-<p:notes xmlns:a="http://schemas.openxmlformats.org/drawingml/2006/main" xmlns:p="http://schemas.openxmlformats.org/presentationml/2006/main" xmlns:r="http://schemas.openxmlformats.org/officeDocument/2006/relationships">
-  <p:cSld>
-    <p:spTree>
-      <p:nvGrpSpPr>
-        <p:cNvPr id="1" name=""/>
-        <p:cNvGrpSpPr/>
-        <p:nvPr/>
-      </p:nvGrpSpPr>
-      <p:grpSpPr>
-        <a:xfrm>
-          <a:off x="0" y="0"/>
-          <a:ext cx="0" cy="0"/>
-          <a:chOff x="0" y="0"/>
-          <a:chExt cx="0" cy="0"/>
-        </a:xfrm>
-      </p:grpSpPr>
-      <p:sp>
-        <p:nvSpPr>
-          <p:cNvPr id="2" name="Slide Image Placeholder 1"/>
-          <p:cNvSpPr>
-            <a:spLocks noGrp="1"/>
-          </p:cNvSpPr>
-          <p:nvPr>
-            <p:ph type="sldImg" idx="2"/>
-          </p:nvPr>
-        </p:nvSpPr>
-        <p:spPr/>
-      </p:sp>
-      <p:sp>
-        <p:nvSpPr>
-          <p:cNvPr id="3" name="Notes Placeholder 2"/>
-          <p:cNvSpPr>
-            <a:spLocks noGrp="1"/>
-          </p:cNvSpPr>
-          <p:nvPr>
-            <p:ph type="body" idx="3" sz="quarter"/>
-          </p:nvPr>
-        </p:nvSpPr>
-        <p:spPr/>
-        <p:txBody>
-          <a:bodyPr/>
-          <a:lstStyle/>
-          <a:p>
-            <a:r>
-              <a:t>DEMONSTRATION (recorded demo available). Screen it, then relate each step to OUR build. Then they</a:t>
-            </a:r>
-          </a:p>
-          <a:p>
-            <a:r>
-              <a:t>replicate on the next slide.</a:t>
-            </a:r>
-          </a:p>
-          <a:p/>
-          <a:p>
-            <a:r>
-              <a:t>WHAT TO DEMONSTRATE (follow the recorded demo, then tie each step to the Accounting build):</a:t>
-            </a:r>
-          </a:p>
-          <a:p>
-            <a:r>
-              <a:t>1. Create a group and attach a least-privilege policy.</a:t>
-            </a:r>
-          </a:p>
-          <a:p>
-            <a:r>
-              <a:t>2. Create a user, add them to the group, enable MFA.</a:t>
-            </a:r>
-          </a:p>
-          <a:p>
-            <a:r>
-              <a:t>3. Create the EC2 instance role (Application-Service) and attach its policy.</a:t>
-            </a:r>
-          </a:p>
-          <a:p>
-            <a:r>
-              <a:t>4. Capture the IAM evidence screenshot (groups list + a user showing MFA enabled).</a:t>
-            </a:r>
-          </a:p>
-          <a:p/>
-          <a:p>
-            <a:r>
-              <a:t>WHAT TO EMPHASISE:</a:t>
-            </a:r>
-          </a:p>
-          <a:p>
-            <a:r>
-              <a:t>• Permissions go on the GROUP, then the user joins it — not policy-on-user. Show the difference explicitly.</a:t>
-            </a:r>
-          </a:p>
-          <a:p>
-            <a:r>
-              <a:t>• MFA — show the "assign MFA device" step; students routinely skip it and it's an Essential Eight</a:t>
-            </a:r>
-          </a:p>
-          <a:p>
-            <a:r>
-              <a:t>requirement they're assessed on.</a:t>
-            </a:r>
-          </a:p>
-          <a:p>
-            <a:r>
-              <a:t>• The role has NO password — point out there are no long-lived credentials; the instance assumes it.</a:t>
-            </a:r>
-          </a:p>
-          <a:p>
-            <a:r>
-              <a:t>This is the payoff of the "IAM components" teaching slide.</a:t>
-            </a:r>
-          </a:p>
-          <a:p>
-            <a:r>
-              <a:t>• Narrate the evidence capture — students must screenshot as they go for AT2; model it here.</a:t>
-            </a:r>
-          </a:p>
-          <a:p/>
-          <a:p>
-            <a:r>
-              <a:t>PREP: clean lab account open, the Accounting Baseline Design handy (for the group names), recorded demo</a:t>
-            </a:r>
-          </a:p>
-          <a:p>
-            <a:r>
-              <a:t>queued. ~8–10 min to screen + narrate before the activity.</a:t>
-            </a:r>
-          </a:p>
-          <a:p/>
-          <a:p>
-            <a:r>
-              <a:t>WHERE TO FIND THE RECORDED DEMO: "Recorded demo: IAM" — ACF M04 · S31 (AWS Academy Cloud Foundations,</a:t>
-            </a:r>
-          </a:p>
-          <a:p>
-            <a:r>
-              <a:t>Module 04 "AWS Cloud Security"), inside the instructor deck (original-materials/AWS-Instructor</a:t>
-            </a:r>
-          </a:p>
-          <a:p>
-            <a:r>
-              <a:t>Presentations/…). Instructor-facing — screen it in class, don't distribute to students. Preview and cue</a:t>
-            </a:r>
-          </a:p>
-          <a:p>
-            <a:r>
-              <a:t>it to this slide before class.</a:t>
-            </a:r>
-          </a:p>
-        </p:txBody>
-      </p:sp>
-      <p:sp>
-        <p:nvSpPr>
-          <p:cNvPr id="4" name="Slide Number Placeholder 3"/>
-          <p:cNvSpPr>
-            <a:spLocks noGrp="1"/>
-          </p:cNvSpPr>
-          <p:nvPr>
-            <p:ph type="sldNum" idx="5" sz="quarter"/>
-          </p:nvPr>
-        </p:nvSpPr>
-        <p:spPr/>
-      </p:sp>
-    </p:spTree>
-  </p:cSld>
-  <p:clrMapOvr>
-    <a:masterClrMapping/>
-  </p:clrMapOvr>
-</p:notes>
-</file>
-
-<file path=ppt/notesSlides/notesSlide12.xml><?xml version="1.0" encoding="utf-8"?>
-<p:notes xmlns:a="http://schemas.openxmlformats.org/drawingml/2006/main" xmlns:p="http://schemas.openxmlformats.org/presentationml/2006/main" xmlns:r="http://schemas.openxmlformats.org/officeDocument/2006/relationships">
-  <p:cSld>
-    <p:spTree>
-      <p:nvGrpSpPr>
-        <p:cNvPr id="1" name=""/>
-        <p:cNvGrpSpPr/>
-        <p:nvPr/>
-      </p:nvGrpSpPr>
-      <p:grpSpPr>
-        <a:xfrm>
-          <a:off x="0" y="0"/>
-          <a:ext cx="0" cy="0"/>
-          <a:chOff x="0" y="0"/>
-          <a:chExt cx="0" cy="0"/>
-        </a:xfrm>
-      </p:grpSpPr>
-      <p:sp>
-        <p:nvSpPr>
-          <p:cNvPr id="2" name="Slide Image Placeholder 1"/>
-          <p:cNvSpPr>
-            <a:spLocks noGrp="1"/>
-          </p:cNvSpPr>
-          <p:nvPr>
-            <p:ph type="sldImg" idx="2"/>
-          </p:nvPr>
-        </p:nvSpPr>
-        <p:spPr/>
-      </p:sp>
-      <p:sp>
-        <p:nvSpPr>
-          <p:cNvPr id="3" name="Notes Placeholder 2"/>
-          <p:cNvSpPr>
-            <a:spLocks noGrp="1"/>
-          </p:cNvSpPr>
-          <p:nvPr>
-            <p:ph type="body" idx="3" sz="quarter"/>
-          </p:nvPr>
-        </p:nvSpPr>
-        <p:spPr/>
-        <p:txBody>
-          <a:bodyPr/>
-          <a:lstStyle/>
-          <a:p>
-            <a:r>
-              <a:t>Facilitation — the C2 practice; they build the design's IAM foundation in the lab, evidencing as they go.</a:t>
-            </a:r>
-          </a:p>
-          <a:p>
-            <a:r>
-              <a:t>Tell students, in these words: "Open the lab and the Accounting Baseline Design. Build the IAM foundation</a:t>
-            </a:r>
-          </a:p>
-          <a:p>
-            <a:r>
-              <a:t>for the MTS engagement — exactly the groups and role in the design. Work in the lab account and capture</a:t>
-            </a:r>
-          </a:p>
-          <a:p>
-            <a:r>
-              <a:t>evidence as you go."</a:t>
-            </a:r>
-          </a:p>
-          <a:p>
-            <a:r>
-              <a:t>The task, step by step (put on the board / read out):</a:t>
-            </a:r>
-          </a:p>
-          <a:p>
-            <a:r>
-              <a:t>1. Create the four groups from the design: YAT-ICT-Admins, MTS-Consultants, Application-Service (this one</a:t>
-            </a:r>
-          </a:p>
-          <a:p>
-            <a:r>
-              <a:t>is the EC2 ROLE, not a human group), Finance-Auditors.</a:t>
-            </a:r>
-          </a:p>
-          <a:p>
-            <a:r>
-              <a:t>2. Attach a least-privilege policy to each — only what that group needs.</a:t>
-            </a:r>
-          </a:p>
-          <a:p>
-            <a:r>
-              <a:t>3. Create at least one user in each HUMAN group and enable MFA on it.</a:t>
-            </a:r>
-          </a:p>
-          <a:p>
-            <a:r>
-              <a:t>4. Create the Application-Service role for the EC2 instance (RDS + S3 + CloudWatch access).</a:t>
-            </a:r>
-          </a:p>
-          <a:p>
-            <a:r>
-              <a:t>5. Capture the IAM evidence: the groups list, a user with MFA on, and the role.</a:t>
-            </a:r>
-          </a:p>
-          <a:p>
-            <a:r>
-              <a:t>MUST PRODUCE (the AT2 evidence): screenshots of the groups list, one user with MFA enabled, and the role</a:t>
-            </a:r>
-          </a:p>
-          <a:p>
-            <a:r>
-              <a:t>with its policy.</a:t>
-            </a:r>
-          </a:p>
-          <a:p>
-            <a:r>
-              <a:t>TIMING: ~30 min. Circulate — the two common sticking points are (a) forgetting MFA and (b) trying to</a:t>
-            </a:r>
-          </a:p>
-          <a:p>
-            <a:r>
-              <a:t>attach a policy straight to a user.</a:t>
-            </a:r>
-          </a:p>
-          <a:p>
-            <a:r>
-              <a:t>SHARE-BACK: ask one student to show their groups list; confirm least privilege (no AdministratorAccess</a:t>
-            </a:r>
-          </a:p>
-          <a:p>
-            <a:r>
-              <a:t>shortcuts).</a:t>
-            </a:r>
-          </a:p>
-          <a:p>
-            <a:r>
-              <a:t>No-leakage note: this practice uses the Accounting baseline; the assessed AT2 task uses a different system</a:t>
-            </a:r>
-          </a:p>
-          <a:p>
-            <a:r>
-              <a:t>— comparable, not identical.</a:t>
-            </a:r>
-          </a:p>
-        </p:txBody>
-      </p:sp>
-      <p:sp>
-        <p:nvSpPr>
-          <p:cNvPr id="4" name="Slide Number Placeholder 3"/>
-          <p:cNvSpPr>
-            <a:spLocks noGrp="1"/>
-          </p:cNvSpPr>
-          <p:nvPr>
-            <p:ph type="sldNum" idx="5" sz="quarter"/>
-          </p:nvPr>
-        </p:nvSpPr>
-        <p:spPr/>
-      </p:sp>
-    </p:spTree>
-  </p:cSld>
-  <p:clrMapOvr>
-    <a:masterClrMapping/>
-  </p:clrMapOvr>
-</p:notes>
-</file>
-
-<file path=ppt/notesSlides/notesSlide13.xml><?xml version="1.0" encoding="utf-8"?>
-<p:notes xmlns:a="http://schemas.openxmlformats.org/drawingml/2006/main" xmlns:p="http://schemas.openxmlformats.org/presentationml/2006/main" xmlns:r="http://schemas.openxmlformats.org/officeDocument/2006/relationships">
-  <p:cSld>
-    <p:spTree>
-      <p:nvGrpSpPr>
-        <p:cNvPr id="1" name=""/>
-        <p:cNvGrpSpPr/>
-        <p:nvPr/>
-      </p:nvGrpSpPr>
-      <p:grpSpPr>
-        <a:xfrm>
-          <a:off x="0" y="0"/>
-          <a:ext cx="0" cy="0"/>
-          <a:chOff x="0" y="0"/>
-          <a:chExt cx="0" cy="0"/>
-        </a:xfrm>
-      </p:grpSpPr>
-      <p:sp>
-        <p:nvSpPr>
-          <p:cNvPr id="2" name="Slide Image Placeholder 1"/>
-          <p:cNvSpPr>
-            <a:spLocks noGrp="1"/>
-          </p:cNvSpPr>
-          <p:nvPr>
-            <p:ph type="sldImg" idx="2"/>
-          </p:nvPr>
-        </p:nvSpPr>
-        <p:spPr/>
-      </p:sp>
-      <p:sp>
-        <p:nvSpPr>
-          <p:cNvPr id="3" name="Notes Placeholder 2"/>
-          <p:cNvSpPr>
-            <a:spLocks noGrp="1"/>
-          </p:cNvSpPr>
-          <p:nvPr>
-            <p:ph type="body" idx="3" sz="quarter"/>
-          </p:nvPr>
-        </p:nvSpPr>
-        <p:spPr/>
-        <p:txBody>
-          <a:bodyPr/>
-          <a:lstStyle/>
-          <a:p>
-            <a:r>
-              <a:t>AWS-sourced (ACF M04) — teach the security dividing line. Use the shared-responsibility diagram.</a:t>
-            </a:r>
-          </a:p>
-          <a:p>
-            <a:r>
-              <a:t>• The split, stated cleanly: AWS handles security OF the cloud — physical data centres, hardware, the</a:t>
-            </a:r>
-          </a:p>
-          <a:p>
-            <a:r>
-              <a:t>network, the virtualisation infrastructure. YOU handle security IN the cloud — the EC2 OS (patching),</a:t>
-            </a:r>
-          </a:p>
-          <a:p>
-            <a:r>
-              <a:t>your applications, security-group config, IAM, account management, and your DATA.</a:t>
-            </a:r>
-          </a:p>
-          <a:p>
-            <a:r>
-              <a:t>• Accent-bold: knowing exactly where the line falls tells you what you must CONFIGURE versus what you can</a:t>
-            </a:r>
-          </a:p>
-          <a:p>
-            <a:r>
-              <a:t>RELY ON. That's the whole practical value of the model.</a:t>
-            </a:r>
-          </a:p>
-          <a:p>
-            <a:r>
-              <a:t>• Anchor it to the build: on our foundation, IAM and MFA sit firmly on the "you" side — which is why the</a:t>
-            </a:r>
-          </a:p>
-          <a:p>
-            <a:r>
-              <a:t>last two slides mattered.</a:t>
-            </a:r>
-          </a:p>
-          <a:p>
-            <a:r>
-              <a:t>Misconception to pre-empt: "it's the cloud, so AWS secures it all." No — AWS secures the infrastructure;</a:t>
-            </a:r>
-          </a:p>
-          <a:p>
-            <a:r>
-              <a:t>misconfiguring a security group or skipping MFA is entirely on YOU, and that's where breaches happen.</a:t>
-            </a:r>
-          </a:p>
-          <a:p>
-            <a:r>
-              <a:t>Question to pose: "The EC2 operating system needs a security patch — whose job is that, AWS's or yours?"</a:t>
-            </a:r>
-          </a:p>
-          <a:p>
-            <a:r>
-              <a:t>(yours, on IaaS — sets up the next slide where the line shifts by service).</a:t>
-            </a:r>
-          </a:p>
-          <a:p>
-            <a:r>
-              <a:t>UoC/AT2 tie: ICTCLD401 PC 1.2 + KE 7 (user/business/vendor responsibilities under shared models) +</a:t>
-            </a:r>
-          </a:p>
-          <a:p>
-            <a:r>
-              <a:t>ICTCLD502 PC 1.3; the shared-responsibility assignment is marked under A2 (section detail A4).</a:t>
-            </a:r>
-          </a:p>
-        </p:txBody>
-      </p:sp>
-      <p:sp>
-        <p:nvSpPr>
-          <p:cNvPr id="4" name="Slide Number Placeholder 3"/>
-          <p:cNvSpPr>
-            <a:spLocks noGrp="1"/>
-          </p:cNvSpPr>
-          <p:nvPr>
-            <p:ph type="sldNum" idx="5" sz="quarter"/>
-          </p:nvPr>
-        </p:nvSpPr>
-        <p:spPr/>
-      </p:sp>
-    </p:spTree>
-  </p:cSld>
-  <p:clrMapOvr>
-    <a:masterClrMapping/>
-  </p:clrMapOvr>
-</p:notes>
-</file>
-
-<file path=ppt/notesSlides/notesSlide14.xml><?xml version="1.0" encoding="utf-8"?>
-<p:notes xmlns:a="http://schemas.openxmlformats.org/drawingml/2006/main" xmlns:p="http://schemas.openxmlformats.org/presentationml/2006/main" xmlns:r="http://schemas.openxmlformats.org/officeDocument/2006/relationships">
-  <p:cSld>
-    <p:spTree>
-      <p:nvGrpSpPr>
-        <p:cNvPr id="1" name=""/>
-        <p:cNvGrpSpPr/>
-        <p:nvPr/>
-      </p:nvGrpSpPr>
-      <p:grpSpPr>
-        <a:xfrm>
-          <a:off x="0" y="0"/>
-          <a:ext cx="0" cy="0"/>
-          <a:chOff x="0" y="0"/>
-          <a:chExt cx="0" cy="0"/>
-        </a:xfrm>
-      </p:grpSpPr>
-      <p:sp>
-        <p:nvSpPr>
-          <p:cNvPr id="2" name="Slide Image Placeholder 1"/>
-          <p:cNvSpPr>
-            <a:spLocks noGrp="1"/>
-          </p:cNvSpPr>
-          <p:nvPr>
-            <p:ph type="sldImg" idx="2"/>
-          </p:nvPr>
-        </p:nvSpPr>
-        <p:spPr/>
-      </p:sp>
-      <p:sp>
-        <p:nvSpPr>
-          <p:cNvPr id="3" name="Notes Placeholder 2"/>
-          <p:cNvSpPr>
-            <a:spLocks noGrp="1"/>
-          </p:cNvSpPr>
-          <p:nvPr>
-            <p:ph type="body" idx="3" sz="quarter"/>
-          </p:nvPr>
-        </p:nvSpPr>
-        <p:spPr/>
-        <p:txBody>
-          <a:bodyPr/>
-          <a:lstStyle/>
-          <a:p>
-            <a:r>
-              <a:t>AWS-sourced (ACF M04) — the crucial nuance: the responsibility line is not fixed; it MOVES by service type.</a:t>
-            </a:r>
-          </a:p>
-          <a:p>
-            <a:r>
-              <a:t>• IaaS (EC2): you manage MORE — the OS, patching, security groups, access controls. Maximum control,</a:t>
-            </a:r>
-          </a:p>
-          <a:p>
-            <a:r>
-              <a:t>maximum responsibility.</a:t>
-            </a:r>
-          </a:p>
-          <a:p>
-            <a:r>
-              <a:t>• PaaS (RDS): AWS handles the OS, database patching, the firewall, DR; you manage your DATA + access. The</a:t>
-            </a:r>
-          </a:p>
-          <a:p>
-            <a:r>
-              <a:t>line has shifted toward AWS.</a:t>
-            </a:r>
-          </a:p>
-          <a:p>
-            <a:r>
-              <a:t>• Accent-bold: more managed = more on AWS. The SERVICE TYPE decides where the line falls — this is the</a:t>
-            </a:r>
-          </a:p>
-          <a:p>
-            <a:r>
-              <a:t>IaaS/PaaS spectrum from Topic 1 now expressed as a security boundary.</a:t>
-            </a:r>
-          </a:p>
-          <a:p>
-            <a:r>
-              <a:t>Misconception to pre-empt: that shared responsibility is one fixed diagram. It isn't — the same account</a:t>
-            </a:r>
-          </a:p>
-          <a:p>
-            <a:r>
-              <a:t>can have EC2 (line well toward you) and RDS (line well toward AWS) side by side; you must map each service.</a:t>
-            </a:r>
-          </a:p>
-          <a:p>
-            <a:r>
-              <a:t>Question to pose: "SQL Server needs patching — who does it if it's on an EC2 instance vs on RDS?" (EC2:</a:t>
-            </a:r>
-          </a:p>
-          <a:p>
-            <a:r>
-              <a:t>you; RDS: AWS — same software, different service, different owner).</a:t>
-            </a:r>
-          </a:p>
-          <a:p>
-            <a:r>
-              <a:t>UoC/AT2 tie: ICTCLD502 PC 1.3 (identify the LEVEL of shared responsibility per business needs) + KE 7;</a:t>
-            </a:r>
-          </a:p>
-          <a:p>
-            <a:r>
-              <a:t>this per-service reasoning is exactly what the build assignment (next activity) requires.</a:t>
-            </a:r>
-          </a:p>
-        </p:txBody>
-      </p:sp>
-      <p:sp>
-        <p:nvSpPr>
-          <p:cNvPr id="4" name="Slide Number Placeholder 3"/>
-          <p:cNvSpPr>
-            <a:spLocks noGrp="1"/>
-          </p:cNvSpPr>
-          <p:nvPr>
-            <p:ph type="sldNum" idx="5" sz="quarter"/>
-          </p:nvPr>
-        </p:nvSpPr>
-        <p:spPr/>
-      </p:sp>
-    </p:spTree>
-  </p:cSld>
-  <p:clrMapOvr>
-    <a:masterClrMapping/>
-  </p:clrMapOvr>
-</p:notes>
-</file>
-
-<file path=ppt/notesSlides/notesSlide15.xml><?xml version="1.0" encoding="utf-8"?>
-<p:notes xmlns:a="http://schemas.openxmlformats.org/drawingml/2006/main" xmlns:p="http://schemas.openxmlformats.org/presentationml/2006/main" xmlns:r="http://schemas.openxmlformats.org/officeDocument/2006/relationships">
-  <p:cSld>
-    <p:spTree>
-      <p:nvGrpSpPr>
-        <p:cNvPr id="1" name=""/>
-        <p:cNvGrpSpPr/>
-        <p:nvPr/>
-      </p:nvGrpSpPr>
-      <p:grpSpPr>
-        <a:xfrm>
-          <a:off x="0" y="0"/>
-          <a:ext cx="0" cy="0"/>
-          <a:chOff x="0" y="0"/>
-          <a:chExt cx="0" cy="0"/>
-        </a:xfrm>
-      </p:grpSpPr>
-      <p:sp>
-        <p:nvSpPr>
-          <p:cNvPr id="2" name="Slide Image Placeholder 1"/>
-          <p:cNvSpPr>
-            <a:spLocks noGrp="1"/>
-          </p:cNvSpPr>
-          <p:nvPr>
-            <p:ph type="sldImg" idx="2"/>
-          </p:nvPr>
-        </p:nvSpPr>
-        <p:spPr/>
-      </p:sp>
-      <p:sp>
-        <p:nvSpPr>
-          <p:cNvPr id="3" name="Notes Placeholder 2"/>
-          <p:cNvSpPr>
-            <a:spLocks noGrp="1"/>
-          </p:cNvSpPr>
-          <p:nvPr>
-            <p:ph type="body" idx="3" sz="quarter"/>
-          </p:nvPr>
-        </p:nvSpPr>
-        <p:spPr/>
-        <p:txBody>
-          <a:bodyPr/>
-          <a:lstStyle/>
-          <a:p>
-            <a:r>
-              <a:t>Bespoke — apply the model to the actual Accounting foundation. This is the bridge from concept to the activity.</a:t>
-            </a:r>
-          </a:p>
-          <a:p>
-            <a:r>
-              <a:t>• The task in one line: map each layer of the Accounting build to its owner — AWS · YAT ICT · MTS (build)</a:t>
-            </a:r>
-          </a:p>
-          <a:p>
-            <a:r>
-              <a:t>· end-users. Four possible owners, not two.</a:t>
-            </a:r>
-          </a:p>
-          <a:p>
-            <a:r>
-              <a:t>• Point them at the source: the supplied design's security section NAMES the split; their job is to apply</a:t>
-            </a:r>
-          </a:p>
-          <a:p>
-            <a:r>
-              <a:t>it, not invent it (the working-to-a-design discipline again).</a:t>
-            </a:r>
-          </a:p>
-          <a:p>
-            <a:r>
-              <a:t>• Worked examples (the sub-bullet): AWS patches the RDS host · YAT patches the EC2 OS · MTS sets the IAM +</a:t>
-            </a:r>
-          </a:p>
-          <a:p>
-            <a:r>
-              <a:t>SG config at build time. Note how the owner changes by both service AND lifecycle stage (build vs run).</a:t>
-            </a:r>
-          </a:p>
-          <a:p>
-            <a:r>
-              <a:t>Misconception to pre-empt: that it's a binary AWS-vs-"you." Here "you" splits three ways — YAT ICT (the</a:t>
-            </a:r>
-          </a:p>
-          <a:p>
-            <a:r>
-              <a:t>ongoing owner), MTS (the builder, now), and end-users. Who's responsible depends on the phase too.</a:t>
-            </a:r>
-          </a:p>
-          <a:p>
-            <a:r>
-              <a:t>Question to pose: "Security-group configuration — who owns it during the build, and who owns it after</a:t>
-            </a:r>
-          </a:p>
-          <a:p>
-            <a:r>
-              <a:t>handover?" (MTS sets it at build; YAT ICT owns it operationally after — draws out the build/run split).</a:t>
-            </a:r>
-          </a:p>
-          <a:p>
-            <a:r>
-              <a:t>UoC/AT2 tie: ICTCLD401 PC 1.7 + KE 7 + ICTCLD502 PC 1.3; produces the input for the Deployment Report's</a:t>
-            </a:r>
-          </a:p>
-          <a:p>
-            <a:r>
-              <a:t>security section (A2 / A4).</a:t>
-            </a:r>
-          </a:p>
-        </p:txBody>
-      </p:sp>
-      <p:sp>
-        <p:nvSpPr>
-          <p:cNvPr id="4" name="Slide Number Placeholder 3"/>
-          <p:cNvSpPr>
-            <a:spLocks noGrp="1"/>
-          </p:cNvSpPr>
-          <p:nvPr>
-            <p:ph type="sldNum" idx="5" sz="quarter"/>
-          </p:nvPr>
-        </p:nvSpPr>
-        <p:spPr/>
-      </p:sp>
-    </p:spTree>
-  </p:cSld>
-  <p:clrMapOvr>
-    <a:masterClrMapping/>
-  </p:clrMapOvr>
-</p:notes>
-</file>
-
-<file path=ppt/notesSlides/notesSlide16.xml><?xml version="1.0" encoding="utf-8"?>
-<p:notes xmlns:a="http://schemas.openxmlformats.org/drawingml/2006/main" xmlns:p="http://schemas.openxmlformats.org/presentationml/2006/main" xmlns:r="http://schemas.openxmlformats.org/officeDocument/2006/relationships">
-  <p:cSld>
-    <p:spTree>
-      <p:nvGrpSpPr>
-        <p:cNvPr id="1" name=""/>
-        <p:cNvGrpSpPr/>
-        <p:nvPr/>
-      </p:nvGrpSpPr>
-      <p:grpSpPr>
-        <a:xfrm>
-          <a:off x="0" y="0"/>
-          <a:ext cx="0" cy="0"/>
-          <a:chOff x="0" y="0"/>
-          <a:chExt cx="0" cy="0"/>
-        </a:xfrm>
-      </p:grpSpPr>
-      <p:sp>
-        <p:nvSpPr>
-          <p:cNvPr id="2" name="Slide Image Placeholder 1"/>
-          <p:cNvSpPr>
-            <a:spLocks noGrp="1"/>
-          </p:cNvSpPr>
-          <p:nvPr>
-            <p:ph type="sldImg" idx="2"/>
-          </p:nvPr>
-        </p:nvSpPr>
-        <p:spPr/>
-      </p:sp>
-      <p:sp>
-        <p:nvSpPr>
-          <p:cNvPr id="3" name="Notes Placeholder 2"/>
-          <p:cNvSpPr>
-            <a:spLocks noGrp="1"/>
-          </p:cNvSpPr>
-          <p:nvPr>
-            <p:ph type="body" idx="3" sz="quarter"/>
-          </p:nvPr>
-        </p:nvSpPr>
-        <p:spPr/>
-        <p:txBody>
-          <a:bodyPr/>
-          <a:lstStyle/>
-          <a:p>
-            <a:r>
-              <a:t>Facilitation — the C3 practice. Note this one is ANALYSIS, not a console build (say so up front).</a:t>
-            </a:r>
-          </a:p>
-          <a:p>
-            <a:r>
-              <a:t>Tell students, in these words: "No building this time — an analysis task in the style of the AWS scenario.</a:t>
-            </a:r>
-          </a:p>
-          <a:p>
-            <a:r>
-              <a:t>For each part of the Accounting foundation, name who is responsible — AWS, or you (YAT ICT / MTS) — using</a:t>
-            </a:r>
-          </a:p>
-          <a:p>
-            <a:r>
-              <a:t>the supplied design and the shared-responsibility model. Write it up as about half a page."</a:t>
-            </a:r>
-          </a:p>
-          <a:p>
-            <a:r>
-              <a:t>The parts to assign (put up):</a:t>
-            </a:r>
-          </a:p>
-          <a:p>
-            <a:r>
-              <a:t>1. EC2 OS patching · security-group settings · application config · IAM / MFA</a:t>
-            </a:r>
-          </a:p>
-          <a:p>
-            <a:r>
-              <a:t>2. SQL Server patching on RDS · physical data-centre security · S3 bucket access config · data</a:t>
-            </a:r>
-          </a:p>
-          <a:p>
-            <a:r>
-              <a:t>MUST PRODUCE: a ~½-page written assignment naming the responsible party for each part, justified against</a:t>
-            </a:r>
-          </a:p>
-          <a:p>
-            <a:r>
-              <a:t>the design + the model — this feeds their Deployment Report's security section.</a:t>
-            </a:r>
-          </a:p>
-          <a:p>
-            <a:r>
-              <a:t>TIMING: ~15 min, then discuss as a group.</a:t>
-            </a:r>
-          </a:p>
-          <a:p>
-            <a:r>
-              <a:t>Where they get stuck: the ones that shift by service — SQL Server patching is AWS's on RDS but would be</a:t>
-            </a:r>
-          </a:p>
-          <a:p>
-            <a:r>
-              <a:t>theirs on EC2; physical security is always AWS. Circulate and probe the reasoning, not just the answer.</a:t>
-            </a:r>
-          </a:p>
-          <a:p>
-            <a:r>
-              <a:t>SHARE-BACK: take the two trickiest (RDS patching, physical data-centre security), get the room's answer,</a:t>
-            </a:r>
-          </a:p>
-          <a:p>
-            <a:r>
-              <a:t>and confirm WHY — the reasoning is the assessable skill.</a:t>
-            </a:r>
-          </a:p>
-          <a:p>
-            <a:r>
-              <a:t>No-leakage note: practice on the Accounting foundation; AT2 assesses the same reasoning on a different</a:t>
-            </a:r>
-          </a:p>
-          <a:p>
-            <a:r>
-              <a:t>system — comparable, not identical.</a:t>
+              <a:t>Activity = practice run sheet task 1. They should finish with the region set and one capture.</a:t>
+            </a:r>
+          </a:p>
+          <a:p>
+            <a:r>
+              <a:t>Circulate for the lab launch/console hand-off; check the region indicator on each screen.</a:t>
             </a:r>
           </a:p>
         </p:txBody>
@@ -1674,67 +600,12 @@
           <a:lstStyle/>
           <a:p>
             <a:r>
-              <a:t>AWS-sourced (ACA M02) — use the diagram to install the three-role picture, then land where THEY sit.</a:t>
-            </a:r>
-          </a:p>
-          <a:p>
-            <a:r>
-              <a:t>• Walk the chain off the visual: the customer sets the REQUIREMENTS → the architect produces the</a:t>
-            </a:r>
-          </a:p>
-          <a:p>
-            <a:r>
-              <a:t>DESIGN → the delivery crew BUILDS it. Three distinct roles, one hand-off line between each.</a:t>
-            </a:r>
-          </a:p>
-          <a:p>
-            <a:r>
-              <a:t>• Drive the accent-bold point: in AT2 they are the DELIVERY CREW. The design is already done; their</a:t>
-            </a:r>
-          </a:p>
-          <a:p>
-            <a:r>
-              <a:t>job starts at "build it," not "decide it."</a:t>
-            </a:r>
-          </a:p>
-          <a:p>
-            <a:r>
-              <a:t>• Callback to AT1: there they were doing the architect/advisor work; now they step one role down the</a:t>
-            </a:r>
-          </a:p>
-          <a:p>
-            <a:r>
-              <a:t>chain and execute. Same engagement, different seat.</a:t>
-            </a:r>
-          </a:p>
-          <a:p>
-            <a:r>
-              <a:t>Misconception to pre-empt: that "architecture" means they get to make the big calls. Here the big</a:t>
-            </a:r>
-          </a:p>
-          <a:p>
-            <a:r>
-              <a:t>calls are made — architecture literacy is what lets them READ the design correctly and build true to it.</a:t>
-            </a:r>
-          </a:p>
-          <a:p>
-            <a:r>
-              <a:t>Question to pose: "If the customer, architect and builder are three roles, which one are you in AT2 —</a:t>
-            </a:r>
-          </a:p>
-          <a:p>
-            <a:r>
-              <a:t>and what does that mean you must NOT do?" (builder; don't rewrite the design).</a:t>
-            </a:r>
-          </a:p>
-          <a:p>
-            <a:r>
-              <a:t>UoC/AT2 tie: frames the whole foundation-build (A2); establishes the working-to-a-supplied-design</a:t>
-            </a:r>
-          </a:p>
-          <a:p>
-            <a:r>
-              <a:t>mode that the next slide makes concrete.</a:t>
+              <a:t>Activity = practice run sheet tasks 2–3. Circulate for the zone dropdown left on "No preference" —</a:t>
+            </a:r>
+          </a:p>
+          <a:p>
+            <a:r>
+              <a:t>it is the failure that shows up three tasks later. Check the Availability Zone column on share-back.</a:t>
             </a:r>
           </a:p>
         </p:txBody>
@@ -1804,931 +675,17 @@
           <a:lstStyle/>
           <a:p>
             <a:r>
-              <a:t>Bespoke — the heart of the AT2 mode. Teach the discipline of building faithfully to someone else's design.</a:t>
-            </a:r>
-          </a:p>
-          <a:p>
-            <a:r>
-              <a:t>• Rule one: read the design end to end BEFORE touching the console. You cannot build faithfully to a</a:t>
-            </a:r>
-          </a:p>
-          <a:p>
-            <a:r>
-              <a:t>document you have only skimmed the first page of.</a:t>
-            </a:r>
-          </a:p>
-          <a:p>
-            <a:r>
-              <a:t>• Rule two: build exactly what it specifies. The only decisions that are yours are the ones the design</a:t>
-            </a:r>
-          </a:p>
-          <a:p>
-            <a:r>
-              <a:t>deliberately LEAVES OPEN — the implementer decisions (labelled C1–C8 in the supplied design).</a:t>
-            </a:r>
-          </a:p>
-          <a:p>
-            <a:r>
-              <a:t>• The accent-bold line: an "implementer decision" is precisely where their judgement is ASSESSED.</a:t>
-            </a:r>
-          </a:p>
-          <a:p>
-            <a:r>
-              <a:t>Everywhere else, deviating from the design is an error, not initiative.</a:t>
-            </a:r>
-          </a:p>
-          <a:p>
-            <a:r>
-              <a:t>Misconception to pre-empt: "if I can build it a better way, I should." No — unrequested cleverness is</a:t>
-            </a:r>
-          </a:p>
-          <a:p>
-            <a:r>
-              <a:t>marked down. The skill is fidelity; judgement is shown only in the open decisions, and must be justified.</a:t>
-            </a:r>
-          </a:p>
-          <a:p>
-            <a:r>
-              <a:t>Question to pose: "You spot what you think is a better instance type than the design names — do you</a:t>
-            </a:r>
-          </a:p>
-          <a:p>
-            <a:r>
-              <a:t>change it?" (No — unless it's an open implementer decision; otherwise build as specified).</a:t>
-            </a:r>
-          </a:p>
-          <a:p>
-            <a:r>
-              <a:t>UoC/AT2 tie: ICTCLD401 PE 1/PE 2 — the built artefacts are the evidence; this establishes the standard</a:t>
-            </a:r>
-          </a:p>
-          <a:p>
-            <a:r>
-              <a:t>the whole foundation build (A2) is judged against.</a:t>
-            </a:r>
-          </a:p>
-        </p:txBody>
-      </p:sp>
-      <p:sp>
-        <p:nvSpPr>
-          <p:cNvPr id="4" name="Slide Number Placeholder 3"/>
-          <p:cNvSpPr>
-            <a:spLocks noGrp="1"/>
-          </p:cNvSpPr>
-          <p:nvPr>
-            <p:ph type="sldNum" idx="5" sz="quarter"/>
-          </p:nvPr>
-        </p:nvSpPr>
-        <p:spPr/>
-      </p:sp>
-    </p:spTree>
-  </p:cSld>
-  <p:clrMapOvr>
-    <a:masterClrMapping/>
-  </p:clrMapOvr>
-</p:notes>
-</file>
-
-<file path=ppt/notesSlides/notesSlide4.xml><?xml version="1.0" encoding="utf-8"?>
-<p:notes xmlns:a="http://schemas.openxmlformats.org/drawingml/2006/main" xmlns:p="http://schemas.openxmlformats.org/presentationml/2006/main" xmlns:r="http://schemas.openxmlformats.org/officeDocument/2006/relationships">
-  <p:cSld>
-    <p:spTree>
-      <p:nvGrpSpPr>
-        <p:cNvPr id="1" name=""/>
-        <p:cNvGrpSpPr/>
-        <p:nvPr/>
-      </p:nvGrpSpPr>
-      <p:grpSpPr>
-        <a:xfrm>
-          <a:off x="0" y="0"/>
-          <a:ext cx="0" cy="0"/>
-          <a:chOff x="0" y="0"/>
-          <a:chExt cx="0" cy="0"/>
-        </a:xfrm>
-      </p:grpSpPr>
-      <p:sp>
-        <p:nvSpPr>
-          <p:cNvPr id="2" name="Slide Image Placeholder 1"/>
-          <p:cNvSpPr>
-            <a:spLocks noGrp="1"/>
-          </p:cNvSpPr>
-          <p:nvPr>
-            <p:ph type="sldImg" idx="2"/>
-          </p:nvPr>
-        </p:nvSpPr>
-        <p:spPr/>
-      </p:sp>
-      <p:sp>
-        <p:nvSpPr>
-          <p:cNvPr id="3" name="Notes Placeholder 2"/>
-          <p:cNvSpPr>
-            <a:spLocks noGrp="1"/>
-          </p:cNvSpPr>
-          <p:nvPr>
-            <p:ph type="body" idx="3" sz="quarter"/>
-          </p:nvPr>
-        </p:nvSpPr>
-        <p:spPr/>
-        <p:txBody>
-          <a:bodyPr/>
-          <a:lstStyle/>
-          <a:p>
-            <a:r>
-              <a:t>The first real build decision — and it's compliance, not preference. Applied from Topic 1's residency teaching.</a:t>
-            </a:r>
-          </a:p>
-          <a:p>
-            <a:r>
-              <a:t>• Region is decision number one because everything you create is Region-scoped — get it wrong and every</a:t>
-            </a:r>
-          </a:p>
-          <a:p>
-            <a:r>
-              <a:t>resource lands in the wrong place.</a:t>
-            </a:r>
-          </a:p>
-          <a:p>
-            <a:r>
-              <a:t>• WHY Sydney: the design mandates ap-southeast-2 because financial records + PII must stay ONSHORE.</a:t>
-            </a:r>
-          </a:p>
-          <a:p>
-            <a:r>
-              <a:t>This is the residency driver from Topic 1 now being BUILT, not just argued.</a:t>
-            </a:r>
-          </a:p>
-          <a:p>
-            <a:r>
-              <a:t>• The lab reality (be explicit): in the AWS Academy Learner Lab they deploy to us-east-1 —</a:t>
-            </a:r>
-          </a:p>
-          <a:p>
-            <a:r>
-              <a:t>[scenario: ap-southeast-2 (Sydney) | deploy: us-east-1]. Same build; only the location label changes.</a:t>
-            </a:r>
-          </a:p>
-          <a:p>
-            <a:r>
-              <a:t>Set the console Region before creating anything.</a:t>
-            </a:r>
-          </a:p>
-          <a:p>
-            <a:r>
-              <a:t>• Accent-bold: deploy everything to the lab's Region (us-east-1) and make sure the Region is VISIBLE in</a:t>
-            </a:r>
-          </a:p>
-          <a:p>
-            <a:r>
-              <a:t>every screenshot — the assessor checks it matches.</a:t>
-            </a:r>
-          </a:p>
-          <a:p>
-            <a:r>
-              <a:t>Misconception to pre-empt: that the us-east-1 substitution means residency doesn't matter. It matters</a:t>
-            </a:r>
-          </a:p>
-          <a:p>
-            <a:r>
-              <a:t>conceptually (design says Sydney, for legal reasons); the lab just can't host that Region.</a:t>
-            </a:r>
-          </a:p>
-          <a:p>
-            <a:r>
-              <a:t>Question to pose: "Why is Region the FIRST thing you set, before you create a single resource?"</a:t>
-            </a:r>
-          </a:p>
-          <a:p>
-            <a:r>
-              <a:t>(resources are Region-scoped; the design mandates it for data residency).</a:t>
-            </a:r>
-          </a:p>
-          <a:p>
-            <a:r>
-              <a:t>UoC/AT2 tie: ICTCLD401 PC 1.4 (access the account per business requirements); evidenced in Appendix A</a:t>
-            </a:r>
-          </a:p>
-          <a:p>
-            <a:r>
-              <a:t>with the Region visible (A9/A10).</a:t>
-            </a:r>
-          </a:p>
-        </p:txBody>
-      </p:sp>
-      <p:sp>
-        <p:nvSpPr>
-          <p:cNvPr id="4" name="Slide Number Placeholder 3"/>
-          <p:cNvSpPr>
-            <a:spLocks noGrp="1"/>
-          </p:cNvSpPr>
-          <p:nvPr>
-            <p:ph type="sldNum" idx="5" sz="quarter"/>
-          </p:nvPr>
-        </p:nvSpPr>
-        <p:spPr/>
-      </p:sp>
-    </p:spTree>
-  </p:cSld>
-  <p:clrMapOvr>
-    <a:masterClrMapping/>
-  </p:clrMapOvr>
-</p:notes>
-</file>
-
-<file path=ppt/notesSlides/notesSlide5.xml><?xml version="1.0" encoding="utf-8"?>
-<p:notes xmlns:a="http://schemas.openxmlformats.org/drawingml/2006/main" xmlns:p="http://schemas.openxmlformats.org/presentationml/2006/main" xmlns:r="http://schemas.openxmlformats.org/officeDocument/2006/relationships">
-  <p:cSld>
-    <p:spTree>
-      <p:nvGrpSpPr>
-        <p:cNvPr id="1" name=""/>
-        <p:cNvGrpSpPr/>
-        <p:nvPr/>
-      </p:nvGrpSpPr>
-      <p:grpSpPr>
-        <a:xfrm>
-          <a:off x="0" y="0"/>
-          <a:ext cx="0" cy="0"/>
-          <a:chOff x="0" y="0"/>
-          <a:chExt cx="0" cy="0"/>
-        </a:xfrm>
-      </p:grpSpPr>
-      <p:sp>
-        <p:nvSpPr>
-          <p:cNvPr id="2" name="Slide Image Placeholder 1"/>
-          <p:cNvSpPr>
-            <a:spLocks noGrp="1"/>
-          </p:cNvSpPr>
-          <p:nvPr>
-            <p:ph type="sldImg" idx="2"/>
-          </p:nvPr>
-        </p:nvSpPr>
-        <p:spPr/>
-      </p:sp>
-      <p:sp>
-        <p:nvSpPr>
-          <p:cNvPr id="3" name="Notes Placeholder 2"/>
-          <p:cNvSpPr>
-            <a:spLocks noGrp="1"/>
-          </p:cNvSpPr>
-          <p:nvPr>
-            <p:ph type="body" idx="3" sz="quarter"/>
-          </p:nvPr>
-        </p:nvSpPr>
-        <p:spPr/>
-        <p:txBody>
-          <a:bodyPr/>
-          <a:lstStyle/>
-          <a:p>
-            <a:r>
-              <a:t>Bespoke — the consulting discipline that makes AT2 pass or fail. Teach it as part of the build, not a write-up.</a:t>
-            </a:r>
-          </a:p>
-          <a:p>
-            <a:r>
-              <a:t>• The core truth: the Deployment Report is EVIDENCED from what they capture live. You cannot go back</a:t>
-            </a:r>
-          </a:p>
-          <a:p>
-            <a:r>
-              <a:t>and reconstruct a screenshot of a resource you built an hour ago in a state you've since changed.</a:t>
-            </a:r>
-          </a:p>
-          <a:p>
-            <a:r>
-              <a:t>• Concretely: the AT2 template LISTS named screenshots — capture each one as you build that resource,</a:t>
-            </a:r>
-          </a:p>
-          <a:p>
-            <a:r>
-              <a:t>with the Region + the named resource visible in frame.</a:t>
-            </a:r>
-          </a:p>
-          <a:p>
-            <a:r>
-              <a:t>• Configs too: export IAM policies, SG rules, VPC settings AS you go → they land in Appendix B.</a:t>
-            </a:r>
-          </a:p>
-          <a:p>
-            <a:r>
-              <a:t>• Accent-bold rhythm: build → capture → move on. Evidence is a step in the build, not homework afterwards.</a:t>
-            </a:r>
-          </a:p>
-          <a:p>
-            <a:r>
-              <a:t>Misconception to pre-empt: "I'll build it all, then screenshot at the end." By then the console state</a:t>
-            </a:r>
-          </a:p>
-          <a:p>
-            <a:r>
-              <a:t>has moved on and half the evidence is gone or inconsistent. Capture is live or it's lost.</a:t>
-            </a:r>
-          </a:p>
-          <a:p>
-            <a:r>
-              <a:t>Question to pose: "You finish the whole build, then realise you never screenshotted the group creation</a:t>
-            </a:r>
-          </a:p>
-          <a:p>
-            <a:r>
-              <a:t>— can you get that evidence back?" (not the live creation state — you'd have to rebuild; capture as you go).</a:t>
-            </a:r>
-          </a:p>
-          <a:p>
-            <a:r>
-              <a:t>UoC/AT2 tie: ICTCLD401 PE 1/PE 2; feeds Appendices A (screenshots) + B (config exports) — criteria A9/A10.</a:t>
-            </a:r>
-          </a:p>
-        </p:txBody>
-      </p:sp>
-      <p:sp>
-        <p:nvSpPr>
-          <p:cNvPr id="4" name="Slide Number Placeholder 3"/>
-          <p:cNvSpPr>
-            <a:spLocks noGrp="1"/>
-          </p:cNvSpPr>
-          <p:nvPr>
-            <p:ph type="sldNum" idx="5" sz="quarter"/>
-          </p:nvPr>
-        </p:nvSpPr>
-        <p:spPr/>
-      </p:sp>
-    </p:spTree>
-  </p:cSld>
-  <p:clrMapOvr>
-    <a:masterClrMapping/>
-  </p:clrMapOvr>
-</p:notes>
-</file>
-
-<file path=ppt/notesSlides/notesSlide6.xml><?xml version="1.0" encoding="utf-8"?>
-<p:notes xmlns:a="http://schemas.openxmlformats.org/drawingml/2006/main" xmlns:p="http://schemas.openxmlformats.org/presentationml/2006/main" xmlns:r="http://schemas.openxmlformats.org/officeDocument/2006/relationships">
-  <p:cSld>
-    <p:spTree>
-      <p:nvGrpSpPr>
-        <p:cNvPr id="1" name=""/>
-        <p:cNvGrpSpPr/>
-        <p:nvPr/>
-      </p:nvGrpSpPr>
-      <p:grpSpPr>
-        <a:xfrm>
-          <a:off x="0" y="0"/>
-          <a:ext cx="0" cy="0"/>
-          <a:chOff x="0" y="0"/>
-          <a:chExt cx="0" cy="0"/>
-        </a:xfrm>
-      </p:grpSpPr>
-      <p:sp>
-        <p:nvSpPr>
-          <p:cNvPr id="2" name="Slide Image Placeholder 1"/>
-          <p:cNvSpPr>
-            <a:spLocks noGrp="1"/>
-          </p:cNvSpPr>
-          <p:nvPr>
-            <p:ph type="sldImg" idx="2"/>
-          </p:nvPr>
-        </p:nvSpPr>
-        <p:spPr/>
-      </p:sp>
-      <p:sp>
-        <p:nvSpPr>
-          <p:cNvPr id="3" name="Notes Placeholder 2"/>
-          <p:cNvSpPr>
-            <a:spLocks noGrp="1"/>
-          </p:cNvSpPr>
-          <p:nvPr>
-            <p:ph type="body" idx="3" sz="quarter"/>
-          </p:nvPr>
-        </p:nvSpPr>
-        <p:spPr/>
-        <p:txBody>
-          <a:bodyPr/>
-          <a:lstStyle/>
-          <a:p>
-            <a:r>
-              <a:t>DEMONSTRATION (educator-led — no recorded demo fits this one; screen a live walk-through or a</a:t>
-            </a:r>
-          </a:p>
-          <a:p>
-            <a:r>
-              <a:t>pre-recorded screen capture you make). Show, then they replicate on the next slide.</a:t>
-            </a:r>
-          </a:p>
-          <a:p/>
-          <a:p>
-            <a:r>
-              <a:t>WHAT TO DEMONSTRATE:</a:t>
-            </a:r>
-          </a:p>
-          <a:p>
-            <a:r>
-              <a:t>1. Sign in to the AWS Academy Learner Lab and set the Region to us-east-1 —</a:t>
-            </a:r>
-          </a:p>
-          <a:p>
-            <a:r>
-              <a:t>[scenario: ap-southeast-2 (Sydney) | deploy: us-east-1]. Say the substitution out loud as you do it.</a:t>
-            </a:r>
-          </a:p>
-          <a:p>
-            <a:r>
-              <a:t>2. Confirm the identity you're building as (the lab's provided credentials).</a:t>
-            </a:r>
-          </a:p>
-          <a:p>
-            <a:r>
-              <a:t>3. Capture the FIRST named screenshot — the Region selector — into the evidence log, Region visible.</a:t>
-            </a:r>
-          </a:p>
-          <a:p>
-            <a:r>
-              <a:t>4. Show where configuration exports come from (the point in the console you'll later export policies/SGs).</a:t>
-            </a:r>
-          </a:p>
-          <a:p/>
-          <a:p>
-            <a:r>
-              <a:t>WHAT TO EMPHASISE:</a:t>
-            </a:r>
-          </a:p>
-          <a:p>
-            <a:r>
-              <a:t>• Region BEFORE anything else — model setting it first, deliberately.</a:t>
-            </a:r>
-          </a:p>
-          <a:p>
-            <a:r>
-              <a:t>• Narrate the evidence capture: name the file the way the AT2 template names it; students must mirror this.</a:t>
-            </a:r>
-          </a:p>
-          <a:p>
-            <a:r>
-              <a:t>• This is the workspace they'll build the whole foundation in — get it set up correctly once.</a:t>
-            </a:r>
-          </a:p>
-          <a:p/>
-          <a:p>
-            <a:r>
-              <a:t>PREP: clean Learner Lab open, evidence-log/template handy, the Accounting Baseline Design ready to open.</a:t>
-            </a:r>
-          </a:p>
-          <a:p>
-            <a:r>
-              <a:t>~5–8 min to screen + narrate before the activity.</a:t>
-            </a:r>
-          </a:p>
-          <a:p/>
-          <a:p>
-            <a:r>
-              <a:t>WHERE TO FIND THE RECORDED DEMO: none — per the demos catalogue, no recorded demo fits the C1</a:t>
-            </a:r>
-          </a:p>
-          <a:p>
-            <a:r>
-              <a:t>account/Region/evidence workspace setup, so this demo stays live/bespoke (screen your own capture).</a:t>
-            </a:r>
-          </a:p>
-        </p:txBody>
-      </p:sp>
-      <p:sp>
-        <p:nvSpPr>
-          <p:cNvPr id="4" name="Slide Number Placeholder 3"/>
-          <p:cNvSpPr>
-            <a:spLocks noGrp="1"/>
-          </p:cNvSpPr>
-          <p:nvPr>
-            <p:ph type="sldNum" idx="5" sz="quarter"/>
-          </p:nvPr>
-        </p:nvSpPr>
-        <p:spPr/>
-      </p:sp>
-    </p:spTree>
-  </p:cSld>
-  <p:clrMapOvr>
-    <a:masterClrMapping/>
-  </p:clrMapOvr>
-</p:notes>
-</file>
-
-<file path=ppt/notesSlides/notesSlide7.xml><?xml version="1.0" encoding="utf-8"?>
-<p:notes xmlns:a="http://schemas.openxmlformats.org/drawingml/2006/main" xmlns:p="http://schemas.openxmlformats.org/presentationml/2006/main" xmlns:r="http://schemas.openxmlformats.org/officeDocument/2006/relationships">
-  <p:cSld>
-    <p:spTree>
-      <p:nvGrpSpPr>
-        <p:cNvPr id="1" name=""/>
-        <p:cNvGrpSpPr/>
-        <p:nvPr/>
-      </p:nvGrpSpPr>
-      <p:grpSpPr>
-        <a:xfrm>
-          <a:off x="0" y="0"/>
-          <a:ext cx="0" cy="0"/>
-          <a:chOff x="0" y="0"/>
-          <a:chExt cx="0" cy="0"/>
-        </a:xfrm>
-      </p:grpSpPr>
-      <p:sp>
-        <p:nvSpPr>
-          <p:cNvPr id="2" name="Slide Image Placeholder 1"/>
-          <p:cNvSpPr>
-            <a:spLocks noGrp="1"/>
-          </p:cNvSpPr>
-          <p:nvPr>
-            <p:ph type="sldImg" idx="2"/>
-          </p:nvPr>
-        </p:nvSpPr>
-        <p:spPr/>
-      </p:sp>
-      <p:sp>
-        <p:nvSpPr>
-          <p:cNvPr id="3" name="Notes Placeholder 2"/>
-          <p:cNvSpPr>
-            <a:spLocks noGrp="1"/>
-          </p:cNvSpPr>
-          <p:nvPr>
-            <p:ph type="body" idx="3" sz="quarter"/>
-          </p:nvPr>
-        </p:nvSpPr>
-        <p:spPr/>
-        <p:txBody>
-          <a:bodyPr/>
-          <a:lstStyle/>
-          <a:p>
-            <a:r>
-              <a:t>Facilitation — the first hands-on step of the cumulative practice build. They do what you just demoed.</a:t>
-            </a:r>
-          </a:p>
-          <a:p>
-            <a:r>
-              <a:t>Tell students, in these words: "In the AWS Academy Learner Lab, set yourself up to build the Accounting</a:t>
-            </a:r>
-          </a:p>
-          <a:p>
-            <a:r>
-              <a:t>System foundation. Set the Region, confirm your identity, capture your first evidence, then open and skim</a:t>
-            </a:r>
-          </a:p>
-          <a:p>
-            <a:r>
-              <a:t>the supplied design. Work in the lab account and capture evidence as you go."</a:t>
-            </a:r>
-          </a:p>
-          <a:p>
-            <a:r>
-              <a:t>The task, step by step (put on the board):</a:t>
-            </a:r>
-          </a:p>
-          <a:p>
-            <a:r>
-              <a:t>1. Set the console Region to us-east-1 — [scenario: ap-southeast-2 (Sydney) | deploy: us-east-1] — and</a:t>
-            </a:r>
-          </a:p>
-          <a:p>
-            <a:r>
-              <a:t>confirm it in your evidence.</a:t>
-            </a:r>
-          </a:p>
-          <a:p>
-            <a:r>
-              <a:t>2. Confirm your build identity.</a:t>
-            </a:r>
-          </a:p>
-          <a:p>
-            <a:r>
-              <a:t>3. Capture your first named evidence screenshot (Region visible) into your evidence log.</a:t>
-            </a:r>
-          </a:p>
-          <a:p>
-            <a:r>
-              <a:t>4. Open the supplied Accounting Baseline Solution Design and skim it end to end.</a:t>
-            </a:r>
-          </a:p>
-          <a:p>
-            <a:r>
-              <a:t>MUST PRODUCE: the first evidence screenshot (Region visible) in the evidence log, and a workspace set to</a:t>
-            </a:r>
-          </a:p>
-          <a:p>
-            <a:r>
-              <a:t>us-east-1, ready to build.</a:t>
-            </a:r>
-          </a:p>
-          <a:p>
-            <a:r>
-              <a:t>TIMING: ~15 min. Where they get stuck: the Learner Lab login/console hand-off (have the lab-launch steps</a:t>
-            </a:r>
-          </a:p>
-          <a:p>
-            <a:r>
-              <a:t>ready), and forgetting to set Region before poking around — circulate and check the Region indicator.</a:t>
-            </a:r>
-          </a:p>
-          <a:p>
-            <a:r>
-              <a:t>SHARE-BACK: ask one student to show their first evidence screenshot; confirm the Region is visible in frame.</a:t>
-            </a:r>
-          </a:p>
-          <a:p>
-            <a:r>
-              <a:t>No-leakage note: this practice runs on the Accounting System (Ledgerline); the ASSESSED AT2 build is a</a:t>
-            </a:r>
-          </a:p>
-          <a:p>
-            <a:r>
-              <a:t>different system — comparable, not identical. Keep them anchored to the Accounting baseline here.</a:t>
-            </a:r>
-          </a:p>
-        </p:txBody>
-      </p:sp>
-      <p:sp>
-        <p:nvSpPr>
-          <p:cNvPr id="4" name="Slide Number Placeholder 3"/>
-          <p:cNvSpPr>
-            <a:spLocks noGrp="1"/>
-          </p:cNvSpPr>
-          <p:nvPr>
-            <p:ph type="sldNum" idx="5" sz="quarter"/>
-          </p:nvPr>
-        </p:nvSpPr>
-        <p:spPr/>
-      </p:sp>
-    </p:spTree>
-  </p:cSld>
-  <p:clrMapOvr>
-    <a:masterClrMapping/>
-  </p:clrMapOvr>
-</p:notes>
-</file>
-
-<file path=ppt/notesSlides/notesSlide8.xml><?xml version="1.0" encoding="utf-8"?>
-<p:notes xmlns:a="http://schemas.openxmlformats.org/drawingml/2006/main" xmlns:p="http://schemas.openxmlformats.org/presentationml/2006/main" xmlns:r="http://schemas.openxmlformats.org/officeDocument/2006/relationships">
-  <p:cSld>
-    <p:spTree>
-      <p:nvGrpSpPr>
-        <p:cNvPr id="1" name=""/>
-        <p:cNvGrpSpPr/>
-        <p:nvPr/>
-      </p:nvGrpSpPr>
-      <p:grpSpPr>
-        <a:xfrm>
-          <a:off x="0" y="0"/>
-          <a:ext cx="0" cy="0"/>
-          <a:chOff x="0" y="0"/>
-          <a:chExt cx="0" cy="0"/>
-        </a:xfrm>
-      </p:grpSpPr>
-      <p:sp>
-        <p:nvSpPr>
-          <p:cNvPr id="2" name="Slide Image Placeholder 1"/>
-          <p:cNvSpPr>
-            <a:spLocks noGrp="1"/>
-          </p:cNvSpPr>
-          <p:nvPr>
-            <p:ph type="sldImg" idx="2"/>
-          </p:nvPr>
-        </p:nvSpPr>
-        <p:spPr/>
-      </p:sp>
-      <p:sp>
-        <p:nvSpPr>
-          <p:cNvPr id="3" name="Notes Placeholder 2"/>
-          <p:cNvSpPr>
-            <a:spLocks noGrp="1"/>
-          </p:cNvSpPr>
-          <p:nvPr>
-            <p:ph type="body" idx="3" sz="quarter"/>
-          </p:nvPr>
-        </p:nvSpPr>
-        <p:spPr/>
-        <p:txBody>
-          <a:bodyPr/>
-          <a:lstStyle/>
-          <a:p>
-            <a:r>
-              <a:t>AWS-sourced (ACF M04) — teach IAM as the account's "who can do what." Use the components diagram.</a:t>
-            </a:r>
-          </a:p>
-          <a:p>
-            <a:r>
-              <a:t>Walk the four in order — user → group → role → policy — stressing the split: the first two are about</a:t>
-            </a:r>
-          </a:p>
-          <a:p>
-            <a:r>
-              <a:t>PEOPLE, the last two about PERMISSIONS.</a:t>
-            </a:r>
-          </a:p>
-          <a:p>
-            <a:r>
-              <a:t>• IAM user — one identity per person or app. Emphasise: never share a login; each person their own user</a:t>
-            </a:r>
-          </a:p>
-          <a:p>
-            <a:r>
-              <a:t>(that is what gives you accountability and an audit trail).</a:t>
-            </a:r>
-          </a:p>
-          <a:p>
-            <a:r>
-              <a:t>• IAM group — how you manage permissions at scale: set permissions ONCE on the group, not per person.</a:t>
-            </a:r>
-          </a:p>
-          <a:p>
-            <a:r>
-              <a:t>Analogy: a team like "Finance" — add someone and they inherit the access.</a:t>
-            </a:r>
-          </a:p>
-          <a:p>
-            <a:r>
-              <a:t>• IAM role — the one students find hardest. Unlike a user it has NO permanent credentials; it is ASSUMED</a:t>
-            </a:r>
-          </a:p>
-          <a:p>
-            <a:r>
-              <a:t>temporarily. Key example for this build: an EC2 instance assumes a role to reach RDS/S3 — no passwords</a:t>
-            </a:r>
-          </a:p>
-          <a:p>
-            <a:r>
-              <a:t>or keys stored on the server.</a:t>
-            </a:r>
-          </a:p>
-          <a:p>
-            <a:r>
-              <a:t>• IAM policy — the JSON that says what is allowed. Everything is DENIED by default; a policy grants. You</a:t>
-            </a:r>
-          </a:p>
-          <a:p>
-            <a:r>
-              <a:t>attach policies to groups/roles, never the JSON straight onto a person.</a:t>
-            </a:r>
-          </a:p>
-          <a:p>
-            <a:r>
-              <a:t>Misconception to pre-empt: students conflate authentication (who you are = user) with authorisation</a:t>
-            </a:r>
-          </a:p>
-          <a:p>
-            <a:r>
-              <a:t>(what you can do = policy). Say both words out loud.</a:t>
-            </a:r>
-          </a:p>
-          <a:p>
-            <a:r>
-              <a:t>Question to pose: "The web server needs to read from S3 — do we give it a username and password?"</a:t>
-            </a:r>
-          </a:p>
-          <a:p>
-            <a:r>
-              <a:t>(No — a role. This sets up the next slides.)</a:t>
-            </a:r>
-          </a:p>
-          <a:p>
-            <a:r>
-              <a:t>UoC/AT2 tie: ICTCLD401 KE 8 + PC 1.5; this identity foundation is what the AT2 build is assessed on (A2);</a:t>
-            </a:r>
-          </a:p>
-          <a:p>
-            <a:r>
-              <a:t>the specific groups to build come two slides on.</a:t>
-            </a:r>
-          </a:p>
-        </p:txBody>
-      </p:sp>
-      <p:sp>
-        <p:nvSpPr>
-          <p:cNvPr id="4" name="Slide Number Placeholder 3"/>
-          <p:cNvSpPr>
-            <a:spLocks noGrp="1"/>
-          </p:cNvSpPr>
-          <p:nvPr>
-            <p:ph type="sldNum" idx="5" sz="quarter"/>
-          </p:nvPr>
-        </p:nvSpPr>
-        <p:spPr/>
-      </p:sp>
-    </p:spTree>
-  </p:cSld>
-  <p:clrMapOvr>
-    <a:masterClrMapping/>
-  </p:clrMapOvr>
-</p:notes>
-</file>
-
-<file path=ppt/notesSlides/notesSlide9.xml><?xml version="1.0" encoding="utf-8"?>
-<p:notes xmlns:a="http://schemas.openxmlformats.org/drawingml/2006/main" xmlns:p="http://schemas.openxmlformats.org/presentationml/2006/main" xmlns:r="http://schemas.openxmlformats.org/officeDocument/2006/relationships">
-  <p:cSld>
-    <p:spTree>
-      <p:nvGrpSpPr>
-        <p:cNvPr id="1" name=""/>
-        <p:cNvGrpSpPr/>
-        <p:nvPr/>
-      </p:nvGrpSpPr>
-      <p:grpSpPr>
-        <a:xfrm>
-          <a:off x="0" y="0"/>
-          <a:ext cx="0" cy="0"/>
-          <a:chOff x="0" y="0"/>
-          <a:chExt cx="0" cy="0"/>
-        </a:xfrm>
-      </p:grpSpPr>
-      <p:sp>
-        <p:nvSpPr>
-          <p:cNvPr id="2" name="Slide Image Placeholder 1"/>
-          <p:cNvSpPr>
-            <a:spLocks noGrp="1"/>
-          </p:cNvSpPr>
-          <p:nvPr>
-            <p:ph type="sldImg" idx="2"/>
-          </p:nvPr>
-        </p:nvSpPr>
-        <p:spPr/>
-      </p:sp>
-      <p:sp>
-        <p:nvSpPr>
-          <p:cNvPr id="3" name="Notes Placeholder 2"/>
-          <p:cNvSpPr>
-            <a:spLocks noGrp="1"/>
-          </p:cNvSpPr>
-          <p:nvPr>
-            <p:ph type="body" idx="3" sz="quarter"/>
-          </p:nvPr>
-        </p:nvSpPr>
-        <p:spPr/>
-        <p:txBody>
-          <a:bodyPr/>
-          <a:lstStyle/>
-          <a:p>
-            <a:r>
-              <a:t>AWS-sourced (ACF M04) — the rules that turn IAM components into a secure configuration. Teach as a checklist they'll apply.</a:t>
-            </a:r>
-          </a:p>
-          <a:p>
-            <a:r>
-              <a:t>• Attach policies to GROUPS, assign users to groups — never policy straight onto an individual. This is</a:t>
-            </a:r>
-          </a:p>
-          <a:p>
-            <a:r>
-              <a:t>the manageability rule from the last slide, now stated as practice.</a:t>
-            </a:r>
-          </a:p>
-          <a:p>
-            <a:r>
-              <a:t>• Least privilege: grant only what the task needs; everything is denied by default, so you add exactly</a:t>
-            </a:r>
-          </a:p>
-          <a:p>
-            <a:r>
-              <a:t>what's required and no more.</a:t>
-            </a:r>
-          </a:p>
-          <a:p>
-            <a:r>
-              <a:t>• MFA on human users; protect the root user (use it only when you must). Root is the master key — you</a:t>
-            </a:r>
-          </a:p>
-          <a:p>
-            <a:r>
-              <a:t>lock it away, you don't build with it.</a:t>
-            </a:r>
-          </a:p>
-          <a:p>
-            <a:r>
-              <a:t>• Accent-bold: roles, NOT long-lived keys, for services — an EC2 instance ASSUMES a role to reach RDS/S3.</a:t>
-            </a:r>
-          </a:p>
-          <a:p>
-            <a:r>
-              <a:t>This is the payoff of the "role has no password" point.</a:t>
-            </a:r>
-          </a:p>
-          <a:p>
-            <a:r>
-              <a:t>Misconception to pre-empt: "least privilege means I'll just grant AdministratorAccess to save time and</a:t>
-            </a:r>
-          </a:p>
-          <a:p>
-            <a:r>
-              <a:t>tighten it later." No — that IS the failure; you grant narrow from the start. Assessors look for it.</a:t>
-            </a:r>
-          </a:p>
-          <a:p>
-            <a:r>
-              <a:t>Question to pose: "Why attach the policy to the group and not to each user directly?" (set once, everyone</a:t>
-            </a:r>
-          </a:p>
-          <a:p>
-            <a:r>
-              <a:t>in the group inherits it; add/remove people without touching policies — manageable + auditable).</a:t>
-            </a:r>
-          </a:p>
-          <a:p>
-            <a:r>
-              <a:t>UoC/AT2 tie: ICTCLD401 PC 1.5 (access protocols/policies) + KE 8; these best practices are exactly what</a:t>
-            </a:r>
-          </a:p>
-          <a:p>
-            <a:r>
-              <a:t>the foundation-tier IAM build (A2) is marked against, incl. the Essential Eight MFA requirement.</a:t>
+              <a:t>Activity = practice run sheet tasks 4–6. The NAT gateway takes several minutes to become available</a:t>
+            </a:r>
+          </a:p>
+          <a:p>
+            <a:r>
+              <a:t>and cannot be routed to before it does — warn them so they do not assume it has failed.</a:t>
+            </a:r>
+          </a:p>
+          <a:p>
+            <a:r>
+              <a:t>Common miss: associating the subnets after adding the route.</a:t>
             </a:r>
           </a:p>
         </p:txBody>
@@ -5831,7 +3788,7 @@
                 </a:solidFill>
                 <a:latin typeface="Roboto"/>
               </a:rPr>
-              <a:t>Build foundations</a:t>
+              <a:t>Getting to work — the account and the network fabric</a:t>
             </a:r>
           </a:p>
           <a:p>
@@ -5847,7 +3804,7 @@
                 </a:solidFill>
                 <a:latin typeface="Roboto Light"/>
               </a:rPr>
-              <a:t>Implement the supplied design in AWS — account, identity, and the shared-responsibility line</a:t>
+              <a:t/>
             </a:r>
           </a:p>
         </p:txBody>
@@ -5909,7 +3866,7 @@
     <p:bg>
       <p:bgPr>
         <a:solidFill>
-          <a:srgbClr val="F9F9F9"/>
+          <a:srgbClr val="FFFFFF"/>
         </a:solidFill>
         <a:effectLst/>
       </p:bgPr>
@@ -5923,70 +3880,20 @@
       <p:grpSpPr/>
       <p:sp>
         <p:nvSpPr>
-          <p:cNvPr id="2" name="TextBox 1"/>
-          <p:cNvSpPr txBox="1"/>
-          <p:nvPr/>
-        </p:nvSpPr>
-        <p:spPr>
-          <a:xfrm>
-            <a:off x="640080" y="548640"/>
-            <a:ext cx="10881360" cy="1097280"/>
-          </a:xfrm>
-          <a:prstGeom prst="rect">
-            <a:avLst/>
-          </a:prstGeom>
-          <a:noFill/>
-        </p:spPr>
-        <p:txBody>
-          <a:bodyPr wrap="square" anchor="t" lIns="0" rIns="0" tIns="0" bIns="0">
-            <a:spAutoFit/>
-          </a:bodyPr>
-          <a:lstStyle/>
-          <a:p>
-            <a:r>
-              <a:rPr sz="3200" b="1" i="0">
-                <a:solidFill>
-                  <a:srgbClr val="2A2929"/>
-                </a:solidFill>
-                <a:latin typeface="Roboto"/>
-              </a:rPr>
-              <a:t>Key takeaways</a:t>
-            </a:r>
-          </a:p>
-          <a:p>
-            <a:pPr>
-              <a:spcBef>
-                <a:spcPts val="200"/>
-              </a:spcBef>
-            </a:pPr>
-            <a:r>
-              <a:rPr sz="1800" b="1" i="0">
-                <a:solidFill>
-                  <a:srgbClr val="92268F"/>
-                </a:solidFill>
-                <a:latin typeface="Roboto"/>
-              </a:rPr>
-              <a:t>Section 1 · Working to a supplied design</a:t>
-            </a:r>
-          </a:p>
-        </p:txBody>
-      </p:sp>
-      <p:sp>
-        <p:nvSpPr>
-          <p:cNvPr id="3" name="Rectangle 2"/>
+          <p:cNvPr id="2" name="Rectangle 1"/>
           <p:cNvSpPr/>
           <p:nvPr/>
         </p:nvSpPr>
         <p:spPr>
           <a:xfrm>
-            <a:off x="658368" y="1600200"/>
-            <a:ext cx="1463040" cy="50800"/>
+            <a:off x="0" y="0"/>
+            <a:ext cx="3931920" cy="6858000"/>
           </a:xfrm>
           <a:prstGeom prst="rect">
             <a:avLst/>
           </a:prstGeom>
           <a:solidFill>
-            <a:srgbClr val="92268F"/>
+            <a:srgbClr val="27B5CE"/>
           </a:solidFill>
           <a:ln>
             <a:noFill/>
@@ -6017,25 +3924,123 @@
       </p:sp>
       <p:sp>
         <p:nvSpPr>
-          <p:cNvPr id="4" name="Rectangle 3"/>
+          <p:cNvPr id="3" name="TextBox 2"/>
+          <p:cNvSpPr txBox="1"/>
+          <p:nvPr/>
+        </p:nvSpPr>
+        <p:spPr>
+          <a:xfrm>
+            <a:off x="365760" y="2103120"/>
+            <a:ext cx="3291840" cy="2194560"/>
+          </a:xfrm>
+          <a:prstGeom prst="rect">
+            <a:avLst/>
+          </a:prstGeom>
+          <a:noFill/>
+        </p:spPr>
+        <p:txBody>
+          <a:bodyPr wrap="square" anchor="t" lIns="0" rIns="0" tIns="0" bIns="0">
+            <a:spAutoFit/>
+          </a:bodyPr>
+          <a:lstStyle/>
+          <a:p>
+            <a:r>
+              <a:rPr sz="13000" b="1" i="0">
+                <a:solidFill>
+                  <a:srgbClr val="FFFFFF"/>
+                </a:solidFill>
+                <a:latin typeface="Roboto"/>
+              </a:rPr>
+              <a:t>02</a:t>
+            </a:r>
+          </a:p>
+        </p:txBody>
+      </p:sp>
+      <p:sp>
+        <p:nvSpPr>
+          <p:cNvPr id="4" name="TextBox 3"/>
+          <p:cNvSpPr txBox="1"/>
+          <p:nvPr/>
+        </p:nvSpPr>
+        <p:spPr>
+          <a:xfrm>
+            <a:off x="4480560" y="2468880"/>
+            <a:ext cx="7132320" cy="2194560"/>
+          </a:xfrm>
+          <a:prstGeom prst="rect">
+            <a:avLst/>
+          </a:prstGeom>
+          <a:noFill/>
+        </p:spPr>
+        <p:txBody>
+          <a:bodyPr wrap="square" anchor="t" lIns="0" rIns="0" tIns="0" bIns="0">
+            <a:spAutoFit/>
+          </a:bodyPr>
+          <a:lstStyle/>
+          <a:p>
+            <a:r>
+              <a:rPr sz="1600" b="1" i="0">
+                <a:solidFill>
+                  <a:srgbClr val="27B5CE"/>
+                </a:solidFill>
+                <a:latin typeface="Roboto"/>
+              </a:rPr>
+              <a:t>SECTION</a:t>
+            </a:r>
+          </a:p>
+          <a:p>
+            <a:pPr>
+              <a:spcBef>
+                <a:spcPts val="600"/>
+              </a:spcBef>
+            </a:pPr>
+            <a:r>
+              <a:rPr sz="3800" b="1" i="0">
+                <a:solidFill>
+                  <a:srgbClr val="2A2929"/>
+                </a:solidFill>
+                <a:latin typeface="Roboto"/>
+              </a:rPr>
+              <a:t>The private network and its subnets</a:t>
+            </a:r>
+          </a:p>
+          <a:p>
+            <a:pPr>
+              <a:spcBef>
+                <a:spcPts val="1000"/>
+              </a:spcBef>
+            </a:pPr>
+            <a:r>
+              <a:rPr sz="2000" b="0" i="1">
+                <a:solidFill>
+                  <a:srgbClr val="484848"/>
+                </a:solidFill>
+                <a:latin typeface="Roboto Light"/>
+              </a:rPr>
+              <a:t>the fabric everything sits in</a:t>
+            </a:r>
+          </a:p>
+        </p:txBody>
+      </p:sp>
+      <p:sp>
+        <p:nvSpPr>
+          <p:cNvPr id="5" name="Rectangle 4"/>
           <p:cNvSpPr/>
           <p:nvPr/>
         </p:nvSpPr>
         <p:spPr>
           <a:xfrm>
-            <a:off x="640080" y="1965960"/>
-            <a:ext cx="10927080" cy="841248"/>
+            <a:off x="0" y="6565392"/>
+            <a:ext cx="12191695" cy="38100"/>
           </a:xfrm>
           <a:prstGeom prst="rect">
             <a:avLst/>
           </a:prstGeom>
           <a:solidFill>
-            <a:srgbClr val="FFFFFF"/>
+            <a:srgbClr val="27B5CE"/>
           </a:solidFill>
-          <a:ln w="12700">
-            <a:solidFill>
-              <a:srgbClr val="CCCCCC"/>
-            </a:solidFill>
+          <a:ln>
+            <a:noFill/>
           </a:ln>
           <a:effectLst/>
         </p:spPr>
@@ -6063,392 +4068,7 @@
       </p:sp>
       <p:sp>
         <p:nvSpPr>
-          <p:cNvPr id="5" name="Rectangle 4"/>
-          <p:cNvSpPr/>
-          <p:nvPr/>
-        </p:nvSpPr>
-        <p:spPr>
-          <a:xfrm>
-            <a:off x="640080" y="1965960"/>
-            <a:ext cx="109728" cy="841248"/>
-          </a:xfrm>
-          <a:prstGeom prst="rect">
-            <a:avLst/>
-          </a:prstGeom>
-          <a:solidFill>
-            <a:srgbClr val="92268F"/>
-          </a:solidFill>
-          <a:ln>
-            <a:noFill/>
-          </a:ln>
-          <a:effectLst/>
-        </p:spPr>
-        <p:style>
-          <a:lnRef idx="1">
-            <a:schemeClr val="accent1"/>
-          </a:lnRef>
-          <a:fillRef idx="3">
-            <a:schemeClr val="accent1"/>
-          </a:fillRef>
-          <a:effectRef idx="2">
-            <a:schemeClr val="accent1"/>
-          </a:effectRef>
-          <a:fontRef idx="minor">
-            <a:schemeClr val="lt1"/>
-          </a:fontRef>
-        </p:style>
-        <p:txBody>
-          <a:bodyPr rtlCol="0" anchor="ctr"/>
-          <a:lstStyle/>
-          <a:p>
-            <a:pPr algn="ctr"/>
-          </a:p>
-        </p:txBody>
-      </p:sp>
-      <p:sp>
-        <p:nvSpPr>
           <p:cNvPr id="6" name="TextBox 5"/>
-          <p:cNvSpPr txBox="1"/>
-          <p:nvPr/>
-        </p:nvSpPr>
-        <p:spPr>
-          <a:xfrm>
-            <a:off x="960120" y="1965960"/>
-            <a:ext cx="10424160" cy="841248"/>
-          </a:xfrm>
-          <a:prstGeom prst="rect">
-            <a:avLst/>
-          </a:prstGeom>
-          <a:noFill/>
-        </p:spPr>
-        <p:txBody>
-          <a:bodyPr wrap="square" anchor="ctr" lIns="0" rIns="0" tIns="0" bIns="0">
-            <a:spAutoFit/>
-          </a:bodyPr>
-          <a:lstStyle/>
-          <a:p>
-            <a:pPr>
-              <a:lnSpc>
-                <a:spcPct val="100000"/>
-              </a:lnSpc>
-            </a:pPr>
-            <a:r>
-              <a:rPr sz="1700" b="0" i="0">
-                <a:solidFill>
-                  <a:srgbClr val="2A2929"/>
-                </a:solidFill>
-                <a:latin typeface="Roboto"/>
-              </a:rPr>
-              <a:t>Architecture = requirements → design → build; in AT2 you're the builder, to a supplied design.</a:t>
-            </a:r>
-          </a:p>
-        </p:txBody>
-      </p:sp>
-      <p:sp>
-        <p:nvSpPr>
-          <p:cNvPr id="7" name="Rectangle 6"/>
-          <p:cNvSpPr/>
-          <p:nvPr/>
-        </p:nvSpPr>
-        <p:spPr>
-          <a:xfrm>
-            <a:off x="640080" y="2916936"/>
-            <a:ext cx="10927080" cy="841248"/>
-          </a:xfrm>
-          <a:prstGeom prst="rect">
-            <a:avLst/>
-          </a:prstGeom>
-          <a:solidFill>
-            <a:srgbClr val="FFFFFF"/>
-          </a:solidFill>
-          <a:ln w="12700">
-            <a:solidFill>
-              <a:srgbClr val="CCCCCC"/>
-            </a:solidFill>
-          </a:ln>
-          <a:effectLst/>
-        </p:spPr>
-        <p:style>
-          <a:lnRef idx="1">
-            <a:schemeClr val="accent1"/>
-          </a:lnRef>
-          <a:fillRef idx="3">
-            <a:schemeClr val="accent1"/>
-          </a:fillRef>
-          <a:effectRef idx="2">
-            <a:schemeClr val="accent1"/>
-          </a:effectRef>
-          <a:fontRef idx="minor">
-            <a:schemeClr val="lt1"/>
-          </a:fontRef>
-        </p:style>
-        <p:txBody>
-          <a:bodyPr rtlCol="0" anchor="ctr"/>
-          <a:lstStyle/>
-          <a:p>
-            <a:pPr algn="ctr"/>
-          </a:p>
-        </p:txBody>
-      </p:sp>
-      <p:sp>
-        <p:nvSpPr>
-          <p:cNvPr id="8" name="Rectangle 7"/>
-          <p:cNvSpPr/>
-          <p:nvPr/>
-        </p:nvSpPr>
-        <p:spPr>
-          <a:xfrm>
-            <a:off x="640080" y="2916936"/>
-            <a:ext cx="109728" cy="841248"/>
-          </a:xfrm>
-          <a:prstGeom prst="rect">
-            <a:avLst/>
-          </a:prstGeom>
-          <a:solidFill>
-            <a:srgbClr val="92268F"/>
-          </a:solidFill>
-          <a:ln>
-            <a:noFill/>
-          </a:ln>
-          <a:effectLst/>
-        </p:spPr>
-        <p:style>
-          <a:lnRef idx="1">
-            <a:schemeClr val="accent1"/>
-          </a:lnRef>
-          <a:fillRef idx="3">
-            <a:schemeClr val="accent1"/>
-          </a:fillRef>
-          <a:effectRef idx="2">
-            <a:schemeClr val="accent1"/>
-          </a:effectRef>
-          <a:fontRef idx="minor">
-            <a:schemeClr val="lt1"/>
-          </a:fontRef>
-        </p:style>
-        <p:txBody>
-          <a:bodyPr rtlCol="0" anchor="ctr"/>
-          <a:lstStyle/>
-          <a:p>
-            <a:pPr algn="ctr"/>
-          </a:p>
-        </p:txBody>
-      </p:sp>
-      <p:sp>
-        <p:nvSpPr>
-          <p:cNvPr id="9" name="TextBox 8"/>
-          <p:cNvSpPr txBox="1"/>
-          <p:nvPr/>
-        </p:nvSpPr>
-        <p:spPr>
-          <a:xfrm>
-            <a:off x="960120" y="2916936"/>
-            <a:ext cx="10424160" cy="841248"/>
-          </a:xfrm>
-          <a:prstGeom prst="rect">
-            <a:avLst/>
-          </a:prstGeom>
-          <a:noFill/>
-        </p:spPr>
-        <p:txBody>
-          <a:bodyPr wrap="square" anchor="ctr" lIns="0" rIns="0" tIns="0" bIns="0">
-            <a:spAutoFit/>
-          </a:bodyPr>
-          <a:lstStyle/>
-          <a:p>
-            <a:pPr>
-              <a:lnSpc>
-                <a:spcPct val="100000"/>
-              </a:lnSpc>
-            </a:pPr>
-            <a:r>
-              <a:rPr sz="1700" b="0" i="0">
-                <a:solidFill>
-                  <a:srgbClr val="2A2929"/>
-                </a:solidFill>
-                <a:latin typeface="Roboto"/>
-              </a:rPr>
-              <a:t>Region first — the design mandates Sydney (ap-southeast-2) for residency; you deploy to us-east-1 in the lab, visible in all evidence.</a:t>
-            </a:r>
-          </a:p>
-        </p:txBody>
-      </p:sp>
-      <p:sp>
-        <p:nvSpPr>
-          <p:cNvPr id="10" name="Rectangle 9"/>
-          <p:cNvSpPr/>
-          <p:nvPr/>
-        </p:nvSpPr>
-        <p:spPr>
-          <a:xfrm>
-            <a:off x="640080" y="3867912"/>
-            <a:ext cx="10927080" cy="841248"/>
-          </a:xfrm>
-          <a:prstGeom prst="rect">
-            <a:avLst/>
-          </a:prstGeom>
-          <a:solidFill>
-            <a:srgbClr val="FFFFFF"/>
-          </a:solidFill>
-          <a:ln w="12700">
-            <a:solidFill>
-              <a:srgbClr val="CCCCCC"/>
-            </a:solidFill>
-          </a:ln>
-          <a:effectLst/>
-        </p:spPr>
-        <p:style>
-          <a:lnRef idx="1">
-            <a:schemeClr val="accent1"/>
-          </a:lnRef>
-          <a:fillRef idx="3">
-            <a:schemeClr val="accent1"/>
-          </a:fillRef>
-          <a:effectRef idx="2">
-            <a:schemeClr val="accent1"/>
-          </a:effectRef>
-          <a:fontRef idx="minor">
-            <a:schemeClr val="lt1"/>
-          </a:fontRef>
-        </p:style>
-        <p:txBody>
-          <a:bodyPr rtlCol="0" anchor="ctr"/>
-          <a:lstStyle/>
-          <a:p>
-            <a:pPr algn="ctr"/>
-          </a:p>
-        </p:txBody>
-      </p:sp>
-      <p:sp>
-        <p:nvSpPr>
-          <p:cNvPr id="11" name="Rectangle 10"/>
-          <p:cNvSpPr/>
-          <p:nvPr/>
-        </p:nvSpPr>
-        <p:spPr>
-          <a:xfrm>
-            <a:off x="640080" y="3867912"/>
-            <a:ext cx="109728" cy="841248"/>
-          </a:xfrm>
-          <a:prstGeom prst="rect">
-            <a:avLst/>
-          </a:prstGeom>
-          <a:solidFill>
-            <a:srgbClr val="92268F"/>
-          </a:solidFill>
-          <a:ln>
-            <a:noFill/>
-          </a:ln>
-          <a:effectLst/>
-        </p:spPr>
-        <p:style>
-          <a:lnRef idx="1">
-            <a:schemeClr val="accent1"/>
-          </a:lnRef>
-          <a:fillRef idx="3">
-            <a:schemeClr val="accent1"/>
-          </a:fillRef>
-          <a:effectRef idx="2">
-            <a:schemeClr val="accent1"/>
-          </a:effectRef>
-          <a:fontRef idx="minor">
-            <a:schemeClr val="lt1"/>
-          </a:fontRef>
-        </p:style>
-        <p:txBody>
-          <a:bodyPr rtlCol="0" anchor="ctr"/>
-          <a:lstStyle/>
-          <a:p>
-            <a:pPr algn="ctr"/>
-          </a:p>
-        </p:txBody>
-      </p:sp>
-      <p:sp>
-        <p:nvSpPr>
-          <p:cNvPr id="12" name="TextBox 11"/>
-          <p:cNvSpPr txBox="1"/>
-          <p:nvPr/>
-        </p:nvSpPr>
-        <p:spPr>
-          <a:xfrm>
-            <a:off x="960120" y="3867912"/>
-            <a:ext cx="10424160" cy="841248"/>
-          </a:xfrm>
-          <a:prstGeom prst="rect">
-            <a:avLst/>
-          </a:prstGeom>
-          <a:noFill/>
-        </p:spPr>
-        <p:txBody>
-          <a:bodyPr wrap="square" anchor="ctr" lIns="0" rIns="0" tIns="0" bIns="0">
-            <a:spAutoFit/>
-          </a:bodyPr>
-          <a:lstStyle/>
-          <a:p>
-            <a:pPr>
-              <a:lnSpc>
-                <a:spcPct val="100000"/>
-              </a:lnSpc>
-            </a:pPr>
-            <a:r>
-              <a:rPr sz="1700" b="0" i="0">
-                <a:solidFill>
-                  <a:srgbClr val="2A2929"/>
-                </a:solidFill>
-                <a:latin typeface="Roboto"/>
-              </a:rPr>
-              <a:t>Capture evidence live as you build — the report is made from it.</a:t>
-            </a:r>
-          </a:p>
-        </p:txBody>
-      </p:sp>
-      <p:sp>
-        <p:nvSpPr>
-          <p:cNvPr id="13" name="Rectangle 12"/>
-          <p:cNvSpPr/>
-          <p:nvPr/>
-        </p:nvSpPr>
-        <p:spPr>
-          <a:xfrm>
-            <a:off x="0" y="6565392"/>
-            <a:ext cx="12191695" cy="38100"/>
-          </a:xfrm>
-          <a:prstGeom prst="rect">
-            <a:avLst/>
-          </a:prstGeom>
-          <a:solidFill>
-            <a:srgbClr val="92268F"/>
-          </a:solidFill>
-          <a:ln>
-            <a:noFill/>
-          </a:ln>
-          <a:effectLst/>
-        </p:spPr>
-        <p:style>
-          <a:lnRef idx="1">
-            <a:schemeClr val="accent1"/>
-          </a:lnRef>
-          <a:fillRef idx="3">
-            <a:schemeClr val="accent1"/>
-          </a:fillRef>
-          <a:effectRef idx="2">
-            <a:schemeClr val="accent1"/>
-          </a:effectRef>
-          <a:fontRef idx="minor">
-            <a:schemeClr val="lt1"/>
-          </a:fontRef>
-        </p:style>
-        <p:txBody>
-          <a:bodyPr rtlCol="0" anchor="ctr"/>
-          <a:lstStyle/>
-          <a:p>
-            <a:pPr algn="ctr"/>
-          </a:p>
-        </p:txBody>
-      </p:sp>
-      <p:sp>
-        <p:nvSpPr>
-          <p:cNvPr id="14" name="TextBox 13"/>
           <p:cNvSpPr txBox="1"/>
           <p:nvPr/>
         </p:nvSpPr>
@@ -6491,7 +4111,7 @@
       </p:sp>
       <p:sp>
         <p:nvSpPr>
-          <p:cNvPr id="15" name="TextBox 14"/>
+          <p:cNvPr id="7" name="TextBox 6"/>
           <p:cNvSpPr txBox="1"/>
           <p:nvPr/>
         </p:nvSpPr>
@@ -6519,7 +4139,7 @@
                 </a:solidFill>
                 <a:latin typeface="Roboto"/>
               </a:rPr>
-              <a:t>8</a:t>
+              <a:t/>
             </a:r>
           </a:p>
         </p:txBody>
@@ -6552,14 +4172,64 @@
       <p:grpSpPr/>
       <p:sp>
         <p:nvSpPr>
-          <p:cNvPr id="2" name="Rectangle 1"/>
+          <p:cNvPr id="2" name="TextBox 1"/>
+          <p:cNvSpPr txBox="1"/>
+          <p:nvPr/>
+        </p:nvSpPr>
+        <p:spPr>
+          <a:xfrm>
+            <a:off x="640080" y="457200"/>
+            <a:ext cx="10881360" cy="960120"/>
+          </a:xfrm>
+          <a:prstGeom prst="rect">
+            <a:avLst/>
+          </a:prstGeom>
+          <a:noFill/>
+        </p:spPr>
+        <p:txBody>
+          <a:bodyPr wrap="square" anchor="t" lIns="0" rIns="0" tIns="0" bIns="0">
+            <a:spAutoFit/>
+          </a:bodyPr>
+          <a:lstStyle/>
+          <a:p>
+            <a:r>
+              <a:rPr sz="2800" b="1" i="0">
+                <a:solidFill>
+                  <a:srgbClr val="2A2929"/>
+                </a:solidFill>
+                <a:latin typeface="Roboto"/>
+              </a:rPr>
+              <a:t>Networks, addresses and ranges</a:t>
+            </a:r>
+          </a:p>
+          <a:p>
+            <a:pPr>
+              <a:spcBef>
+                <a:spcPts val="200"/>
+              </a:spcBef>
+            </a:pPr>
+            <a:r>
+              <a:rPr sz="1800" b="0" i="1">
+                <a:solidFill>
+                  <a:srgbClr val="D68E10"/>
+                </a:solidFill>
+                <a:latin typeface="Roboto Light"/>
+              </a:rPr>
+              <a:t>the vocabulary the build assumes</a:t>
+            </a:r>
+          </a:p>
+        </p:txBody>
+      </p:sp>
+      <p:sp>
+        <p:nvSpPr>
+          <p:cNvPr id="3" name="Rectangle 2"/>
           <p:cNvSpPr/>
           <p:nvPr/>
         </p:nvSpPr>
         <p:spPr>
           <a:xfrm>
-            <a:off x="0" y="0"/>
-            <a:ext cx="3931920" cy="6858000"/>
+            <a:off x="658368" y="1371600"/>
+            <a:ext cx="1463040" cy="50800"/>
           </a:xfrm>
           <a:prstGeom prst="rect">
             <a:avLst/>
@@ -6596,14 +4266,14 @@
       </p:sp>
       <p:sp>
         <p:nvSpPr>
-          <p:cNvPr id="3" name="TextBox 2"/>
+          <p:cNvPr id="4" name="TextBox 3"/>
           <p:cNvSpPr txBox="1"/>
           <p:nvPr/>
         </p:nvSpPr>
         <p:spPr>
           <a:xfrm>
-            <a:off x="365760" y="2103120"/>
-            <a:ext cx="3291840" cy="2194560"/>
+            <a:off x="658368" y="1737360"/>
+            <a:ext cx="5486400" cy="4297680"/>
           </a:xfrm>
           <a:prstGeom prst="rect">
             <a:avLst/>
@@ -6616,87 +4286,158 @@
           </a:bodyPr>
           <a:lstStyle/>
           <a:p>
-            <a:r>
-              <a:rPr sz="13000" b="1" i="0">
-                <a:solidFill>
-                  <a:srgbClr val="FFFFFF"/>
-                </a:solidFill>
-                <a:latin typeface="Roboto"/>
-              </a:rPr>
-              <a:t>02</a:t>
-            </a:r>
-          </a:p>
-        </p:txBody>
-      </p:sp>
-      <p:sp>
-        <p:nvSpPr>
-          <p:cNvPr id="4" name="TextBox 3"/>
-          <p:cNvSpPr txBox="1"/>
-          <p:nvPr/>
-        </p:nvSpPr>
-        <p:spPr>
-          <a:xfrm>
-            <a:off x="4480560" y="2468880"/>
-            <a:ext cx="7132320" cy="2194560"/>
-          </a:xfrm>
-          <a:prstGeom prst="rect">
-            <a:avLst/>
-          </a:prstGeom>
-          <a:noFill/>
-        </p:spPr>
-        <p:txBody>
-          <a:bodyPr wrap="square" anchor="t" lIns="0" rIns="0" tIns="0" bIns="0">
-            <a:spAutoFit/>
-          </a:bodyPr>
-          <a:lstStyle/>
-          <a:p>
-            <a:r>
-              <a:rPr sz="1600" b="1" i="0">
-                <a:solidFill>
-                  <a:srgbClr val="27B5CE"/>
-                </a:solidFill>
-                <a:latin typeface="Roboto"/>
-              </a:rPr>
-              <a:t>SECTION</a:t>
-            </a:r>
-          </a:p>
-          <a:p>
-            <a:pPr>
+            <a:pPr marL="0" indent="0">
+              <a:lnSpc>
+                <a:spcPct val="105000"/>
+              </a:lnSpc>
               <a:spcBef>
-                <a:spcPts val="600"/>
+                <a:spcPts val="0"/>
               </a:spcBef>
+              <a:spcAft>
+                <a:spcPts val="1000"/>
+              </a:spcAft>
             </a:pPr>
             <a:r>
-              <a:rPr sz="3800" b="1" i="0">
+              <a:rPr sz="1700" b="1" i="0">
+                <a:solidFill>
+                  <a:srgbClr val="EDAB0C"/>
+                </a:solidFill>
+                <a:latin typeface="Roboto"/>
+              </a:rPr>
+              <a:t>■  </a:t>
+            </a:r>
+            <a:r>
+              <a:rPr sz="1700" b="0" i="0">
                 <a:solidFill>
                   <a:srgbClr val="2A2929"/>
                 </a:solidFill>
                 <a:latin typeface="Roboto"/>
               </a:rPr>
-              <a:t>Identity &amp; access</a:t>
-            </a:r>
-          </a:p>
-          <a:p>
-            <a:pPr>
+              <a:t>A network connects machines so they can reach each other; it can be divided into subnets.</a:t>
+            </a:r>
+          </a:p>
+          <a:p>
+            <a:pPr marL="0" indent="0">
+              <a:lnSpc>
+                <a:spcPct val="105000"/>
+              </a:lnSpc>
               <a:spcBef>
+                <a:spcPts val="0"/>
+              </a:spcBef>
+              <a:spcAft>
                 <a:spcPts val="1000"/>
+              </a:spcAft>
+            </a:pPr>
+            <a:r>
+              <a:rPr sz="1700" b="1" i="0">
+                <a:solidFill>
+                  <a:srgbClr val="EDAB0C"/>
+                </a:solidFill>
+                <a:latin typeface="Roboto"/>
+              </a:rPr>
+              <a:t>■  </a:t>
+            </a:r>
+            <a:r>
+              <a:rPr sz="1700" b="0" i="0">
+                <a:solidFill>
+                  <a:srgbClr val="2A2929"/>
+                </a:solidFill>
+                <a:latin typeface="Roboto"/>
+              </a:rPr>
+              <a:t>Every machine has an IP address — a unique numeric label.</a:t>
+            </a:r>
+          </a:p>
+          <a:p>
+            <a:pPr marL="0" indent="0">
+              <a:lnSpc>
+                <a:spcPct val="105000"/>
+              </a:lnSpc>
+              <a:spcBef>
+                <a:spcPts val="0"/>
               </a:spcBef>
+              <a:spcAft>
+                <a:spcPts val="1000"/>
+              </a:spcAft>
             </a:pPr>
             <a:r>
-              <a:rPr sz="2000" b="0" i="1">
-                <a:solidFill>
-                  <a:srgbClr val="484848"/>
-                </a:solidFill>
-                <a:latin typeface="Roboto Light"/>
-              </a:rPr>
-              <a:t>who can do what</a:t>
-            </a:r>
-          </a:p>
-        </p:txBody>
-      </p:sp>
-      <p:sp>
-        <p:nvSpPr>
-          <p:cNvPr id="5" name="Rectangle 4"/>
+              <a:rPr sz="1700" b="1" i="0">
+                <a:solidFill>
+                  <a:srgbClr val="EDAB0C"/>
+                </a:solidFill>
+                <a:latin typeface="Roboto"/>
+              </a:rPr>
+              <a:t>■  </a:t>
+            </a:r>
+            <a:r>
+              <a:rPr sz="1700" b="0" i="0">
+                <a:solidFill>
+                  <a:srgbClr val="2A2929"/>
+                </a:solidFill>
+                <a:latin typeface="Roboto"/>
+              </a:rPr>
+              <a:t>A CIDR block describes a range of addresses. The number after the slash says how many bits are fixed, so a smaller number means a bigger range.</a:t>
+            </a:r>
+          </a:p>
+          <a:p>
+            <a:pPr marL="0" indent="0">
+              <a:lnSpc>
+                <a:spcPct val="105000"/>
+              </a:lnSpc>
+              <a:spcBef>
+                <a:spcPts val="0"/>
+              </a:spcBef>
+              <a:spcAft>
+                <a:spcPts val="1000"/>
+              </a:spcAft>
+            </a:pPr>
+            <a:r>
+              <a:rPr sz="1700" b="1" i="0">
+                <a:solidFill>
+                  <a:srgbClr val="EDAB0C"/>
+                </a:solidFill>
+                <a:latin typeface="Roboto"/>
+              </a:rPr>
+              <a:t>■  </a:t>
+            </a:r>
+            <a:r>
+              <a:rPr sz="1700" b="0" i="0">
+                <a:solidFill>
+                  <a:srgbClr val="2A2929"/>
+                </a:solidFill>
+                <a:latin typeface="Roboto"/>
+              </a:rPr>
+              <a:t>Traffic moves between networks through routers and gateways.</a:t>
+            </a:r>
+          </a:p>
+        </p:txBody>
+      </p:sp>
+      <p:pic>
+        <p:nvPicPr>
+          <p:cNvPr id="5" name="Picture 4" descr="07-ip-cidr.png"/>
+          <p:cNvPicPr>
+            <a:picLocks noChangeAspect="1"/>
+          </p:cNvPicPr>
+          <p:nvPr/>
+        </p:nvPicPr>
+        <p:blipFill>
+          <a:blip r:embed="rId2"/>
+          <a:stretch>
+            <a:fillRect/>
+          </a:stretch>
+        </p:blipFill>
+        <p:spPr>
+          <a:xfrm>
+            <a:off x="6400800" y="2862619"/>
+            <a:ext cx="5120640" cy="1864282"/>
+          </a:xfrm>
+          <a:prstGeom prst="rect">
+            <a:avLst/>
+          </a:prstGeom>
+        </p:spPr>
+      </p:pic>
+      <p:sp>
+        <p:nvSpPr>
+          <p:cNvPr id="6" name="Rectangle 5"/>
           <p:cNvSpPr/>
           <p:nvPr/>
         </p:nvSpPr>
@@ -6740,7 +4481,7 @@
       </p:sp>
       <p:sp>
         <p:nvSpPr>
-          <p:cNvPr id="6" name="TextBox 5"/>
+          <p:cNvPr id="7" name="TextBox 6"/>
           <p:cNvSpPr txBox="1"/>
           <p:nvPr/>
         </p:nvSpPr>
@@ -6783,7 +4524,7 @@
       </p:sp>
       <p:sp>
         <p:nvSpPr>
-          <p:cNvPr id="7" name="TextBox 6"/>
+          <p:cNvPr id="8" name="TextBox 7"/>
           <p:cNvSpPr txBox="1"/>
           <p:nvPr/>
         </p:nvSpPr>
@@ -6811,7 +4552,7 @@
                 </a:solidFill>
                 <a:latin typeface="Roboto"/>
               </a:rPr>
-              <a:t/>
+              <a:t>8</a:t>
             </a:r>
           </a:p>
         </p:txBody>
@@ -6871,7 +4612,7 @@
                 </a:solidFill>
                 <a:latin typeface="Roboto"/>
               </a:rPr>
-              <a:t>IAM — the essential components</a:t>
+              <a:t>Your own private network in the cloud</a:t>
             </a:r>
           </a:p>
           <a:p>
@@ -6887,7 +4628,7 @@
                 </a:solidFill>
                 <a:latin typeface="Roboto Light"/>
               </a:rPr>
-              <a:t>ACF M04</a:t>
+              <a:t>region-scoped, spans zones</a:t>
             </a:r>
           </a:p>
         </p:txBody>
@@ -6944,8 +4685,8 @@
         </p:nvSpPr>
         <p:spPr>
           <a:xfrm>
-            <a:off x="658368" y="1737360"/>
-            <a:ext cx="5486400" cy="4297680"/>
+            <a:off x="658368" y="1691640"/>
+            <a:ext cx="10881360" cy="4480560"/>
           </a:xfrm>
           <a:prstGeom prst="rect">
             <a:avLst/>
@@ -6953,7 +4694,7 @@
           <a:noFill/>
         </p:spPr>
         <p:txBody>
-          <a:bodyPr wrap="square" anchor="t" lIns="0" rIns="0" tIns="0" bIns="0">
+          <a:bodyPr wrap="square" anchor="ctr" lIns="0" rIns="0" tIns="0" bIns="0">
             <a:spAutoFit/>
           </a:bodyPr>
           <a:lstStyle/>
@@ -6970,7 +4711,7 @@
               </a:spcAft>
             </a:pPr>
             <a:r>
-              <a:rPr sz="1700" b="1" i="0">
+              <a:rPr sz="2400" b="1" i="0">
                 <a:solidFill>
                   <a:srgbClr val="EDAB0C"/>
                 </a:solidFill>
@@ -6979,13 +4720,13 @@
               <a:t>■  </a:t>
             </a:r>
             <a:r>
-              <a:rPr sz="1700" b="0" i="0">
+              <a:rPr sz="2400" b="0" i="0">
                 <a:solidFill>
                   <a:srgbClr val="2A2929"/>
                 </a:solidFill>
                 <a:latin typeface="Roboto"/>
               </a:rPr>
-              <a:t>IAM user — a person or application that authenticates to the account.</a:t>
+              <a:t>A virtual private network is a logically isolated slice of the provider's cloud that you define.</a:t>
             </a:r>
           </a:p>
           <a:p>
@@ -7001,7 +4742,7 @@
               </a:spcAft>
             </a:pPr>
             <a:r>
-              <a:rPr sz="1700" b="1" i="0">
+              <a:rPr sz="2400" b="1" i="0">
                 <a:solidFill>
                   <a:srgbClr val="EDAB0C"/>
                 </a:solidFill>
@@ -7010,13 +4751,13 @@
               <a:t>■  </a:t>
             </a:r>
             <a:r>
-              <a:rPr sz="1700" b="0" i="0">
+              <a:rPr sz="2400" b="0" i="0">
                 <a:solidFill>
                   <a:srgbClr val="2A2929"/>
                 </a:solidFill>
                 <a:latin typeface="Roboto"/>
               </a:rPr>
-              <a:t>IAM group — a collection of users granted identical permissions.</a:t>
+              <a:t>It belongs to one region and spans the availability zones inside it.</a:t>
             </a:r>
           </a:p>
           <a:p>
@@ -7032,7 +4773,7 @@
               </a:spcAft>
             </a:pPr>
             <a:r>
-              <a:rPr sz="1700" b="1" i="0">
+              <a:rPr sz="2400" b="1" i="0">
                 <a:solidFill>
                   <a:srgbClr val="EDAB0C"/>
                 </a:solidFill>
@@ -7041,75 +4782,20 @@
               <a:t>■  </a:t>
             </a:r>
             <a:r>
-              <a:rPr sz="1700" b="0" i="0">
+              <a:rPr sz="2400" b="0" i="0">
                 <a:solidFill>
                   <a:srgbClr val="2A2929"/>
                 </a:solidFill>
                 <a:latin typeface="Roboto"/>
               </a:rPr>
-              <a:t>IAM role — temporary permissions, assumable by a person, application or service (e.g. an EC2 instance).</a:t>
-            </a:r>
-          </a:p>
-          <a:p>
-            <a:pPr marL="0" indent="0">
-              <a:lnSpc>
-                <a:spcPct val="105000"/>
-              </a:lnSpc>
-              <a:spcBef>
-                <a:spcPts val="0"/>
-              </a:spcBef>
-              <a:spcAft>
-                <a:spcPts val="1000"/>
-              </a:spcAft>
-            </a:pPr>
-            <a:r>
-              <a:rPr sz="1700" b="1" i="0">
-                <a:solidFill>
-                  <a:srgbClr val="EDAB0C"/>
-                </a:solidFill>
-                <a:latin typeface="Roboto"/>
-              </a:rPr>
-              <a:t>■  </a:t>
-            </a:r>
-            <a:r>
-              <a:rPr sz="1700" b="0" i="0">
-                <a:solidFill>
-                  <a:srgbClr val="2A2929"/>
-                </a:solidFill>
-                <a:latin typeface="Roboto"/>
-              </a:rPr>
-              <a:t>IAM policy — a JSON document defining which resources can be accessed, and how.</a:t>
-            </a:r>
-          </a:p>
-        </p:txBody>
-      </p:sp>
-      <p:pic>
-        <p:nvPicPr>
-          <p:cNvPr id="5" name="Picture 4" descr="06-iam-components.png"/>
-          <p:cNvPicPr>
-            <a:picLocks noChangeAspect="1"/>
-          </p:cNvPicPr>
-          <p:nvPr/>
-        </p:nvPicPr>
-        <p:blipFill>
-          <a:blip r:embed="rId2"/>
-          <a:stretch>
-            <a:fillRect/>
-          </a:stretch>
-        </p:blipFill>
-        <p:spPr>
-          <a:xfrm>
-            <a:off x="6400800" y="2554558"/>
-            <a:ext cx="5120640" cy="2480404"/>
-          </a:xfrm>
-          <a:prstGeom prst="rect">
-            <a:avLst/>
-          </a:prstGeom>
-        </p:spPr>
-      </p:pic>
-      <p:sp>
-        <p:nvSpPr>
-          <p:cNvPr id="6" name="Rectangle 5"/>
+              <a:t>You size it with a CIDR block when you create it, and you cannot change that later — so it is given room to grow.</a:t>
+            </a:r>
+          </a:p>
+        </p:txBody>
+      </p:sp>
+      <p:sp>
+        <p:nvSpPr>
+          <p:cNvPr id="5" name="Rectangle 4"/>
           <p:cNvSpPr/>
           <p:nvPr/>
         </p:nvSpPr>
@@ -7153,7 +4839,7 @@
       </p:sp>
       <p:sp>
         <p:nvSpPr>
-          <p:cNvPr id="7" name="TextBox 6"/>
+          <p:cNvPr id="6" name="TextBox 5"/>
           <p:cNvSpPr txBox="1"/>
           <p:nvPr/>
         </p:nvSpPr>
@@ -7196,7 +4882,7 @@
       </p:sp>
       <p:sp>
         <p:nvSpPr>
-          <p:cNvPr id="8" name="TextBox 7"/>
+          <p:cNvPr id="7" name="TextBox 6"/>
           <p:cNvSpPr txBox="1"/>
           <p:nvPr/>
         </p:nvSpPr>
@@ -7284,7 +4970,7 @@
                 </a:solidFill>
                 <a:latin typeface="Roboto"/>
               </a:rPr>
-              <a:t>Securing access — the best practices</a:t>
+              <a:t>Names — the two settings you are about to turn on</a:t>
             </a:r>
           </a:p>
           <a:p>
@@ -7300,7 +4986,7 @@
                 </a:solidFill>
                 <a:latin typeface="Roboto Light"/>
               </a:rPr>
-              <a:t>ACF M04</a:t>
+              <a:t>two tick boxes, and why they matter later</a:t>
             </a:r>
           </a:p>
         </p:txBody>
@@ -7383,7 +5069,7 @@
               </a:spcAft>
             </a:pPr>
             <a:r>
-              <a:rPr sz="2400" b="1" i="0">
+              <a:rPr sz="1800" b="1" i="0">
                 <a:solidFill>
                   <a:srgbClr val="EDAB0C"/>
                 </a:solidFill>
@@ -7392,13 +5078,13 @@
               <a:t>■  </a:t>
             </a:r>
             <a:r>
-              <a:rPr sz="2400" b="0" i="0">
+              <a:rPr sz="1800" b="0" i="0">
                 <a:solidFill>
                   <a:srgbClr val="2A2929"/>
                 </a:solidFill>
                 <a:latin typeface="Roboto"/>
               </a:rPr>
-              <a:t>Attach policies to groups; assign users to groups (don't attach policies to individuals).</a:t>
+              <a:t>DNS turns a name into an address. Machines connect to addresses; people and configuration use names.</a:t>
             </a:r>
           </a:p>
           <a:p>
@@ -7414,7 +5100,7 @@
               </a:spcAft>
             </a:pPr>
             <a:r>
-              <a:rPr sz="2400" b="1" i="0">
+              <a:rPr sz="1800" b="1" i="0">
                 <a:solidFill>
                   <a:srgbClr val="EDAB0C"/>
                 </a:solidFill>
@@ -7423,13 +5109,75 @@
               <a:t>■  </a:t>
             </a:r>
             <a:r>
-              <a:rPr sz="2400" b="0" i="0">
+              <a:rPr sz="1800" b="0" i="0">
                 <a:solidFill>
                   <a:srgbClr val="2A2929"/>
                 </a:solidFill>
                 <a:latin typeface="Roboto"/>
               </a:rPr>
-              <a:t>Least privilege — grant only the permissions the task needs; all access is denied by default.</a:t>
+              <a:t>Creating the network asks you to enable two things, and they are not the same:</a:t>
+            </a:r>
+          </a:p>
+          <a:p>
+            <a:pPr marL="365760" indent="0">
+              <a:lnSpc>
+                <a:spcPct val="105000"/>
+              </a:lnSpc>
+              <a:spcBef>
+                <a:spcPts val="0"/>
+              </a:spcBef>
+              <a:spcAft>
+                <a:spcPts val="500"/>
+              </a:spcAft>
+            </a:pPr>
+            <a:r>
+              <a:rPr sz="1500" b="0" i="0">
+                <a:solidFill>
+                  <a:srgbClr val="7A7A7A"/>
+                </a:solidFill>
+                <a:latin typeface="Roboto"/>
+              </a:rPr>
+              <a:t>–  </a:t>
+            </a:r>
+            <a:r>
+              <a:rPr sz="1500" b="0" i="0">
+                <a:solidFill>
+                  <a:srgbClr val="2A2929"/>
+                </a:solidFill>
+                <a:latin typeface="Roboto"/>
+              </a:rPr>
+              <a:t>DNS resolution — things inside the network can look names up at all</a:t>
+            </a:r>
+          </a:p>
+          <a:p>
+            <a:pPr marL="365760" indent="0">
+              <a:lnSpc>
+                <a:spcPct val="105000"/>
+              </a:lnSpc>
+              <a:spcBef>
+                <a:spcPts val="0"/>
+              </a:spcBef>
+              <a:spcAft>
+                <a:spcPts val="500"/>
+              </a:spcAft>
+            </a:pPr>
+            <a:r>
+              <a:rPr sz="1500" b="0" i="0">
+                <a:solidFill>
+                  <a:srgbClr val="7A7A7A"/>
+                </a:solidFill>
+                <a:latin typeface="Roboto"/>
+              </a:rPr>
+              <a:t>–  </a:t>
+            </a:r>
+            <a:r>
+              <a:rPr sz="1500" b="0" i="0">
+                <a:solidFill>
+                  <a:srgbClr val="2A2929"/>
+                </a:solidFill>
+                <a:latin typeface="Roboto"/>
+              </a:rPr>
+              <a:t>DNS hostnames — things inside the network get a name of their own, not just an address</a:t>
             </a:r>
           </a:p>
           <a:p>
@@ -7445,7 +5193,7 @@
               </a:spcAft>
             </a:pPr>
             <a:r>
-              <a:rPr sz="2400" b="1" i="0">
+              <a:rPr sz="1800" b="1" i="0">
                 <a:solidFill>
                   <a:srgbClr val="EDAB0C"/>
                 </a:solidFill>
@@ -7454,13 +5202,13 @@
               <a:t>■  </a:t>
             </a:r>
             <a:r>
-              <a:rPr sz="2400" b="0" i="0">
+              <a:rPr sz="1800" b="0" i="0">
                 <a:solidFill>
                   <a:srgbClr val="2A2929"/>
                 </a:solidFill>
                 <a:latin typeface="Roboto"/>
               </a:rPr>
-              <a:t>MFA on human users; protect the root user (use it only when you must).</a:t>
+              <a:t>You are not building a DNS service here. You are switching on the one the platform already runs.</a:t>
             </a:r>
           </a:p>
           <a:p>
@@ -7476,7 +5224,7 @@
               </a:spcAft>
             </a:pPr>
             <a:r>
-              <a:rPr sz="2400" b="1" i="0">
+              <a:rPr sz="1800" b="1" i="0">
                 <a:solidFill>
                   <a:srgbClr val="EDAB0C"/>
                 </a:solidFill>
@@ -7485,13 +5233,44 @@
               <a:t>■  </a:t>
             </a:r>
             <a:r>
-              <a:rPr sz="2400" b="0" i="0">
+              <a:rPr sz="1800" b="0" i="0">
                 <a:solidFill>
                   <a:srgbClr val="2A2929"/>
                 </a:solidFill>
                 <a:latin typeface="Roboto"/>
               </a:rPr>
-              <a:t>Roles, not long-lived keys, for services — an EC2 instance assumes a role to reach RDS / S3.</a:t>
+              <a:t>It pays off at the end: the load balancer is given a name, and that name is what you open in a browser to prove the build works. Its addresses change over time; the name does not — which is the whole reason anything uses names.</a:t>
+            </a:r>
+          </a:p>
+          <a:p>
+            <a:pPr marL="0" indent="0">
+              <a:lnSpc>
+                <a:spcPct val="105000"/>
+              </a:lnSpc>
+              <a:spcBef>
+                <a:spcPts val="0"/>
+              </a:spcBef>
+              <a:spcAft>
+                <a:spcPts val="1000"/>
+              </a:spcAft>
+            </a:pPr>
+            <a:r>
+              <a:rPr sz="1800" b="1" i="0">
+                <a:solidFill>
+                  <a:srgbClr val="EDAB0C"/>
+                </a:solidFill>
+                <a:latin typeface="Roboto"/>
+              </a:rPr>
+              <a:t>■  </a:t>
+            </a:r>
+            <a:r>
+              <a:rPr sz="1800" b="0" i="0">
+                <a:solidFill>
+                  <a:srgbClr val="2A2929"/>
+                </a:solidFill>
+                <a:latin typeface="Roboto"/>
+              </a:rPr>
+              <a:t>Get this wrong and every server can be running perfectly and still be unreachable by name.</a:t>
             </a:r>
           </a:p>
         </p:txBody>
@@ -7673,7 +5452,7 @@
                 </a:solidFill>
                 <a:latin typeface="Roboto"/>
               </a:rPr>
-              <a:t>The design's IAM model</a:t>
+              <a:t>Subnets</a:t>
             </a:r>
           </a:p>
           <a:p>
@@ -7689,7 +5468,7 @@
                 </a:solidFill>
                 <a:latin typeface="Roboto Light"/>
               </a:rPr>
-              <a:t>build these groups + role</a:t>
+              <a:t>one zone each; public or private</a:t>
             </a:r>
           </a:p>
         </p:txBody>
@@ -7787,7 +5566,7 @@
                 </a:solidFill>
                 <a:latin typeface="Roboto"/>
               </a:rPr>
-              <a:t>YAT-ICT-Admins — read-only infra + console post-handover</a:t>
+              <a:t>You divide the network into subnets. Each subnet lives in exactly one availability zone.</a:t>
             </a:r>
           </a:p>
           <a:p>
@@ -7818,7 +5597,7 @@
                 </a:solidFill>
                 <a:latin typeface="Roboto"/>
               </a:rPr>
-              <a:t>MTS-Consultants — build admin</a:t>
+              <a:t>A subnet is public or private according to whether it has a route to the internet — not according to what it is called.</a:t>
             </a:r>
           </a:p>
           <a:p>
@@ -7849,69 +5628,7 @@
                 </a:solidFill>
                 <a:latin typeface="Roboto"/>
               </a:rPr>
-              <a:t>Application-Service — EC2 instance role (RDS + S3 + CloudWatch)</a:t>
-            </a:r>
-          </a:p>
-          <a:p>
-            <a:pPr marL="0" indent="0">
-              <a:lnSpc>
-                <a:spcPct val="105000"/>
-              </a:lnSpc>
-              <a:spcBef>
-                <a:spcPts val="0"/>
-              </a:spcBef>
-              <a:spcAft>
-                <a:spcPts val="1000"/>
-              </a:spcAft>
-            </a:pPr>
-            <a:r>
-              <a:rPr sz="2400" b="1" i="0">
-                <a:solidFill>
-                  <a:srgbClr val="EDAB0C"/>
-                </a:solidFill>
-                <a:latin typeface="Roboto"/>
-              </a:rPr>
-              <a:t>■  </a:t>
-            </a:r>
-            <a:r>
-              <a:rPr sz="2400" b="0" i="0">
-                <a:solidFill>
-                  <a:srgbClr val="2A2929"/>
-                </a:solidFill>
-                <a:latin typeface="Roboto"/>
-              </a:rPr>
-              <a:t>Finance-Auditors — read-only on logs / metrics / configs</a:t>
-            </a:r>
-          </a:p>
-          <a:p>
-            <a:pPr marL="0" indent="0">
-              <a:lnSpc>
-                <a:spcPct val="105000"/>
-              </a:lnSpc>
-              <a:spcBef>
-                <a:spcPts val="0"/>
-              </a:spcBef>
-              <a:spcAft>
-                <a:spcPts val="1000"/>
-              </a:spcAft>
-            </a:pPr>
-            <a:r>
-              <a:rPr sz="2400" b="1" i="0">
-                <a:solidFill>
-                  <a:srgbClr val="EDAB0C"/>
-                </a:solidFill>
-                <a:latin typeface="Roboto"/>
-              </a:rPr>
-              <a:t>■  </a:t>
-            </a:r>
-            <a:r>
-              <a:rPr sz="2400" b="0" i="0">
-                <a:solidFill>
-                  <a:srgbClr val="2A2929"/>
-                </a:solidFill>
-                <a:latin typeface="Roboto"/>
-              </a:rPr>
-              <a:t>Enforce MFA on the human groups (Essential Eight).</a:t>
+              <a:t>Set the zone yourself on every subnet. Left alone the console picks one for you, and a subnet in the wrong zone causes failures much later that never mention subnets.</a:t>
             </a:r>
           </a:p>
         </p:txBody>
@@ -8066,60 +5783,66 @@
       <p:grpSpPr/>
       <p:sp>
         <p:nvSpPr>
-          <p:cNvPr id="2" name="Rectangle 1"/>
+          <p:cNvPr id="2" name="TextBox 1"/>
+          <p:cNvSpPr txBox="1"/>
+          <p:nvPr/>
+        </p:nvSpPr>
+        <p:spPr>
+          <a:xfrm>
+            <a:off x="640080" y="457200"/>
+            <a:ext cx="10881360" cy="960120"/>
+          </a:xfrm>
+          <a:prstGeom prst="rect">
+            <a:avLst/>
+          </a:prstGeom>
+          <a:noFill/>
+        </p:spPr>
+        <p:txBody>
+          <a:bodyPr wrap="square" anchor="t" lIns="0" rIns="0" tIns="0" bIns="0">
+            <a:spAutoFit/>
+          </a:bodyPr>
+          <a:lstStyle/>
+          <a:p>
+            <a:r>
+              <a:rPr sz="2800" b="1" i="0">
+                <a:solidFill>
+                  <a:srgbClr val="2A2929"/>
+                </a:solidFill>
+                <a:latin typeface="Roboto"/>
+              </a:rPr>
+              <a:t>Why there are more subnets than tiers</a:t>
+            </a:r>
+          </a:p>
+          <a:p>
+            <a:pPr>
+              <a:spcBef>
+                <a:spcPts val="200"/>
+              </a:spcBef>
+            </a:pPr>
+            <a:r>
+              <a:rPr sz="1800" b="0" i="1">
+                <a:solidFill>
+                  <a:srgbClr val="D68E10"/>
+                </a:solidFill>
+                <a:latin typeface="Roboto Light"/>
+              </a:rPr>
+              <a:t>a service requirement, not a tier</a:t>
+            </a:r>
+          </a:p>
+        </p:txBody>
+      </p:sp>
+      <p:sp>
+        <p:nvSpPr>
+          <p:cNvPr id="3" name="Rectangle 2"/>
           <p:cNvSpPr/>
           <p:nvPr/>
         </p:nvSpPr>
         <p:spPr>
           <a:xfrm>
-            <a:off x="0" y="0"/>
-            <a:ext cx="12191695" cy="1234440"/>
-          </a:xfrm>
-          <a:prstGeom prst="rect">
-            <a:avLst/>
-          </a:prstGeom>
-          <a:solidFill>
-            <a:srgbClr val="2A2929"/>
-          </a:solidFill>
-          <a:ln>
-            <a:noFill/>
-          </a:ln>
-          <a:effectLst/>
-        </p:spPr>
-        <p:style>
-          <a:lnRef idx="1">
-            <a:schemeClr val="accent1"/>
-          </a:lnRef>
-          <a:fillRef idx="3">
-            <a:schemeClr val="accent1"/>
-          </a:fillRef>
-          <a:effectRef idx="2">
-            <a:schemeClr val="accent1"/>
-          </a:effectRef>
-          <a:fontRef idx="minor">
-            <a:schemeClr val="lt1"/>
-          </a:fontRef>
-        </p:style>
-        <p:txBody>
-          <a:bodyPr rtlCol="0" anchor="ctr"/>
-          <a:lstStyle/>
-          <a:p>
-            <a:pPr algn="ctr"/>
-          </a:p>
-        </p:txBody>
-      </p:sp>
-      <p:sp>
-        <p:nvSpPr>
-          <p:cNvPr id="3" name="Rounded Rectangle 2"/>
-          <p:cNvSpPr/>
-          <p:nvPr/>
-        </p:nvSpPr>
-        <p:spPr>
-          <a:xfrm>
-            <a:off x="640080" y="384048"/>
-            <a:ext cx="2331720" cy="457200"/>
-          </a:xfrm>
-          <a:prstGeom prst="roundRect">
+            <a:off x="658368" y="1371600"/>
+            <a:ext cx="1463040" cy="50800"/>
+          </a:xfrm>
+          <a:prstGeom prst="rect">
             <a:avLst/>
           </a:prstGeom>
           <a:solidFill>
@@ -8149,15 +5872,6 @@
           <a:lstStyle/>
           <a:p>
             <a:pPr algn="ctr"/>
-            <a:r>
-              <a:rPr sz="1300" b="1" i="0">
-                <a:solidFill>
-                  <a:srgbClr val="2A2929"/>
-                </a:solidFill>
-                <a:latin typeface="Roboto"/>
-              </a:rPr>
-              <a:t>RECORDED DEMO</a:t>
-            </a:r>
           </a:p>
         </p:txBody>
       </p:sp>
@@ -8169,8 +5883,8 @@
         </p:nvSpPr>
         <p:spPr>
           <a:xfrm>
-            <a:off x="3200400" y="310896"/>
-            <a:ext cx="8321040" cy="685800"/>
+            <a:off x="658368" y="1691640"/>
+            <a:ext cx="10881360" cy="4480560"/>
           </a:xfrm>
           <a:prstGeom prst="rect">
             <a:avLst/>
@@ -8179,40 +5893,6 @@
         </p:spPr>
         <p:txBody>
           <a:bodyPr wrap="square" anchor="ctr" lIns="0" rIns="0" tIns="0" bIns="0">
-            <a:spAutoFit/>
-          </a:bodyPr>
-          <a:lstStyle/>
-          <a:p>
-            <a:r>
-              <a:rPr sz="2500" b="1" i="0">
-                <a:solidFill>
-                  <a:srgbClr val="FFFFFF"/>
-                </a:solidFill>
-                <a:latin typeface="Roboto"/>
-              </a:rPr>
-              <a:t>Build an IAM group, user &amp; MFA</a:t>
-            </a:r>
-          </a:p>
-        </p:txBody>
-      </p:sp>
-      <p:sp>
-        <p:nvSpPr>
-          <p:cNvPr id="5" name="TextBox 4"/>
-          <p:cNvSpPr txBox="1"/>
-          <p:nvPr/>
-        </p:nvSpPr>
-        <p:spPr>
-          <a:xfrm>
-            <a:off x="658368" y="1554480"/>
-            <a:ext cx="10881360" cy="4297680"/>
-          </a:xfrm>
-          <a:prstGeom prst="rect">
-            <a:avLst/>
-          </a:prstGeom>
-          <a:noFill/>
-        </p:spPr>
-        <p:txBody>
-          <a:bodyPr wrap="square" anchor="t" lIns="0" rIns="0" tIns="0" bIns="0">
             <a:spAutoFit/>
           </a:bodyPr>
           <a:lstStyle/>
@@ -8229,7 +5909,7 @@
               </a:spcAft>
             </a:pPr>
             <a:r>
-              <a:rPr sz="1700" b="1" i="0">
+              <a:rPr sz="2400" b="1" i="0">
                 <a:solidFill>
                   <a:srgbClr val="EDAB0C"/>
                 </a:solidFill>
@@ -8238,13 +5918,13 @@
               <a:t>■  </a:t>
             </a:r>
             <a:r>
-              <a:rPr sz="1700" b="0" i="0">
+              <a:rPr sz="2400" b="0" i="0">
                 <a:solidFill>
                   <a:srgbClr val="2A2929"/>
                 </a:solidFill>
                 <a:latin typeface="Roboto"/>
               </a:rPr>
-              <a:t>Create a group; attach a least-privilege policy.</a:t>
+              <a:t>Your run sheet asks for more subnets than you have tiers to put in them.</a:t>
             </a:r>
           </a:p>
           <a:p>
@@ -8260,7 +5940,7 @@
               </a:spcAft>
             </a:pPr>
             <a:r>
-              <a:rPr sz="1700" b="1" i="0">
+              <a:rPr sz="2400" b="1" i="0">
                 <a:solidFill>
                   <a:srgbClr val="EDAB0C"/>
                 </a:solidFill>
@@ -8269,13 +5949,13 @@
               <a:t>■  </a:t>
             </a:r>
             <a:r>
-              <a:rPr sz="1700" b="0" i="0">
+              <a:rPr sz="2400" b="0" i="0">
                 <a:solidFill>
                   <a:srgbClr val="2A2929"/>
                 </a:solidFill>
                 <a:latin typeface="Roboto"/>
               </a:rPr>
-              <a:t>Create a user; add to the group; enable MFA.</a:t>
+              <a:t>Some managed services refuse to be created unless you hand them subnets in two zones — even when everything you are running sits in one.</a:t>
             </a:r>
           </a:p>
           <a:p>
@@ -8291,7 +5971,7 @@
               </a:spcAft>
             </a:pPr>
             <a:r>
-              <a:rPr sz="1700" b="1" i="0">
+              <a:rPr sz="2400" b="1" i="0">
                 <a:solidFill>
                   <a:srgbClr val="EDAB0C"/>
                 </a:solidFill>
@@ -8300,13 +5980,13 @@
               <a:t>■  </a:t>
             </a:r>
             <a:r>
-              <a:rPr sz="1700" b="0" i="0">
+              <a:rPr sz="2400" b="0" i="0">
                 <a:solidFill>
                   <a:srgbClr val="2A2929"/>
                 </a:solidFill>
                 <a:latin typeface="Roboto"/>
               </a:rPr>
-              <a:t>Create the EC2 instance role (Application-Service) and attach its policy.</a:t>
+              <a:t>So a couple of subnets exist to satisfy a service requirement, and stay empty.</a:t>
             </a:r>
           </a:p>
           <a:p>
@@ -8322,7 +6002,7 @@
               </a:spcAft>
             </a:pPr>
             <a:r>
-              <a:rPr sz="1700" b="1" i="0">
+              <a:rPr sz="2400" b="1" i="0">
                 <a:solidFill>
                   <a:srgbClr val="EDAB0C"/>
                 </a:solidFill>
@@ -8331,100 +6011,20 @@
               <a:t>■  </a:t>
             </a:r>
             <a:r>
-              <a:rPr sz="1700" b="0" i="0">
+              <a:rPr sz="2400" b="0" i="0">
                 <a:solidFill>
                   <a:srgbClr val="2A2929"/>
                 </a:solidFill>
                 <a:latin typeface="Roboto"/>
               </a:rPr>
-              <a:t>Capture the IAM evidence screenshot (groups list + a user with MFA).</a:t>
-            </a:r>
-          </a:p>
-        </p:txBody>
-      </p:sp>
-      <p:sp>
-        <p:nvSpPr>
-          <p:cNvPr id="6" name="Rounded Rectangle 5"/>
-          <p:cNvSpPr/>
-          <p:nvPr/>
-        </p:nvSpPr>
-        <p:spPr>
-          <a:xfrm>
-            <a:off x="640080" y="5897880"/>
-            <a:ext cx="7863840" cy="457200"/>
-          </a:xfrm>
-          <a:prstGeom prst="roundRect">
-            <a:avLst/>
-          </a:prstGeom>
-          <a:solidFill>
-            <a:srgbClr val="F9F9F9"/>
-          </a:solidFill>
-          <a:ln w="12700">
-            <a:solidFill>
-              <a:srgbClr val="CCCCCC"/>
-            </a:solidFill>
-          </a:ln>
-          <a:effectLst/>
-        </p:spPr>
-        <p:style>
-          <a:lnRef idx="1">
-            <a:schemeClr val="accent1"/>
-          </a:lnRef>
-          <a:fillRef idx="3">
-            <a:schemeClr val="accent1"/>
-          </a:fillRef>
-          <a:effectRef idx="2">
-            <a:schemeClr val="accent1"/>
-          </a:effectRef>
-          <a:fontRef idx="minor">
-            <a:schemeClr val="lt1"/>
-          </a:fontRef>
-        </p:style>
-        <p:txBody>
-          <a:bodyPr rtlCol="0" anchor="ctr"/>
-          <a:lstStyle/>
-          <a:p>
-            <a:pPr algn="ctr"/>
-          </a:p>
-        </p:txBody>
-      </p:sp>
-      <p:sp>
-        <p:nvSpPr>
-          <p:cNvPr id="7" name="TextBox 6"/>
-          <p:cNvSpPr txBox="1"/>
-          <p:nvPr/>
-        </p:nvSpPr>
-        <p:spPr>
-          <a:xfrm>
-            <a:off x="822960" y="5943600"/>
-            <a:ext cx="7498080" cy="365760"/>
-          </a:xfrm>
-          <a:prstGeom prst="rect">
-            <a:avLst/>
-          </a:prstGeom>
-          <a:noFill/>
-        </p:spPr>
-        <p:txBody>
-          <a:bodyPr wrap="square" anchor="ctr" lIns="0" rIns="0" tIns="0" bIns="0">
-            <a:spAutoFit/>
-          </a:bodyPr>
-          <a:lstStyle/>
-          <a:p>
-            <a:r>
-              <a:rPr sz="1400" b="1" i="0">
-                <a:solidFill>
-                  <a:srgbClr val="2A2929"/>
-                </a:solidFill>
-                <a:latin typeface="Roboto"/>
-              </a:rPr>
-              <a:t>▶  Play the AWS recorded demo (ACF M04 · IAM) — you do this next</a:t>
-            </a:r>
-          </a:p>
-        </p:txBody>
-      </p:sp>
-      <p:sp>
-        <p:nvSpPr>
-          <p:cNvPr id="8" name="Rectangle 7"/>
+              <a:t>Worth remembering. It becomes the starting point of the availability work later.</a:t>
+            </a:r>
+          </a:p>
+        </p:txBody>
+      </p:sp>
+      <p:sp>
+        <p:nvSpPr>
+          <p:cNvPr id="5" name="Rectangle 4"/>
           <p:cNvSpPr/>
           <p:nvPr/>
         </p:nvSpPr>
@@ -8468,7 +6068,7 @@
       </p:sp>
       <p:sp>
         <p:nvSpPr>
-          <p:cNvPr id="9" name="TextBox 8"/>
+          <p:cNvPr id="6" name="TextBox 5"/>
           <p:cNvSpPr txBox="1"/>
           <p:nvPr/>
         </p:nvSpPr>
@@ -8511,7 +6111,7 @@
       </p:sp>
       <p:sp>
         <p:nvSpPr>
-          <p:cNvPr id="10" name="TextBox 9"/>
+          <p:cNvPr id="7" name="TextBox 6"/>
           <p:cNvSpPr txBox="1"/>
           <p:nvPr/>
         </p:nvSpPr>
@@ -8696,7 +6296,7 @@
                 </a:solidFill>
                 <a:latin typeface="Roboto"/>
               </a:rPr>
-              <a:t>Build the IAM model</a:t>
+              <a:t>Create the network and its subnets</a:t>
             </a:r>
           </a:p>
         </p:txBody>
@@ -8750,11 +6350,11 @@
                 </a:solidFill>
                 <a:latin typeface="Roboto"/>
               </a:rPr>
-              <a:t>Per the Accounting Baseline Design, build the IAM foundation in the lab:</a:t>
-            </a:r>
-          </a:p>
-          <a:p>
-            <a:pPr marL="365760" indent="0">
+              <a:t>Run sheet — tasks 2 and 3.</a:t>
+            </a:r>
+          </a:p>
+          <a:p>
+            <a:pPr marL="0" indent="0">
               <a:lnSpc>
                 <a:spcPct val="105000"/>
               </a:lnSpc>
@@ -8762,88 +6362,26 @@
                 <a:spcPts val="0"/>
               </a:spcBef>
               <a:spcAft>
-                <a:spcPts val="500"/>
+                <a:spcPts val="1000"/>
               </a:spcAft>
             </a:pPr>
             <a:r>
-              <a:rPr sz="1400" b="0" i="0">
-                <a:solidFill>
-                  <a:srgbClr val="7A7A7A"/>
-                </a:solidFill>
-                <a:latin typeface="Roboto"/>
-              </a:rPr>
-              <a:t>–  </a:t>
-            </a:r>
-            <a:r>
-              <a:rPr sz="1400" b="0" i="0">
+              <a:rPr sz="1700" b="1" i="0">
+                <a:solidFill>
+                  <a:srgbClr val="EDAB0C"/>
+                </a:solidFill>
+                <a:latin typeface="Roboto"/>
+              </a:rPr>
+              <a:t>■  </a:t>
+            </a:r>
+            <a:r>
+              <a:rPr sz="1700" b="0" i="0">
                 <a:solidFill>
                   <a:srgbClr val="2A2929"/>
                 </a:solidFill>
                 <a:latin typeface="Roboto"/>
               </a:rPr>
-              <a:t>create the groups + the application-service role, with least-privilege policies</a:t>
-            </a:r>
-          </a:p>
-          <a:p>
-            <a:pPr marL="365760" indent="0">
-              <a:lnSpc>
-                <a:spcPct val="105000"/>
-              </a:lnSpc>
-              <a:spcBef>
-                <a:spcPts val="0"/>
-              </a:spcBef>
-              <a:spcAft>
-                <a:spcPts val="500"/>
-              </a:spcAft>
-            </a:pPr>
-            <a:r>
-              <a:rPr sz="1400" b="0" i="0">
-                <a:solidFill>
-                  <a:srgbClr val="7A7A7A"/>
-                </a:solidFill>
-                <a:latin typeface="Roboto"/>
-              </a:rPr>
-              <a:t>–  </a:t>
-            </a:r>
-            <a:r>
-              <a:rPr sz="1400" b="0" i="0">
-                <a:solidFill>
-                  <a:srgbClr val="2A2929"/>
-                </a:solidFill>
-                <a:latin typeface="Roboto"/>
-              </a:rPr>
-              <a:t>create at least one user per human group; enforce MFA</a:t>
-            </a:r>
-          </a:p>
-          <a:p>
-            <a:pPr marL="365760" indent="0">
-              <a:lnSpc>
-                <a:spcPct val="105000"/>
-              </a:lnSpc>
-              <a:spcBef>
-                <a:spcPts val="0"/>
-              </a:spcBef>
-              <a:spcAft>
-                <a:spcPts val="500"/>
-              </a:spcAft>
-            </a:pPr>
-            <a:r>
-              <a:rPr sz="1400" b="0" i="0">
-                <a:solidFill>
-                  <a:srgbClr val="7A7A7A"/>
-                </a:solidFill>
-                <a:latin typeface="Roboto"/>
-              </a:rPr>
-              <a:t>–  </a:t>
-            </a:r>
-            <a:r>
-              <a:rPr sz="1400" b="0" i="0">
-                <a:solidFill>
-                  <a:srgbClr val="2A2929"/>
-                </a:solidFill>
-                <a:latin typeface="Roboto"/>
-              </a:rPr>
-              <a:t>capture the IAM evidence (groups, a user with MFA, the role)</a:t>
+              <a:t>Create the private network at the range your run sheet gives, then every subnet it lists, setting the zone on each one yourself.</a:t>
             </a:r>
           </a:p>
         </p:txBody>
@@ -8923,7 +6461,7 @@
                 </a:solidFill>
                 <a:latin typeface="Roboto"/>
               </a:rPr>
-              <a:t>⏱  ~30 min</a:t>
+              <a:t>⏱  ~20 min</a:t>
             </a:r>
           </a:p>
         </p:txBody>
@@ -9121,7 +6659,7 @@
                 </a:solidFill>
                 <a:latin typeface="Roboto"/>
               </a:rPr>
-              <a:t>Section 2 · Identity &amp; access</a:t>
+              <a:t>Section 2 · The network</a:t>
             </a:r>
           </a:p>
         </p:txBody>
@@ -9294,7 +6832,7 @@
                 </a:solidFill>
                 <a:latin typeface="Roboto"/>
               </a:rPr>
-              <a:t>IAM = users + groups (people), roles (services, temporary creds), policies (JSON permissions).</a:t>
+              <a:t>A virtual private network is yours, region-scoped, and sized once.</a:t>
             </a:r>
           </a:p>
         </p:txBody>
@@ -9423,7 +6961,7 @@
                 </a:solidFill>
                 <a:latin typeface="Roboto"/>
               </a:rPr>
-              <a:t>Attach policies to groups; least privilege; MFA on humans; roles for services.</a:t>
+              <a:t>Subnets each sit in one zone; public or private is decided by routing.</a:t>
             </a:r>
           </a:p>
         </p:txBody>
@@ -9552,7 +7090,7 @@
                 </a:solidFill>
                 <a:latin typeface="Roboto"/>
               </a:rPr>
-              <a:t>Build the design's groups + role, and evidence it as you go.</a:t>
+              <a:t>Some subnets exist only because a service demands two zones.</a:t>
             </a:r>
           </a:p>
         </p:txBody>
@@ -9828,7 +7366,7 @@
                 </a:solidFill>
                 <a:latin typeface="Roboto"/>
               </a:rPr>
-              <a:t>Shared responsibility</a:t>
+              <a:t>Paths in and out</a:t>
             </a:r>
           </a:p>
           <a:p>
@@ -9844,7 +7382,7 @@
                 </a:solidFill>
                 <a:latin typeface="Roboto Light"/>
               </a:rPr>
-              <a:t>who secures what</a:t>
+              <a:t>what can reach what</a:t>
             </a:r>
           </a:p>
         </p:txBody>
@@ -10026,7 +7564,7 @@
                 </a:solidFill>
                 <a:latin typeface="Roboto"/>
               </a:rPr>
-              <a:t>The shared responsibility model</a:t>
+              <a:t>Two gateways, two jobs</a:t>
             </a:r>
           </a:p>
           <a:p>
@@ -10042,7 +7580,7 @@
                 </a:solidFill>
                 <a:latin typeface="Roboto Light"/>
               </a:rPr>
-              <a:t>ACF M04</a:t>
+              <a:t>one way in, one way out</a:t>
             </a:r>
           </a:p>
         </p:txBody>
@@ -10140,7 +7678,7 @@
                 </a:solidFill>
                 <a:latin typeface="Roboto"/>
               </a:rPr>
-              <a:t>AWS — security OF the cloud: physical data centres, hardware, network, virtualization infrastructure.</a:t>
+              <a:t>An internet gateway gives a subnet a two-way path to the internet.</a:t>
             </a:r>
           </a:p>
           <a:p>
@@ -10171,7 +7709,7 @@
                 </a:solidFill>
                 <a:latin typeface="Roboto"/>
               </a:rPr>
-              <a:t>You — security IN the cloud: the EC2 OS (patching), applications, security-group config, IAM, account management, and your data.</a:t>
+              <a:t>A NAT gateway lets private resources reach out — for updates and external calls — while nothing on the internet can reach in.</a:t>
             </a:r>
           </a:p>
           <a:p>
@@ -10202,14 +7740,14 @@
                 </a:solidFill>
                 <a:latin typeface="Roboto"/>
               </a:rPr>
-              <a:t>Knowing the line tells you what you must configure — and what you can rely on.</a:t>
+              <a:t>A NAT gateway is placed in a public subnet, and serves the private ones.</a:t>
             </a:r>
           </a:p>
         </p:txBody>
       </p:sp>
       <p:pic>
         <p:nvPicPr>
-          <p:cNvPr id="5" name="Picture 4" descr="06-shared-responsibility.png"/>
+          <p:cNvPr id="5" name="Picture 4" descr="vpc-anatomy.png"/>
           <p:cNvPicPr>
             <a:picLocks noChangeAspect="1"/>
           </p:cNvPicPr>
@@ -10223,8 +7761,8 @@
         </p:blipFill>
         <p:spPr>
           <a:xfrm>
-            <a:off x="6400800" y="2384615"/>
-            <a:ext cx="5120640" cy="2820290"/>
+            <a:off x="6400800" y="2057400"/>
+            <a:ext cx="5120640" cy="3474720"/>
           </a:xfrm>
           <a:prstGeom prst="rect">
             <a:avLst/>
@@ -10408,7 +7946,7 @@
                 </a:solidFill>
                 <a:latin typeface="Roboto"/>
               </a:rPr>
-              <a:t>From advising to building</a:t>
+              <a:t>Building what someone else designed</a:t>
             </a:r>
           </a:p>
           <a:p>
@@ -10424,7 +7962,7 @@
                 </a:solidFill>
                 <a:latin typeface="Roboto Light"/>
               </a:rPr>
-              <a:t>AT1 was advice; now you build</a:t>
+              <a:t>advice becomes a build</a:t>
             </a:r>
           </a:p>
         </p:txBody>
@@ -10522,7 +8060,7 @@
                 </a:solidFill>
                 <a:latin typeface="Roboto"/>
               </a:rPr>
-              <a:t>You implement a supplied design in the AWS lab — and evidence it.</a:t>
+              <a:t>AT1 was advice on paper. From here you build, in the console, and evidence it.</a:t>
             </a:r>
           </a:p>
           <a:p>
@@ -10553,7 +8091,7 @@
                 </a:solidFill>
                 <a:latin typeface="Roboto"/>
               </a:rPr>
-              <a:t>New mode: work to a design you didn't write — read it, build it faithfully.</a:t>
+              <a:t>Your run sheet tells you what to build and the settings to build it to. Finding your way around the console is your job.</a:t>
             </a:r>
           </a:p>
           <a:p>
@@ -10584,7 +8122,7 @@
                 </a:solidFill>
                 <a:latin typeface="Roboto"/>
               </a:rPr>
-              <a:t>New discipline: capture evidence as you go — the Deployment Report is built from it.</a:t>
+              <a:t>Today: the account and its region, then the private network and the paths in and out of it.</a:t>
             </a:r>
           </a:p>
           <a:p>
@@ -10615,38 +8153,7 @@
                 </a:solidFill>
                 <a:latin typeface="Roboto"/>
               </a:rPr>
-              <a:t>This Topic — the foundation tier: account &amp; Region, identity &amp; access, shared responsibility.</a:t>
-            </a:r>
-          </a:p>
-          <a:p>
-            <a:pPr marL="0" indent="0">
-              <a:lnSpc>
-                <a:spcPct val="105000"/>
-              </a:lnSpc>
-              <a:spcBef>
-                <a:spcPts val="0"/>
-              </a:spcBef>
-              <a:spcAft>
-                <a:spcPts val="1000"/>
-              </a:spcAft>
-            </a:pPr>
-            <a:r>
-              <a:rPr sz="2400" b="1" i="0">
-                <a:solidFill>
-                  <a:srgbClr val="EDAB0C"/>
-                </a:solidFill>
-                <a:latin typeface="Roboto"/>
-              </a:rPr>
-              <a:t>■  </a:t>
-            </a:r>
-            <a:r>
-              <a:rPr sz="2400" b="0" i="0">
-                <a:solidFill>
-                  <a:srgbClr val="2A2929"/>
-                </a:solidFill>
-                <a:latin typeface="Roboto"/>
-              </a:rPr>
-              <a:t>For every AWS task: watch the demo, then do it yourself.</a:t>
+              <a:t>Every block of teaching today ends with the next task on your run sheet.</a:t>
             </a:r>
           </a:p>
         </p:txBody>
@@ -10828,7 +8335,7 @@
                 </a:solidFill>
                 <a:latin typeface="Roboto"/>
               </a:rPr>
-              <a:t>The line shifts with the service</a:t>
+              <a:t>Route tables decide what is public</a:t>
             </a:r>
           </a:p>
           <a:p>
@@ -10844,7 +8351,7 @@
                 </a:solidFill>
                 <a:latin typeface="Roboto Light"/>
               </a:rPr>
-              <a:t>ACF M04</a:t>
+              <a:t>public or private is a routing decision</a:t>
             </a:r>
           </a:p>
         </p:txBody>
@@ -10942,7 +8449,7 @@
                 </a:solidFill>
                 <a:latin typeface="Roboto"/>
               </a:rPr>
-              <a:t>IaaS (EC2) — you manage more: the OS, patching, security groups, access controls.</a:t>
+              <a:t>A route table holds the rules that direct a subnet's traffic, and every table has a built-in local route so anything inside the network can talk.</a:t>
             </a:r>
           </a:p>
           <a:p>
@@ -10973,7 +8480,7 @@
                 </a:solidFill>
                 <a:latin typeface="Roboto"/>
               </a:rPr>
-              <a:t>PaaS (RDS) — AWS handles the OS, database patching, firewall, DR; you manage your data + access.</a:t>
+              <a:t>Add a 0.0.0.0/0 route to an internet gateway and the subnet is public. Point it at a NAT gateway instead and the subnet reaches out but cannot be reached.</a:t>
             </a:r>
           </a:p>
           <a:p>
@@ -11004,7 +8511,7 @@
                 </a:solidFill>
                 <a:latin typeface="Roboto"/>
               </a:rPr>
-              <a:t>More managed = more on AWS. The service type sets where the line falls.</a:t>
+              <a:t>A subnet with no route table of its own falls back to the network's default, which has no path out at all.</a:t>
             </a:r>
           </a:p>
         </p:txBody>
@@ -11186,7 +8693,23 @@
                 </a:solidFill>
                 <a:latin typeface="Roboto"/>
               </a:rPr>
-              <a:t>Assigning responsibility on this build</a:t>
+              <a:t>A tier that should have no way out</a:t>
+            </a:r>
+          </a:p>
+          <a:p>
+            <a:pPr>
+              <a:spcBef>
+                <a:spcPts val="200"/>
+              </a:spcBef>
+            </a:pPr>
+            <a:r>
+              <a:rPr sz="1800" b="0" i="1">
+                <a:solidFill>
+                  <a:srgbClr val="D68E10"/>
+                </a:solidFill>
+                <a:latin typeface="Roboto Light"/>
+              </a:rPr>
+              <a:t>deliberately unreachable</a:t>
             </a:r>
           </a:p>
         </p:txBody>
@@ -11284,7 +8807,7 @@
                 </a:solidFill>
                 <a:latin typeface="Roboto"/>
               </a:rPr>
-              <a:t>Map each layer of the Accounting build to its owner — AWS · YAT ICT · MTS (build) · end-users.</a:t>
+              <a:t>Your data subnets get no route table and no path to the internet. That is not an omission.</a:t>
             </a:r>
           </a:p>
           <a:p>
@@ -11315,11 +8838,11 @@
                 </a:solidFill>
                 <a:latin typeface="Roboto"/>
               </a:rPr>
-              <a:t>The supplied design's security section names the split; your job is to apply it:</a:t>
-            </a:r>
-          </a:p>
-          <a:p>
-            <a:pPr marL="365760" indent="0">
+              <a:t>A database has no business making outbound connections, so it is given no means to.</a:t>
+            </a:r>
+          </a:p>
+          <a:p>
+            <a:pPr marL="0" indent="0">
               <a:lnSpc>
                 <a:spcPct val="105000"/>
               </a:lnSpc>
@@ -11327,26 +8850,26 @@
                 <a:spcPts val="0"/>
               </a:spcBef>
               <a:spcAft>
-                <a:spcPts val="500"/>
+                <a:spcPts val="1000"/>
               </a:spcAft>
             </a:pPr>
             <a:r>
-              <a:rPr sz="2100" b="0" i="0">
-                <a:solidFill>
-                  <a:srgbClr val="7A7A7A"/>
-                </a:solidFill>
-                <a:latin typeface="Roboto"/>
-              </a:rPr>
-              <a:t>–  </a:t>
-            </a:r>
-            <a:r>
-              <a:rPr sz="2100" b="0" i="0">
+              <a:rPr sz="2400" b="1" i="0">
+                <a:solidFill>
+                  <a:srgbClr val="EDAB0C"/>
+                </a:solidFill>
+                <a:latin typeface="Roboto"/>
+              </a:rPr>
+              <a:t>■  </a:t>
+            </a:r>
+            <a:r>
+              <a:rPr sz="2400" b="0" i="0">
                 <a:solidFill>
                   <a:srgbClr val="2A2929"/>
                 </a:solidFill>
                 <a:latin typeface="Roboto"/>
               </a:rPr>
-              <a:t>AWS patches the RDS host · YAT patches the EC2 OS · MTS sets the IAM + SG config at build</a:t>
+              <a:t>Least privilege applies to routing, not just to permissions.</a:t>
             </a:r>
           </a:p>
         </p:txBody>
@@ -11625,7 +9148,7 @@
                 </a:solidFill>
                 <a:latin typeface="Roboto"/>
               </a:rPr>
-              <a:t>Complete the shared-responsibility assignment</a:t>
+              <a:t>Build the gateways and the routing</a:t>
             </a:r>
           </a:p>
         </p:txBody>
@@ -11679,7 +9202,7 @@
                 </a:solidFill>
                 <a:latin typeface="Roboto"/>
               </a:rPr>
-              <a:t>No console build — an analysis task (in the style of the AWS scenario).</a:t>
+              <a:t>Run sheet — tasks 4, 5 and 6.</a:t>
             </a:r>
           </a:p>
           <a:p>
@@ -11710,100 +9233,7 @@
                 </a:solidFill>
                 <a:latin typeface="Roboto"/>
               </a:rPr>
-              <a:t>For each part of the Accounting foundation, name who is responsible — AWS or you (YAT/MTS):</a:t>
-            </a:r>
-          </a:p>
-          <a:p>
-            <a:pPr marL="365760" indent="0">
-              <a:lnSpc>
-                <a:spcPct val="105000"/>
-              </a:lnSpc>
-              <a:spcBef>
-                <a:spcPts val="0"/>
-              </a:spcBef>
-              <a:spcAft>
-                <a:spcPts val="500"/>
-              </a:spcAft>
-            </a:pPr>
-            <a:r>
-              <a:rPr sz="1400" b="0" i="0">
-                <a:solidFill>
-                  <a:srgbClr val="7A7A7A"/>
-                </a:solidFill>
-                <a:latin typeface="Roboto"/>
-              </a:rPr>
-              <a:t>–  </a:t>
-            </a:r>
-            <a:r>
-              <a:rPr sz="1400" b="0" i="0">
-                <a:solidFill>
-                  <a:srgbClr val="2A2929"/>
-                </a:solidFill>
-                <a:latin typeface="Roboto"/>
-              </a:rPr>
-              <a:t>EC2 OS patching · security-group settings · application config · IAM / MFA</a:t>
-            </a:r>
-          </a:p>
-          <a:p>
-            <a:pPr marL="365760" indent="0">
-              <a:lnSpc>
-                <a:spcPct val="105000"/>
-              </a:lnSpc>
-              <a:spcBef>
-                <a:spcPts val="0"/>
-              </a:spcBef>
-              <a:spcAft>
-                <a:spcPts val="500"/>
-              </a:spcAft>
-            </a:pPr>
-            <a:r>
-              <a:rPr sz="1400" b="0" i="0">
-                <a:solidFill>
-                  <a:srgbClr val="7A7A7A"/>
-                </a:solidFill>
-                <a:latin typeface="Roboto"/>
-              </a:rPr>
-              <a:t>–  </a:t>
-            </a:r>
-            <a:r>
-              <a:rPr sz="1400" b="0" i="0">
-                <a:solidFill>
-                  <a:srgbClr val="2A2929"/>
-                </a:solidFill>
-                <a:latin typeface="Roboto"/>
-              </a:rPr>
-              <a:t>SQL Server patching on RDS · physical data-centre security · S3 bucket access config · data</a:t>
-            </a:r>
-          </a:p>
-          <a:p>
-            <a:pPr marL="0" indent="0">
-              <a:lnSpc>
-                <a:spcPct val="105000"/>
-              </a:lnSpc>
-              <a:spcBef>
-                <a:spcPts val="0"/>
-              </a:spcBef>
-              <a:spcAft>
-                <a:spcPts val="1000"/>
-              </a:spcAft>
-            </a:pPr>
-            <a:r>
-              <a:rPr sz="1700" b="1" i="0">
-                <a:solidFill>
-                  <a:srgbClr val="EDAB0C"/>
-                </a:solidFill>
-                <a:latin typeface="Roboto"/>
-              </a:rPr>
-              <a:t>■  </a:t>
-            </a:r>
-            <a:r>
-              <a:rPr sz="1700" b="0" i="0">
-                <a:solidFill>
-                  <a:srgbClr val="2A2929"/>
-                </a:solidFill>
-                <a:latin typeface="Roboto"/>
-              </a:rPr>
-              <a:t>Per the supplied design + the shared-responsibility model. ~½ page — feeds your Deployment Report's security section.</a:t>
+              <a:t>Create and attach the internet gateway, create the NAT gateway, then build the route tables and associate them with the right subnets.</a:t>
             </a:r>
           </a:p>
         </p:txBody>
@@ -11883,7 +9313,7 @@
                 </a:solidFill>
                 <a:latin typeface="Roboto"/>
               </a:rPr>
-              <a:t>⏱  ~15 min, then we discuss</a:t>
+              <a:t>⏱  ~25 min</a:t>
             </a:r>
           </a:p>
         </p:txBody>
@@ -12081,7 +9511,7 @@
                 </a:solidFill>
                 <a:latin typeface="Roboto"/>
               </a:rPr>
-              <a:t>Section 3 · Shared responsibility</a:t>
+              <a:t>Section 3 · Paths in and out</a:t>
             </a:r>
           </a:p>
         </p:txBody>
@@ -12254,7 +9684,7 @@
                 </a:solidFill>
                 <a:latin typeface="Roboto"/>
               </a:rPr>
-              <a:t>AWS secures the cloud; you secure what's in it — OS, apps, IAM, config, data.</a:t>
+              <a:t>An internet gateway is two-way; a NAT gateway is outbound only.</a:t>
             </a:r>
           </a:p>
         </p:txBody>
@@ -12383,7 +9813,7 @@
                 </a:solidFill>
                 <a:latin typeface="Roboto"/>
               </a:rPr>
-              <a:t>The line shifts by service: IaaS = more on you; PaaS = more on AWS.</a:t>
+              <a:t>The route table is what makes a subnet public or private.</a:t>
             </a:r>
           </a:p>
         </p:txBody>
@@ -12512,7 +9942,7 @@
                 </a:solidFill>
                 <a:latin typeface="Roboto"/>
               </a:rPr>
-              <a:t>Map every component to its owner — that's what you configure vs rely on.</a:t>
+              <a:t>The data tier is given no route out, deliberately.</a:t>
             </a:r>
           </a:p>
         </p:txBody>
@@ -12738,7 +10168,7 @@
                 </a:solidFill>
                 <a:latin typeface="Roboto"/>
               </a:rPr>
-              <a:t>Foundation down — next, the network</a:t>
+              <a:t>Next — who may talk to what</a:t>
             </a:r>
           </a:p>
           <a:p>
@@ -12757,7 +10187,7 @@
                 </a:solidFill>
                 <a:latin typeface="Roboto Light"/>
               </a:rPr>
-              <a:t>You've set the build mode (work to the design, evidence as you go) and stood up the foundation: account/Region, IAM, shared responsibility.</a:t>
+              <a:t>The network exists. Nothing yet controls which tier may reach which.</a:t>
             </a:r>
           </a:p>
           <a:p>
@@ -12776,26 +10206,7 @@
                 </a:solidFill>
                 <a:latin typeface="Roboto Light"/>
               </a:rPr>
-              <a:t>Everything else sits on this identity + access base.</a:t>
-            </a:r>
-          </a:p>
-          <a:p>
-            <a:pPr>
-              <a:lnSpc>
-                <a:spcPct val="105000"/>
-              </a:lnSpc>
-              <a:spcBef>
-                <a:spcPts val="1200"/>
-              </a:spcBef>
-            </a:pPr>
-            <a:r>
-              <a:rPr sz="1900" b="0" i="0">
-                <a:solidFill>
-                  <a:srgbClr val="E8E8E8"/>
-                </a:solidFill>
-                <a:latin typeface="Roboto Light"/>
-              </a:rPr>
-              <a:t>Next: the network &amp; security base — VPC, subnets, security groups, DNS.</a:t>
+              <a:t>Next: the firewall rules that chain the tiers, and the identities that operate the platform.</a:t>
             </a:r>
           </a:p>
         </p:txBody>
@@ -12949,7 +10360,7 @@
                 </a:solidFill>
                 <a:latin typeface="Roboto"/>
               </a:rPr>
-              <a:t>Working to a supplied design</a:t>
+              <a:t>Working to a run sheet</a:t>
             </a:r>
           </a:p>
           <a:p>
@@ -12965,7 +10376,7 @@
                 </a:solidFill>
                 <a:latin typeface="Roboto Light"/>
               </a:rPr>
-              <a:t>account · Region · evidence</a:t>
+              <a:t>the implementer's seat</a:t>
             </a:r>
           </a:p>
         </p:txBody>
@@ -13147,7 +10558,7 @@
                 </a:solidFill>
                 <a:latin typeface="Roboto"/>
               </a:rPr>
-              <a:t>Cloud architecture: requirements → design → build</a:t>
+              <a:t>Requirements → design → build</a:t>
             </a:r>
           </a:p>
           <a:p>
@@ -13163,7 +10574,7 @@
                 </a:solidFill>
                 <a:latin typeface="Roboto Light"/>
               </a:rPr>
-              <a:t>ACA M02</a:t>
+              <a:t>three roles, one hand-off each</a:t>
             </a:r>
           </a:p>
         </p:txBody>
@@ -13292,7 +10703,7 @@
                 </a:solidFill>
                 <a:latin typeface="Roboto"/>
               </a:rPr>
-              <a:t>the customer sets the requirements · the architect produces the design · the delivery crew builds it</a:t>
+              <a:t>the customer sets the requirements · an architect produces the design · a delivery crew builds it</a:t>
             </a:r>
           </a:p>
           <a:p>
@@ -13323,7 +10734,7 @@
                 </a:solidFill>
                 <a:latin typeface="Roboto"/>
               </a:rPr>
-              <a:t>In AT2 you're the delivery crew — the design is already done.</a:t>
+              <a:t>Three roles, a hand-off between each. From here you sit in the third one.</a:t>
             </a:r>
           </a:p>
         </p:txBody>
@@ -13529,7 +10940,7 @@
                 </a:solidFill>
                 <a:latin typeface="Roboto"/>
               </a:rPr>
-              <a:t>Working to a supplied design</a:t>
+              <a:t>What a run sheet gives you, and what it doesn't</a:t>
             </a:r>
           </a:p>
           <a:p>
@@ -13545,7 +10956,7 @@
                 </a:solidFill>
                 <a:latin typeface="Roboto Light"/>
               </a:rPr>
-              <a:t>faithful implementation, not redesign</a:t>
+              <a:t>the settings are given; the route is not</a:t>
             </a:r>
           </a:p>
         </p:txBody>
@@ -13643,7 +11054,7 @@
                 </a:solidFill>
                 <a:latin typeface="Roboto"/>
               </a:rPr>
-              <a:t>Read the design end to end before you touch the console.</a:t>
+              <a:t>It gives you the task, the settings to build it to, and what your screenshot must show.</a:t>
             </a:r>
           </a:p>
           <a:p>
@@ -13674,7 +11085,7 @@
                 </a:solidFill>
                 <a:latin typeface="Roboto"/>
               </a:rPr>
-              <a:t>Build what it specifies; make and justify only the decisions it leaves open (C1–C8).</a:t>
+              <a:t>It does not give you the clicks. Working out where a setting lives is part of the job.</a:t>
             </a:r>
           </a:p>
           <a:p>
@@ -13705,7 +11116,38 @@
                 </a:solidFill>
                 <a:latin typeface="Roboto"/>
               </a:rPr>
-              <a:t>“Implementer decision” = where your judgement is assessed.</a:t>
+              <a:t>Build what it specifies. Where it asks you to choose, the choice — and your reasoning — is yours.</a:t>
+            </a:r>
+          </a:p>
+          <a:p>
+            <a:pPr marL="0" indent="0">
+              <a:lnSpc>
+                <a:spcPct val="105000"/>
+              </a:lnSpc>
+              <a:spcBef>
+                <a:spcPts val="0"/>
+              </a:spcBef>
+              <a:spcAft>
+                <a:spcPts val="1000"/>
+              </a:spcAft>
+            </a:pPr>
+            <a:r>
+              <a:rPr sz="2400" b="1" i="0">
+                <a:solidFill>
+                  <a:srgbClr val="EDAB0C"/>
+                </a:solidFill>
+                <a:latin typeface="Roboto"/>
+              </a:rPr>
+              <a:t>■  </a:t>
+            </a:r>
+            <a:r>
+              <a:rPr sz="2400" b="0" i="0">
+                <a:solidFill>
+                  <a:srgbClr val="2A2929"/>
+                </a:solidFill>
+                <a:latin typeface="Roboto"/>
+              </a:rPr>
+              <a:t>Work the tasks in order. Each one is built on the one before it.</a:t>
             </a:r>
           </a:p>
         </p:txBody>
@@ -13887,7 +11329,7 @@
                 </a:solidFill>
                 <a:latin typeface="Roboto"/>
               </a:rPr>
-              <a:t>Choose your Region — data residency first</a:t>
+              <a:t>Region is the first decision</a:t>
             </a:r>
           </a:p>
           <a:p>
@@ -13903,7 +11345,7 @@
                 </a:solidFill>
                 <a:latin typeface="Roboto Light"/>
               </a:rPr>
-              <a:t>(applied from Topic 1)</a:t>
+              <a:t>set it before you create anything</a:t>
             </a:r>
           </a:p>
         </p:txBody>
@@ -13986,7 +11428,7 @@
               </a:spcAft>
             </a:pPr>
             <a:r>
-              <a:rPr sz="2200" b="1" i="0">
+              <a:rPr sz="2400" b="1" i="0">
                 <a:solidFill>
                   <a:srgbClr val="EDAB0C"/>
                 </a:solidFill>
@@ -13995,13 +11437,13 @@
               <a:t>■  </a:t>
             </a:r>
             <a:r>
-              <a:rPr sz="2200" b="0" i="0">
+              <a:rPr sz="2400" b="0" i="0">
                 <a:solidFill>
                   <a:srgbClr val="2A2929"/>
                 </a:solidFill>
                 <a:latin typeface="Roboto"/>
               </a:rPr>
-              <a:t>Region is the first build decision — and it's compliance, not preference.</a:t>
+              <a:t>Everything you create belongs to one region, so it is set before you create anything.</a:t>
             </a:r>
           </a:p>
           <a:p>
@@ -14017,7 +11459,7 @@
               </a:spcAft>
             </a:pPr>
             <a:r>
-              <a:rPr sz="2200" b="1" i="0">
+              <a:rPr sz="2400" b="1" i="0">
                 <a:solidFill>
                   <a:srgbClr val="EDAB0C"/>
                 </a:solidFill>
@@ -14026,13 +11468,13 @@
               <a:t>■  </a:t>
             </a:r>
             <a:r>
-              <a:rPr sz="2200" b="0" i="0">
+              <a:rPr sz="2400" b="0" i="0">
                 <a:solidFill>
                   <a:srgbClr val="2A2929"/>
                 </a:solidFill>
                 <a:latin typeface="Roboto"/>
               </a:rPr>
-              <a:t>The design mandates ap-southeast-2 (Sydney): financial records + PII stay onshore.</a:t>
+              <a:t>The driver is compliance, not preference — where the data is allowed to live.</a:t>
             </a:r>
           </a:p>
           <a:p>
@@ -14048,7 +11490,7 @@
               </a:spcAft>
             </a:pPr>
             <a:r>
-              <a:rPr sz="2200" b="1" i="0">
+              <a:rPr sz="2400" b="1" i="0">
                 <a:solidFill>
                   <a:srgbClr val="EDAB0C"/>
                 </a:solidFill>
@@ -14057,13 +11499,13 @@
               <a:t>■  </a:t>
             </a:r>
             <a:r>
-              <a:rPr sz="2200" b="0" i="0">
+              <a:rPr sz="2400" b="0" i="0">
                 <a:solidFill>
                   <a:srgbClr val="2A2929"/>
                 </a:solidFill>
                 <a:latin typeface="Roboto"/>
               </a:rPr>
-              <a:t>In the AWS Academy Learner Lab you deploy to us-east-1 — [scenario: ap-southeast-2 (Sydney) | deploy: us-east-1]. Same build; only the location label changes.</a:t>
+              <a:t>Your run sheet names a production region and a build region. They differ, and only the location label changes; the build is identical.</a:t>
             </a:r>
           </a:p>
           <a:p>
@@ -14079,7 +11521,7 @@
               </a:spcAft>
             </a:pPr>
             <a:r>
-              <a:rPr sz="2200" b="1" i="0">
+              <a:rPr sz="2400" b="1" i="0">
                 <a:solidFill>
                   <a:srgbClr val="EDAB0C"/>
                 </a:solidFill>
@@ -14088,44 +11530,13 @@
               <a:t>■  </a:t>
             </a:r>
             <a:r>
-              <a:rPr sz="2200" b="0" i="0">
+              <a:rPr sz="2400" b="0" i="0">
                 <a:solidFill>
                   <a:srgbClr val="2A2929"/>
                 </a:solidFill>
                 <a:latin typeface="Roboto"/>
               </a:rPr>
-              <a:t>Set the console Region before creating anything — resources are Region-scoped.</a:t>
-            </a:r>
-          </a:p>
-          <a:p>
-            <a:pPr marL="0" indent="0">
-              <a:lnSpc>
-                <a:spcPct val="105000"/>
-              </a:lnSpc>
-              <a:spcBef>
-                <a:spcPts val="0"/>
-              </a:spcBef>
-              <a:spcAft>
-                <a:spcPts val="1000"/>
-              </a:spcAft>
-            </a:pPr>
-            <a:r>
-              <a:rPr sz="2200" b="1" i="0">
-                <a:solidFill>
-                  <a:srgbClr val="EDAB0C"/>
-                </a:solidFill>
-                <a:latin typeface="Roboto"/>
-              </a:rPr>
-              <a:t>■  </a:t>
-            </a:r>
-            <a:r>
-              <a:rPr sz="2200" b="0" i="0">
-                <a:solidFill>
-                  <a:srgbClr val="2A2929"/>
-                </a:solidFill>
-                <a:latin typeface="Roboto"/>
-              </a:rPr>
-              <a:t>Deploy everything in the lab's Region (us-east-1) — the assessor checks the Region matches in every screenshot.</a:t>
+              <a:t>Make the region visible in your evidence.</a:t>
             </a:r>
           </a:p>
         </p:txBody>
@@ -14307,7 +11718,23 @@
                 </a:solidFill>
                 <a:latin typeface="Roboto"/>
               </a:rPr>
-              <a:t>Evidence discipline — capture as you build</a:t>
+              <a:t>Capture as you build</a:t>
+            </a:r>
+          </a:p>
+          <a:p>
+            <a:pPr>
+              <a:spcBef>
+                <a:spcPts val="200"/>
+              </a:spcBef>
+            </a:pPr>
+            <a:r>
+              <a:rPr sz="1800" b="0" i="1">
+                <a:solidFill>
+                  <a:srgbClr val="D68E10"/>
+                </a:solidFill>
+                <a:latin typeface="Roboto Light"/>
+              </a:rPr>
+              <a:t>build → capture → move on</a:t>
             </a:r>
           </a:p>
         </p:txBody>
@@ -14405,7 +11832,7 @@
                 </a:solidFill>
                 <a:latin typeface="Roboto"/>
               </a:rPr>
-              <a:t>The Deployment Report is evidenced from what you capture live — you can't reconstruct it later.</a:t>
+              <a:t>Take each screenshot as you finish that task, not at the end of the session.</a:t>
             </a:r>
           </a:p>
           <a:p>
@@ -14436,7 +11863,7 @@
                 </a:solidFill>
                 <a:latin typeface="Roboto"/>
               </a:rPr>
-              <a:t>Capture each named screenshot the template lists, as you build that resource (Region + the named resource visible).</a:t>
+              <a:t>Console state moves on. A screen you have navigated away from often cannot be recreated.</a:t>
             </a:r>
           </a:p>
           <a:p>
@@ -14467,38 +11894,7 @@
                 </a:solidFill>
                 <a:latin typeface="Roboto"/>
               </a:rPr>
-              <a:t>Export configs (IAM policies, SG rules, VPC) as you go → Appendix B.</a:t>
-            </a:r>
-          </a:p>
-          <a:p>
-            <a:pPr marL="0" indent="0">
-              <a:lnSpc>
-                <a:spcPct val="105000"/>
-              </a:lnSpc>
-              <a:spcBef>
-                <a:spcPts val="0"/>
-              </a:spcBef>
-              <a:spcAft>
-                <a:spcPts val="1000"/>
-              </a:spcAft>
-            </a:pPr>
-            <a:r>
-              <a:rPr sz="2400" b="1" i="0">
-                <a:solidFill>
-                  <a:srgbClr val="EDAB0C"/>
-                </a:solidFill>
-                <a:latin typeface="Roboto"/>
-              </a:rPr>
-              <a:t>■  </a:t>
-            </a:r>
-            <a:r>
-              <a:rPr sz="2400" b="0" i="0">
-                <a:solidFill>
-                  <a:srgbClr val="2A2929"/>
-                </a:solidFill>
-                <a:latin typeface="Roboto"/>
-              </a:rPr>
-              <a:t>Build → capture → move on. Evidence is part of the build, not a write-up afterwards.</a:t>
+              <a:t>The bar for a screenshot is simple: clear enough for the assessor to read. If they cannot make out the setting you are claiming, it is not evidence.</a:t>
             </a:r>
           </a:p>
         </p:txBody>
@@ -14666,6 +12062,50 @@
             <a:avLst/>
           </a:prstGeom>
           <a:solidFill>
+            <a:srgbClr val="92268F"/>
+          </a:solidFill>
+          <a:ln>
+            <a:noFill/>
+          </a:ln>
+          <a:effectLst/>
+        </p:spPr>
+        <p:style>
+          <a:lnRef idx="1">
+            <a:schemeClr val="accent1"/>
+          </a:lnRef>
+          <a:fillRef idx="3">
+            <a:schemeClr val="accent1"/>
+          </a:fillRef>
+          <a:effectRef idx="2">
+            <a:schemeClr val="accent1"/>
+          </a:effectRef>
+          <a:fontRef idx="minor">
+            <a:schemeClr val="lt1"/>
+          </a:fontRef>
+        </p:style>
+        <p:txBody>
+          <a:bodyPr rtlCol="0" anchor="ctr"/>
+          <a:lstStyle/>
+          <a:p>
+            <a:pPr algn="ctr"/>
+          </a:p>
+        </p:txBody>
+      </p:sp>
+      <p:sp>
+        <p:nvSpPr>
+          <p:cNvPr id="3" name="Rounded Rectangle 2"/>
+          <p:cNvSpPr/>
+          <p:nvPr/>
+        </p:nvSpPr>
+        <p:spPr>
+          <a:xfrm>
+            <a:off x="640080" y="384048"/>
+            <a:ext cx="1691640" cy="457200"/>
+          </a:xfrm>
+          <a:prstGeom prst="roundRect">
+            <a:avLst/>
+          </a:prstGeom>
+          <a:solidFill>
             <a:srgbClr val="2A2929"/>
           </a:solidFill>
           <a:ln>
@@ -14692,58 +12132,14 @@
           <a:lstStyle/>
           <a:p>
             <a:pPr algn="ctr"/>
-          </a:p>
-        </p:txBody>
-      </p:sp>
-      <p:sp>
-        <p:nvSpPr>
-          <p:cNvPr id="3" name="Rounded Rectangle 2"/>
-          <p:cNvSpPr/>
-          <p:nvPr/>
-        </p:nvSpPr>
-        <p:spPr>
-          <a:xfrm>
-            <a:off x="640080" y="384048"/>
-            <a:ext cx="2240280" cy="457200"/>
-          </a:xfrm>
-          <a:prstGeom prst="roundRect">
-            <a:avLst/>
-          </a:prstGeom>
-          <a:solidFill>
-            <a:srgbClr val="92268F"/>
-          </a:solidFill>
-          <a:ln>
-            <a:noFill/>
-          </a:ln>
-          <a:effectLst/>
-        </p:spPr>
-        <p:style>
-          <a:lnRef idx="1">
-            <a:schemeClr val="accent1"/>
-          </a:lnRef>
-          <a:fillRef idx="3">
-            <a:schemeClr val="accent1"/>
-          </a:fillRef>
-          <a:effectRef idx="2">
-            <a:schemeClr val="accent1"/>
-          </a:effectRef>
-          <a:fontRef idx="minor">
-            <a:schemeClr val="lt1"/>
-          </a:fontRef>
-        </p:style>
-        <p:txBody>
-          <a:bodyPr rtlCol="0" anchor="ctr"/>
-          <a:lstStyle/>
-          <a:p>
-            <a:pPr algn="ctr"/>
-            <a:r>
-              <a:rPr sz="1300" b="1" i="0">
-                <a:solidFill>
-                  <a:srgbClr val="2A2929"/>
-                </a:solidFill>
-                <a:latin typeface="Roboto"/>
-              </a:rPr>
-              <a:t>DEMONSTRATION</a:t>
+            <a:r>
+              <a:rPr sz="1400" b="1" i="0">
+                <a:solidFill>
+                  <a:srgbClr val="FBB900"/>
+                </a:solidFill>
+                <a:latin typeface="Roboto"/>
+              </a:rPr>
+              <a:t>ACTIVITY</a:t>
             </a:r>
           </a:p>
         </p:txBody>
@@ -14756,8 +12152,8 @@
         </p:nvSpPr>
         <p:spPr>
           <a:xfrm>
-            <a:off x="3200400" y="310896"/>
-            <a:ext cx="8321040" cy="685800"/>
+            <a:off x="2560320" y="310896"/>
+            <a:ext cx="8961120" cy="685800"/>
           </a:xfrm>
           <a:prstGeom prst="rect">
             <a:avLst/>
@@ -14771,13 +12167,13 @@
           <a:lstStyle/>
           <a:p>
             <a:r>
-              <a:rPr sz="2500" b="1" i="0">
+              <a:rPr sz="2600" b="1" i="0">
                 <a:solidFill>
                   <a:srgbClr val="FFFFFF"/>
                 </a:solidFill>
                 <a:latin typeface="Roboto"/>
               </a:rPr>
-              <a:t>Set up the build workspace</a:t>
+              <a:t>Set your region and confirm it</a:t>
             </a:r>
           </a:p>
         </p:txBody>
@@ -14831,7 +12227,7 @@
                 </a:solidFill>
                 <a:latin typeface="Roboto"/>
               </a:rPr>
-              <a:t>Sign in to the AWS Academy Learner Lab; set the Region to us-east-1 — [scenario: ap-southeast-2 (Sydney) | deploy: us-east-1].</a:t>
+              <a:t>Run sheet — task 1.</a:t>
             </a:r>
           </a:p>
           <a:p>
@@ -14862,69 +12258,7 @@
                 </a:solidFill>
                 <a:latin typeface="Roboto"/>
               </a:rPr>
-              <a:t>Confirm the identity you're building as.</a:t>
-            </a:r>
-          </a:p>
-          <a:p>
-            <a:pPr marL="0" indent="0">
-              <a:lnSpc>
-                <a:spcPct val="105000"/>
-              </a:lnSpc>
-              <a:spcBef>
-                <a:spcPts val="0"/>
-              </a:spcBef>
-              <a:spcAft>
-                <a:spcPts val="1000"/>
-              </a:spcAft>
-            </a:pPr>
-            <a:r>
-              <a:rPr sz="1700" b="1" i="0">
-                <a:solidFill>
-                  <a:srgbClr val="EDAB0C"/>
-                </a:solidFill>
-                <a:latin typeface="Roboto"/>
-              </a:rPr>
-              <a:t>■  </a:t>
-            </a:r>
-            <a:r>
-              <a:rPr sz="1700" b="0" i="0">
-                <a:solidFill>
-                  <a:srgbClr val="2A2929"/>
-                </a:solidFill>
-                <a:latin typeface="Roboto"/>
-              </a:rPr>
-              <a:t>Capture the first named screenshot (the Region selector) into the evidence log.</a:t>
-            </a:r>
-          </a:p>
-          <a:p>
-            <a:pPr marL="0" indent="0">
-              <a:lnSpc>
-                <a:spcPct val="105000"/>
-              </a:lnSpc>
-              <a:spcBef>
-                <a:spcPts val="0"/>
-              </a:spcBef>
-              <a:spcAft>
-                <a:spcPts val="1000"/>
-              </a:spcAft>
-            </a:pPr>
-            <a:r>
-              <a:rPr sz="1700" b="1" i="0">
-                <a:solidFill>
-                  <a:srgbClr val="EDAB0C"/>
-                </a:solidFill>
-                <a:latin typeface="Roboto"/>
-              </a:rPr>
-              <a:t>■  </a:t>
-            </a:r>
-            <a:r>
-              <a:rPr sz="1700" b="0" i="0">
-                <a:solidFill>
-                  <a:srgbClr val="2A2929"/>
-                </a:solidFill>
-                <a:latin typeface="Roboto"/>
-              </a:rPr>
-              <a:t>Show where configuration exports come from.</a:t>
+              <a:t>Sign in, set the region your run sheet names for building, and capture the console with the region selector visible.</a:t>
             </a:r>
           </a:p>
         </p:txBody>
@@ -14938,7 +12272,7 @@
         <p:spPr>
           <a:xfrm>
             <a:off x="640080" y="5897880"/>
-            <a:ext cx="6583680" cy="457200"/>
+            <a:ext cx="4023360" cy="457200"/>
           </a:xfrm>
           <a:prstGeom prst="roundRect">
             <a:avLst/>
@@ -14984,7 +12318,7 @@
         <p:spPr>
           <a:xfrm>
             <a:off x="822960" y="5943600"/>
-            <a:ext cx="6217920" cy="365760"/>
+            <a:ext cx="3657600" cy="365760"/>
           </a:xfrm>
           <a:prstGeom prst="rect">
             <a:avLst/>
@@ -14998,13 +12332,13 @@
           <a:lstStyle/>
           <a:p>
             <a:r>
-              <a:rPr sz="1400" b="1" i="0">
+              <a:rPr sz="1500" b="1" i="0">
                 <a:solidFill>
                   <a:srgbClr val="2A2929"/>
                 </a:solidFill>
                 <a:latin typeface="Roboto"/>
               </a:rPr>
-              <a:t>▶  Instructor demonstrates live (no recorded demo) — you do this next</a:t>
+              <a:t>⏱  ~10 min</a:t>
             </a:r>
           </a:p>
         </p:txBody>
@@ -15145,7 +12479,7 @@
     <p:bg>
       <p:bgPr>
         <a:solidFill>
-          <a:srgbClr val="FFFFFF"/>
+          <a:srgbClr val="F9F9F9"/>
         </a:solidFill>
         <a:effectLst/>
       </p:bgPr>
@@ -15159,14 +12493,64 @@
       <p:grpSpPr/>
       <p:sp>
         <p:nvSpPr>
-          <p:cNvPr id="2" name="Rectangle 1"/>
+          <p:cNvPr id="2" name="TextBox 1"/>
+          <p:cNvSpPr txBox="1"/>
+          <p:nvPr/>
+        </p:nvSpPr>
+        <p:spPr>
+          <a:xfrm>
+            <a:off x="640080" y="548640"/>
+            <a:ext cx="10881360" cy="1097280"/>
+          </a:xfrm>
+          <a:prstGeom prst="rect">
+            <a:avLst/>
+          </a:prstGeom>
+          <a:noFill/>
+        </p:spPr>
+        <p:txBody>
+          <a:bodyPr wrap="square" anchor="t" lIns="0" rIns="0" tIns="0" bIns="0">
+            <a:spAutoFit/>
+          </a:bodyPr>
+          <a:lstStyle/>
+          <a:p>
+            <a:r>
+              <a:rPr sz="3200" b="1" i="0">
+                <a:solidFill>
+                  <a:srgbClr val="2A2929"/>
+                </a:solidFill>
+                <a:latin typeface="Roboto"/>
+              </a:rPr>
+              <a:t>Key takeaways</a:t>
+            </a:r>
+          </a:p>
+          <a:p>
+            <a:pPr>
+              <a:spcBef>
+                <a:spcPts val="200"/>
+              </a:spcBef>
+            </a:pPr>
+            <a:r>
+              <a:rPr sz="1800" b="1" i="0">
+                <a:solidFill>
+                  <a:srgbClr val="92268F"/>
+                </a:solidFill>
+                <a:latin typeface="Roboto"/>
+              </a:rPr>
+              <a:t>Section 1 · Working to a run sheet</a:t>
+            </a:r>
+          </a:p>
+        </p:txBody>
+      </p:sp>
+      <p:sp>
+        <p:nvSpPr>
+          <p:cNvPr id="3" name="Rectangle 2"/>
           <p:cNvSpPr/>
           <p:nvPr/>
         </p:nvSpPr>
         <p:spPr>
           <a:xfrm>
-            <a:off x="0" y="0"/>
-            <a:ext cx="12191695" cy="1234440"/>
+            <a:off x="658368" y="1600200"/>
+            <a:ext cx="1463040" cy="50800"/>
           </a:xfrm>
           <a:prstGeom prst="rect">
             <a:avLst/>
@@ -15203,285 +12587,20 @@
       </p:sp>
       <p:sp>
         <p:nvSpPr>
-          <p:cNvPr id="3" name="Rounded Rectangle 2"/>
+          <p:cNvPr id="4" name="Rectangle 3"/>
           <p:cNvSpPr/>
           <p:nvPr/>
         </p:nvSpPr>
         <p:spPr>
           <a:xfrm>
-            <a:off x="640080" y="384048"/>
-            <a:ext cx="1691640" cy="457200"/>
-          </a:xfrm>
-          <a:prstGeom prst="roundRect">
+            <a:off x="640080" y="1965960"/>
+            <a:ext cx="10927080" cy="841248"/>
+          </a:xfrm>
+          <a:prstGeom prst="rect">
             <a:avLst/>
           </a:prstGeom>
           <a:solidFill>
-            <a:srgbClr val="2A2929"/>
-          </a:solidFill>
-          <a:ln>
-            <a:noFill/>
-          </a:ln>
-          <a:effectLst/>
-        </p:spPr>
-        <p:style>
-          <a:lnRef idx="1">
-            <a:schemeClr val="accent1"/>
-          </a:lnRef>
-          <a:fillRef idx="3">
-            <a:schemeClr val="accent1"/>
-          </a:fillRef>
-          <a:effectRef idx="2">
-            <a:schemeClr val="accent1"/>
-          </a:effectRef>
-          <a:fontRef idx="minor">
-            <a:schemeClr val="lt1"/>
-          </a:fontRef>
-        </p:style>
-        <p:txBody>
-          <a:bodyPr rtlCol="0" anchor="ctr"/>
-          <a:lstStyle/>
-          <a:p>
-            <a:pPr algn="ctr"/>
-            <a:r>
-              <a:rPr sz="1400" b="1" i="0">
-                <a:solidFill>
-                  <a:srgbClr val="FBB900"/>
-                </a:solidFill>
-                <a:latin typeface="Roboto"/>
-              </a:rPr>
-              <a:t>ACTIVITY</a:t>
-            </a:r>
-          </a:p>
-        </p:txBody>
-      </p:sp>
-      <p:sp>
-        <p:nvSpPr>
-          <p:cNvPr id="4" name="TextBox 3"/>
-          <p:cNvSpPr txBox="1"/>
-          <p:nvPr/>
-        </p:nvSpPr>
-        <p:spPr>
-          <a:xfrm>
-            <a:off x="2560320" y="310896"/>
-            <a:ext cx="8961120" cy="685800"/>
-          </a:xfrm>
-          <a:prstGeom prst="rect">
-            <a:avLst/>
-          </a:prstGeom>
-          <a:noFill/>
-        </p:spPr>
-        <p:txBody>
-          <a:bodyPr wrap="square" anchor="ctr" lIns="0" rIns="0" tIns="0" bIns="0">
-            <a:spAutoFit/>
-          </a:bodyPr>
-          <a:lstStyle/>
-          <a:p>
-            <a:r>
-              <a:rPr sz="2600" b="1" i="0">
-                <a:solidFill>
-                  <a:srgbClr val="FFFFFF"/>
-                </a:solidFill>
-                <a:latin typeface="Roboto"/>
-              </a:rPr>
-              <a:t>Set up your build workspace</a:t>
-            </a:r>
-          </a:p>
-        </p:txBody>
-      </p:sp>
-      <p:sp>
-        <p:nvSpPr>
-          <p:cNvPr id="5" name="TextBox 4"/>
-          <p:cNvSpPr txBox="1"/>
-          <p:nvPr/>
-        </p:nvSpPr>
-        <p:spPr>
-          <a:xfrm>
-            <a:off x="658368" y="1554480"/>
-            <a:ext cx="10881360" cy="4297680"/>
-          </a:xfrm>
-          <a:prstGeom prst="rect">
-            <a:avLst/>
-          </a:prstGeom>
-          <a:noFill/>
-        </p:spPr>
-        <p:txBody>
-          <a:bodyPr wrap="square" anchor="t" lIns="0" rIns="0" tIns="0" bIns="0">
-            <a:spAutoFit/>
-          </a:bodyPr>
-          <a:lstStyle/>
-          <a:p>
-            <a:pPr marL="0" indent="0">
-              <a:lnSpc>
-                <a:spcPct val="105000"/>
-              </a:lnSpc>
-              <a:spcBef>
-                <a:spcPts val="0"/>
-              </a:spcBef>
-              <a:spcAft>
-                <a:spcPts val="1000"/>
-              </a:spcAft>
-            </a:pPr>
-            <a:r>
-              <a:rPr sz="1700" b="1" i="0">
-                <a:solidFill>
-                  <a:srgbClr val="EDAB0C"/>
-                </a:solidFill>
-                <a:latin typeface="Roboto"/>
-              </a:rPr>
-              <a:t>■  </a:t>
-            </a:r>
-            <a:r>
-              <a:rPr sz="1700" b="0" i="0">
-                <a:solidFill>
-                  <a:srgbClr val="2A2929"/>
-                </a:solidFill>
-                <a:latin typeface="Roboto"/>
-              </a:rPr>
-              <a:t>In the AWS Academy Learner Lab, set up to build the Accounting System foundation:</a:t>
-            </a:r>
-          </a:p>
-          <a:p>
-            <a:pPr marL="365760" indent="0">
-              <a:lnSpc>
-                <a:spcPct val="105000"/>
-              </a:lnSpc>
-              <a:spcBef>
-                <a:spcPts val="0"/>
-              </a:spcBef>
-              <a:spcAft>
-                <a:spcPts val="500"/>
-              </a:spcAft>
-            </a:pPr>
-            <a:r>
-              <a:rPr sz="1400" b="0" i="0">
-                <a:solidFill>
-                  <a:srgbClr val="7A7A7A"/>
-                </a:solidFill>
-                <a:latin typeface="Roboto"/>
-              </a:rPr>
-              <a:t>–  </a:t>
-            </a:r>
-            <a:r>
-              <a:rPr sz="1400" b="0" i="0">
-                <a:solidFill>
-                  <a:srgbClr val="2A2929"/>
-                </a:solidFill>
-                <a:latin typeface="Roboto"/>
-              </a:rPr>
-              <a:t>set the Region to us-east-1 — [scenario: ap-southeast-2 (Sydney) | deploy: us-east-1] (confirm it in your evidence)</a:t>
-            </a:r>
-          </a:p>
-          <a:p>
-            <a:pPr marL="365760" indent="0">
-              <a:lnSpc>
-                <a:spcPct val="105000"/>
-              </a:lnSpc>
-              <a:spcBef>
-                <a:spcPts val="0"/>
-              </a:spcBef>
-              <a:spcAft>
-                <a:spcPts val="500"/>
-              </a:spcAft>
-            </a:pPr>
-            <a:r>
-              <a:rPr sz="1400" b="0" i="0">
-                <a:solidFill>
-                  <a:srgbClr val="7A7A7A"/>
-                </a:solidFill>
-                <a:latin typeface="Roboto"/>
-              </a:rPr>
-              <a:t>–  </a:t>
-            </a:r>
-            <a:r>
-              <a:rPr sz="1400" b="0" i="0">
-                <a:solidFill>
-                  <a:srgbClr val="2A2929"/>
-                </a:solidFill>
-                <a:latin typeface="Roboto"/>
-              </a:rPr>
-              <a:t>confirm your build identity</a:t>
-            </a:r>
-          </a:p>
-          <a:p>
-            <a:pPr marL="365760" indent="0">
-              <a:lnSpc>
-                <a:spcPct val="105000"/>
-              </a:lnSpc>
-              <a:spcBef>
-                <a:spcPts val="0"/>
-              </a:spcBef>
-              <a:spcAft>
-                <a:spcPts val="500"/>
-              </a:spcAft>
-            </a:pPr>
-            <a:r>
-              <a:rPr sz="1400" b="0" i="0">
-                <a:solidFill>
-                  <a:srgbClr val="7A7A7A"/>
-                </a:solidFill>
-                <a:latin typeface="Roboto"/>
-              </a:rPr>
-              <a:t>–  </a:t>
-            </a:r>
-            <a:r>
-              <a:rPr sz="1400" b="0" i="0">
-                <a:solidFill>
-                  <a:srgbClr val="2A2929"/>
-                </a:solidFill>
-                <a:latin typeface="Roboto"/>
-              </a:rPr>
-              <a:t>capture your first named evidence screenshot (Region visible) into your evidence log</a:t>
-            </a:r>
-          </a:p>
-          <a:p>
-            <a:pPr marL="0" indent="0">
-              <a:lnSpc>
-                <a:spcPct val="105000"/>
-              </a:lnSpc>
-              <a:spcBef>
-                <a:spcPts val="0"/>
-              </a:spcBef>
-              <a:spcAft>
-                <a:spcPts val="1000"/>
-              </a:spcAft>
-            </a:pPr>
-            <a:r>
-              <a:rPr sz="1700" b="1" i="0">
-                <a:solidFill>
-                  <a:srgbClr val="EDAB0C"/>
-                </a:solidFill>
-                <a:latin typeface="Roboto"/>
-              </a:rPr>
-              <a:t>■  </a:t>
-            </a:r>
-            <a:r>
-              <a:rPr sz="1700" b="0" i="0">
-                <a:solidFill>
-                  <a:srgbClr val="2A2929"/>
-                </a:solidFill>
-                <a:latin typeface="Roboto"/>
-              </a:rPr>
-              <a:t>Open the supplied Accounting Baseline Solution Design and skim it end to end.</a:t>
-            </a:r>
-          </a:p>
-        </p:txBody>
-      </p:sp>
-      <p:sp>
-        <p:nvSpPr>
-          <p:cNvPr id="6" name="Rounded Rectangle 5"/>
-          <p:cNvSpPr/>
-          <p:nvPr/>
-        </p:nvSpPr>
-        <p:spPr>
-          <a:xfrm>
-            <a:off x="640080" y="5897880"/>
-            <a:ext cx="4023360" cy="457200"/>
-          </a:xfrm>
-          <a:prstGeom prst="roundRect">
-            <a:avLst/>
-          </a:prstGeom>
-          <a:solidFill>
-            <a:srgbClr val="F9F9F9"/>
+            <a:srgbClr val="FFFFFF"/>
           </a:solidFill>
           <a:ln w="12700">
             <a:solidFill>
@@ -15514,48 +12633,14 @@
       </p:sp>
       <p:sp>
         <p:nvSpPr>
-          <p:cNvPr id="7" name="TextBox 6"/>
-          <p:cNvSpPr txBox="1"/>
-          <p:nvPr/>
-        </p:nvSpPr>
-        <p:spPr>
-          <a:xfrm>
-            <a:off x="822960" y="5943600"/>
-            <a:ext cx="3657600" cy="365760"/>
-          </a:xfrm>
-          <a:prstGeom prst="rect">
-            <a:avLst/>
-          </a:prstGeom>
-          <a:noFill/>
-        </p:spPr>
-        <p:txBody>
-          <a:bodyPr wrap="square" anchor="ctr" lIns="0" rIns="0" tIns="0" bIns="0">
-            <a:spAutoFit/>
-          </a:bodyPr>
-          <a:lstStyle/>
-          <a:p>
-            <a:r>
-              <a:rPr sz="1500" b="1" i="0">
-                <a:solidFill>
-                  <a:srgbClr val="2A2929"/>
-                </a:solidFill>
-                <a:latin typeface="Roboto"/>
-              </a:rPr>
-              <a:t>⏱  ~15 min</a:t>
-            </a:r>
-          </a:p>
-        </p:txBody>
-      </p:sp>
-      <p:sp>
-        <p:nvSpPr>
-          <p:cNvPr id="8" name="Rectangle 7"/>
+          <p:cNvPr id="5" name="Rectangle 4"/>
           <p:cNvSpPr/>
           <p:nvPr/>
         </p:nvSpPr>
         <p:spPr>
           <a:xfrm>
-            <a:off x="0" y="6565392"/>
-            <a:ext cx="12191695" cy="38100"/>
+            <a:off x="640080" y="1965960"/>
+            <a:ext cx="109728" cy="841248"/>
           </a:xfrm>
           <a:prstGeom prst="rect">
             <a:avLst/>
@@ -15592,7 +12677,348 @@
       </p:sp>
       <p:sp>
         <p:nvSpPr>
+          <p:cNvPr id="6" name="TextBox 5"/>
+          <p:cNvSpPr txBox="1"/>
+          <p:nvPr/>
+        </p:nvSpPr>
+        <p:spPr>
+          <a:xfrm>
+            <a:off x="960120" y="1965960"/>
+            <a:ext cx="10424160" cy="841248"/>
+          </a:xfrm>
+          <a:prstGeom prst="rect">
+            <a:avLst/>
+          </a:prstGeom>
+          <a:noFill/>
+        </p:spPr>
+        <p:txBody>
+          <a:bodyPr wrap="square" anchor="ctr" lIns="0" rIns="0" tIns="0" bIns="0">
+            <a:spAutoFit/>
+          </a:bodyPr>
+          <a:lstStyle/>
+          <a:p>
+            <a:pPr>
+              <a:lnSpc>
+                <a:spcPct val="100000"/>
+              </a:lnSpc>
+            </a:pPr>
+            <a:r>
+              <a:rPr sz="1700" b="0" i="0">
+                <a:solidFill>
+                  <a:srgbClr val="2A2929"/>
+                </a:solidFill>
+                <a:latin typeface="Roboto"/>
+              </a:rPr>
+              <a:t>You are the builder. The settings are given; finding them is yours.</a:t>
+            </a:r>
+          </a:p>
+        </p:txBody>
+      </p:sp>
+      <p:sp>
+        <p:nvSpPr>
+          <p:cNvPr id="7" name="Rectangle 6"/>
+          <p:cNvSpPr/>
+          <p:nvPr/>
+        </p:nvSpPr>
+        <p:spPr>
+          <a:xfrm>
+            <a:off x="640080" y="2916936"/>
+            <a:ext cx="10927080" cy="841248"/>
+          </a:xfrm>
+          <a:prstGeom prst="rect">
+            <a:avLst/>
+          </a:prstGeom>
+          <a:solidFill>
+            <a:srgbClr val="FFFFFF"/>
+          </a:solidFill>
+          <a:ln w="12700">
+            <a:solidFill>
+              <a:srgbClr val="CCCCCC"/>
+            </a:solidFill>
+          </a:ln>
+          <a:effectLst/>
+        </p:spPr>
+        <p:style>
+          <a:lnRef idx="1">
+            <a:schemeClr val="accent1"/>
+          </a:lnRef>
+          <a:fillRef idx="3">
+            <a:schemeClr val="accent1"/>
+          </a:fillRef>
+          <a:effectRef idx="2">
+            <a:schemeClr val="accent1"/>
+          </a:effectRef>
+          <a:fontRef idx="minor">
+            <a:schemeClr val="lt1"/>
+          </a:fontRef>
+        </p:style>
+        <p:txBody>
+          <a:bodyPr rtlCol="0" anchor="ctr"/>
+          <a:lstStyle/>
+          <a:p>
+            <a:pPr algn="ctr"/>
+          </a:p>
+        </p:txBody>
+      </p:sp>
+      <p:sp>
+        <p:nvSpPr>
+          <p:cNvPr id="8" name="Rectangle 7"/>
+          <p:cNvSpPr/>
+          <p:nvPr/>
+        </p:nvSpPr>
+        <p:spPr>
+          <a:xfrm>
+            <a:off x="640080" y="2916936"/>
+            <a:ext cx="109728" cy="841248"/>
+          </a:xfrm>
+          <a:prstGeom prst="rect">
+            <a:avLst/>
+          </a:prstGeom>
+          <a:solidFill>
+            <a:srgbClr val="92268F"/>
+          </a:solidFill>
+          <a:ln>
+            <a:noFill/>
+          </a:ln>
+          <a:effectLst/>
+        </p:spPr>
+        <p:style>
+          <a:lnRef idx="1">
+            <a:schemeClr val="accent1"/>
+          </a:lnRef>
+          <a:fillRef idx="3">
+            <a:schemeClr val="accent1"/>
+          </a:fillRef>
+          <a:effectRef idx="2">
+            <a:schemeClr val="accent1"/>
+          </a:effectRef>
+          <a:fontRef idx="minor">
+            <a:schemeClr val="lt1"/>
+          </a:fontRef>
+        </p:style>
+        <p:txBody>
+          <a:bodyPr rtlCol="0" anchor="ctr"/>
+          <a:lstStyle/>
+          <a:p>
+            <a:pPr algn="ctr"/>
+          </a:p>
+        </p:txBody>
+      </p:sp>
+      <p:sp>
+        <p:nvSpPr>
           <p:cNvPr id="9" name="TextBox 8"/>
+          <p:cNvSpPr txBox="1"/>
+          <p:nvPr/>
+        </p:nvSpPr>
+        <p:spPr>
+          <a:xfrm>
+            <a:off x="960120" y="2916936"/>
+            <a:ext cx="10424160" cy="841248"/>
+          </a:xfrm>
+          <a:prstGeom prst="rect">
+            <a:avLst/>
+          </a:prstGeom>
+          <a:noFill/>
+        </p:spPr>
+        <p:txBody>
+          <a:bodyPr wrap="square" anchor="ctr" lIns="0" rIns="0" tIns="0" bIns="0">
+            <a:spAutoFit/>
+          </a:bodyPr>
+          <a:lstStyle/>
+          <a:p>
+            <a:pPr>
+              <a:lnSpc>
+                <a:spcPct val="100000"/>
+              </a:lnSpc>
+            </a:pPr>
+            <a:r>
+              <a:rPr sz="1700" b="0" i="0">
+                <a:solidFill>
+                  <a:srgbClr val="2A2929"/>
+                </a:solidFill>
+                <a:latin typeface="Roboto"/>
+              </a:rPr>
+              <a:t>Region first — it is compliance, and everything is region-scoped.</a:t>
+            </a:r>
+          </a:p>
+        </p:txBody>
+      </p:sp>
+      <p:sp>
+        <p:nvSpPr>
+          <p:cNvPr id="10" name="Rectangle 9"/>
+          <p:cNvSpPr/>
+          <p:nvPr/>
+        </p:nvSpPr>
+        <p:spPr>
+          <a:xfrm>
+            <a:off x="640080" y="3867912"/>
+            <a:ext cx="10927080" cy="841248"/>
+          </a:xfrm>
+          <a:prstGeom prst="rect">
+            <a:avLst/>
+          </a:prstGeom>
+          <a:solidFill>
+            <a:srgbClr val="FFFFFF"/>
+          </a:solidFill>
+          <a:ln w="12700">
+            <a:solidFill>
+              <a:srgbClr val="CCCCCC"/>
+            </a:solidFill>
+          </a:ln>
+          <a:effectLst/>
+        </p:spPr>
+        <p:style>
+          <a:lnRef idx="1">
+            <a:schemeClr val="accent1"/>
+          </a:lnRef>
+          <a:fillRef idx="3">
+            <a:schemeClr val="accent1"/>
+          </a:fillRef>
+          <a:effectRef idx="2">
+            <a:schemeClr val="accent1"/>
+          </a:effectRef>
+          <a:fontRef idx="minor">
+            <a:schemeClr val="lt1"/>
+          </a:fontRef>
+        </p:style>
+        <p:txBody>
+          <a:bodyPr rtlCol="0" anchor="ctr"/>
+          <a:lstStyle/>
+          <a:p>
+            <a:pPr algn="ctr"/>
+          </a:p>
+        </p:txBody>
+      </p:sp>
+      <p:sp>
+        <p:nvSpPr>
+          <p:cNvPr id="11" name="Rectangle 10"/>
+          <p:cNvSpPr/>
+          <p:nvPr/>
+        </p:nvSpPr>
+        <p:spPr>
+          <a:xfrm>
+            <a:off x="640080" y="3867912"/>
+            <a:ext cx="109728" cy="841248"/>
+          </a:xfrm>
+          <a:prstGeom prst="rect">
+            <a:avLst/>
+          </a:prstGeom>
+          <a:solidFill>
+            <a:srgbClr val="92268F"/>
+          </a:solidFill>
+          <a:ln>
+            <a:noFill/>
+          </a:ln>
+          <a:effectLst/>
+        </p:spPr>
+        <p:style>
+          <a:lnRef idx="1">
+            <a:schemeClr val="accent1"/>
+          </a:lnRef>
+          <a:fillRef idx="3">
+            <a:schemeClr val="accent1"/>
+          </a:fillRef>
+          <a:effectRef idx="2">
+            <a:schemeClr val="accent1"/>
+          </a:effectRef>
+          <a:fontRef idx="minor">
+            <a:schemeClr val="lt1"/>
+          </a:fontRef>
+        </p:style>
+        <p:txBody>
+          <a:bodyPr rtlCol="0" anchor="ctr"/>
+          <a:lstStyle/>
+          <a:p>
+            <a:pPr algn="ctr"/>
+          </a:p>
+        </p:txBody>
+      </p:sp>
+      <p:sp>
+        <p:nvSpPr>
+          <p:cNvPr id="12" name="TextBox 11"/>
+          <p:cNvSpPr txBox="1"/>
+          <p:nvPr/>
+        </p:nvSpPr>
+        <p:spPr>
+          <a:xfrm>
+            <a:off x="960120" y="3867912"/>
+            <a:ext cx="10424160" cy="841248"/>
+          </a:xfrm>
+          <a:prstGeom prst="rect">
+            <a:avLst/>
+          </a:prstGeom>
+          <a:noFill/>
+        </p:spPr>
+        <p:txBody>
+          <a:bodyPr wrap="square" anchor="ctr" lIns="0" rIns="0" tIns="0" bIns="0">
+            <a:spAutoFit/>
+          </a:bodyPr>
+          <a:lstStyle/>
+          <a:p>
+            <a:pPr>
+              <a:lnSpc>
+                <a:spcPct val="100000"/>
+              </a:lnSpc>
+            </a:pPr>
+            <a:r>
+              <a:rPr sz="1700" b="0" i="0">
+                <a:solidFill>
+                  <a:srgbClr val="2A2929"/>
+                </a:solidFill>
+                <a:latin typeface="Roboto"/>
+              </a:rPr>
+              <a:t>Capture each task as you finish it.</a:t>
+            </a:r>
+          </a:p>
+        </p:txBody>
+      </p:sp>
+      <p:sp>
+        <p:nvSpPr>
+          <p:cNvPr id="13" name="Rectangle 12"/>
+          <p:cNvSpPr/>
+          <p:nvPr/>
+        </p:nvSpPr>
+        <p:spPr>
+          <a:xfrm>
+            <a:off x="0" y="6565392"/>
+            <a:ext cx="12191695" cy="38100"/>
+          </a:xfrm>
+          <a:prstGeom prst="rect">
+            <a:avLst/>
+          </a:prstGeom>
+          <a:solidFill>
+            <a:srgbClr val="92268F"/>
+          </a:solidFill>
+          <a:ln>
+            <a:noFill/>
+          </a:ln>
+          <a:effectLst/>
+        </p:spPr>
+        <p:style>
+          <a:lnRef idx="1">
+            <a:schemeClr val="accent1"/>
+          </a:lnRef>
+          <a:fillRef idx="3">
+            <a:schemeClr val="accent1"/>
+          </a:fillRef>
+          <a:effectRef idx="2">
+            <a:schemeClr val="accent1"/>
+          </a:effectRef>
+          <a:fontRef idx="minor">
+            <a:schemeClr val="lt1"/>
+          </a:fontRef>
+        </p:style>
+        <p:txBody>
+          <a:bodyPr rtlCol="0" anchor="ctr"/>
+          <a:lstStyle/>
+          <a:p>
+            <a:pPr algn="ctr"/>
+          </a:p>
+        </p:txBody>
+      </p:sp>
+      <p:sp>
+        <p:nvSpPr>
+          <p:cNvPr id="14" name="TextBox 13"/>
           <p:cNvSpPr txBox="1"/>
           <p:nvPr/>
         </p:nvSpPr>
@@ -15635,7 +13061,7 @@
       </p:sp>
       <p:sp>
         <p:nvSpPr>
-          <p:cNvPr id="10" name="TextBox 9"/>
+          <p:cNvPr id="15" name="TextBox 14"/>
           <p:cNvSpPr txBox="1"/>
           <p:nvPr/>
         </p:nvSpPr>
